--- a/ki-tag-gymnasium-sued/KI-Tag_Gymnasium-Sued_Impulsvortrag.pptx
+++ b/ki-tag-gymnasium-sued/KI-Tag_Gymnasium-Sued_Impulsvortrag.pptx
@@ -124,14 +124,14 @@
   <p:extLst>
     <p:ext uri="{521415D9-36F7-43E2-AB2F-B90AF26B5E84}">
       <p14:sectionLst xmlns:p14="http://schemas.microsoft.com/office/powerpoint/2010/main">
-        <p14:section name="Einstieg" id="{487de1be-8881-0cb9-20b1-29c830392adc}">
+        <p14:section name="Einstieg" id="{09d5822b-ffae-f4ed-28bf-61eb1a0668b1}">
           <p14:sldIdLst>
             <p14:sldId id="256"/>
             <p14:sldId id="257"/>
             <p14:sldId id="258"/>
           </p14:sldIdLst>
         </p14:section>
-        <p14:section name="Staunen" id="{7f27db10-b426-598d-46e6-884295fa5e30}">
+        <p14:section name="Staunen" id="{ee41868e-a216-0975-f3f2-d390d7f9087d}">
           <p14:sldIdLst>
             <p14:sldId id="259"/>
             <p14:sldId id="260"/>
@@ -139,28 +139,28 @@
             <p14:sldId id="262"/>
           </p14:sldIdLst>
         </p14:section>
-        <p14:section name="Verstehen" id="{e28ce41e-6169-a820-b944-34c441a6913e}">
+        <p14:section name="Verstehen" id="{54995c5c-f9a3-78d8-230a-7214a073b547}">
           <p14:sldIdLst>
             <p14:sldId id="263"/>
             <p14:sldId id="264"/>
             <p14:sldId id="265"/>
           </p14:sldIdLst>
         </p14:section>
-        <p14:section name="Chancen" id="{7265d999-360c-d316-6876-40f12b67b8d8}">
+        <p14:section name="Chancen" id="{b9e0f019-2c7e-b66d-37c5-46b66b26a3c6}">
           <p14:sldIdLst>
             <p14:sldId id="266"/>
             <p14:sldId id="267"/>
             <p14:sldId id="268"/>
           </p14:sldIdLst>
         </p14:section>
-        <p14:section name="Risiken &amp; Verantwortung" id="{e776f60e-ef37-0fe4-59e5-fe62852ed467}">
+        <p14:section name="Risiken &amp; Verantwortung" id="{ddd1200e-0409-3c0f-b771-40b8fd76fcb4}">
           <p14:sldIdLst>
             <p14:sldId id="269"/>
             <p14:sldId id="270"/>
             <p14:sldId id="271"/>
           </p14:sldIdLst>
         </p14:section>
-        <p14:section name="Workshop &amp; Abschluss" id="{48ff71ce-9a76-ab47-9640-b9110ed8a429}">
+        <p14:section name="Workshop &amp; Abschluss" id="{62ee86b1-8d63-d0e8-6fa0-5315ed9aa182}">
           <p14:sldIdLst>
             <p14:sldId id="272"/>
             <p14:sldId id="273"/>
@@ -805,7 +805,7 @@
           <a:p>
             <a:r>
               <a:rPr lang="en-US" dirty="0"/>
-              <a:t>Begrüßung (ca. 1 Min.). Thema des Tages: KI verstehen, ausprobieren, einordnen. Das Bild rechts ist die Idee des Tages: Mensch und KI zusammen – nicht gegeneinander.</a:t>
+              <a:t>Begrüßung (ca. 30 Sek.). Thema des Tages: KI verstehen, ausprobieren, einordnen. Das Bild rechts ist die Idee des Tages: Mensch und KI zusammen – nicht gegeneinander.</a:t>
             </a:r>
             <a:endParaRPr lang="en-US" dirty="0"/>
           </a:p>
@@ -893,7 +893,7 @@
           <a:p>
             <a:r>
               <a:rPr lang="en-US" dirty="0"/>
-              <a:t>Ca. 5 Min. Am besten durch ein echtes Beispiel aus der Live-Demo ersetzen oder ergänzen (KI live nach einer Quelle fragen und gemeinsam prüfen). Merksatz: Sprachliche Sicherheit ist kein Beweis für Wahrheit.</a:t>
+              <a:t>Ca. 3 Min. Am besten durch ein echtes Beispiel aus der Live-Demo ersetzen oder ergänzen (KI live nach einer Quelle fragen und gemeinsam prüfen). Merksatz: Sprachliche Sicherheit ist kein Beweis für Wahrheit.</a:t>
             </a:r>
             <a:endParaRPr lang="en-US" dirty="0"/>
           </a:p>
@@ -981,7 +981,7 @@
           <a:p>
             <a:r>
               <a:rPr lang="en-US" dirty="0"/>
-              <a:t>Übergang zu Teil 3 (ca. 30 Sek.).</a:t>
+              <a:t>Übergang zu Teil 3 (ca. 15 Sek.).</a:t>
             </a:r>
             <a:endParaRPr lang="en-US" dirty="0"/>
           </a:p>
@@ -1069,7 +1069,7 @@
           <a:p>
             <a:r>
               <a:rPr lang="en-US" dirty="0"/>
-              <a:t>Ca. 5 Min. Den Unterschied der beiden Prompts unten betonen: Gleiches Werkzeug, völlig anderer Lerneffekt. Verweis auf Station 2 (KI als Lerncoach) und Station 1 (Prompt Battle).</a:t>
+              <a:t>Ca. 3 Min. Den Unterschied der beiden Prompts unten betonen: Gleiches Werkzeug, völlig anderer Lerneffekt. Verweis auf Station 2 (KI als Lerncoach) und Station 1 (Prompt Battle).</a:t>
             </a:r>
             <a:endParaRPr lang="en-US" dirty="0"/>
           </a:p>
@@ -1157,7 +1157,7 @@
           <a:p>
             <a:r>
               <a:rPr lang="en-US" dirty="0"/>
-              <a:t>Ca. 4 Min. Grafik kurz lesen helfen: rechts oben = heute wichtig UND wird noch wichtiger. KI und Big Data ganz oben – aber direkt daneben kreatives Denken, Resilienz, Neugier. Botschaft: Wer KI beherrscht UND menschliche Stärken trainiert, ist für die Zukunft gut aufgestellt.</a:t>
+              <a:t>Ca. 2 Min. Grafik kurz lesen helfen: rechts oben = heute wichtig UND wird noch wichtiger. KI und Big Data ganz oben – aber direkt daneben kreatives Denken, Resilienz, Neugier. Botschaft: Wer KI beherrscht UND menschliche Stärken trainiert, ist für die Zukunft gut aufgestellt.</a:t>
             </a:r>
             <a:endParaRPr lang="en-US" dirty="0"/>
           </a:p>
@@ -1245,7 +1245,7 @@
           <a:p>
             <a:r>
               <a:rPr lang="en-US" dirty="0"/>
-              <a:t>Übergang zu Teil 4 (ca. 30 Sek.).</a:t>
+              <a:t>Übergang zu Teil 4 (ca. 15 Sek.).</a:t>
             </a:r>
             <a:endParaRPr lang="en-US" dirty="0"/>
           </a:p>
@@ -1333,7 +1333,7 @@
           <a:p>
             <a:r>
               <a:rPr lang="en-US" dirty="0"/>
-              <a:t>Ca. 6 Min. Deepfakes am besten mit einem echten Beispiel zeigen (Bild oder Video, ‚echt oder KI?‘) – Überleitung zu Station 4 (Deepfake Detective). Datenschutz: Nutzungsbedingungen/Altersgrenzen der Tools und die Regeln der Schule ansprechen.</a:t>
+              <a:t>Ca. 4 Min. Vorher Menti-Frage 4 stellen: Wie sicher erkennst du, ob ein Bild echt ist? Ergebnis merken – an Station 4 wird das überprüft. Deepfakes am besten mit einem echten Beispiel zeigen (Bild oder Video, ‚echt oder KI?‘) – Überleitung zu Station 4 (Deepfake Detective). Datenschutz: Nutzungsbedingungen/Altersgrenzen der Tools und die Regeln der Schule ansprechen.</a:t>
             </a:r>
             <a:endParaRPr lang="en-US" dirty="0"/>
           </a:p>
@@ -1421,7 +1421,7 @@
           <a:p>
             <a:r>
               <a:rPr lang="en-US" dirty="0"/>
-              <a:t>Ca. 3 Min. Kernbotschaft des Vortrags: Die stärkste Kombination ist Mensch + KI. Die KI liefert Tempo und Menge, der Mensch Urteil und Verantwortung. Wer prüft, wer entscheidet? Immer ihr.</a:t>
+              <a:t>Ca. 2 Min. Kernbotschaft des Vortrags: Die stärkste Kombination ist Mensch + KI. Die KI liefert Tempo und Menge, der Mensch Urteil und Verantwortung. Wer prüft, wer entscheidet? Immer ihr.</a:t>
             </a:r>
             <a:endParaRPr lang="en-US" dirty="0"/>
           </a:p>
@@ -1509,7 +1509,7 @@
           <a:p>
             <a:r>
               <a:rPr lang="en-US" dirty="0"/>
-              <a:t>Ca. 3 Min. Stationen kurz vorstellen, Gruppeneinteilung und Rotation erklären (wer startet wo, Signal zum Wechseln, Pause nach Station … ). Die Stationen sind vorbereitet und können selbstständig oder mit Begleitung durch Lehrkräfte bearbeitet werden.</a:t>
+              <a:t>Ca. 2 Min. Stationen kurz vorstellen, Gruppeneinteilung und Rotation erklären (wer startet wo, Signal zum Wechseln, Pause nach Station … ). Die Stationen sind vorbereitet und können selbstständig oder mit Begleitung durch Lehrkräfte bearbeitet werden.</a:t>
             </a:r>
             <a:endParaRPr lang="en-US" dirty="0"/>
           </a:p>
@@ -1597,7 +1597,7 @@
           <a:p>
             <a:r>
               <a:rPr lang="en-US" dirty="0"/>
-              <a:t>Ca. 2 Min. Leitidee laut vorlesen und als Auftrag für den Parcours mitgeben. Kurze Fragerunde, dann Wechsel zu den Stationen.</a:t>
+              <a:t>Ca. 2,5 Min. Leitidee laut vorlesen und als Auftrag für den Parcours mitgeben. Menti-Frage 5 (Was nimmst du mit?) – gerne auch am Ende des Tages nochmal öffnen. Kurze Fragerunde, dann Wechsel zu den Stationen. Gesamtzeit Impuls: ca. 40 Min.</a:t>
             </a:r>
             <a:endParaRPr lang="en-US" dirty="0"/>
           </a:p>
@@ -1685,7 +1685,7 @@
           <a:p>
             <a:r>
               <a:rPr lang="en-US" dirty="0"/>
-              <a:t>Kurz vorstellen (1 Min.), dann Umfrage per Handzeichen (2–3 Min.). Ergebnisse spiegeln: Die meisten nutzen KI schon – heute geht es darum, sie gut und kritisch zu nutzen. Alternative: Live-Umfrage per Mentimeter.</a:t>
+              <a:t>Ca. 4 Min. Kurz vorstellen (1 Min.). Dann zu Mentimeter wechseln: Menti-Frage 1 (Wortwolke: Woran denkst du bei KI?) und Menti-Frage 2 (Wofür hast du KI schon genutzt?). Ergebnisse kurz spiegeln: Die meisten nutzen KI schon – heute geht es darum, sie gut und kritisch zu nutzen.</a:t>
             </a:r>
             <a:endParaRPr lang="en-US" dirty="0"/>
           </a:p>
@@ -1773,7 +1773,7 @@
           <a:p>
             <a:r>
               <a:rPr lang="en-US" dirty="0"/>
-              <a:t>Ablauf erklären (ca. 2 Min.): Impuls in vier Teilen, danach Workshop-Parcours in 5 Gruppen à ca. 11 Personen. Durchlauf 1: Impuls 08:15–09:15, Workshop 09:15–12:00. Durchlauf 2: Impuls 12:05–13:05, Workshop 13:05–15:50.</a:t>
+              <a:t>Ablauf erklären (ca. 1 Min.): Impuls in vier Teilen, danach Workshop-Parcours in 5 Gruppen à ca. 11 Personen. Durchlauf 1: Impuls 08:15–09:15, Workshop 09:15–12:00. Durchlauf 2: Impuls 12:05–13:05, Workshop 13:05–15:50.</a:t>
             </a:r>
             <a:endParaRPr lang="en-US" dirty="0"/>
           </a:p>
@@ -1861,7 +1861,7 @@
           <a:p>
             <a:r>
               <a:rPr lang="en-US" dirty="0"/>
-              <a:t>Übergang zu Teil 1 (ca. 30 Sek.).</a:t>
+              <a:t>Übergang zu Teil 1 (ca. 15 Sek.).</a:t>
             </a:r>
             <a:endParaRPr lang="en-US" dirty="0"/>
           </a:p>
@@ -1949,7 +1949,7 @@
           <a:p>
             <a:r>
               <a:rPr lang="en-US" dirty="0"/>
-              <a:t>Ca. 3 Min. Frage ans Publikum: Was glaubt ihr, wie lange hat ChatGPT für 1 Million Nutzer gebraucht? Erst raten lassen, dann auflösen. Botschaft: KI ist nicht ‚irgendwann‘, sie ist schon im Alltag angekommen.</a:t>
+              <a:t>Ca. 2,5 Min. Folie erst ausblenden (schwarz, Taste B) und Menti-Frage 3 stellen: Wie lange hat ChatGPT für 1 Million Nutzer gebraucht? Abstimmen lassen, dann diese Folie zeigen und auflösen. Botschaft: KI ist nicht ‚irgendwann‘, sie ist schon im Alltag angekommen.</a:t>
             </a:r>
             <a:endParaRPr lang="en-US" dirty="0"/>
           </a:p>
@@ -2037,7 +2037,7 @@
           <a:p>
             <a:r>
               <a:rPr lang="en-US" dirty="0"/>
-              <a:t>Kernstück von Teil 1 (ca. 10–12 Min.). Live am Beamer zeigen, Aufgaben möglichst aus dem Publikum nehmen. Vorher testen: WLAN, Logins, Tools. Backup: Screenshots/Videos der Demos, falls das Netz ausfällt.</a:t>
+              <a:t>Kernstück von Teil 1 (ca. 7 Min., max. 2 Demos ausführlich, den Rest kurz). Live am Beamer zeigen, Aufgaben möglichst aus dem Publikum nehmen. Vorher testen: WLAN, Logins, Tools. Backup: Screenshots/Videos der Demos, falls das Netz ausfällt.</a:t>
             </a:r>
             <a:endParaRPr lang="en-US" dirty="0"/>
           </a:p>
@@ -2125,7 +2125,7 @@
           <a:p>
             <a:r>
               <a:rPr lang="en-US" dirty="0"/>
-              <a:t>Ca. 3 Min. Die Glockenkurve zeigt, wie Menschen in IQ-Tests verteilt sind (Durchschnitt 100). Die Logos sind KI-Modelle. 2024 lagen die besten Modelle noch unter dem Durchschnitt, ein Jahr später weit darüber. Wichtig: Ein IQ-Test misst nur einen kleinen Teil von Intelligenz – Urteilsvermögen, Verantwortung oder Empathie misst er nicht. Das führt zu Teil 2.</a:t>
+              <a:t>Ca. 2 Min. Die Glockenkurve zeigt, wie Menschen in IQ-Tests verteilt sind (Durchschnitt 100). Die Logos sind KI-Modelle. 2024 lagen die besten Modelle noch unter dem Durchschnitt, ein Jahr später weit darüber. Wichtig: Ein IQ-Test misst nur einen kleinen Teil von Intelligenz – Urteilsvermögen, Verantwortung oder Empathie misst er nicht. Das führt zu Teil 2.</a:t>
             </a:r>
             <a:endParaRPr lang="en-US" dirty="0"/>
           </a:p>
@@ -2213,7 +2213,7 @@
           <a:p>
             <a:r>
               <a:rPr lang="en-US" dirty="0"/>
-              <a:t>Übergang zu Teil 2 (ca. 30 Sek.).</a:t>
+              <a:t>Übergang zu Teil 2 (ca. 15 Sek.).</a:t>
             </a:r>
             <a:endParaRPr lang="en-US" dirty="0"/>
           </a:p>
@@ -2301,7 +2301,7 @@
           <a:p>
             <a:r>
               <a:rPr lang="en-US" dirty="0"/>
-              <a:t>Ca. 6 Min. Mitmachen lassen: ‚Der Himmel ist heute …‘ – Klasse ergänzt. Genau das macht die KI, nur mit Milliarden Texten. Konsequenz: Sie produziert, was wahrscheinlich KLINGT, nicht, was geprüft WAHR ist.</a:t>
+              <a:t>Ca. 3,5 Min. Mitmachen lassen: ‚Der Himmel ist heute …‘ – Klasse ergänzt. Genau das macht die KI, nur mit Milliarden Texten. Konsequenz: Sie produziert, was wahrscheinlich KLINGT, nicht, was geprüft WAHR ist.</a:t>
             </a:r>
             <a:endParaRPr lang="en-US" dirty="0"/>
           </a:p>
@@ -7515,6 +7515,64 @@
       </p:sp>
       <p:sp>
         <p:nvSpPr>
+          <p:cNvPr id="28" name="Hinweis Menti-Frage 4"/>
+          <p:cNvSpPr/>
+          <p:nvPr/>
+        </p:nvSpPr>
+        <p:spPr>
+          <a:xfrm>
+            <a:off x="9144000" y="6336792"/>
+            <a:ext cx="1783080" cy="274320"/>
+          </a:xfrm>
+          <a:prstGeom prst="roundRect">
+            <a:avLst>
+              <a:gd name="adj" fmla="val 20000"/>
+            </a:avLst>
+          </a:prstGeom>
+          <a:solidFill>
+            <a:schemeClr val="accent1"/>
+          </a:solidFill>
+          <a:ln/>
+        </p:spPr>
+      </p:sp>
+      <p:sp>
+        <p:nvSpPr>
+          <p:cNvPr id="29" name="Text 23"/>
+          <p:cNvSpPr txBox="1"/>
+          <p:nvPr/>
+        </p:nvSpPr>
+        <p:spPr>
+          <a:xfrm>
+            <a:off x="9144000" y="6336792"/>
+            <a:ext cx="1783080" cy="274320"/>
+          </a:xfrm>
+          <a:prstGeom prst="rect">
+            <a:avLst/>
+          </a:prstGeom>
+          <a:noFill/>
+          <a:ln/>
+        </p:spPr>
+        <p:txBody>
+          <a:bodyPr wrap="square" lIns="0" tIns="0" rIns="0" bIns="0" rtlCol="0" anchor="ctr"/>
+          <a:lstStyle/>
+          <a:p>
+            <a:pPr algn="ctr" indent="0" marL="0">
+              <a:buNone/>
+            </a:pPr>
+            <a:r>
+              <a:rPr lang="en-US" sz="1000" b="1" spc="200" kern="0" dirty="0">
+                <a:solidFill>
+                  <a:schemeClr val="bg1"/>
+                </a:solidFill>
+              </a:rPr>
+              <a:t>MENTI-FRAGE 4</a:t>
+            </a:r>
+            <a:endParaRPr lang="en-US" sz="1000" dirty="0"/>
+          </a:p>
+        </p:txBody>
+      </p:sp>
+      <p:sp>
+        <p:nvSpPr>
           <p:cNvPr id="25" name="Slide Number Placeholder 0"/>
           <p:cNvSpPr>
             <a:spLocks noGrp="1"/>
@@ -9501,6 +9559,64 @@
           </a:p>
         </p:txBody>
       </p:sp>
+      <p:sp>
+        <p:nvSpPr>
+          <p:cNvPr id="8" name="Hinweis Menti-Frage 5"/>
+          <p:cNvSpPr/>
+          <p:nvPr/>
+        </p:nvSpPr>
+        <p:spPr>
+          <a:xfrm>
+            <a:off x="9144000" y="6336792"/>
+            <a:ext cx="1783080" cy="274320"/>
+          </a:xfrm>
+          <a:prstGeom prst="roundRect">
+            <a:avLst>
+              <a:gd name="adj" fmla="val 20000"/>
+            </a:avLst>
+          </a:prstGeom>
+          <a:solidFill>
+            <a:schemeClr val="accent1"/>
+          </a:solidFill>
+          <a:ln/>
+        </p:spPr>
+      </p:sp>
+      <p:sp>
+        <p:nvSpPr>
+          <p:cNvPr id="9" name="Text 7"/>
+          <p:cNvSpPr txBox="1"/>
+          <p:nvPr/>
+        </p:nvSpPr>
+        <p:spPr>
+          <a:xfrm>
+            <a:off x="9144000" y="6336792"/>
+            <a:ext cx="1783080" cy="274320"/>
+          </a:xfrm>
+          <a:prstGeom prst="rect">
+            <a:avLst/>
+          </a:prstGeom>
+          <a:noFill/>
+          <a:ln/>
+        </p:spPr>
+        <p:txBody>
+          <a:bodyPr wrap="square" lIns="0" tIns="0" rIns="0" bIns="0" rtlCol="0" anchor="ctr"/>
+          <a:lstStyle/>
+          <a:p>
+            <a:pPr algn="ctr" indent="0" marL="0">
+              <a:buNone/>
+            </a:pPr>
+            <a:r>
+              <a:rPr lang="en-US" sz="1000" b="1" spc="200" kern="0" dirty="0">
+                <a:solidFill>
+                  <a:schemeClr val="bg1"/>
+                </a:solidFill>
+              </a:rPr>
+              <a:t>MENTI-FRAGE 5</a:t>
+            </a:r>
+            <a:endParaRPr lang="en-US" sz="1000" dirty="0"/>
+          </a:p>
+        </p:txBody>
+      </p:sp>
     </p:spTree>
   </p:cSld>
   <p:clrMapOvr>
@@ -9596,7 +9712,7 @@
                   <a:schemeClr val="tx2"/>
                 </a:solidFill>
               </a:rPr>
-              <a:t>Wer heute vor euch steht – und eine kurze Umfrage per Handzeichen</a:t>
+              <a:t>Wer heute vor euch steht – und eure Meinung per Mentimeter</a:t>
             </a:r>
             <a:endParaRPr lang="en-US" sz="1600" dirty="0"/>
           </a:p>
@@ -9624,193 +9740,9 @@
           <a:ln/>
         </p:spPr>
       </p:sp>
-      <p:sp>
-        <p:nvSpPr>
-          <p:cNvPr id="5" name="Foto-Platzhalter (durch Foto ersetzen)"/>
-          <p:cNvSpPr/>
-          <p:nvPr/>
-        </p:nvSpPr>
-        <p:spPr>
-          <a:xfrm>
-            <a:off x="914400" y="2194560"/>
-            <a:ext cx="1463040" cy="1463040"/>
-          </a:xfrm>
-          <a:prstGeom prst="ellipse">
-            <a:avLst/>
-          </a:prstGeom>
-          <a:solidFill>
-            <a:schemeClr val="tx1"/>
-          </a:solidFill>
-          <a:ln/>
-        </p:spPr>
-      </p:sp>
-      <p:sp>
-        <p:nvSpPr>
-          <p:cNvPr id="6" name="Text 4"/>
-          <p:cNvSpPr txBox="1"/>
-          <p:nvPr/>
-        </p:nvSpPr>
-        <p:spPr>
-          <a:xfrm>
-            <a:off x="914400" y="2194560"/>
-            <a:ext cx="1463040" cy="1463040"/>
-          </a:xfrm>
-          <a:prstGeom prst="rect">
-            <a:avLst/>
-          </a:prstGeom>
-          <a:noFill/>
-          <a:ln/>
-        </p:spPr>
-        <p:txBody>
-          <a:bodyPr wrap="square" lIns="0" tIns="0" rIns="0" bIns="0" rtlCol="0" anchor="ctr"/>
-          <a:lstStyle/>
-          <a:p>
-            <a:pPr algn="ctr" indent="0" marL="0">
-              <a:buNone/>
-            </a:pPr>
-            <a:r>
-              <a:rPr lang="en-US" sz="3600" b="1" dirty="0">
-                <a:solidFill>
-                  <a:schemeClr val="bg1"/>
-                </a:solidFill>
-              </a:rPr>
-              <a:t>EH</a:t>
-            </a:r>
-            <a:endParaRPr lang="en-US" sz="3600" dirty="0"/>
-          </a:p>
-        </p:txBody>
-      </p:sp>
-      <p:sp>
-        <p:nvSpPr>
-          <p:cNvPr id="7" name="Text 5"/>
-          <p:cNvSpPr txBox="1"/>
-          <p:nvPr/>
-        </p:nvSpPr>
-        <p:spPr>
-          <a:xfrm>
-            <a:off x="914400" y="3931920"/>
-            <a:ext cx="4114800" cy="457200"/>
-          </a:xfrm>
-          <a:prstGeom prst="rect">
-            <a:avLst/>
-          </a:prstGeom>
-          <a:noFill/>
-          <a:ln/>
-        </p:spPr>
-        <p:txBody>
-          <a:bodyPr wrap="square" lIns="0" tIns="0" rIns="0" bIns="0" rtlCol="0" anchor="ctr"/>
-          <a:lstStyle/>
-          <a:p>
-            <a:pPr indent="0" marL="0">
-              <a:buNone/>
-            </a:pPr>
-            <a:r>
-              <a:rPr lang="en-US" sz="2400" b="1" dirty="0">
-                <a:solidFill>
-                  <a:schemeClr val="tx1"/>
-                </a:solidFill>
-              </a:rPr>
-              <a:t>Elias Hauck</a:t>
-            </a:r>
-            <a:endParaRPr lang="en-US" sz="2400" dirty="0"/>
-          </a:p>
-        </p:txBody>
-      </p:sp>
-      <p:sp>
-        <p:nvSpPr>
-          <p:cNvPr id="8" name="Text 6"/>
-          <p:cNvSpPr txBox="1"/>
-          <p:nvPr/>
-        </p:nvSpPr>
-        <p:spPr>
-          <a:xfrm>
-            <a:off x="914400" y="4434840"/>
-            <a:ext cx="4114800" cy="731520"/>
-          </a:xfrm>
-          <a:prstGeom prst="rect">
-            <a:avLst/>
-          </a:prstGeom>
-          <a:noFill/>
-          <a:ln/>
-        </p:spPr>
-        <p:txBody>
-          <a:bodyPr wrap="square" lIns="0" tIns="0" rIns="0" bIns="0" rtlCol="0" anchor="ctr"/>
-          <a:lstStyle/>
-          <a:p>
-            <a:pPr indent="0" marL="0">
-              <a:buNone/>
-            </a:pPr>
-            <a:r>
-              <a:rPr lang="en-US" sz="1500" dirty="0">
-                <a:solidFill>
-                  <a:schemeClr val="tx2"/>
-                </a:solidFill>
-              </a:rPr>
-              <a:t>Geschäftsführer und Gründer</a:t>
-            </a:r>
-            <a:endParaRPr lang="en-US" sz="1500" dirty="0"/>
-          </a:p>
-          <a:p>
-            <a:pPr indent="0" marL="0">
-              <a:buNone/>
-            </a:pPr>
-            <a:r>
-              <a:rPr lang="en-US" sz="1500" dirty="0">
-                <a:solidFill>
-                  <a:schemeClr val="tx2"/>
-                </a:solidFill>
-              </a:rPr>
-              <a:t>asuno und SH&amp;Partner</a:t>
-            </a:r>
-            <a:endParaRPr lang="en-US" sz="1500" dirty="0"/>
-          </a:p>
-        </p:txBody>
-      </p:sp>
-      <p:sp>
-        <p:nvSpPr>
-          <p:cNvPr id="9" name="Karte Umfrage"/>
-          <p:cNvSpPr/>
-          <p:nvPr/>
-        </p:nvSpPr>
-        <p:spPr>
-          <a:xfrm>
-            <a:off x="5760720" y="1828800"/>
-            <a:ext cx="5879592" cy="3749040"/>
-          </a:xfrm>
-          <a:prstGeom prst="roundRect">
-            <a:avLst>
-              <a:gd name="adj" fmla="val 1951"/>
-            </a:avLst>
-          </a:prstGeom>
-          <a:solidFill>
-            <a:schemeClr val="tx1"/>
-          </a:solidFill>
-          <a:ln/>
-        </p:spPr>
-      </p:sp>
-      <p:sp>
-        <p:nvSpPr>
-          <p:cNvPr id="10" name="Icon-Kreis LuHand"/>
-          <p:cNvSpPr/>
-          <p:nvPr/>
-        </p:nvSpPr>
-        <p:spPr>
-          <a:xfrm>
-            <a:off x="6172200" y="2194560"/>
-            <a:ext cx="685800" cy="685800"/>
-          </a:xfrm>
-          <a:prstGeom prst="ellipse">
-            <a:avLst/>
-          </a:prstGeom>
-          <a:solidFill>
-            <a:schemeClr val="accent1"/>
-          </a:solidFill>
-          <a:ln/>
-        </p:spPr>
-      </p:sp>
       <p:pic>
         <p:nvPicPr>
-          <p:cNvPr id="11" name="Icon LuHand" descr="preencoded.png">    </p:cNvPr>
+          <p:cNvPr id="5" name="Foto Elias Hauck" descr="Foto von Elias Hauck">    </p:cNvPr>
           <p:cNvPicPr>
             <a:picLocks noChangeAspect="1"/>
           </p:cNvPicPr>
@@ -9824,6 +9756,158 @@
         </p:blipFill>
         <p:spPr>
           <a:xfrm>
+            <a:off x="914400" y="2148840"/>
+            <a:ext cx="1600200" cy="1600200"/>
+          </a:xfrm>
+          <a:prstGeom prst="rect">
+            <a:avLst/>
+          </a:prstGeom>
+        </p:spPr>
+      </p:pic>
+      <p:sp>
+        <p:nvSpPr>
+          <p:cNvPr id="6" name="Text 3"/>
+          <p:cNvSpPr txBox="1"/>
+          <p:nvPr/>
+        </p:nvSpPr>
+        <p:spPr>
+          <a:xfrm>
+            <a:off x="914400" y="3931920"/>
+            <a:ext cx="4114800" cy="457200"/>
+          </a:xfrm>
+          <a:prstGeom prst="rect">
+            <a:avLst/>
+          </a:prstGeom>
+          <a:noFill/>
+          <a:ln/>
+        </p:spPr>
+        <p:txBody>
+          <a:bodyPr wrap="square" lIns="0" tIns="0" rIns="0" bIns="0" rtlCol="0" anchor="ctr"/>
+          <a:lstStyle/>
+          <a:p>
+            <a:pPr indent="0" marL="0">
+              <a:buNone/>
+            </a:pPr>
+            <a:r>
+              <a:rPr lang="en-US" sz="2400" b="1" dirty="0">
+                <a:solidFill>
+                  <a:schemeClr val="tx1"/>
+                </a:solidFill>
+              </a:rPr>
+              <a:t>Elias Hauck</a:t>
+            </a:r>
+            <a:endParaRPr lang="en-US" sz="2400" dirty="0"/>
+          </a:p>
+        </p:txBody>
+      </p:sp>
+      <p:sp>
+        <p:nvSpPr>
+          <p:cNvPr id="7" name="Text 4"/>
+          <p:cNvSpPr txBox="1"/>
+          <p:nvPr/>
+        </p:nvSpPr>
+        <p:spPr>
+          <a:xfrm>
+            <a:off x="914400" y="4434840"/>
+            <a:ext cx="4114800" cy="731520"/>
+          </a:xfrm>
+          <a:prstGeom prst="rect">
+            <a:avLst/>
+          </a:prstGeom>
+          <a:noFill/>
+          <a:ln/>
+        </p:spPr>
+        <p:txBody>
+          <a:bodyPr wrap="square" lIns="0" tIns="0" rIns="0" bIns="0" rtlCol="0" anchor="ctr"/>
+          <a:lstStyle/>
+          <a:p>
+            <a:pPr indent="0" marL="0">
+              <a:buNone/>
+            </a:pPr>
+            <a:r>
+              <a:rPr lang="en-US" sz="1500" dirty="0">
+                <a:solidFill>
+                  <a:schemeClr val="tx2"/>
+                </a:solidFill>
+              </a:rPr>
+              <a:t>Geschäftsführer und Gründer</a:t>
+            </a:r>
+            <a:endParaRPr lang="en-US" sz="1500" dirty="0"/>
+          </a:p>
+          <a:p>
+            <a:pPr indent="0" marL="0">
+              <a:buNone/>
+            </a:pPr>
+            <a:r>
+              <a:rPr lang="en-US" sz="1500" dirty="0">
+                <a:solidFill>
+                  <a:schemeClr val="tx2"/>
+                </a:solidFill>
+              </a:rPr>
+              <a:t>asuno und SH&amp;Partner</a:t>
+            </a:r>
+            <a:endParaRPr lang="en-US" sz="1500" dirty="0"/>
+          </a:p>
+        </p:txBody>
+      </p:sp>
+      <p:sp>
+        <p:nvSpPr>
+          <p:cNvPr id="8" name="Karte Umfrage"/>
+          <p:cNvSpPr/>
+          <p:nvPr/>
+        </p:nvSpPr>
+        <p:spPr>
+          <a:xfrm>
+            <a:off x="5760720" y="1828800"/>
+            <a:ext cx="5879592" cy="3749040"/>
+          </a:xfrm>
+          <a:prstGeom prst="roundRect">
+            <a:avLst>
+              <a:gd name="adj" fmla="val 1951"/>
+            </a:avLst>
+          </a:prstGeom>
+          <a:solidFill>
+            <a:schemeClr val="tx1"/>
+          </a:solidFill>
+          <a:ln/>
+        </p:spPr>
+      </p:sp>
+      <p:sp>
+        <p:nvSpPr>
+          <p:cNvPr id="9" name="Icon-Kreis LuSmartphone"/>
+          <p:cNvSpPr/>
+          <p:nvPr/>
+        </p:nvSpPr>
+        <p:spPr>
+          <a:xfrm>
+            <a:off x="6172200" y="2194560"/>
+            <a:ext cx="685800" cy="685800"/>
+          </a:xfrm>
+          <a:prstGeom prst="ellipse">
+            <a:avLst/>
+          </a:prstGeom>
+          <a:solidFill>
+            <a:schemeClr val="accent1"/>
+          </a:solidFill>
+          <a:ln/>
+        </p:spPr>
+      </p:sp>
+      <p:pic>
+        <p:nvPicPr>
+          <p:cNvPr id="10" name="Icon LuSmartphone" descr="preencoded.png">    </p:cNvPr>
+          <p:cNvPicPr>
+            <a:picLocks noChangeAspect="1"/>
+          </p:cNvPicPr>
+          <p:nvPr/>
+        </p:nvPicPr>
+        <p:blipFill>
+          <a:blip r:embed="rId2"/>
+          <a:stretch>
+            <a:fillRect/>
+          </a:stretch>
+        </p:blipFill>
+        <p:spPr>
+          <a:xfrm>
             <a:off x="6343650" y="2366010"/>
             <a:ext cx="342900" cy="342900"/>
           </a:xfrm>
@@ -9834,7 +9918,7 @@
       </p:pic>
       <p:sp>
         <p:nvSpPr>
-          <p:cNvPr id="12" name="Text 9"/>
+          <p:cNvPr id="11" name="Text 7"/>
           <p:cNvSpPr txBox="1"/>
           <p:nvPr/>
         </p:nvSpPr>
@@ -9862,7 +9946,7 @@
                   <a:schemeClr val="bg1"/>
                 </a:solidFill>
               </a:rPr>
-              <a:t>Hand hoch, wenn …</a:t>
+              <a:t>Macht mit – per Handy!</a:t>
             </a:r>
             <a:endParaRPr lang="en-US" sz="2200" dirty="0"/>
           </a:p>
@@ -9870,7 +9954,7 @@
       </p:sp>
       <p:sp>
         <p:nvSpPr>
-          <p:cNvPr id="13" name="Nummer 1"/>
+          <p:cNvPr id="12" name="Nummer 1"/>
           <p:cNvSpPr/>
           <p:nvPr/>
         </p:nvSpPr>
@@ -9890,7 +9974,7 @@
       </p:sp>
       <p:sp>
         <p:nvSpPr>
-          <p:cNvPr id="14" name="Text 11"/>
+          <p:cNvPr id="13" name="Text 9"/>
           <p:cNvSpPr txBox="1"/>
           <p:nvPr/>
         </p:nvSpPr>
@@ -9926,7 +10010,7 @@
       </p:sp>
       <p:sp>
         <p:nvSpPr>
-          <p:cNvPr id="15" name="Text 12"/>
+          <p:cNvPr id="14" name="Text 10"/>
           <p:cNvSpPr txBox="1"/>
           <p:nvPr/>
         </p:nvSpPr>
@@ -9954,7 +10038,7 @@
                   <a:schemeClr val="accent5"/>
                 </a:solidFill>
               </a:rPr>
-              <a:t>… ihr in der letzten Woche eine KI benutzt habt.</a:t>
+              <a:t>menti.com im Browser öffnen</a:t>
             </a:r>
             <a:endParaRPr lang="en-US" sz="1600" dirty="0"/>
           </a:p>
@@ -9962,7 +10046,7 @@
       </p:sp>
       <p:sp>
         <p:nvSpPr>
-          <p:cNvPr id="16" name="Nummer 2"/>
+          <p:cNvPr id="15" name="Nummer 2"/>
           <p:cNvSpPr/>
           <p:nvPr/>
         </p:nvSpPr>
@@ -9982,7 +10066,7 @@
       </p:sp>
       <p:sp>
         <p:nvSpPr>
-          <p:cNvPr id="17" name="Text 14"/>
+          <p:cNvPr id="16" name="Text 12"/>
           <p:cNvSpPr txBox="1"/>
           <p:nvPr/>
         </p:nvSpPr>
@@ -10018,7 +10102,7 @@
       </p:sp>
       <p:sp>
         <p:nvSpPr>
-          <p:cNvPr id="18" name="Text 15"/>
+          <p:cNvPr id="17" name="Text 13"/>
           <p:cNvSpPr txBox="1"/>
           <p:nvPr/>
         </p:nvSpPr>
@@ -10046,7 +10130,7 @@
                   <a:schemeClr val="accent5"/>
                 </a:solidFill>
               </a:rPr>
-              <a:t>… ihr KI schon für die Schule eingesetzt habt.</a:t>
+              <a:t>Code eingeben – er steht gleich oben auf dem Bildschirm</a:t>
             </a:r>
             <a:endParaRPr lang="en-US" sz="1600" dirty="0"/>
           </a:p>
@@ -10054,7 +10138,7 @@
       </p:sp>
       <p:sp>
         <p:nvSpPr>
-          <p:cNvPr id="19" name="Nummer 3"/>
+          <p:cNvPr id="18" name="Nummer 3"/>
           <p:cNvSpPr/>
           <p:nvPr/>
         </p:nvSpPr>
@@ -10074,7 +10158,7 @@
       </p:sp>
       <p:sp>
         <p:nvSpPr>
-          <p:cNvPr id="20" name="Text 17"/>
+          <p:cNvPr id="19" name="Text 15"/>
           <p:cNvSpPr txBox="1"/>
           <p:nvPr/>
         </p:nvSpPr>
@@ -10110,7 +10194,7 @@
       </p:sp>
       <p:sp>
         <p:nvSpPr>
-          <p:cNvPr id="21" name="Text 18"/>
+          <p:cNvPr id="20" name="Text 16"/>
           <p:cNvSpPr txBox="1"/>
           <p:nvPr/>
         </p:nvSpPr>
@@ -10138,9 +10222,67 @@
                   <a:schemeClr val="accent5"/>
                 </a:solidFill>
               </a:rPr>
-              <a:t>… euch eine KI-Antwort schon mal komisch vorkam.</a:t>
+              <a:t>Erste Frage: Woran denkst du bei „KI“?</a:t>
             </a:r>
             <a:endParaRPr lang="en-US" sz="1600" dirty="0"/>
+          </a:p>
+        </p:txBody>
+      </p:sp>
+      <p:sp>
+        <p:nvSpPr>
+          <p:cNvPr id="21" name="Hinweis Menti-Frage 1 + 2"/>
+          <p:cNvSpPr/>
+          <p:nvPr/>
+        </p:nvSpPr>
+        <p:spPr>
+          <a:xfrm>
+            <a:off x="9144000" y="6336792"/>
+            <a:ext cx="1783080" cy="274320"/>
+          </a:xfrm>
+          <a:prstGeom prst="roundRect">
+            <a:avLst>
+              <a:gd name="adj" fmla="val 20000"/>
+            </a:avLst>
+          </a:prstGeom>
+          <a:solidFill>
+            <a:schemeClr val="accent1"/>
+          </a:solidFill>
+          <a:ln/>
+        </p:spPr>
+      </p:sp>
+      <p:sp>
+        <p:nvSpPr>
+          <p:cNvPr id="22" name="Text 18"/>
+          <p:cNvSpPr txBox="1"/>
+          <p:nvPr/>
+        </p:nvSpPr>
+        <p:spPr>
+          <a:xfrm>
+            <a:off x="9144000" y="6336792"/>
+            <a:ext cx="1783080" cy="274320"/>
+          </a:xfrm>
+          <a:prstGeom prst="rect">
+            <a:avLst/>
+          </a:prstGeom>
+          <a:noFill/>
+          <a:ln/>
+        </p:spPr>
+        <p:txBody>
+          <a:bodyPr wrap="square" lIns="0" tIns="0" rIns="0" bIns="0" rtlCol="0" anchor="ctr"/>
+          <a:lstStyle/>
+          <a:p>
+            <a:pPr algn="ctr" indent="0" marL="0">
+              <a:buNone/>
+            </a:pPr>
+            <a:r>
+              <a:rPr lang="en-US" sz="1000" b="1" spc="200" kern="0" dirty="0">
+                <a:solidFill>
+                  <a:schemeClr val="bg1"/>
+                </a:solidFill>
+              </a:rPr>
+              <a:t>MENTI-FRAGE 1 + 2</a:t>
+            </a:r>
+            <a:endParaRPr lang="en-US" sz="1000" dirty="0"/>
           </a:p>
         </p:txBody>
       </p:sp>
@@ -10342,7 +10484,7 @@
                   <a:schemeClr val="accent1"/>
                 </a:solidFill>
               </a:rPr>
-              <a:t>IMPULS · 60 MIN.</a:t>
+              <a:t>IMPULS · CA. 40 MIN.</a:t>
             </a:r>
             <a:endParaRPr lang="en-US" sz="1200" dirty="0"/>
           </a:p>
@@ -12359,6 +12501,64 @@
                 </a:solidFill>
               </a:rPr>
               <a:t>Quelle: Statista, nach Unternehmensangaben. ChatGPT wurde am 30. November 2022 veröffentlicht.</a:t>
+            </a:r>
+            <a:endParaRPr lang="en-US" sz="1000" dirty="0"/>
+          </a:p>
+        </p:txBody>
+      </p:sp>
+      <p:sp>
+        <p:nvSpPr>
+          <p:cNvPr id="22" name="Hinweis Menti-Frage 3"/>
+          <p:cNvSpPr/>
+          <p:nvPr/>
+        </p:nvSpPr>
+        <p:spPr>
+          <a:xfrm>
+            <a:off x="9144000" y="6336792"/>
+            <a:ext cx="1783080" cy="274320"/>
+          </a:xfrm>
+          <a:prstGeom prst="roundRect">
+            <a:avLst>
+              <a:gd name="adj" fmla="val 20000"/>
+            </a:avLst>
+          </a:prstGeom>
+          <a:solidFill>
+            <a:schemeClr val="accent1"/>
+          </a:solidFill>
+          <a:ln/>
+        </p:spPr>
+      </p:sp>
+      <p:sp>
+        <p:nvSpPr>
+          <p:cNvPr id="23" name="Text 21"/>
+          <p:cNvSpPr txBox="1"/>
+          <p:nvPr/>
+        </p:nvSpPr>
+        <p:spPr>
+          <a:xfrm>
+            <a:off x="9144000" y="6336792"/>
+            <a:ext cx="1783080" cy="274320"/>
+          </a:xfrm>
+          <a:prstGeom prst="rect">
+            <a:avLst/>
+          </a:prstGeom>
+          <a:noFill/>
+          <a:ln/>
+        </p:spPr>
+        <p:txBody>
+          <a:bodyPr wrap="square" lIns="0" tIns="0" rIns="0" bIns="0" rtlCol="0" anchor="ctr"/>
+          <a:lstStyle/>
+          <a:p>
+            <a:pPr algn="ctr" indent="0" marL="0">
+              <a:buNone/>
+            </a:pPr>
+            <a:r>
+              <a:rPr lang="en-US" sz="1000" b="1" spc="200" kern="0" dirty="0">
+                <a:solidFill>
+                  <a:schemeClr val="bg1"/>
+                </a:solidFill>
+              </a:rPr>
+              <a:t>MENTI-FRAGE 3</a:t>
             </a:r>
             <a:endParaRPr lang="en-US" sz="1000" dirty="0"/>
           </a:p>

--- a/ki-tag-gymnasium-sued/KI-Tag_Gymnasium-Sued_Impulsvortrag.pptx
+++ b/ki-tag-gymnasium-sued/KI-Tag_Gymnasium-Sued_Impulsvortrag.pptx
@@ -132,7 +132,7 @@
   <p:extLst>
     <p:ext uri="{521415D9-36F7-43E2-AB2F-B90AF26B5E84}">
       <p14:sectionLst xmlns:p14="http://schemas.microsoft.com/office/powerpoint/2010/main">
-        <p14:section name="Einstieg" id="{2183e841-72bb-e5fb-76ff-a40a7451e8bd}">
+        <p14:section name="Einstieg" id="{53cdd3b0-32e9-0f23-0f20-f6ee48dee400}">
           <p14:sldIdLst>
             <p14:sldId id="256"/>
             <p14:sldId id="257"/>
@@ -141,7 +141,7 @@
             <p14:sldId id="260"/>
           </p14:sldIdLst>
         </p14:section>
-        <p14:section name="Staunen" id="{aa02cff7-cd8d-fff1-c912-60e7e7fb775c}">
+        <p14:section name="Staunen" id="{8a2f8613-42c9-9d8b-bda1-209012ad4dad}">
           <p14:sldIdLst>
             <p14:sldId id="261"/>
             <p14:sldId id="262"/>
@@ -152,7 +152,7 @@
             <p14:sldId id="267"/>
           </p14:sldIdLst>
         </p14:section>
-        <p14:section name="Verstehen" id="{d52209b7-06e1-4bc6-939c-91b935971525}">
+        <p14:section name="Verstehen" id="{2acb20db-50e1-992f-5dc9-43e2bc000ead}">
           <p14:sldIdLst>
             <p14:sldId id="268"/>
             <p14:sldId id="269"/>
@@ -160,14 +160,14 @@
             <p14:sldId id="271"/>
           </p14:sldIdLst>
         </p14:section>
-        <p14:section name="Chancen" id="{c0e6b35a-efc8-1ae2-0759-45d1fc0d2b0c}">
+        <p14:section name="Chancen" id="{7f0f55fa-0f12-e6ab-0d46-12a8c2ae2bad}">
           <p14:sldIdLst>
             <p14:sldId id="272"/>
             <p14:sldId id="273"/>
             <p14:sldId id="274"/>
           </p14:sldIdLst>
         </p14:section>
-        <p14:section name="Risiken &amp; Verantwortung" id="{2cacab90-f89c-dddd-2198-289e459a6cb6}">
+        <p14:section name="Risiken &amp; Verantwortung" id="{2f34c55c-e1e6-dcd4-e126-30443d2a9c82}">
           <p14:sldIdLst>
             <p14:sldId id="275"/>
             <p14:sldId id="276"/>
@@ -176,7 +176,7 @@
             <p14:sldId id="279"/>
           </p14:sldIdLst>
         </p14:section>
-        <p14:section name="Mission" id="{dd76fb59-517d-de0c-8a1b-cc43849cbd3f}">
+        <p14:section name="Mission" id="{5b4a9187-c6fa-ff1d-80f3-98f0586826b9}">
           <p14:sldIdLst>
             <p14:sldId id="280"/>
             <p14:sldId id="281"/>
@@ -2317,7 +2317,7 @@
           <a:p>
             <a:r>
               <a:rPr lang="en-US" dirty="0"/>
-              <a:t>Ca. 1,5 Min. Stationen kurz vorstellen, Gruppeneinteilung und Rotation erklären (wer startet wo, Signal zum Wechseln, Pause). Alles, was ihr gerade in den Challenges erlebt habt, vertieft ihr jetzt selbst.</a:t>
+              <a:t>Ca. 1,5 Min. Stationen kurz vorstellen. In Raum 1 und 2 teilt sich die Gruppe in zwei Hälften, die nach 20 Minuten die Station tauschen; in Raum 3 arbeitet die ganze Gruppe. Rotation: Gruppe A startet in Raum 1, B in Raum 2, C in Raum 3. Alles, was ihr gerade in den Challenges erlebt habt, vertieft ihr jetzt selbst.</a:t>
             </a:r>
             <a:endParaRPr lang="en-US" dirty="0"/>
           </a:p>
@@ -2669,7 +2669,7 @@
           <a:p>
             <a:r>
               <a:rPr lang="en-US" dirty="0"/>
-              <a:t>Ca. 1 Min. Ablauf erklären: Impuls mit Challenges in vier Teilen, dann Workshop-Parcours in 5 Gruppen à ca. 11 Personen.</a:t>
+              <a:t>Ca. 1 Min. Ablauf erklären: Impuls mit Challenges in vier Teilen. Danach teilt ihr euch in 3 Gruppen à ca. 23 und durchlauft nacheinander alle drei Themenräume à 45 Minuten – so macht jede und jeder alle 5 Stationen. Gruppeneinteilung und Startraum hier ansagen.</a:t>
             </a:r>
             <a:endParaRPr lang="en-US" dirty="0"/>
           </a:p>
@@ -14162,7 +14162,7 @@
                   <a:schemeClr val="tx2"/>
                 </a:solidFill>
               </a:rPr>
-              <a:t>5 Stationen · 5 Gruppen à ca. 11 Personen · ca. 25 Minuten pro Station</a:t>
+              <a:t>3 Gruppen · 3 Themenräume à 45 Minuten · alle 5 Stationen</a:t>
             </a:r>
             <a:endParaRPr lang="en-US" sz="1500" dirty="0"/>
           </a:p>
@@ -14170,14 +14170,188 @@
       </p:sp>
       <p:sp>
         <p:nvSpPr>
-          <p:cNvPr id="4" name="Station 1"/>
+          <p:cNvPr id="4" name="RAUM 1 · KI NUTZEN"/>
           <p:cNvSpPr/>
           <p:nvPr/>
         </p:nvSpPr>
         <p:spPr>
           <a:xfrm>
-            <a:off x="484632" y="2103120"/>
-            <a:ext cx="2103120" cy="3931920"/>
+            <a:off x="484632" y="2057400"/>
+            <a:ext cx="4379976" cy="329184"/>
+          </a:xfrm>
+          <a:prstGeom prst="roundRect">
+            <a:avLst>
+              <a:gd name="adj" fmla="val 50000"/>
+            </a:avLst>
+          </a:prstGeom>
+          <a:solidFill>
+            <a:schemeClr val="accent5"/>
+          </a:solidFill>
+          <a:ln/>
+        </p:spPr>
+      </p:sp>
+      <p:sp>
+        <p:nvSpPr>
+          <p:cNvPr id="5" name="Text 3"/>
+          <p:cNvSpPr txBox="1"/>
+          <p:nvPr/>
+        </p:nvSpPr>
+        <p:spPr>
+          <a:xfrm>
+            <a:off x="484632" y="2057400"/>
+            <a:ext cx="4379976" cy="329184"/>
+          </a:xfrm>
+          <a:prstGeom prst="rect">
+            <a:avLst/>
+          </a:prstGeom>
+          <a:noFill/>
+          <a:ln/>
+        </p:spPr>
+        <p:txBody>
+          <a:bodyPr wrap="square" lIns="0" tIns="0" rIns="0" bIns="0" rtlCol="0" anchor="ctr"/>
+          <a:lstStyle/>
+          <a:p>
+            <a:pPr algn="ctr" indent="0" marL="0">
+              <a:buNone/>
+            </a:pPr>
+            <a:r>
+              <a:rPr lang="en-US" sz="900" b="1" spc="100" kern="0" dirty="0">
+                <a:solidFill>
+                  <a:schemeClr val="accent1"/>
+                </a:solidFill>
+              </a:rPr>
+              <a:t>RAUM 1 · KI NUTZEN</a:t>
+            </a:r>
+            <a:endParaRPr lang="en-US" sz="900" dirty="0"/>
+          </a:p>
+        </p:txBody>
+      </p:sp>
+      <p:sp>
+        <p:nvSpPr>
+          <p:cNvPr id="6" name="RAUM 2 · KI PRÜFEN"/>
+          <p:cNvSpPr/>
+          <p:nvPr/>
+        </p:nvSpPr>
+        <p:spPr>
+          <a:xfrm>
+            <a:off x="5038344" y="2057400"/>
+            <a:ext cx="4379976" cy="329184"/>
+          </a:xfrm>
+          <a:prstGeom prst="roundRect">
+            <a:avLst>
+              <a:gd name="adj" fmla="val 50000"/>
+            </a:avLst>
+          </a:prstGeom>
+          <a:solidFill>
+            <a:schemeClr val="accent5"/>
+          </a:solidFill>
+          <a:ln/>
+        </p:spPr>
+      </p:sp>
+      <p:sp>
+        <p:nvSpPr>
+          <p:cNvPr id="7" name="Text 5"/>
+          <p:cNvSpPr txBox="1"/>
+          <p:nvPr/>
+        </p:nvSpPr>
+        <p:spPr>
+          <a:xfrm>
+            <a:off x="5038344" y="2057400"/>
+            <a:ext cx="4379976" cy="329184"/>
+          </a:xfrm>
+          <a:prstGeom prst="rect">
+            <a:avLst/>
+          </a:prstGeom>
+          <a:noFill/>
+          <a:ln/>
+        </p:spPr>
+        <p:txBody>
+          <a:bodyPr wrap="square" lIns="0" tIns="0" rIns="0" bIns="0" rtlCol="0" anchor="ctr"/>
+          <a:lstStyle/>
+          <a:p>
+            <a:pPr algn="ctr" indent="0" marL="0">
+              <a:buNone/>
+            </a:pPr>
+            <a:r>
+              <a:rPr lang="en-US" sz="900" b="1" spc="100" kern="0" dirty="0">
+                <a:solidFill>
+                  <a:schemeClr val="accent1"/>
+                </a:solidFill>
+              </a:rPr>
+              <a:t>RAUM 2 · KI PRÜFEN</a:t>
+            </a:r>
+            <a:endParaRPr lang="en-US" sz="900" dirty="0"/>
+          </a:p>
+        </p:txBody>
+      </p:sp>
+      <p:sp>
+        <p:nvSpPr>
+          <p:cNvPr id="8" name="RAUM 3 · KI GESTALTEN"/>
+          <p:cNvSpPr/>
+          <p:nvPr/>
+        </p:nvSpPr>
+        <p:spPr>
+          <a:xfrm>
+            <a:off x="9592056" y="2057400"/>
+            <a:ext cx="2103120" cy="329184"/>
+          </a:xfrm>
+          <a:prstGeom prst="roundRect">
+            <a:avLst>
+              <a:gd name="adj" fmla="val 50000"/>
+            </a:avLst>
+          </a:prstGeom>
+          <a:solidFill>
+            <a:schemeClr val="accent5"/>
+          </a:solidFill>
+          <a:ln/>
+        </p:spPr>
+      </p:sp>
+      <p:sp>
+        <p:nvSpPr>
+          <p:cNvPr id="9" name="Text 7"/>
+          <p:cNvSpPr txBox="1"/>
+          <p:nvPr/>
+        </p:nvSpPr>
+        <p:spPr>
+          <a:xfrm>
+            <a:off x="9592056" y="2057400"/>
+            <a:ext cx="2103120" cy="329184"/>
+          </a:xfrm>
+          <a:prstGeom prst="rect">
+            <a:avLst/>
+          </a:prstGeom>
+          <a:noFill/>
+          <a:ln/>
+        </p:spPr>
+        <p:txBody>
+          <a:bodyPr wrap="square" lIns="0" tIns="0" rIns="0" bIns="0" rtlCol="0" anchor="ctr"/>
+          <a:lstStyle/>
+          <a:p>
+            <a:pPr algn="ctr" indent="0" marL="0">
+              <a:buNone/>
+            </a:pPr>
+            <a:r>
+              <a:rPr lang="en-US" sz="900" b="1" spc="100" kern="0" dirty="0">
+                <a:solidFill>
+                  <a:schemeClr val="accent1"/>
+                </a:solidFill>
+              </a:rPr>
+              <a:t>RAUM 3 · KI GESTALTEN</a:t>
+            </a:r>
+            <a:endParaRPr lang="en-US" sz="900" dirty="0"/>
+          </a:p>
+        </p:txBody>
+      </p:sp>
+      <p:sp>
+        <p:nvSpPr>
+          <p:cNvPr id="10" name="Station 1"/>
+          <p:cNvSpPr/>
+          <p:nvPr/>
+        </p:nvSpPr>
+        <p:spPr>
+          <a:xfrm>
+            <a:off x="484632" y="2542032"/>
+            <a:ext cx="2103120" cy="3520440"/>
           </a:xfrm>
           <a:prstGeom prst="roundRect">
             <a:avLst>
@@ -14199,14 +14373,14 @@
       </p:sp>
       <p:sp>
         <p:nvSpPr>
-          <p:cNvPr id="5" name="Text 3"/>
-          <p:cNvSpPr txBox="1"/>
-          <p:nvPr/>
-        </p:nvSpPr>
-        <p:spPr>
-          <a:xfrm>
-            <a:off x="685800" y="2240280"/>
-            <a:ext cx="1097280" cy="640080"/>
+          <p:cNvPr id="11" name="Text 9"/>
+          <p:cNvSpPr txBox="1"/>
+          <p:nvPr/>
+        </p:nvSpPr>
+        <p:spPr>
+          <a:xfrm>
+            <a:off x="685800" y="2633472"/>
+            <a:ext cx="1097280" cy="566928"/>
           </a:xfrm>
           <a:prstGeom prst="rect">
             <a:avLst/>
@@ -14222,27 +14396,27 @@
               <a:buNone/>
             </a:pPr>
             <a:r>
-              <a:rPr lang="en-US" sz="3000" b="1" dirty="0">
+              <a:rPr lang="en-US" sz="2800" b="1" dirty="0">
                 <a:solidFill>
                   <a:schemeClr val="accent1"/>
                 </a:solidFill>
               </a:rPr>
               <a:t>01</a:t>
             </a:r>
-            <a:endParaRPr lang="en-US" sz="3000" dirty="0"/>
-          </a:p>
-        </p:txBody>
-      </p:sp>
-      <p:sp>
-        <p:nvSpPr>
-          <p:cNvPr id="6" name="Text 4"/>
-          <p:cNvSpPr txBox="1"/>
-          <p:nvPr/>
-        </p:nvSpPr>
-        <p:spPr>
-          <a:xfrm>
-            <a:off x="685800" y="2880360"/>
-            <a:ext cx="1737360" cy="640080"/>
+            <a:endParaRPr lang="en-US" sz="2800" dirty="0"/>
+          </a:p>
+        </p:txBody>
+      </p:sp>
+      <p:sp>
+        <p:nvSpPr>
+          <p:cNvPr id="12" name="Text 10"/>
+          <p:cNvSpPr txBox="1"/>
+          <p:nvPr/>
+        </p:nvSpPr>
+        <p:spPr>
+          <a:xfrm>
+            <a:off x="685800" y="3200400"/>
+            <a:ext cx="1737360" cy="621792"/>
           </a:xfrm>
           <a:prstGeom prst="rect">
             <a:avLst/>
@@ -14271,14 +14445,14 @@
       </p:sp>
       <p:sp>
         <p:nvSpPr>
-          <p:cNvPr id="7" name="Text 5"/>
-          <p:cNvSpPr txBox="1"/>
-          <p:nvPr/>
-        </p:nvSpPr>
-        <p:spPr>
-          <a:xfrm>
-            <a:off x="685800" y="3520440"/>
-            <a:ext cx="1737360" cy="1325880"/>
+          <p:cNvPr id="13" name="Text 11"/>
+          <p:cNvSpPr txBox="1"/>
+          <p:nvPr/>
+        </p:nvSpPr>
+        <p:spPr>
+          <a:xfrm>
+            <a:off x="685800" y="3822192"/>
+            <a:ext cx="1737360" cy="1188720"/>
           </a:xfrm>
           <a:prstGeom prst="rect">
             <a:avLst/>
@@ -14307,14 +14481,14 @@
       </p:sp>
       <p:sp>
         <p:nvSpPr>
-          <p:cNvPr id="8" name="Text 6"/>
-          <p:cNvSpPr txBox="1"/>
-          <p:nvPr/>
-        </p:nvSpPr>
-        <p:spPr>
-          <a:xfrm>
-            <a:off x="685800" y="4892040"/>
-            <a:ext cx="1737360" cy="1005840"/>
+          <p:cNvPr id="14" name="Text 12"/>
+          <p:cNvSpPr txBox="1"/>
+          <p:nvPr/>
+        </p:nvSpPr>
+        <p:spPr>
+          <a:xfrm>
+            <a:off x="685800" y="5029200"/>
+            <a:ext cx="1737360" cy="960120"/>
           </a:xfrm>
           <a:prstGeom prst="rect">
             <a:avLst/>
@@ -14343,14 +14517,14 @@
       </p:sp>
       <p:sp>
         <p:nvSpPr>
-          <p:cNvPr id="9" name="Station 2"/>
+          <p:cNvPr id="15" name="Station 2"/>
           <p:cNvSpPr/>
           <p:nvPr/>
         </p:nvSpPr>
         <p:spPr>
           <a:xfrm>
-            <a:off x="2761488" y="2103120"/>
-            <a:ext cx="2103120" cy="3931920"/>
+            <a:off x="2761488" y="2542032"/>
+            <a:ext cx="2103120" cy="3520440"/>
           </a:xfrm>
           <a:prstGeom prst="roundRect">
             <a:avLst>
@@ -14372,14 +14546,14 @@
       </p:sp>
       <p:sp>
         <p:nvSpPr>
-          <p:cNvPr id="10" name="Text 8"/>
-          <p:cNvSpPr txBox="1"/>
-          <p:nvPr/>
-        </p:nvSpPr>
-        <p:spPr>
-          <a:xfrm>
-            <a:off x="2962656" y="2240280"/>
-            <a:ext cx="1097280" cy="640080"/>
+          <p:cNvPr id="16" name="Text 14"/>
+          <p:cNvSpPr txBox="1"/>
+          <p:nvPr/>
+        </p:nvSpPr>
+        <p:spPr>
+          <a:xfrm>
+            <a:off x="2962656" y="2633472"/>
+            <a:ext cx="1097280" cy="566928"/>
           </a:xfrm>
           <a:prstGeom prst="rect">
             <a:avLst/>
@@ -14395,27 +14569,27 @@
               <a:buNone/>
             </a:pPr>
             <a:r>
-              <a:rPr lang="en-US" sz="3000" b="1" dirty="0">
+              <a:rPr lang="en-US" sz="2800" b="1" dirty="0">
                 <a:solidFill>
                   <a:schemeClr val="accent1"/>
                 </a:solidFill>
               </a:rPr>
               <a:t>02</a:t>
             </a:r>
-            <a:endParaRPr lang="en-US" sz="3000" dirty="0"/>
-          </a:p>
-        </p:txBody>
-      </p:sp>
-      <p:sp>
-        <p:nvSpPr>
-          <p:cNvPr id="11" name="Text 9"/>
-          <p:cNvSpPr txBox="1"/>
-          <p:nvPr/>
-        </p:nvSpPr>
-        <p:spPr>
-          <a:xfrm>
-            <a:off x="2962656" y="2880360"/>
-            <a:ext cx="1737360" cy="640080"/>
+            <a:endParaRPr lang="en-US" sz="2800" dirty="0"/>
+          </a:p>
+        </p:txBody>
+      </p:sp>
+      <p:sp>
+        <p:nvSpPr>
+          <p:cNvPr id="17" name="Text 15"/>
+          <p:cNvSpPr txBox="1"/>
+          <p:nvPr/>
+        </p:nvSpPr>
+        <p:spPr>
+          <a:xfrm>
+            <a:off x="2962656" y="3200400"/>
+            <a:ext cx="1737360" cy="621792"/>
           </a:xfrm>
           <a:prstGeom prst="rect">
             <a:avLst/>
@@ -14444,14 +14618,14 @@
       </p:sp>
       <p:sp>
         <p:nvSpPr>
-          <p:cNvPr id="12" name="Text 10"/>
-          <p:cNvSpPr txBox="1"/>
-          <p:nvPr/>
-        </p:nvSpPr>
-        <p:spPr>
-          <a:xfrm>
-            <a:off x="2962656" y="3520440"/>
-            <a:ext cx="1737360" cy="1325880"/>
+          <p:cNvPr id="18" name="Text 16"/>
+          <p:cNvSpPr txBox="1"/>
+          <p:nvPr/>
+        </p:nvSpPr>
+        <p:spPr>
+          <a:xfrm>
+            <a:off x="2962656" y="3822192"/>
+            <a:ext cx="1737360" cy="1188720"/>
           </a:xfrm>
           <a:prstGeom prst="rect">
             <a:avLst/>
@@ -14480,14 +14654,14 @@
       </p:sp>
       <p:sp>
         <p:nvSpPr>
-          <p:cNvPr id="13" name="Text 11"/>
-          <p:cNvSpPr txBox="1"/>
-          <p:nvPr/>
-        </p:nvSpPr>
-        <p:spPr>
-          <a:xfrm>
-            <a:off x="2962656" y="4892040"/>
-            <a:ext cx="1737360" cy="1005840"/>
+          <p:cNvPr id="19" name="Text 17"/>
+          <p:cNvSpPr txBox="1"/>
+          <p:nvPr/>
+        </p:nvSpPr>
+        <p:spPr>
+          <a:xfrm>
+            <a:off x="2962656" y="5029200"/>
+            <a:ext cx="1737360" cy="960120"/>
           </a:xfrm>
           <a:prstGeom prst="rect">
             <a:avLst/>
@@ -14516,14 +14690,14 @@
       </p:sp>
       <p:sp>
         <p:nvSpPr>
-          <p:cNvPr id="14" name="Station 3"/>
+          <p:cNvPr id="20" name="Station 3"/>
           <p:cNvSpPr/>
           <p:nvPr/>
         </p:nvSpPr>
         <p:spPr>
           <a:xfrm>
-            <a:off x="5038344" y="2103120"/>
-            <a:ext cx="2103120" cy="3931920"/>
+            <a:off x="5038344" y="2542032"/>
+            <a:ext cx="2103120" cy="3520440"/>
           </a:xfrm>
           <a:prstGeom prst="roundRect">
             <a:avLst>
@@ -14545,14 +14719,14 @@
       </p:sp>
       <p:sp>
         <p:nvSpPr>
-          <p:cNvPr id="15" name="Text 13"/>
-          <p:cNvSpPr txBox="1"/>
-          <p:nvPr/>
-        </p:nvSpPr>
-        <p:spPr>
-          <a:xfrm>
-            <a:off x="5239512" y="2240280"/>
-            <a:ext cx="1097280" cy="640080"/>
+          <p:cNvPr id="21" name="Text 19"/>
+          <p:cNvSpPr txBox="1"/>
+          <p:nvPr/>
+        </p:nvSpPr>
+        <p:spPr>
+          <a:xfrm>
+            <a:off x="5239512" y="2633472"/>
+            <a:ext cx="1097280" cy="566928"/>
           </a:xfrm>
           <a:prstGeom prst="rect">
             <a:avLst/>
@@ -14568,27 +14742,27 @@
               <a:buNone/>
             </a:pPr>
             <a:r>
-              <a:rPr lang="en-US" sz="3000" b="1" dirty="0">
+              <a:rPr lang="en-US" sz="2800" b="1" dirty="0">
                 <a:solidFill>
                   <a:schemeClr val="accent1"/>
                 </a:solidFill>
               </a:rPr>
               <a:t>03</a:t>
             </a:r>
-            <a:endParaRPr lang="en-US" sz="3000" dirty="0"/>
-          </a:p>
-        </p:txBody>
-      </p:sp>
-      <p:sp>
-        <p:nvSpPr>
-          <p:cNvPr id="16" name="Text 14"/>
-          <p:cNvSpPr txBox="1"/>
-          <p:nvPr/>
-        </p:nvSpPr>
-        <p:spPr>
-          <a:xfrm>
-            <a:off x="5239512" y="2880360"/>
-            <a:ext cx="1737360" cy="640080"/>
+            <a:endParaRPr lang="en-US" sz="2800" dirty="0"/>
+          </a:p>
+        </p:txBody>
+      </p:sp>
+      <p:sp>
+        <p:nvSpPr>
+          <p:cNvPr id="22" name="Text 20"/>
+          <p:cNvSpPr txBox="1"/>
+          <p:nvPr/>
+        </p:nvSpPr>
+        <p:spPr>
+          <a:xfrm>
+            <a:off x="5239512" y="3200400"/>
+            <a:ext cx="1737360" cy="621792"/>
           </a:xfrm>
           <a:prstGeom prst="rect">
             <a:avLst/>
@@ -14617,14 +14791,14 @@
       </p:sp>
       <p:sp>
         <p:nvSpPr>
-          <p:cNvPr id="17" name="Text 15"/>
-          <p:cNvSpPr txBox="1"/>
-          <p:nvPr/>
-        </p:nvSpPr>
-        <p:spPr>
-          <a:xfrm>
-            <a:off x="5239512" y="3520440"/>
-            <a:ext cx="1737360" cy="1325880"/>
+          <p:cNvPr id="23" name="Text 21"/>
+          <p:cNvSpPr txBox="1"/>
+          <p:nvPr/>
+        </p:nvSpPr>
+        <p:spPr>
+          <a:xfrm>
+            <a:off x="5239512" y="3822192"/>
+            <a:ext cx="1737360" cy="1188720"/>
           </a:xfrm>
           <a:prstGeom prst="rect">
             <a:avLst/>
@@ -14653,14 +14827,14 @@
       </p:sp>
       <p:sp>
         <p:nvSpPr>
-          <p:cNvPr id="18" name="Text 16"/>
-          <p:cNvSpPr txBox="1"/>
-          <p:nvPr/>
-        </p:nvSpPr>
-        <p:spPr>
-          <a:xfrm>
-            <a:off x="5239512" y="4892040"/>
-            <a:ext cx="1737360" cy="1005840"/>
+          <p:cNvPr id="24" name="Text 22"/>
+          <p:cNvSpPr txBox="1"/>
+          <p:nvPr/>
+        </p:nvSpPr>
+        <p:spPr>
+          <a:xfrm>
+            <a:off x="5239512" y="5029200"/>
+            <a:ext cx="1737360" cy="960120"/>
           </a:xfrm>
           <a:prstGeom prst="rect">
             <a:avLst/>
@@ -14689,14 +14863,14 @@
       </p:sp>
       <p:sp>
         <p:nvSpPr>
-          <p:cNvPr id="19" name="Station 4"/>
+          <p:cNvPr id="25" name="Station 4"/>
           <p:cNvSpPr/>
           <p:nvPr/>
         </p:nvSpPr>
         <p:spPr>
           <a:xfrm>
-            <a:off x="7315200" y="2103120"/>
-            <a:ext cx="2103120" cy="3931920"/>
+            <a:off x="7315200" y="2542032"/>
+            <a:ext cx="2103120" cy="3520440"/>
           </a:xfrm>
           <a:prstGeom prst="roundRect">
             <a:avLst>
@@ -14718,14 +14892,14 @@
       </p:sp>
       <p:sp>
         <p:nvSpPr>
-          <p:cNvPr id="20" name="Text 18"/>
-          <p:cNvSpPr txBox="1"/>
-          <p:nvPr/>
-        </p:nvSpPr>
-        <p:spPr>
-          <a:xfrm>
-            <a:off x="7516368" y="2240280"/>
-            <a:ext cx="1097280" cy="640080"/>
+          <p:cNvPr id="26" name="Text 24"/>
+          <p:cNvSpPr txBox="1"/>
+          <p:nvPr/>
+        </p:nvSpPr>
+        <p:spPr>
+          <a:xfrm>
+            <a:off x="7516368" y="2633472"/>
+            <a:ext cx="1097280" cy="566928"/>
           </a:xfrm>
           <a:prstGeom prst="rect">
             <a:avLst/>
@@ -14741,27 +14915,27 @@
               <a:buNone/>
             </a:pPr>
             <a:r>
-              <a:rPr lang="en-US" sz="3000" b="1" dirty="0">
+              <a:rPr lang="en-US" sz="2800" b="1" dirty="0">
                 <a:solidFill>
                   <a:schemeClr val="accent1"/>
                 </a:solidFill>
               </a:rPr>
               <a:t>04</a:t>
             </a:r>
-            <a:endParaRPr lang="en-US" sz="3000" dirty="0"/>
-          </a:p>
-        </p:txBody>
-      </p:sp>
-      <p:sp>
-        <p:nvSpPr>
-          <p:cNvPr id="21" name="Text 19"/>
-          <p:cNvSpPr txBox="1"/>
-          <p:nvPr/>
-        </p:nvSpPr>
-        <p:spPr>
-          <a:xfrm>
-            <a:off x="7516368" y="2880360"/>
-            <a:ext cx="1737360" cy="640080"/>
+            <a:endParaRPr lang="en-US" sz="2800" dirty="0"/>
+          </a:p>
+        </p:txBody>
+      </p:sp>
+      <p:sp>
+        <p:nvSpPr>
+          <p:cNvPr id="27" name="Text 25"/>
+          <p:cNvSpPr txBox="1"/>
+          <p:nvPr/>
+        </p:nvSpPr>
+        <p:spPr>
+          <a:xfrm>
+            <a:off x="7516368" y="3200400"/>
+            <a:ext cx="1737360" cy="621792"/>
           </a:xfrm>
           <a:prstGeom prst="rect">
             <a:avLst/>
@@ -14790,14 +14964,14 @@
       </p:sp>
       <p:sp>
         <p:nvSpPr>
-          <p:cNvPr id="22" name="Text 20"/>
-          <p:cNvSpPr txBox="1"/>
-          <p:nvPr/>
-        </p:nvSpPr>
-        <p:spPr>
-          <a:xfrm>
-            <a:off x="7516368" y="3520440"/>
-            <a:ext cx="1737360" cy="1325880"/>
+          <p:cNvPr id="28" name="Text 26"/>
+          <p:cNvSpPr txBox="1"/>
+          <p:nvPr/>
+        </p:nvSpPr>
+        <p:spPr>
+          <a:xfrm>
+            <a:off x="7516368" y="3822192"/>
+            <a:ext cx="1737360" cy="1188720"/>
           </a:xfrm>
           <a:prstGeom prst="rect">
             <a:avLst/>
@@ -14826,14 +15000,14 @@
       </p:sp>
       <p:sp>
         <p:nvSpPr>
-          <p:cNvPr id="23" name="Text 21"/>
-          <p:cNvSpPr txBox="1"/>
-          <p:nvPr/>
-        </p:nvSpPr>
-        <p:spPr>
-          <a:xfrm>
-            <a:off x="7516368" y="4892040"/>
-            <a:ext cx="1737360" cy="1005840"/>
+          <p:cNvPr id="29" name="Text 27"/>
+          <p:cNvSpPr txBox="1"/>
+          <p:nvPr/>
+        </p:nvSpPr>
+        <p:spPr>
+          <a:xfrm>
+            <a:off x="7516368" y="5029200"/>
+            <a:ext cx="1737360" cy="960120"/>
           </a:xfrm>
           <a:prstGeom prst="rect">
             <a:avLst/>
@@ -14862,14 +15036,14 @@
       </p:sp>
       <p:sp>
         <p:nvSpPr>
-          <p:cNvPr id="24" name="Station 5"/>
+          <p:cNvPr id="30" name="Station 5"/>
           <p:cNvSpPr/>
           <p:nvPr/>
         </p:nvSpPr>
         <p:spPr>
           <a:xfrm>
-            <a:off x="9592056" y="2103120"/>
-            <a:ext cx="2103120" cy="3931920"/>
+            <a:off x="9592056" y="2542032"/>
+            <a:ext cx="2103120" cy="3520440"/>
           </a:xfrm>
           <a:prstGeom prst="roundRect">
             <a:avLst>
@@ -14891,14 +15065,14 @@
       </p:sp>
       <p:sp>
         <p:nvSpPr>
-          <p:cNvPr id="25" name="Text 23"/>
-          <p:cNvSpPr txBox="1"/>
-          <p:nvPr/>
-        </p:nvSpPr>
-        <p:spPr>
-          <a:xfrm>
-            <a:off x="9793224" y="2240280"/>
-            <a:ext cx="1097280" cy="640080"/>
+          <p:cNvPr id="31" name="Text 29"/>
+          <p:cNvSpPr txBox="1"/>
+          <p:nvPr/>
+        </p:nvSpPr>
+        <p:spPr>
+          <a:xfrm>
+            <a:off x="9793224" y="2633472"/>
+            <a:ext cx="1097280" cy="566928"/>
           </a:xfrm>
           <a:prstGeom prst="rect">
             <a:avLst/>
@@ -14914,27 +15088,27 @@
               <a:buNone/>
             </a:pPr>
             <a:r>
-              <a:rPr lang="en-US" sz="3000" b="1" dirty="0">
+              <a:rPr lang="en-US" sz="2800" b="1" dirty="0">
                 <a:solidFill>
                   <a:schemeClr val="accent1"/>
                 </a:solidFill>
               </a:rPr>
               <a:t>05</a:t>
             </a:r>
-            <a:endParaRPr lang="en-US" sz="3000" dirty="0"/>
-          </a:p>
-        </p:txBody>
-      </p:sp>
-      <p:sp>
-        <p:nvSpPr>
-          <p:cNvPr id="26" name="Text 24"/>
-          <p:cNvSpPr txBox="1"/>
-          <p:nvPr/>
-        </p:nvSpPr>
-        <p:spPr>
-          <a:xfrm>
-            <a:off x="9793224" y="2880360"/>
-            <a:ext cx="1737360" cy="640080"/>
+            <a:endParaRPr lang="en-US" sz="2800" dirty="0"/>
+          </a:p>
+        </p:txBody>
+      </p:sp>
+      <p:sp>
+        <p:nvSpPr>
+          <p:cNvPr id="32" name="Text 30"/>
+          <p:cNvSpPr txBox="1"/>
+          <p:nvPr/>
+        </p:nvSpPr>
+        <p:spPr>
+          <a:xfrm>
+            <a:off x="9793224" y="3200400"/>
+            <a:ext cx="1737360" cy="621792"/>
           </a:xfrm>
           <a:prstGeom prst="rect">
             <a:avLst/>
@@ -14963,14 +15137,14 @@
       </p:sp>
       <p:sp>
         <p:nvSpPr>
-          <p:cNvPr id="27" name="Text 25"/>
-          <p:cNvSpPr txBox="1"/>
-          <p:nvPr/>
-        </p:nvSpPr>
-        <p:spPr>
-          <a:xfrm>
-            <a:off x="9793224" y="3520440"/>
-            <a:ext cx="1737360" cy="1325880"/>
+          <p:cNvPr id="33" name="Text 31"/>
+          <p:cNvSpPr txBox="1"/>
+          <p:nvPr/>
+        </p:nvSpPr>
+        <p:spPr>
+          <a:xfrm>
+            <a:off x="9793224" y="3822192"/>
+            <a:ext cx="1737360" cy="1188720"/>
           </a:xfrm>
           <a:prstGeom prst="rect">
             <a:avLst/>
@@ -14999,14 +15173,14 @@
       </p:sp>
       <p:sp>
         <p:nvSpPr>
-          <p:cNvPr id="28" name="Text 26"/>
-          <p:cNvSpPr txBox="1"/>
-          <p:nvPr/>
-        </p:nvSpPr>
-        <p:spPr>
-          <a:xfrm>
-            <a:off x="9793224" y="4892040"/>
-            <a:ext cx="1737360" cy="1005840"/>
+          <p:cNvPr id="34" name="Text 32"/>
+          <p:cNvSpPr txBox="1"/>
+          <p:nvPr/>
+        </p:nvSpPr>
+        <p:spPr>
+          <a:xfrm>
+            <a:off x="9793224" y="5029200"/>
+            <a:ext cx="1737360" cy="960120"/>
           </a:xfrm>
           <a:prstGeom prst="rect">
             <a:avLst/>
@@ -16804,7 +16978,7 @@
                   <a:schemeClr val="accent2"/>
                 </a:solidFill>
               </a:rPr>
-              <a:t>WORKSHOP-PARCOURS · 5 STATIONEN À CA. 25 MIN. + 20 MIN. PAUSE</a:t>
+              <a:t>WORKSHOP · 3 THEMENRÄUME À 45 MIN. · 20 MIN. PAUSE</a:t>
             </a:r>
             <a:endParaRPr lang="en-US" sz="1200" dirty="0"/>
           </a:p>
@@ -16812,18 +16986,18 @@
       </p:sp>
       <p:sp>
         <p:nvSpPr>
-          <p:cNvPr id="18" name="Station 1"/>
+          <p:cNvPr id="18" name="Raum 1"/>
           <p:cNvSpPr/>
           <p:nvPr/>
         </p:nvSpPr>
         <p:spPr>
           <a:xfrm>
             <a:off x="484632" y="4480560"/>
-            <a:ext cx="2103120" cy="1188720"/>
+            <a:ext cx="3611880" cy="1280160"/>
           </a:xfrm>
           <a:prstGeom prst="roundRect">
             <a:avLst>
-              <a:gd name="adj" fmla="val 9231"/>
+              <a:gd name="adj" fmla="val 8571"/>
             </a:avLst>
           </a:prstGeom>
           <a:solidFill>
@@ -16834,110 +17008,126 @@
       </p:sp>
       <p:sp>
         <p:nvSpPr>
-          <p:cNvPr id="19" name="Nummer 1"/>
+          <p:cNvPr id="19" name="Text 17"/>
+          <p:cNvSpPr txBox="1"/>
+          <p:nvPr/>
+        </p:nvSpPr>
+        <p:spPr>
+          <a:xfrm>
+            <a:off x="758952" y="4590288"/>
+            <a:ext cx="3108960" cy="274320"/>
+          </a:xfrm>
+          <a:prstGeom prst="rect">
+            <a:avLst/>
+          </a:prstGeom>
+          <a:noFill/>
+          <a:ln/>
+        </p:spPr>
+        <p:txBody>
+          <a:bodyPr wrap="square" lIns="0" tIns="0" rIns="0" bIns="0" rtlCol="0" anchor="ctr"/>
+          <a:lstStyle/>
+          <a:p>
+            <a:pPr indent="0" marL="0">
+              <a:buNone/>
+            </a:pPr>
+            <a:r>
+              <a:rPr lang="en-US" sz="1000" b="1" spc="200" kern="0" dirty="0">
+                <a:solidFill>
+                  <a:schemeClr val="accent1"/>
+                </a:solidFill>
+              </a:rPr>
+              <a:t>RAUM 1</a:t>
+            </a:r>
+            <a:endParaRPr lang="en-US" sz="1000" dirty="0"/>
+          </a:p>
+        </p:txBody>
+      </p:sp>
+      <p:sp>
+        <p:nvSpPr>
+          <p:cNvPr id="20" name="Text 18"/>
+          <p:cNvSpPr txBox="1"/>
+          <p:nvPr/>
+        </p:nvSpPr>
+        <p:spPr>
+          <a:xfrm>
+            <a:off x="758952" y="4846320"/>
+            <a:ext cx="3108960" cy="411480"/>
+          </a:xfrm>
+          <a:prstGeom prst="rect">
+            <a:avLst/>
+          </a:prstGeom>
+          <a:noFill/>
+          <a:ln/>
+        </p:spPr>
+        <p:txBody>
+          <a:bodyPr wrap="square" lIns="0" tIns="0" rIns="0" bIns="0" rtlCol="0" anchor="ctr"/>
+          <a:lstStyle/>
+          <a:p>
+            <a:pPr indent="0" marL="0">
+              <a:buNone/>
+            </a:pPr>
+            <a:r>
+              <a:rPr lang="en-US" sz="1800" b="1" dirty="0">
+                <a:solidFill>
+                  <a:schemeClr val="tx1"/>
+                </a:solidFill>
+              </a:rPr>
+              <a:t>KI nutzen</a:t>
+            </a:r>
+            <a:endParaRPr lang="en-US" sz="1800" dirty="0"/>
+          </a:p>
+        </p:txBody>
+      </p:sp>
+      <p:sp>
+        <p:nvSpPr>
+          <p:cNvPr id="21" name="Text 19"/>
+          <p:cNvSpPr txBox="1"/>
+          <p:nvPr/>
+        </p:nvSpPr>
+        <p:spPr>
+          <a:xfrm>
+            <a:off x="758952" y="5285232"/>
+            <a:ext cx="3200400" cy="320040"/>
+          </a:xfrm>
+          <a:prstGeom prst="rect">
+            <a:avLst/>
+          </a:prstGeom>
+          <a:noFill/>
+          <a:ln/>
+        </p:spPr>
+        <p:txBody>
+          <a:bodyPr wrap="square" lIns="0" tIns="0" rIns="0" bIns="0" rtlCol="0" anchor="ctr"/>
+          <a:lstStyle/>
+          <a:p>
+            <a:pPr indent="0" marL="0">
+              <a:buNone/>
+            </a:pPr>
+            <a:r>
+              <a:rPr lang="en-US" sz="1200" dirty="0">
+                <a:solidFill>
+                  <a:schemeClr val="tx2"/>
+                </a:solidFill>
+              </a:rPr>
+              <a:t>Prompt Battle · KI als Lerncoach</a:t>
+            </a:r>
+            <a:endParaRPr lang="en-US" sz="1200" dirty="0"/>
+          </a:p>
+        </p:txBody>
+      </p:sp>
+      <p:sp>
+        <p:nvSpPr>
+          <p:cNvPr id="22" name="Raum 2"/>
           <p:cNvSpPr/>
           <p:nvPr/>
         </p:nvSpPr>
         <p:spPr>
           <a:xfrm>
-            <a:off x="685800" y="4864608"/>
-            <a:ext cx="420624" cy="420624"/>
-          </a:xfrm>
-          <a:prstGeom prst="ellipse">
-            <a:avLst/>
-          </a:prstGeom>
-          <a:solidFill>
-            <a:schemeClr val="tx1"/>
-          </a:solidFill>
-          <a:ln/>
-        </p:spPr>
-      </p:sp>
-      <p:sp>
-        <p:nvSpPr>
-          <p:cNvPr id="20" name="Text 18"/>
-          <p:cNvSpPr txBox="1"/>
-          <p:nvPr/>
-        </p:nvSpPr>
-        <p:spPr>
-          <a:xfrm>
-            <a:off x="685800" y="4864608"/>
-            <a:ext cx="420624" cy="420624"/>
-          </a:xfrm>
-          <a:prstGeom prst="rect">
-            <a:avLst/>
-          </a:prstGeom>
-          <a:noFill/>
-          <a:ln/>
-        </p:spPr>
-        <p:txBody>
-          <a:bodyPr wrap="square" lIns="0" tIns="0" rIns="0" bIns="0" rtlCol="0" anchor="ctr"/>
-          <a:lstStyle/>
-          <a:p>
-            <a:pPr algn="ctr" indent="0" marL="0">
-              <a:buNone/>
-            </a:pPr>
-            <a:r>
-              <a:rPr lang="en-US" sz="1400" b="1" dirty="0">
-                <a:solidFill>
-                  <a:schemeClr val="bg1"/>
-                </a:solidFill>
-              </a:rPr>
-              <a:t>1</a:t>
-            </a:r>
-            <a:endParaRPr lang="en-US" sz="1400" dirty="0"/>
-          </a:p>
-        </p:txBody>
-      </p:sp>
-      <p:sp>
-        <p:nvSpPr>
-          <p:cNvPr id="21" name="Text 19"/>
-          <p:cNvSpPr txBox="1"/>
-          <p:nvPr/>
-        </p:nvSpPr>
-        <p:spPr>
-          <a:xfrm>
-            <a:off x="1216152" y="4480560"/>
-            <a:ext cx="1325880" cy="1188720"/>
-          </a:xfrm>
-          <a:prstGeom prst="rect">
-            <a:avLst/>
-          </a:prstGeom>
-          <a:noFill/>
-          <a:ln/>
-        </p:spPr>
-        <p:txBody>
-          <a:bodyPr wrap="square" lIns="0" tIns="0" rIns="0" bIns="0" rtlCol="0" anchor="ctr"/>
-          <a:lstStyle/>
-          <a:p>
-            <a:pPr indent="0" marL="0">
-              <a:buNone/>
-            </a:pPr>
-            <a:r>
-              <a:rPr lang="en-US" sz="1400" b="1" dirty="0">
-                <a:solidFill>
-                  <a:schemeClr val="tx1"/>
-                </a:solidFill>
-              </a:rPr>
-              <a:t>Prompt Battle</a:t>
-            </a:r>
-            <a:endParaRPr lang="en-US" sz="1400" dirty="0"/>
-          </a:p>
-        </p:txBody>
-      </p:sp>
-      <p:sp>
-        <p:nvSpPr>
-          <p:cNvPr id="22" name="Station 2"/>
-          <p:cNvSpPr/>
-          <p:nvPr/>
-        </p:nvSpPr>
-        <p:spPr>
-          <a:xfrm>
-            <a:off x="2752344" y="4480560"/>
-            <a:ext cx="2103120" cy="1188720"/>
+            <a:off x="4279392" y="4480560"/>
+            <a:ext cx="3611880" cy="1280160"/>
           </a:xfrm>
           <a:prstGeom prst="roundRect">
             <a:avLst>
-              <a:gd name="adj" fmla="val 9231"/>
+              <a:gd name="adj" fmla="val 8571"/>
             </a:avLst>
           </a:prstGeom>
           <a:solidFill>
@@ -16948,110 +17138,126 @@
       </p:sp>
       <p:sp>
         <p:nvSpPr>
-          <p:cNvPr id="23" name="Nummer 2"/>
+          <p:cNvPr id="23" name="Text 21"/>
+          <p:cNvSpPr txBox="1"/>
+          <p:nvPr/>
+        </p:nvSpPr>
+        <p:spPr>
+          <a:xfrm>
+            <a:off x="4553712" y="4590288"/>
+            <a:ext cx="3108960" cy="274320"/>
+          </a:xfrm>
+          <a:prstGeom prst="rect">
+            <a:avLst/>
+          </a:prstGeom>
+          <a:noFill/>
+          <a:ln/>
+        </p:spPr>
+        <p:txBody>
+          <a:bodyPr wrap="square" lIns="0" tIns="0" rIns="0" bIns="0" rtlCol="0" anchor="ctr"/>
+          <a:lstStyle/>
+          <a:p>
+            <a:pPr indent="0" marL="0">
+              <a:buNone/>
+            </a:pPr>
+            <a:r>
+              <a:rPr lang="en-US" sz="1000" b="1" spc="200" kern="0" dirty="0">
+                <a:solidFill>
+                  <a:schemeClr val="accent1"/>
+                </a:solidFill>
+              </a:rPr>
+              <a:t>RAUM 2</a:t>
+            </a:r>
+            <a:endParaRPr lang="en-US" sz="1000" dirty="0"/>
+          </a:p>
+        </p:txBody>
+      </p:sp>
+      <p:sp>
+        <p:nvSpPr>
+          <p:cNvPr id="24" name="Text 22"/>
+          <p:cNvSpPr txBox="1"/>
+          <p:nvPr/>
+        </p:nvSpPr>
+        <p:spPr>
+          <a:xfrm>
+            <a:off x="4553712" y="4846320"/>
+            <a:ext cx="3108960" cy="411480"/>
+          </a:xfrm>
+          <a:prstGeom prst="rect">
+            <a:avLst/>
+          </a:prstGeom>
+          <a:noFill/>
+          <a:ln/>
+        </p:spPr>
+        <p:txBody>
+          <a:bodyPr wrap="square" lIns="0" tIns="0" rIns="0" bIns="0" rtlCol="0" anchor="ctr"/>
+          <a:lstStyle/>
+          <a:p>
+            <a:pPr indent="0" marL="0">
+              <a:buNone/>
+            </a:pPr>
+            <a:r>
+              <a:rPr lang="en-US" sz="1800" b="1" dirty="0">
+                <a:solidFill>
+                  <a:schemeClr val="tx1"/>
+                </a:solidFill>
+              </a:rPr>
+              <a:t>KI prüfen</a:t>
+            </a:r>
+            <a:endParaRPr lang="en-US" sz="1800" dirty="0"/>
+          </a:p>
+        </p:txBody>
+      </p:sp>
+      <p:sp>
+        <p:nvSpPr>
+          <p:cNvPr id="25" name="Text 23"/>
+          <p:cNvSpPr txBox="1"/>
+          <p:nvPr/>
+        </p:nvSpPr>
+        <p:spPr>
+          <a:xfrm>
+            <a:off x="4553712" y="5285232"/>
+            <a:ext cx="3200400" cy="320040"/>
+          </a:xfrm>
+          <a:prstGeom prst="rect">
+            <a:avLst/>
+          </a:prstGeom>
+          <a:noFill/>
+          <a:ln/>
+        </p:spPr>
+        <p:txBody>
+          <a:bodyPr wrap="square" lIns="0" tIns="0" rIns="0" bIns="0" rtlCol="0" anchor="ctr"/>
+          <a:lstStyle/>
+          <a:p>
+            <a:pPr indent="0" marL="0">
+              <a:buNone/>
+            </a:pPr>
+            <a:r>
+              <a:rPr lang="en-US" sz="1200" dirty="0">
+                <a:solidFill>
+                  <a:schemeClr val="tx2"/>
+                </a:solidFill>
+              </a:rPr>
+              <a:t>KI-Faktencheck · Deepfake Detective</a:t>
+            </a:r>
+            <a:endParaRPr lang="en-US" sz="1200" dirty="0"/>
+          </a:p>
+        </p:txBody>
+      </p:sp>
+      <p:sp>
+        <p:nvSpPr>
+          <p:cNvPr id="26" name="Raum 3"/>
           <p:cNvSpPr/>
           <p:nvPr/>
         </p:nvSpPr>
         <p:spPr>
           <a:xfrm>
-            <a:off x="2953512" y="4864608"/>
-            <a:ext cx="420624" cy="420624"/>
-          </a:xfrm>
-          <a:prstGeom prst="ellipse">
-            <a:avLst/>
-          </a:prstGeom>
-          <a:solidFill>
-            <a:schemeClr val="tx1"/>
-          </a:solidFill>
-          <a:ln/>
-        </p:spPr>
-      </p:sp>
-      <p:sp>
-        <p:nvSpPr>
-          <p:cNvPr id="24" name="Text 22"/>
-          <p:cNvSpPr txBox="1"/>
-          <p:nvPr/>
-        </p:nvSpPr>
-        <p:spPr>
-          <a:xfrm>
-            <a:off x="2953512" y="4864608"/>
-            <a:ext cx="420624" cy="420624"/>
-          </a:xfrm>
-          <a:prstGeom prst="rect">
-            <a:avLst/>
-          </a:prstGeom>
-          <a:noFill/>
-          <a:ln/>
-        </p:spPr>
-        <p:txBody>
-          <a:bodyPr wrap="square" lIns="0" tIns="0" rIns="0" bIns="0" rtlCol="0" anchor="ctr"/>
-          <a:lstStyle/>
-          <a:p>
-            <a:pPr algn="ctr" indent="0" marL="0">
-              <a:buNone/>
-            </a:pPr>
-            <a:r>
-              <a:rPr lang="en-US" sz="1400" b="1" dirty="0">
-                <a:solidFill>
-                  <a:schemeClr val="bg1"/>
-                </a:solidFill>
-              </a:rPr>
-              <a:t>2</a:t>
-            </a:r>
-            <a:endParaRPr lang="en-US" sz="1400" dirty="0"/>
-          </a:p>
-        </p:txBody>
-      </p:sp>
-      <p:sp>
-        <p:nvSpPr>
-          <p:cNvPr id="25" name="Text 23"/>
-          <p:cNvSpPr txBox="1"/>
-          <p:nvPr/>
-        </p:nvSpPr>
-        <p:spPr>
-          <a:xfrm>
-            <a:off x="3483864" y="4480560"/>
-            <a:ext cx="1325880" cy="1188720"/>
-          </a:xfrm>
-          <a:prstGeom prst="rect">
-            <a:avLst/>
-          </a:prstGeom>
-          <a:noFill/>
-          <a:ln/>
-        </p:spPr>
-        <p:txBody>
-          <a:bodyPr wrap="square" lIns="0" tIns="0" rIns="0" bIns="0" rtlCol="0" anchor="ctr"/>
-          <a:lstStyle/>
-          <a:p>
-            <a:pPr indent="0" marL="0">
-              <a:buNone/>
-            </a:pPr>
-            <a:r>
-              <a:rPr lang="en-US" sz="1400" b="1" dirty="0">
-                <a:solidFill>
-                  <a:schemeClr val="tx1"/>
-                </a:solidFill>
-              </a:rPr>
-              <a:t>KI als Lerncoach</a:t>
-            </a:r>
-            <a:endParaRPr lang="en-US" sz="1400" dirty="0"/>
-          </a:p>
-        </p:txBody>
-      </p:sp>
-      <p:sp>
-        <p:nvSpPr>
-          <p:cNvPr id="26" name="Station 3"/>
-          <p:cNvSpPr/>
-          <p:nvPr/>
-        </p:nvSpPr>
-        <p:spPr>
-          <a:xfrm>
-            <a:off x="5020056" y="4480560"/>
-            <a:ext cx="2103120" cy="1188720"/>
+            <a:off x="8074152" y="4480560"/>
+            <a:ext cx="3611880" cy="1280160"/>
           </a:xfrm>
           <a:prstGeom prst="roundRect">
             <a:avLst>
-              <a:gd name="adj" fmla="val 9231"/>
+              <a:gd name="adj" fmla="val 8571"/>
             </a:avLst>
           </a:prstGeom>
           <a:solidFill>
@@ -17062,23 +17268,39 @@
       </p:sp>
       <p:sp>
         <p:nvSpPr>
-          <p:cNvPr id="27" name="Nummer 3"/>
-          <p:cNvSpPr/>
-          <p:nvPr/>
-        </p:nvSpPr>
-        <p:spPr>
-          <a:xfrm>
-            <a:off x="5221224" y="4864608"/>
-            <a:ext cx="420624" cy="420624"/>
-          </a:xfrm>
-          <a:prstGeom prst="ellipse">
-            <a:avLst/>
-          </a:prstGeom>
-          <a:solidFill>
-            <a:schemeClr val="tx1"/>
-          </a:solidFill>
-          <a:ln/>
-        </p:spPr>
+          <p:cNvPr id="27" name="Text 25"/>
+          <p:cNvSpPr txBox="1"/>
+          <p:nvPr/>
+        </p:nvSpPr>
+        <p:spPr>
+          <a:xfrm>
+            <a:off x="8348472" y="4590288"/>
+            <a:ext cx="3108960" cy="274320"/>
+          </a:xfrm>
+          <a:prstGeom prst="rect">
+            <a:avLst/>
+          </a:prstGeom>
+          <a:noFill/>
+          <a:ln/>
+        </p:spPr>
+        <p:txBody>
+          <a:bodyPr wrap="square" lIns="0" tIns="0" rIns="0" bIns="0" rtlCol="0" anchor="ctr"/>
+          <a:lstStyle/>
+          <a:p>
+            <a:pPr indent="0" marL="0">
+              <a:buNone/>
+            </a:pPr>
+            <a:r>
+              <a:rPr lang="en-US" sz="1000" b="1" spc="200" kern="0" dirty="0">
+                <a:solidFill>
+                  <a:schemeClr val="accent1"/>
+                </a:solidFill>
+              </a:rPr>
+              <a:t>RAUM 3</a:t>
+            </a:r>
+            <a:endParaRPr lang="en-US" sz="1000" dirty="0"/>
+          </a:p>
+        </p:txBody>
       </p:sp>
       <p:sp>
         <p:nvSpPr>
@@ -17088,8 +17310,8 @@
         </p:nvSpPr>
         <p:spPr>
           <a:xfrm>
-            <a:off x="5221224" y="4864608"/>
-            <a:ext cx="420624" cy="420624"/>
+            <a:off x="8348472" y="4846320"/>
+            <a:ext cx="3108960" cy="411480"/>
           </a:xfrm>
           <a:prstGeom prst="rect">
             <a:avLst/>
@@ -17101,18 +17323,18 @@
           <a:bodyPr wrap="square" lIns="0" tIns="0" rIns="0" bIns="0" rtlCol="0" anchor="ctr"/>
           <a:lstStyle/>
           <a:p>
-            <a:pPr algn="ctr" indent="0" marL="0">
-              <a:buNone/>
-            </a:pPr>
-            <a:r>
-              <a:rPr lang="en-US" sz="1400" b="1" dirty="0">
-                <a:solidFill>
-                  <a:schemeClr val="bg1"/>
-                </a:solidFill>
-              </a:rPr>
-              <a:t>3</a:t>
-            </a:r>
-            <a:endParaRPr lang="en-US" sz="1400" dirty="0"/>
+            <a:pPr indent="0" marL="0">
+              <a:buNone/>
+            </a:pPr>
+            <a:r>
+              <a:rPr lang="en-US" sz="1800" b="1" dirty="0">
+                <a:solidFill>
+                  <a:schemeClr val="tx1"/>
+                </a:solidFill>
+              </a:rPr>
+              <a:t>KI gestalten</a:t>
+            </a:r>
+            <a:endParaRPr lang="en-US" sz="1800" dirty="0"/>
           </a:p>
         </p:txBody>
       </p:sp>
@@ -17124,8 +17346,8 @@
         </p:nvSpPr>
         <p:spPr>
           <a:xfrm>
-            <a:off x="5751576" y="4480560"/>
-            <a:ext cx="1325880" cy="1188720"/>
+            <a:off x="8348472" y="5285232"/>
+            <a:ext cx="3200400" cy="320040"/>
           </a:xfrm>
           <a:prstGeom prst="rect">
             <a:avLst/>
@@ -17141,242 +17363,14 @@
               <a:buNone/>
             </a:pPr>
             <a:r>
-              <a:rPr lang="en-US" sz="1400" b="1" dirty="0">
-                <a:solidFill>
-                  <a:schemeClr val="tx1"/>
-                </a:solidFill>
-              </a:rPr>
-              <a:t>KI-Faktencheck</a:t>
-            </a:r>
-            <a:endParaRPr lang="en-US" sz="1400" dirty="0"/>
-          </a:p>
-        </p:txBody>
-      </p:sp>
-      <p:sp>
-        <p:nvSpPr>
-          <p:cNvPr id="30" name="Station 4"/>
-          <p:cNvSpPr/>
-          <p:nvPr/>
-        </p:nvSpPr>
-        <p:spPr>
-          <a:xfrm>
-            <a:off x="7287768" y="4480560"/>
-            <a:ext cx="2103120" cy="1188720"/>
-          </a:xfrm>
-          <a:prstGeom prst="roundRect">
-            <a:avLst>
-              <a:gd name="adj" fmla="val 9231"/>
-            </a:avLst>
-          </a:prstGeom>
-          <a:solidFill>
-            <a:schemeClr val="bg2"/>
-          </a:solidFill>
-          <a:ln/>
-        </p:spPr>
-      </p:sp>
-      <p:sp>
-        <p:nvSpPr>
-          <p:cNvPr id="31" name="Nummer 4"/>
-          <p:cNvSpPr/>
-          <p:nvPr/>
-        </p:nvSpPr>
-        <p:spPr>
-          <a:xfrm>
-            <a:off x="7488936" y="4864608"/>
-            <a:ext cx="420624" cy="420624"/>
-          </a:xfrm>
-          <a:prstGeom prst="ellipse">
-            <a:avLst/>
-          </a:prstGeom>
-          <a:solidFill>
-            <a:schemeClr val="tx1"/>
-          </a:solidFill>
-          <a:ln/>
-        </p:spPr>
-      </p:sp>
-      <p:sp>
-        <p:nvSpPr>
-          <p:cNvPr id="32" name="Text 30"/>
-          <p:cNvSpPr txBox="1"/>
-          <p:nvPr/>
-        </p:nvSpPr>
-        <p:spPr>
-          <a:xfrm>
-            <a:off x="7488936" y="4864608"/>
-            <a:ext cx="420624" cy="420624"/>
-          </a:xfrm>
-          <a:prstGeom prst="rect">
-            <a:avLst/>
-          </a:prstGeom>
-          <a:noFill/>
-          <a:ln/>
-        </p:spPr>
-        <p:txBody>
-          <a:bodyPr wrap="square" lIns="0" tIns="0" rIns="0" bIns="0" rtlCol="0" anchor="ctr"/>
-          <a:lstStyle/>
-          <a:p>
-            <a:pPr algn="ctr" indent="0" marL="0">
-              <a:buNone/>
-            </a:pPr>
-            <a:r>
-              <a:rPr lang="en-US" sz="1400" b="1" dirty="0">
-                <a:solidFill>
-                  <a:schemeClr val="bg1"/>
-                </a:solidFill>
-              </a:rPr>
-              <a:t>4</a:t>
-            </a:r>
-            <a:endParaRPr lang="en-US" sz="1400" dirty="0"/>
-          </a:p>
-        </p:txBody>
-      </p:sp>
-      <p:sp>
-        <p:nvSpPr>
-          <p:cNvPr id="33" name="Text 31"/>
-          <p:cNvSpPr txBox="1"/>
-          <p:nvPr/>
-        </p:nvSpPr>
-        <p:spPr>
-          <a:xfrm>
-            <a:off x="8019288" y="4480560"/>
-            <a:ext cx="1325880" cy="1188720"/>
-          </a:xfrm>
-          <a:prstGeom prst="rect">
-            <a:avLst/>
-          </a:prstGeom>
-          <a:noFill/>
-          <a:ln/>
-        </p:spPr>
-        <p:txBody>
-          <a:bodyPr wrap="square" lIns="0" tIns="0" rIns="0" bIns="0" rtlCol="0" anchor="ctr"/>
-          <a:lstStyle/>
-          <a:p>
-            <a:pPr indent="0" marL="0">
-              <a:buNone/>
-            </a:pPr>
-            <a:r>
-              <a:rPr lang="en-US" sz="1400" b="1" dirty="0">
-                <a:solidFill>
-                  <a:schemeClr val="tx1"/>
-                </a:solidFill>
-              </a:rPr>
-              <a:t>Deepfake Detective</a:t>
-            </a:r>
-            <a:endParaRPr lang="en-US" sz="1400" dirty="0"/>
-          </a:p>
-        </p:txBody>
-      </p:sp>
-      <p:sp>
-        <p:nvSpPr>
-          <p:cNvPr id="34" name="Station 5"/>
-          <p:cNvSpPr/>
-          <p:nvPr/>
-        </p:nvSpPr>
-        <p:spPr>
-          <a:xfrm>
-            <a:off x="9555480" y="4480560"/>
-            <a:ext cx="2103120" cy="1188720"/>
-          </a:xfrm>
-          <a:prstGeom prst="roundRect">
-            <a:avLst>
-              <a:gd name="adj" fmla="val 9231"/>
-            </a:avLst>
-          </a:prstGeom>
-          <a:solidFill>
-            <a:schemeClr val="bg2"/>
-          </a:solidFill>
-          <a:ln/>
-        </p:spPr>
-      </p:sp>
-      <p:sp>
-        <p:nvSpPr>
-          <p:cNvPr id="35" name="Nummer 5"/>
-          <p:cNvSpPr/>
-          <p:nvPr/>
-        </p:nvSpPr>
-        <p:spPr>
-          <a:xfrm>
-            <a:off x="9756648" y="4864608"/>
-            <a:ext cx="420624" cy="420624"/>
-          </a:xfrm>
-          <a:prstGeom prst="ellipse">
-            <a:avLst/>
-          </a:prstGeom>
-          <a:solidFill>
-            <a:schemeClr val="tx1"/>
-          </a:solidFill>
-          <a:ln/>
-        </p:spPr>
-      </p:sp>
-      <p:sp>
-        <p:nvSpPr>
-          <p:cNvPr id="36" name="Text 34"/>
-          <p:cNvSpPr txBox="1"/>
-          <p:nvPr/>
-        </p:nvSpPr>
-        <p:spPr>
-          <a:xfrm>
-            <a:off x="9756648" y="4864608"/>
-            <a:ext cx="420624" cy="420624"/>
-          </a:xfrm>
-          <a:prstGeom prst="rect">
-            <a:avLst/>
-          </a:prstGeom>
-          <a:noFill/>
-          <a:ln/>
-        </p:spPr>
-        <p:txBody>
-          <a:bodyPr wrap="square" lIns="0" tIns="0" rIns="0" bIns="0" rtlCol="0" anchor="ctr"/>
-          <a:lstStyle/>
-          <a:p>
-            <a:pPr algn="ctr" indent="0" marL="0">
-              <a:buNone/>
-            </a:pPr>
-            <a:r>
-              <a:rPr lang="en-US" sz="1400" b="1" dirty="0">
-                <a:solidFill>
-                  <a:schemeClr val="bg1"/>
-                </a:solidFill>
-              </a:rPr>
-              <a:t>5</a:t>
-            </a:r>
-            <a:endParaRPr lang="en-US" sz="1400" dirty="0"/>
-          </a:p>
-        </p:txBody>
-      </p:sp>
-      <p:sp>
-        <p:nvSpPr>
-          <p:cNvPr id="37" name="Text 35"/>
-          <p:cNvSpPr txBox="1"/>
-          <p:nvPr/>
-        </p:nvSpPr>
-        <p:spPr>
-          <a:xfrm>
-            <a:off x="10287000" y="4480560"/>
-            <a:ext cx="1325880" cy="1188720"/>
-          </a:xfrm>
-          <a:prstGeom prst="rect">
-            <a:avLst/>
-          </a:prstGeom>
-          <a:noFill/>
-          <a:ln/>
-        </p:spPr>
-        <p:txBody>
-          <a:bodyPr wrap="square" lIns="0" tIns="0" rIns="0" bIns="0" rtlCol="0" anchor="ctr"/>
-          <a:lstStyle/>
-          <a:p>
-            <a:pPr indent="0" marL="0">
-              <a:buNone/>
-            </a:pPr>
-            <a:r>
-              <a:rPr lang="en-US" sz="1400" b="1" dirty="0">
-                <a:solidFill>
-                  <a:schemeClr val="tx1"/>
+              <a:rPr lang="en-US" sz="1200" dirty="0">
+                <a:solidFill>
+                  <a:schemeClr val="tx2"/>
                 </a:solidFill>
               </a:rPr>
               <a:t>Build your AI</a:t>
             </a:r>
-            <a:endParaRPr lang="en-US" sz="1400" dirty="0"/>
+            <a:endParaRPr lang="en-US" sz="1200" dirty="0"/>
           </a:p>
         </p:txBody>
       </p:sp>

--- a/ki-tag-gymnasium-sued/KI-Tag_Gymnasium-Sued_Impulsvortrag.pptx
+++ b/ki-tag-gymnasium-sued/KI-Tag_Gymnasium-Sued_Impulsvortrag.pptx
@@ -31,9 +31,19 @@
     <p:sldId id="279" r:id="rId25"/>
     <p:sldId id="280" r:id="rId26"/>
     <p:sldId id="281" r:id="rId27"/>
+    <p:sldId id="282" r:id="rId28"/>
+    <p:sldId id="283" r:id="rId29"/>
+    <p:sldId id="284" r:id="rId30"/>
+    <p:sldId id="285" r:id="rId31"/>
+    <p:sldId id="286" r:id="rId32"/>
+    <p:sldId id="287" r:id="rId33"/>
+    <p:sldId id="288" r:id="rId34"/>
+    <p:sldId id="289" r:id="rId35"/>
+    <p:sldId id="290" r:id="rId36"/>
+    <p:sldId id="291" r:id="rId37"/>
   </p:sldIdLst>
   <p:notesMasterIdLst>
-    <p:notesMasterId r:id="rId28"/>
+    <p:notesMasterId r:id="rId38"/>
   </p:notesMasterIdLst>
   <p:sldSz cx="12192000" cy="6858000"/>
   <p:notesSz cx="6858000" cy="12192000"/>
@@ -132,7 +142,7 @@
   <p:extLst>
     <p:ext uri="{521415D9-36F7-43E2-AB2F-B90AF26B5E84}">
       <p14:sectionLst xmlns:p14="http://schemas.microsoft.com/office/powerpoint/2010/main">
-        <p14:section name="Einstieg" id="{53cdd3b0-32e9-0f23-0f20-f6ee48dee400}">
+        <p14:section name="Einstieg" id="{c37fea8b-14f8-e11f-5b3b-c6d5cda42edb}">
           <p14:sldIdLst>
             <p14:sldId id="256"/>
             <p14:sldId id="257"/>
@@ -141,7 +151,7 @@
             <p14:sldId id="260"/>
           </p14:sldIdLst>
         </p14:section>
-        <p14:section name="Staunen" id="{8a2f8613-42c9-9d8b-bda1-209012ad4dad}">
+        <p14:section name="Staunen" id="{b3c63ead-a789-9ffe-bb4a-5e05aa5badbf}">
           <p14:sldIdLst>
             <p14:sldId id="261"/>
             <p14:sldId id="262"/>
@@ -152,7 +162,7 @@
             <p14:sldId id="267"/>
           </p14:sldIdLst>
         </p14:section>
-        <p14:section name="Verstehen" id="{2acb20db-50e1-992f-5dc9-43e2bc000ead}">
+        <p14:section name="Verstehen" id="{9688ce80-a621-f75d-21ba-91cc22d79022}">
           <p14:sldIdLst>
             <p14:sldId id="268"/>
             <p14:sldId id="269"/>
@@ -160,14 +170,14 @@
             <p14:sldId id="271"/>
           </p14:sldIdLst>
         </p14:section>
-        <p14:section name="Chancen" id="{7f0f55fa-0f12-e6ab-0d46-12a8c2ae2bad}">
+        <p14:section name="Chancen" id="{933366f2-85bf-0d1b-11df-a3ab26f23b7c}">
           <p14:sldIdLst>
             <p14:sldId id="272"/>
             <p14:sldId id="273"/>
             <p14:sldId id="274"/>
           </p14:sldIdLst>
         </p14:section>
-        <p14:section name="Risiken &amp; Verantwortung" id="{2f34c55c-e1e6-dcd4-e126-30443d2a9c82}">
+        <p14:section name="Risiken &amp; Verantwortung" id="{9e33f848-cd79-205a-47b7-4bc986025614}">
           <p14:sldIdLst>
             <p14:sldId id="275"/>
             <p14:sldId id="276"/>
@@ -176,10 +186,24 @@
             <p14:sldId id="279"/>
           </p14:sldIdLst>
         </p14:section>
-        <p14:section name="Mission" id="{5b4a9187-c6fa-ff1d-80f3-98f0586826b9}">
+        <p14:section name="Mission" id="{81f69031-7a49-28c6-01da-f8d4866615a2}">
           <p14:sldIdLst>
             <p14:sldId id="280"/>
             <p14:sldId id="281"/>
+          </p14:sldIdLst>
+        </p14:section>
+        <p14:section name="Optionale Folien" id="{be0cf37c-6093-2b17-de96-0c8e5f776f9f}">
+          <p14:sldIdLst>
+            <p14:sldId id="282"/>
+            <p14:sldId id="283"/>
+            <p14:sldId id="284"/>
+            <p14:sldId id="285"/>
+            <p14:sldId id="286"/>
+            <p14:sldId id="287"/>
+            <p14:sldId id="288"/>
+            <p14:sldId id="289"/>
+            <p14:sldId id="290"/>
+            <p14:sldId id="291"/>
           </p14:sldIdLst>
         </p14:section>
       </p14:sectionLst>
@@ -1789,7 +1813,7 @@
           <a:p>
             <a:r>
               <a:rPr lang="en-US" dirty="0"/>
-              <a:t>Ca. 1,5 Min. Beide Texte vorlesen (gerne mit verstellter Stimme). Per Handzeichen abstimmen lassen: Wer glaubt A ist von der KI? Wer B? Dann weiterklicken – noch nicht auflösen.</a:t>
+              <a:t>Ca. 1,5 Min. Beide Nachrichten vorlesen. Per Handzeichen abstimmen lassen: Wer glaubt, A ist von der KI? Wer B? Die meisten tippen auf B, weil sie förmlicher klingt. Dann weiterklicken – noch nicht auflösen.</a:t>
             </a:r>
             <a:endParaRPr lang="en-US" dirty="0"/>
           </a:p>
@@ -2447,6 +2471,270 @@
 </p:notes>
 </file>
 
+<file path=ppt/notesSlides/notesSlide27.xml><?xml version="1.0" encoding="utf-8"?>
+<p:notes xmlns:a="http://schemas.openxmlformats.org/drawingml/2006/main" xmlns:r="http://schemas.openxmlformats.org/officeDocument/2006/relationships" xmlns:p="http://schemas.openxmlformats.org/presentationml/2006/main">
+  <p:cSld>
+    <p:spTree>
+      <p:nvGrpSpPr>
+        <p:cNvPr id="1" name=""/>
+        <p:cNvGrpSpPr/>
+        <p:nvPr/>
+      </p:nvGrpSpPr>
+      <p:grpSpPr>
+        <a:xfrm>
+          <a:off x="0" y="0"/>
+          <a:ext cx="0" cy="0"/>
+          <a:chOff x="0" y="0"/>
+          <a:chExt cx="0" cy="0"/>
+        </a:xfrm>
+      </p:grpSpPr>
+      <p:sp>
+        <p:nvSpPr>
+          <p:cNvPr id="2" name="Slide Image Placeholder 1"/>
+          <p:cNvSpPr>
+            <a:spLocks noGrp="1" noRot="1" noChangeAspect="1"/>
+          </p:cNvSpPr>
+          <p:nvPr>
+            <p:ph type="sldImg"/>
+          </p:nvPr>
+        </p:nvSpPr>
+        <p:spPr/>
+      </p:sp>
+      <p:sp>
+        <p:nvSpPr>
+          <p:cNvPr id="3" name="Notes Placeholder 2"/>
+          <p:cNvSpPr>
+            <a:spLocks noGrp="1"/>
+          </p:cNvSpPr>
+          <p:nvPr>
+            <p:ph type="body" idx="1"/>
+          </p:nvPr>
+        </p:nvSpPr>
+        <p:spPr/>
+        <p:txBody>
+          <a:bodyPr/>
+          <a:lstStyle/>
+          <a:p>
+            <a:r>
+              <a:rPr lang="en-US" dirty="0"/>
+              <a:t>Diese Folien sind Bausteine. Jede Folie trägt unten rechts einen Hinweis, zu welchem Kapitel sie passt. Zum Einbauen einfach an die passende Stelle verschieben – oder für Fragen am Ende in der Hinterhand behalten.</a:t>
+            </a:r>
+            <a:endParaRPr lang="en-US" dirty="0"/>
+          </a:p>
+        </p:txBody>
+      </p:sp>
+      <p:sp>
+        <p:nvSpPr>
+          <p:cNvPr id="4" name="Slide Number Placeholder 3"/>
+          <p:cNvSpPr>
+            <a:spLocks noGrp="1"/>
+          </p:cNvSpPr>
+          <p:nvPr>
+            <p:ph type="sldNum" sz="quarter" idx="10"/>
+          </p:nvPr>
+        </p:nvSpPr>
+        <p:spPr/>
+        <p:txBody>
+          <a:bodyPr/>
+          <a:lstStyle/>
+          <a:p>
+            <a:fld id="{F7021451-1387-4CA6-816F-3879F97B5CBC}" type="slidenum">
+              <a:rPr lang="en-US"/>
+              <a:t>27</a:t>
+            </a:fld>
+            <a:endParaRPr lang="en-US"/>
+          </a:p>
+        </p:txBody>
+      </p:sp>
+    </p:spTree>
+    <p:extLst>
+      <p:ext uri="{BB962C8B-B14F-4D97-AF65-F5344CB8AC3E}">
+        <p14:creationId xmlns:p14="http://schemas.microsoft.com/office/powerpoint/2010/main" val="1024086991"/>
+      </p:ext>
+    </p:extLst>
+  </p:cSld>
+  <p:clrMapOvr>
+    <a:masterClrMapping/>
+  </p:clrMapOvr>
+</p:notes>
+</file>
+
+<file path=ppt/notesSlides/notesSlide28.xml><?xml version="1.0" encoding="utf-8"?>
+<p:notes xmlns:a="http://schemas.openxmlformats.org/drawingml/2006/main" xmlns:r="http://schemas.openxmlformats.org/officeDocument/2006/relationships" xmlns:p="http://schemas.openxmlformats.org/presentationml/2006/main">
+  <p:cSld>
+    <p:spTree>
+      <p:nvGrpSpPr>
+        <p:cNvPr id="1" name=""/>
+        <p:cNvGrpSpPr/>
+        <p:nvPr/>
+      </p:nvGrpSpPr>
+      <p:grpSpPr>
+        <a:xfrm>
+          <a:off x="0" y="0"/>
+          <a:ext cx="0" cy="0"/>
+          <a:chOff x="0" y="0"/>
+          <a:chExt cx="0" cy="0"/>
+        </a:xfrm>
+      </p:grpSpPr>
+      <p:sp>
+        <p:nvSpPr>
+          <p:cNvPr id="2" name="Slide Image Placeholder 1"/>
+          <p:cNvSpPr>
+            <a:spLocks noGrp="1" noRot="1" noChangeAspect="1"/>
+          </p:cNvSpPr>
+          <p:nvPr>
+            <p:ph type="sldImg"/>
+          </p:nvPr>
+        </p:nvSpPr>
+        <p:spPr/>
+      </p:sp>
+      <p:sp>
+        <p:nvSpPr>
+          <p:cNvPr id="3" name="Notes Placeholder 2"/>
+          <p:cNvSpPr>
+            <a:spLocks noGrp="1"/>
+          </p:cNvSpPr>
+          <p:nvPr>
+            <p:ph type="body" idx="1"/>
+          </p:nvPr>
+        </p:nvSpPr>
+        <p:spPr/>
+        <p:txBody>
+          <a:bodyPr/>
+          <a:lstStyle/>
+          <a:p>
+            <a:r>
+              <a:rPr lang="en-US" dirty="0"/>
+              <a:t>Ca. 2 Min. Passt nach ‚KI ist längst in deinem Alltag‘. Botschaft: Die Idee ist über 70 Jahre alt – neu ist, wie schnell es seit 2022 geht. Frage: Was glaubt ihr, steht hier 2030?</a:t>
+            </a:r>
+            <a:endParaRPr lang="en-US" dirty="0"/>
+          </a:p>
+        </p:txBody>
+      </p:sp>
+      <p:sp>
+        <p:nvSpPr>
+          <p:cNvPr id="4" name="Slide Number Placeholder 3"/>
+          <p:cNvSpPr>
+            <a:spLocks noGrp="1"/>
+          </p:cNvSpPr>
+          <p:nvPr>
+            <p:ph type="sldNum" sz="quarter" idx="10"/>
+          </p:nvPr>
+        </p:nvSpPr>
+        <p:spPr/>
+        <p:txBody>
+          <a:bodyPr/>
+          <a:lstStyle/>
+          <a:p>
+            <a:fld id="{F7021451-1387-4CA6-816F-3879F97B5CBC}" type="slidenum">
+              <a:rPr lang="en-US"/>
+              <a:t>28</a:t>
+            </a:fld>
+            <a:endParaRPr lang="en-US"/>
+          </a:p>
+        </p:txBody>
+      </p:sp>
+    </p:spTree>
+    <p:extLst>
+      <p:ext uri="{BB962C8B-B14F-4D97-AF65-F5344CB8AC3E}">
+        <p14:creationId xmlns:p14="http://schemas.microsoft.com/office/powerpoint/2010/main" val="1024086991"/>
+      </p:ext>
+    </p:extLst>
+  </p:cSld>
+  <p:clrMapOvr>
+    <a:masterClrMapping/>
+  </p:clrMapOvr>
+</p:notes>
+</file>
+
+<file path=ppt/notesSlides/notesSlide29.xml><?xml version="1.0" encoding="utf-8"?>
+<p:notes xmlns:a="http://schemas.openxmlformats.org/drawingml/2006/main" xmlns:r="http://schemas.openxmlformats.org/officeDocument/2006/relationships" xmlns:p="http://schemas.openxmlformats.org/presentationml/2006/main">
+  <p:cSld>
+    <p:spTree>
+      <p:nvGrpSpPr>
+        <p:cNvPr id="1" name=""/>
+        <p:cNvGrpSpPr/>
+        <p:nvPr/>
+      </p:nvGrpSpPr>
+      <p:grpSpPr>
+        <a:xfrm>
+          <a:off x="0" y="0"/>
+          <a:ext cx="0" cy="0"/>
+          <a:chOff x="0" y="0"/>
+          <a:chExt cx="0" cy="0"/>
+        </a:xfrm>
+      </p:grpSpPr>
+      <p:sp>
+        <p:nvSpPr>
+          <p:cNvPr id="2" name="Slide Image Placeholder 1"/>
+          <p:cNvSpPr>
+            <a:spLocks noGrp="1" noRot="1" noChangeAspect="1"/>
+          </p:cNvSpPr>
+          <p:nvPr>
+            <p:ph type="sldImg"/>
+          </p:nvPr>
+        </p:nvSpPr>
+        <p:spPr/>
+      </p:sp>
+      <p:sp>
+        <p:nvSpPr>
+          <p:cNvPr id="3" name="Notes Placeholder 2"/>
+          <p:cNvSpPr>
+            <a:spLocks noGrp="1"/>
+          </p:cNvSpPr>
+          <p:nvPr>
+            <p:ph type="body" idx="1"/>
+          </p:nvPr>
+        </p:nvSpPr>
+        <p:spPr/>
+        <p:txBody>
+          <a:bodyPr/>
+          <a:lstStyle/>
+          <a:p>
+            <a:r>
+              <a:rPr lang="en-US" dirty="0"/>
+              <a:t>Ca. 2 Min. Passt vor ‚Wie macht die KI das?‘. Variante zum Mitmachen: Begriffe zuerst ohne Erklärung zeigen und die Klasse raten lassen.</a:t>
+            </a:r>
+            <a:endParaRPr lang="en-US" dirty="0"/>
+          </a:p>
+        </p:txBody>
+      </p:sp>
+      <p:sp>
+        <p:nvSpPr>
+          <p:cNvPr id="4" name="Slide Number Placeholder 3"/>
+          <p:cNvSpPr>
+            <a:spLocks noGrp="1"/>
+          </p:cNvSpPr>
+          <p:nvPr>
+            <p:ph type="sldNum" sz="quarter" idx="10"/>
+          </p:nvPr>
+        </p:nvSpPr>
+        <p:spPr/>
+        <p:txBody>
+          <a:bodyPr/>
+          <a:lstStyle/>
+          <a:p>
+            <a:fld id="{F7021451-1387-4CA6-816F-3879F97B5CBC}" type="slidenum">
+              <a:rPr lang="en-US"/>
+              <a:t>29</a:t>
+            </a:fld>
+            <a:endParaRPr lang="en-US"/>
+          </a:p>
+        </p:txBody>
+      </p:sp>
+    </p:spTree>
+    <p:extLst>
+      <p:ext uri="{BB962C8B-B14F-4D97-AF65-F5344CB8AC3E}">
+        <p14:creationId xmlns:p14="http://schemas.microsoft.com/office/powerpoint/2010/main" val="1024086991"/>
+      </p:ext>
+    </p:extLst>
+  </p:cSld>
+  <p:clrMapOvr>
+    <a:masterClrMapping/>
+  </p:clrMapOvr>
+</p:notes>
+</file>
+
 <file path=ppt/notesSlides/notesSlide3.xml><?xml version="1.0" encoding="utf-8"?>
 <p:notes xmlns:a="http://schemas.openxmlformats.org/drawingml/2006/main" xmlns:r="http://schemas.openxmlformats.org/officeDocument/2006/relationships" xmlns:p="http://schemas.openxmlformats.org/presentationml/2006/main">
   <p:cSld>
@@ -2493,7 +2781,7 @@
           <a:p>
             <a:r>
               <a:rPr lang="en-US" dirty="0"/>
-              <a:t>Ca. 1 Min. Auflösen: Beide Texte wurden für diese Präsentation mit KI erstellt. Frage in den Raum: Woran hättet ihr es merken können? (Meist gar nicht.) Überleitung: Heute schauen wir, was KI kann, wie sie funktioniert – und wo ihr aufpassen müsst.</a:t>
+              <a:t>Ca. 1 Min. Auflösen: Beide Nachrichten wurden für diese Präsentation mit KI erstellt. Frage in den Raum: Woran hättet ihr es merken können? (Meist gar nicht.) Überleitung: Heute schauen wir, was KI kann, wie sie funktioniert – und wo ihr aufpassen müsst.</a:t>
             </a:r>
             <a:endParaRPr lang="en-US" dirty="0"/>
           </a:p>
@@ -2517,6 +2805,622 @@
             <a:fld id="{F7021451-1387-4CA6-816F-3879F97B5CBC}" type="slidenum">
               <a:rPr lang="en-US"/>
               <a:t>3</a:t>
+            </a:fld>
+            <a:endParaRPr lang="en-US"/>
+          </a:p>
+        </p:txBody>
+      </p:sp>
+    </p:spTree>
+    <p:extLst>
+      <p:ext uri="{BB962C8B-B14F-4D97-AF65-F5344CB8AC3E}">
+        <p14:creationId xmlns:p14="http://schemas.microsoft.com/office/powerpoint/2010/main" val="1024086991"/>
+      </p:ext>
+    </p:extLst>
+  </p:cSld>
+  <p:clrMapOvr>
+    <a:masterClrMapping/>
+  </p:clrMapOvr>
+</p:notes>
+</file>
+
+<file path=ppt/notesSlides/notesSlide30.xml><?xml version="1.0" encoding="utf-8"?>
+<p:notes xmlns:a="http://schemas.openxmlformats.org/drawingml/2006/main" xmlns:r="http://schemas.openxmlformats.org/officeDocument/2006/relationships" xmlns:p="http://schemas.openxmlformats.org/presentationml/2006/main">
+  <p:cSld>
+    <p:spTree>
+      <p:nvGrpSpPr>
+        <p:cNvPr id="1" name=""/>
+        <p:cNvGrpSpPr/>
+        <p:nvPr/>
+      </p:nvGrpSpPr>
+      <p:grpSpPr>
+        <a:xfrm>
+          <a:off x="0" y="0"/>
+          <a:ext cx="0" cy="0"/>
+          <a:chOff x="0" y="0"/>
+          <a:chExt cx="0" cy="0"/>
+        </a:xfrm>
+      </p:grpSpPr>
+      <p:sp>
+        <p:nvSpPr>
+          <p:cNvPr id="2" name="Slide Image Placeholder 1"/>
+          <p:cNvSpPr>
+            <a:spLocks noGrp="1" noRot="1" noChangeAspect="1"/>
+          </p:cNvSpPr>
+          <p:nvPr>
+            <p:ph type="sldImg"/>
+          </p:nvPr>
+        </p:nvSpPr>
+        <p:spPr/>
+      </p:sp>
+      <p:sp>
+        <p:nvSpPr>
+          <p:cNvPr id="3" name="Notes Placeholder 2"/>
+          <p:cNvSpPr>
+            <a:spLocks noGrp="1"/>
+          </p:cNvSpPr>
+          <p:nvPr>
+            <p:ph type="body" idx="1"/>
+          </p:nvPr>
+        </p:nvSpPr>
+        <p:spPr/>
+        <p:txBody>
+          <a:bodyPr/>
+          <a:lstStyle/>
+          <a:p>
+            <a:r>
+              <a:rPr lang="en-US" dirty="0"/>
+              <a:t>Ca. 2 Min. Passt nach der Auflösung zum Eiffelturm. Frage an die Klasse: Was davon überrascht euch? Wichtig: ‚(noch)‘ – die Liste links wird jedes Jahr länger, die Verantwortung bleibt beim Menschen.</a:t>
+            </a:r>
+            <a:endParaRPr lang="en-US" dirty="0"/>
+          </a:p>
+        </p:txBody>
+      </p:sp>
+      <p:sp>
+        <p:nvSpPr>
+          <p:cNvPr id="4" name="Slide Number Placeholder 3"/>
+          <p:cNvSpPr>
+            <a:spLocks noGrp="1"/>
+          </p:cNvSpPr>
+          <p:nvPr>
+            <p:ph type="sldNum" sz="quarter" idx="10"/>
+          </p:nvPr>
+        </p:nvSpPr>
+        <p:spPr/>
+        <p:txBody>
+          <a:bodyPr/>
+          <a:lstStyle/>
+          <a:p>
+            <a:fld id="{F7021451-1387-4CA6-816F-3879F97B5CBC}" type="slidenum">
+              <a:rPr lang="en-US"/>
+              <a:t>30</a:t>
+            </a:fld>
+            <a:endParaRPr lang="en-US"/>
+          </a:p>
+        </p:txBody>
+      </p:sp>
+    </p:spTree>
+    <p:extLst>
+      <p:ext uri="{BB962C8B-B14F-4D97-AF65-F5344CB8AC3E}">
+        <p14:creationId xmlns:p14="http://schemas.microsoft.com/office/powerpoint/2010/main" val="1024086991"/>
+      </p:ext>
+    </p:extLst>
+  </p:cSld>
+  <p:clrMapOvr>
+    <a:masterClrMapping/>
+  </p:clrMapOvr>
+</p:notes>
+</file>
+
+<file path=ppt/notesSlides/notesSlide31.xml><?xml version="1.0" encoding="utf-8"?>
+<p:notes xmlns:a="http://schemas.openxmlformats.org/drawingml/2006/main" xmlns:r="http://schemas.openxmlformats.org/officeDocument/2006/relationships" xmlns:p="http://schemas.openxmlformats.org/presentationml/2006/main">
+  <p:cSld>
+    <p:spTree>
+      <p:nvGrpSpPr>
+        <p:cNvPr id="1" name=""/>
+        <p:cNvGrpSpPr/>
+        <p:nvPr/>
+      </p:nvGrpSpPr>
+      <p:grpSpPr>
+        <a:xfrm>
+          <a:off x="0" y="0"/>
+          <a:ext cx="0" cy="0"/>
+          <a:chOff x="0" y="0"/>
+          <a:chExt cx="0" cy="0"/>
+        </a:xfrm>
+      </p:grpSpPr>
+      <p:sp>
+        <p:nvSpPr>
+          <p:cNvPr id="2" name="Slide Image Placeholder 1"/>
+          <p:cNvSpPr>
+            <a:spLocks noGrp="1" noRot="1" noChangeAspect="1"/>
+          </p:cNvSpPr>
+          <p:nvPr>
+            <p:ph type="sldImg"/>
+          </p:nvPr>
+        </p:nvSpPr>
+        <p:spPr/>
+      </p:sp>
+      <p:sp>
+        <p:nvSpPr>
+          <p:cNvPr id="3" name="Notes Placeholder 2"/>
+          <p:cNvSpPr>
+            <a:spLocks noGrp="1"/>
+          </p:cNvSpPr>
+          <p:nvPr>
+            <p:ph type="body" idx="1"/>
+          </p:nvPr>
+        </p:nvSpPr>
+        <p:spPr/>
+        <p:txBody>
+          <a:bodyPr/>
+          <a:lstStyle/>
+          <a:p>
+            <a:r>
+              <a:rPr lang="en-US" dirty="0"/>
+              <a:t>Ca. 2 Min. Passt nach ‚Spickzettel oder Lerncoach?‘. Die Farben zeigen, welcher Teil des Prompts zu welchem Baustein gehört. Live-Variante: beide Prompts eintippen und die Ergebnisse vergleichen.</a:t>
+            </a:r>
+            <a:endParaRPr lang="en-US" dirty="0"/>
+          </a:p>
+        </p:txBody>
+      </p:sp>
+      <p:sp>
+        <p:nvSpPr>
+          <p:cNvPr id="4" name="Slide Number Placeholder 3"/>
+          <p:cNvSpPr>
+            <a:spLocks noGrp="1"/>
+          </p:cNvSpPr>
+          <p:nvPr>
+            <p:ph type="sldNum" sz="quarter" idx="10"/>
+          </p:nvPr>
+        </p:nvSpPr>
+        <p:spPr/>
+        <p:txBody>
+          <a:bodyPr/>
+          <a:lstStyle/>
+          <a:p>
+            <a:fld id="{F7021451-1387-4CA6-816F-3879F97B5CBC}" type="slidenum">
+              <a:rPr lang="en-US"/>
+              <a:t>31</a:t>
+            </a:fld>
+            <a:endParaRPr lang="en-US"/>
+          </a:p>
+        </p:txBody>
+      </p:sp>
+    </p:spTree>
+    <p:extLst>
+      <p:ext uri="{BB962C8B-B14F-4D97-AF65-F5344CB8AC3E}">
+        <p14:creationId xmlns:p14="http://schemas.microsoft.com/office/powerpoint/2010/main" val="1024086991"/>
+      </p:ext>
+    </p:extLst>
+  </p:cSld>
+  <p:clrMapOvr>
+    <a:masterClrMapping/>
+  </p:clrMapOvr>
+</p:notes>
+</file>
+
+<file path=ppt/notesSlides/notesSlide32.xml><?xml version="1.0" encoding="utf-8"?>
+<p:notes xmlns:a="http://schemas.openxmlformats.org/drawingml/2006/main" xmlns:r="http://schemas.openxmlformats.org/officeDocument/2006/relationships" xmlns:p="http://schemas.openxmlformats.org/presentationml/2006/main">
+  <p:cSld>
+    <p:spTree>
+      <p:nvGrpSpPr>
+        <p:cNvPr id="1" name=""/>
+        <p:cNvGrpSpPr/>
+        <p:nvPr/>
+      </p:nvGrpSpPr>
+      <p:grpSpPr>
+        <a:xfrm>
+          <a:off x="0" y="0"/>
+          <a:ext cx="0" cy="0"/>
+          <a:chOff x="0" y="0"/>
+          <a:chExt cx="0" cy="0"/>
+        </a:xfrm>
+      </p:grpSpPr>
+      <p:sp>
+        <p:nvSpPr>
+          <p:cNvPr id="2" name="Slide Image Placeholder 1"/>
+          <p:cNvSpPr>
+            <a:spLocks noGrp="1" noRot="1" noChangeAspect="1"/>
+          </p:cNvSpPr>
+          <p:nvPr>
+            <p:ph type="sldImg"/>
+          </p:nvPr>
+        </p:nvSpPr>
+        <p:spPr/>
+      </p:sp>
+      <p:sp>
+        <p:nvSpPr>
+          <p:cNvPr id="3" name="Notes Placeholder 2"/>
+          <p:cNvSpPr>
+            <a:spLocks noGrp="1"/>
+          </p:cNvSpPr>
+          <p:nvPr>
+            <p:ph type="body" idx="1"/>
+          </p:nvPr>
+        </p:nvSpPr>
+        <p:spPr/>
+        <p:txBody>
+          <a:bodyPr/>
+          <a:lstStyle/>
+          <a:p>
+            <a:r>
+              <a:rPr lang="en-US" dirty="0"/>
+              <a:t>Ca. 2 Min. Passt zu ‚Was im Beruf 2030 zählt‘. Muster in allen Beispielen: KI übernimmt Routine, der Mensch entscheidet. Zwei, drei Berufswünsche aus der Klasse aufgreifen.</a:t>
+            </a:r>
+            <a:endParaRPr lang="en-US" dirty="0"/>
+          </a:p>
+        </p:txBody>
+      </p:sp>
+      <p:sp>
+        <p:nvSpPr>
+          <p:cNvPr id="4" name="Slide Number Placeholder 3"/>
+          <p:cNvSpPr>
+            <a:spLocks noGrp="1"/>
+          </p:cNvSpPr>
+          <p:nvPr>
+            <p:ph type="sldNum" sz="quarter" idx="10"/>
+          </p:nvPr>
+        </p:nvSpPr>
+        <p:spPr/>
+        <p:txBody>
+          <a:bodyPr/>
+          <a:lstStyle/>
+          <a:p>
+            <a:fld id="{F7021451-1387-4CA6-816F-3879F97B5CBC}" type="slidenum">
+              <a:rPr lang="en-US"/>
+              <a:t>32</a:t>
+            </a:fld>
+            <a:endParaRPr lang="en-US"/>
+          </a:p>
+        </p:txBody>
+      </p:sp>
+    </p:spTree>
+    <p:extLst>
+      <p:ext uri="{BB962C8B-B14F-4D97-AF65-F5344CB8AC3E}">
+        <p14:creationId xmlns:p14="http://schemas.microsoft.com/office/powerpoint/2010/main" val="1024086991"/>
+      </p:ext>
+    </p:extLst>
+  </p:cSld>
+  <p:clrMapOvr>
+    <a:masterClrMapping/>
+  </p:clrMapOvr>
+</p:notes>
+</file>
+
+<file path=ppt/notesSlides/notesSlide33.xml><?xml version="1.0" encoding="utf-8"?>
+<p:notes xmlns:a="http://schemas.openxmlformats.org/drawingml/2006/main" xmlns:r="http://schemas.openxmlformats.org/officeDocument/2006/relationships" xmlns:p="http://schemas.openxmlformats.org/presentationml/2006/main">
+  <p:cSld>
+    <p:spTree>
+      <p:nvGrpSpPr>
+        <p:cNvPr id="1" name=""/>
+        <p:cNvGrpSpPr/>
+        <p:nvPr/>
+      </p:nvGrpSpPr>
+      <p:grpSpPr>
+        <a:xfrm>
+          <a:off x="0" y="0"/>
+          <a:ext cx="0" cy="0"/>
+          <a:chOff x="0" y="0"/>
+          <a:chExt cx="0" cy="0"/>
+        </a:xfrm>
+      </p:grpSpPr>
+      <p:sp>
+        <p:nvSpPr>
+          <p:cNvPr id="2" name="Slide Image Placeholder 1"/>
+          <p:cNvSpPr>
+            <a:spLocks noGrp="1" noRot="1" noChangeAspect="1"/>
+          </p:cNvSpPr>
+          <p:nvPr>
+            <p:ph type="sldImg"/>
+          </p:nvPr>
+        </p:nvSpPr>
+        <p:spPr/>
+      </p:sp>
+      <p:sp>
+        <p:nvSpPr>
+          <p:cNvPr id="3" name="Notes Placeholder 2"/>
+          <p:cNvSpPr>
+            <a:spLocks noGrp="1"/>
+          </p:cNvSpPr>
+          <p:nvPr>
+            <p:ph type="body" idx="1"/>
+          </p:nvPr>
+        </p:nvSpPr>
+        <p:spPr/>
+        <p:txBody>
+          <a:bodyPr/>
+          <a:lstStyle/>
+          <a:p>
+            <a:r>
+              <a:rPr lang="en-US" dirty="0"/>
+              <a:t>Ca. 3 Min. mit Auflösung. Aussagen einzeln vorlesen, per Daumen abstimmen lassen, dann zur Auflösung weiterklicken. Eignet sich auch als Auflockerung zwischen zwei Kapiteln oder als Wiederholung am Ende.</a:t>
+            </a:r>
+            <a:endParaRPr lang="en-US" dirty="0"/>
+          </a:p>
+        </p:txBody>
+      </p:sp>
+      <p:sp>
+        <p:nvSpPr>
+          <p:cNvPr id="4" name="Slide Number Placeholder 3"/>
+          <p:cNvSpPr>
+            <a:spLocks noGrp="1"/>
+          </p:cNvSpPr>
+          <p:nvPr>
+            <p:ph type="sldNum" sz="quarter" idx="10"/>
+          </p:nvPr>
+        </p:nvSpPr>
+        <p:spPr/>
+        <p:txBody>
+          <a:bodyPr/>
+          <a:lstStyle/>
+          <a:p>
+            <a:fld id="{F7021451-1387-4CA6-816F-3879F97B5CBC}" type="slidenum">
+              <a:rPr lang="en-US"/>
+              <a:t>33</a:t>
+            </a:fld>
+            <a:endParaRPr lang="en-US"/>
+          </a:p>
+        </p:txBody>
+      </p:sp>
+    </p:spTree>
+    <p:extLst>
+      <p:ext uri="{BB962C8B-B14F-4D97-AF65-F5344CB8AC3E}">
+        <p14:creationId xmlns:p14="http://schemas.microsoft.com/office/powerpoint/2010/main" val="1024086991"/>
+      </p:ext>
+    </p:extLst>
+  </p:cSld>
+  <p:clrMapOvr>
+    <a:masterClrMapping/>
+  </p:clrMapOvr>
+</p:notes>
+</file>
+
+<file path=ppt/notesSlides/notesSlide34.xml><?xml version="1.0" encoding="utf-8"?>
+<p:notes xmlns:a="http://schemas.openxmlformats.org/drawingml/2006/main" xmlns:r="http://schemas.openxmlformats.org/officeDocument/2006/relationships" xmlns:p="http://schemas.openxmlformats.org/presentationml/2006/main">
+  <p:cSld>
+    <p:spTree>
+      <p:nvGrpSpPr>
+        <p:cNvPr id="1" name=""/>
+        <p:cNvGrpSpPr/>
+        <p:nvPr/>
+      </p:nvGrpSpPr>
+      <p:grpSpPr>
+        <a:xfrm>
+          <a:off x="0" y="0"/>
+          <a:ext cx="0" cy="0"/>
+          <a:chOff x="0" y="0"/>
+          <a:chExt cx="0" cy="0"/>
+        </a:xfrm>
+      </p:grpSpPr>
+      <p:sp>
+        <p:nvSpPr>
+          <p:cNvPr id="2" name="Slide Image Placeholder 1"/>
+          <p:cNvSpPr>
+            <a:spLocks noGrp="1" noRot="1" noChangeAspect="1"/>
+          </p:cNvSpPr>
+          <p:nvPr>
+            <p:ph type="sldImg"/>
+          </p:nvPr>
+        </p:nvSpPr>
+        <p:spPr/>
+      </p:sp>
+      <p:sp>
+        <p:nvSpPr>
+          <p:cNvPr id="3" name="Notes Placeholder 2"/>
+          <p:cNvSpPr>
+            <a:spLocks noGrp="1"/>
+          </p:cNvSpPr>
+          <p:nvPr>
+            <p:ph type="body" idx="1"/>
+          </p:nvPr>
+        </p:nvSpPr>
+        <p:spPr/>
+        <p:txBody>
+          <a:bodyPr/>
+          <a:lstStyle/>
+          <a:p>
+            <a:r>
+              <a:rPr lang="en-US" dirty="0"/>
+              <a:t>Auflösung zeigen und bei jeder Aussage kurz nachfragen, wer richtig lag.</a:t>
+            </a:r>
+            <a:endParaRPr lang="en-US" dirty="0"/>
+          </a:p>
+        </p:txBody>
+      </p:sp>
+      <p:sp>
+        <p:nvSpPr>
+          <p:cNvPr id="4" name="Slide Number Placeholder 3"/>
+          <p:cNvSpPr>
+            <a:spLocks noGrp="1"/>
+          </p:cNvSpPr>
+          <p:nvPr>
+            <p:ph type="sldNum" sz="quarter" idx="10"/>
+          </p:nvPr>
+        </p:nvSpPr>
+        <p:spPr/>
+        <p:txBody>
+          <a:bodyPr/>
+          <a:lstStyle/>
+          <a:p>
+            <a:fld id="{F7021451-1387-4CA6-816F-3879F97B5CBC}" type="slidenum">
+              <a:rPr lang="en-US"/>
+              <a:t>34</a:t>
+            </a:fld>
+            <a:endParaRPr lang="en-US"/>
+          </a:p>
+        </p:txBody>
+      </p:sp>
+    </p:spTree>
+    <p:extLst>
+      <p:ext uri="{BB962C8B-B14F-4D97-AF65-F5344CB8AC3E}">
+        <p14:creationId xmlns:p14="http://schemas.microsoft.com/office/powerpoint/2010/main" val="1024086991"/>
+      </p:ext>
+    </p:extLst>
+  </p:cSld>
+  <p:clrMapOvr>
+    <a:masterClrMapping/>
+  </p:clrMapOvr>
+</p:notes>
+</file>
+
+<file path=ppt/notesSlides/notesSlide35.xml><?xml version="1.0" encoding="utf-8"?>
+<p:notes xmlns:a="http://schemas.openxmlformats.org/drawingml/2006/main" xmlns:r="http://schemas.openxmlformats.org/officeDocument/2006/relationships" xmlns:p="http://schemas.openxmlformats.org/presentationml/2006/main">
+  <p:cSld>
+    <p:spTree>
+      <p:nvGrpSpPr>
+        <p:cNvPr id="1" name=""/>
+        <p:cNvGrpSpPr/>
+        <p:nvPr/>
+      </p:nvGrpSpPr>
+      <p:grpSpPr>
+        <a:xfrm>
+          <a:off x="0" y="0"/>
+          <a:ext cx="0" cy="0"/>
+          <a:chOff x="0" y="0"/>
+          <a:chExt cx="0" cy="0"/>
+        </a:xfrm>
+      </p:grpSpPr>
+      <p:sp>
+        <p:nvSpPr>
+          <p:cNvPr id="2" name="Slide Image Placeholder 1"/>
+          <p:cNvSpPr>
+            <a:spLocks noGrp="1" noRot="1" noChangeAspect="1"/>
+          </p:cNvSpPr>
+          <p:nvPr>
+            <p:ph type="sldImg"/>
+          </p:nvPr>
+        </p:nvSpPr>
+        <p:spPr/>
+      </p:sp>
+      <p:sp>
+        <p:nvSpPr>
+          <p:cNvPr id="3" name="Notes Placeholder 2"/>
+          <p:cNvSpPr>
+            <a:spLocks noGrp="1"/>
+          </p:cNvSpPr>
+          <p:nvPr>
+            <p:ph type="body" idx="1"/>
+          </p:nvPr>
+        </p:nvSpPr>
+        <p:spPr/>
+        <p:txBody>
+          <a:bodyPr/>
+          <a:lstStyle/>
+          <a:p>
+            <a:r>
+              <a:rPr lang="en-US" dirty="0"/>
+              <a:t>Ca. 2 Min. Passt nach den vier Risiken. Keine Rechtsberatung, sondern Orientierung. Besonders betonen: Deepfakes oder bearbeitete Fotos von Mitschülern sind kein Spaß – sie können Persönlichkeitsrechte verletzen und strafbar sein.</a:t>
+            </a:r>
+            <a:endParaRPr lang="en-US" dirty="0"/>
+          </a:p>
+        </p:txBody>
+      </p:sp>
+      <p:sp>
+        <p:nvSpPr>
+          <p:cNvPr id="4" name="Slide Number Placeholder 3"/>
+          <p:cNvSpPr>
+            <a:spLocks noGrp="1"/>
+          </p:cNvSpPr>
+          <p:nvPr>
+            <p:ph type="sldNum" sz="quarter" idx="10"/>
+          </p:nvPr>
+        </p:nvSpPr>
+        <p:spPr/>
+        <p:txBody>
+          <a:bodyPr/>
+          <a:lstStyle/>
+          <a:p>
+            <a:fld id="{F7021451-1387-4CA6-816F-3879F97B5CBC}" type="slidenum">
+              <a:rPr lang="en-US"/>
+              <a:t>35</a:t>
+            </a:fld>
+            <a:endParaRPr lang="en-US"/>
+          </a:p>
+        </p:txBody>
+      </p:sp>
+    </p:spTree>
+    <p:extLst>
+      <p:ext uri="{BB962C8B-B14F-4D97-AF65-F5344CB8AC3E}">
+        <p14:creationId xmlns:p14="http://schemas.microsoft.com/office/powerpoint/2010/main" val="1024086991"/>
+      </p:ext>
+    </p:extLst>
+  </p:cSld>
+  <p:clrMapOvr>
+    <a:masterClrMapping/>
+  </p:clrMapOvr>
+</p:notes>
+</file>
+
+<file path=ppt/notesSlides/notesSlide36.xml><?xml version="1.0" encoding="utf-8"?>
+<p:notes xmlns:a="http://schemas.openxmlformats.org/drawingml/2006/main" xmlns:r="http://schemas.openxmlformats.org/officeDocument/2006/relationships" xmlns:p="http://schemas.openxmlformats.org/presentationml/2006/main">
+  <p:cSld>
+    <p:spTree>
+      <p:nvGrpSpPr>
+        <p:cNvPr id="1" name=""/>
+        <p:cNvGrpSpPr/>
+        <p:nvPr/>
+      </p:nvGrpSpPr>
+      <p:grpSpPr>
+        <a:xfrm>
+          <a:off x="0" y="0"/>
+          <a:ext cx="0" cy="0"/>
+          <a:chOff x="0" y="0"/>
+          <a:chExt cx="0" cy="0"/>
+        </a:xfrm>
+      </p:grpSpPr>
+      <p:sp>
+        <p:nvSpPr>
+          <p:cNvPr id="2" name="Slide Image Placeholder 1"/>
+          <p:cNvSpPr>
+            <a:spLocks noGrp="1" noRot="1" noChangeAspect="1"/>
+          </p:cNvSpPr>
+          <p:nvPr>
+            <p:ph type="sldImg"/>
+          </p:nvPr>
+        </p:nvSpPr>
+        <p:spPr/>
+      </p:sp>
+      <p:sp>
+        <p:nvSpPr>
+          <p:cNvPr id="3" name="Notes Placeholder 2"/>
+          <p:cNvSpPr>
+            <a:spLocks noGrp="1"/>
+          </p:cNvSpPr>
+          <p:nvPr>
+            <p:ph type="body" idx="1"/>
+          </p:nvPr>
+        </p:nvSpPr>
+        <p:spPr/>
+        <p:txBody>
+          <a:bodyPr/>
+          <a:lstStyle/>
+          <a:p>
+            <a:r>
+              <a:rPr lang="en-US" dirty="0"/>
+              <a:t>Ca. 1,5 Min. Passt direkt vor die Leitidee. Tipp: als Foto-Folie stehen lassen, damit die Klasse sie abfotografieren kann.</a:t>
+            </a:r>
+            <a:endParaRPr lang="en-US" dirty="0"/>
+          </a:p>
+        </p:txBody>
+      </p:sp>
+      <p:sp>
+        <p:nvSpPr>
+          <p:cNvPr id="4" name="Slide Number Placeholder 3"/>
+          <p:cNvSpPr>
+            <a:spLocks noGrp="1"/>
+          </p:cNvSpPr>
+          <p:nvPr>
+            <p:ph type="sldNum" sz="quarter" idx="10"/>
+          </p:nvPr>
+        </p:nvSpPr>
+        <p:spPr/>
+        <p:txBody>
+          <a:bodyPr/>
+          <a:lstStyle/>
+          <a:p>
+            <a:fld id="{F7021451-1387-4CA6-816F-3879F97B5CBC}" type="slidenum">
+              <a:rPr lang="en-US"/>
+              <a:t>36</a:t>
             </a:fld>
             <a:endParaRPr lang="en-US"/>
           </a:p>
@@ -10725,7 +11629,7 @@
                   <a:schemeClr val="tx1"/>
                 </a:solidFill>
               </a:rPr>
-              <a:t>Welche Ausrede stammt von einer KI?</a:t>
+              <a:t>Welche Nachricht hat eine KI geschrieben?</a:t>
             </a:r>
             <a:endParaRPr lang="en-US" sz="3000" dirty="0"/>
           </a:p>
@@ -10851,7 +11755,7 @@
       </p:sp>
       <p:sp>
         <p:nvSpPr>
-          <p:cNvPr id="7" name="Ausrede A"/>
+          <p:cNvPr id="7" name="Nachricht A"/>
           <p:cNvSpPr/>
           <p:nvPr/>
         </p:nvSpPr>
@@ -10964,7 +11868,7 @@
                   <a:schemeClr val="tx1"/>
                 </a:solidFill>
               </a:rPr>
-              <a:t>„Sorry, ich hab die Hausi echt gemacht!! Aber mein Hund hat sich aufs Heft gelegt und dann ist Kakao drübergelaufen … ich bring’s morgen mit, versprochen!“</a:t>
+              <a:t>„Hey Leute, Freitag ab 18 Uhr ist Klassenfest im Jugendraum! Musik ist organisiert, bringt einfach Snacks mit. Wer ist dabei?“</a:t>
             </a:r>
             <a:endParaRPr lang="en-US" sz="1900" dirty="0"/>
           </a:p>
@@ -10972,7 +11876,7 @@
       </p:sp>
       <p:sp>
         <p:nvSpPr>
-          <p:cNvPr id="11" name="Ausrede B"/>
+          <p:cNvPr id="11" name="Nachricht B"/>
           <p:cNvSpPr/>
           <p:nvPr/>
         </p:nvSpPr>
@@ -11085,7 +11989,7 @@
                   <a:schemeClr val="tx1"/>
                 </a:solidFill>
               </a:rPr>
-              <a:t>„Sehr geehrte Frau Müller, leider konnte ich die Hausaufgabe aufgrund unvorhergesehener familiärer Umstände nicht fristgerecht fertigstellen. Ich reiche sie morgen nach.“</a:t>
+              <a:t>„Liebe Klasse 9b, wir laden euch herzlich zu unserem Klassenfest am Freitag um 18 Uhr im Jugendraum ein. Für Musik ist gesorgt – über mitgebrachte Snacks freuen wir uns.“</a:t>
             </a:r>
             <a:endParaRPr lang="en-US" sz="1900" dirty="0"/>
           </a:p>
@@ -13578,8 +14482,8 @@
             <a:avLst/>
           </a:prstGeom>
           <a:solidFill>
-            <a:schemeClr val="accent3">
-              <a:alpha val="40000"/>
+            <a:schemeClr val="accent4">
+              <a:alpha val="28000"/>
             </a:schemeClr>
           </a:solidFill>
           <a:ln w="31750">
@@ -15524,6 +16428,2063 @@
 </p:sld>
 </file>
 
+<file path=ppt/slides/slide27.xml><?xml version="1.0" encoding="utf-8"?>
+<p:sld xmlns:a="http://schemas.openxmlformats.org/drawingml/2006/main" xmlns:r="http://schemas.openxmlformats.org/officeDocument/2006/relationships" xmlns:p="http://schemas.openxmlformats.org/presentationml/2006/main">
+  <p:cSld name="Slide 27">
+    <p:spTree>
+      <p:nvGrpSpPr>
+        <p:cNvPr id="1" name=""/>
+        <p:cNvGrpSpPr/>
+        <p:nvPr/>
+      </p:nvGrpSpPr>
+      <p:grpSpPr>
+        <a:xfrm>
+          <a:off x="0" y="0"/>
+          <a:ext cx="0" cy="0"/>
+          <a:chOff x="0" y="0"/>
+          <a:chExt cx="0" cy="0"/>
+        </a:xfrm>
+      </p:grpSpPr>
+      <p:sp>
+        <p:nvSpPr>
+          <p:cNvPr id="2" name="Text 1"/>
+          <p:cNvSpPr/>
+          <p:nvPr>
+            <p:ph idx="103" type="body" hasCustomPrompt="1"/>
+          </p:nvPr>
+        </p:nvSpPr>
+        <p:spPr>
+          <a:xfrm>
+            <a:off x="182880" y="1600200"/>
+            <a:ext cx="2468880" cy="1188720"/>
+          </a:xfrm>
+          <a:prstGeom prst="rect">
+            <a:avLst/>
+          </a:prstGeom>
+          <a:noFill/>
+          <a:ln/>
+        </p:spPr>
+        <p:txBody>
+          <a:bodyPr wrap="square" lIns="0" tIns="0" rIns="0" bIns="0" rtlCol="0" anchor="b"/>
+          <a:lstStyle/>
+          <a:p>
+            <a:pPr algn="r" indent="0" marL="0">
+              <a:buNone/>
+            </a:pPr>
+            <a:r>
+              <a:rPr lang="en-US" sz="10000" b="1" dirty="0">
+                <a:solidFill>
+                  <a:schemeClr val="tx1"/>
+                </a:solidFill>
+              </a:rPr>
+              <a:t>+</a:t>
+            </a:r>
+            <a:endParaRPr lang="en-US" sz="10000" dirty="0"/>
+          </a:p>
+        </p:txBody>
+      </p:sp>
+      <p:sp>
+        <p:nvSpPr>
+          <p:cNvPr id="3" name="Text 1"/>
+          <p:cNvSpPr/>
+          <p:nvPr>
+            <p:ph idx="104" type="title" hasCustomPrompt="1"/>
+          </p:nvPr>
+        </p:nvSpPr>
+        <p:spPr>
+          <a:xfrm>
+            <a:off x="1856232" y="3931920"/>
+            <a:ext cx="8229600" cy="777240"/>
+          </a:xfrm>
+          <a:prstGeom prst="rect">
+            <a:avLst/>
+          </a:prstGeom>
+          <a:noFill/>
+          <a:ln/>
+        </p:spPr>
+        <p:txBody>
+          <a:bodyPr wrap="square" lIns="0" tIns="0" rIns="0" bIns="0" rtlCol="0" anchor="ctr"/>
+          <a:lstStyle/>
+          <a:p>
+            <a:pPr algn="l" indent="0" marL="0">
+              <a:buNone/>
+            </a:pPr>
+            <a:r>
+              <a:rPr lang="en-US" sz="3600" b="1" dirty="0">
+                <a:solidFill>
+                  <a:schemeClr val="tx1"/>
+                </a:solidFill>
+              </a:rPr>
+              <a:t>Optionale Folien</a:t>
+            </a:r>
+            <a:endParaRPr lang="en-US" sz="3600" dirty="0"/>
+          </a:p>
+        </p:txBody>
+      </p:sp>
+      <p:sp>
+        <p:nvSpPr>
+          <p:cNvPr id="4" name="Text 1"/>
+          <p:cNvSpPr/>
+          <p:nvPr>
+            <p:ph idx="105" type="body" hasCustomPrompt="1"/>
+          </p:nvPr>
+        </p:nvSpPr>
+        <p:spPr>
+          <a:xfrm>
+            <a:off x="1856232" y="4709160"/>
+            <a:ext cx="6400800" cy="457200"/>
+          </a:xfrm>
+          <a:prstGeom prst="rect">
+            <a:avLst/>
+          </a:prstGeom>
+          <a:noFill/>
+          <a:ln/>
+        </p:spPr>
+        <p:txBody>
+          <a:bodyPr wrap="square" lIns="0" tIns="0" rIns="0" bIns="0" rtlCol="0" anchor="t"/>
+          <a:lstStyle/>
+          <a:p>
+            <a:pPr indent="0" marL="0">
+              <a:buNone/>
+            </a:pPr>
+            <a:r>
+              <a:rPr lang="en-US" sz="1800" dirty="0">
+                <a:solidFill>
+                  <a:schemeClr val="tx2"/>
+                </a:solidFill>
+              </a:rPr>
+              <a:t>Zum Einbauen – je nach Zeit, Gruppe und Stimmung im Raum</a:t>
+            </a:r>
+            <a:endParaRPr lang="en-US" sz="1800" dirty="0"/>
+          </a:p>
+        </p:txBody>
+      </p:sp>
+    </p:spTree>
+  </p:cSld>
+  <p:clrMapOvr>
+    <a:masterClrMapping/>
+  </p:clrMapOvr>
+</p:sld>
+</file>
+
+<file path=ppt/slides/slide28.xml><?xml version="1.0" encoding="utf-8"?>
+<p:sld xmlns:a="http://schemas.openxmlformats.org/drawingml/2006/main" xmlns:r="http://schemas.openxmlformats.org/officeDocument/2006/relationships" xmlns:p="http://schemas.openxmlformats.org/presentationml/2006/main">
+  <p:cSld name="Slide 28">
+    <p:spTree>
+      <p:nvGrpSpPr>
+        <p:cNvPr id="1" name=""/>
+        <p:cNvGrpSpPr/>
+        <p:nvPr/>
+      </p:nvGrpSpPr>
+      <p:grpSpPr>
+        <a:xfrm>
+          <a:off x="0" y="0"/>
+          <a:ext cx="0" cy="0"/>
+          <a:chOff x="0" y="0"/>
+          <a:chExt cx="0" cy="0"/>
+        </a:xfrm>
+      </p:grpSpPr>
+      <p:sp>
+        <p:nvSpPr>
+          <p:cNvPr id="2" name="Text 1"/>
+          <p:cNvSpPr/>
+          <p:nvPr>
+            <p:ph idx="103" type="title" hasCustomPrompt="1"/>
+          </p:nvPr>
+        </p:nvSpPr>
+        <p:spPr>
+          <a:xfrm>
+            <a:off x="484632" y="548640"/>
+            <a:ext cx="8778240" cy="640080"/>
+          </a:xfrm>
+          <a:prstGeom prst="rect">
+            <a:avLst/>
+          </a:prstGeom>
+          <a:noFill/>
+          <a:ln/>
+        </p:spPr>
+        <p:txBody>
+          <a:bodyPr wrap="square" lIns="0" tIns="0" rIns="0" bIns="0" rtlCol="0" anchor="b"/>
+          <a:lstStyle/>
+          <a:p>
+            <a:pPr algn="l" indent="0" marL="0">
+              <a:buNone/>
+            </a:pPr>
+            <a:r>
+              <a:rPr lang="en-US" sz="3000" b="1" dirty="0">
+                <a:solidFill>
+                  <a:schemeClr val="tx1"/>
+                </a:solidFill>
+              </a:rPr>
+              <a:t>Eine kurze Geschichte der KI</a:t>
+            </a:r>
+            <a:endParaRPr lang="en-US" sz="3000" dirty="0"/>
+          </a:p>
+        </p:txBody>
+      </p:sp>
+      <p:sp>
+        <p:nvSpPr>
+          <p:cNvPr id="3" name="Text 1"/>
+          <p:cNvSpPr/>
+          <p:nvPr>
+            <p:ph idx="104" type="body" hasCustomPrompt="1"/>
+          </p:nvPr>
+        </p:nvSpPr>
+        <p:spPr>
+          <a:xfrm>
+            <a:off x="484632" y="1417320"/>
+            <a:ext cx="9601200" cy="365760"/>
+          </a:xfrm>
+          <a:prstGeom prst="rect">
+            <a:avLst/>
+          </a:prstGeom>
+          <a:noFill/>
+          <a:ln/>
+        </p:spPr>
+        <p:txBody>
+          <a:bodyPr wrap="square" lIns="0" tIns="0" rIns="0" bIns="0" rtlCol="0" anchor="ctr"/>
+          <a:lstStyle/>
+          <a:p>
+            <a:pPr indent="0" marL="0">
+              <a:buNone/>
+            </a:pPr>
+            <a:r>
+              <a:rPr lang="en-US" sz="1500" dirty="0">
+                <a:solidFill>
+                  <a:schemeClr val="tx2"/>
+                </a:solidFill>
+              </a:rPr>
+              <a:t>Von der ersten Idee bis zu eurem Klassenzimmer</a:t>
+            </a:r>
+            <a:endParaRPr lang="en-US" sz="1500" dirty="0"/>
+          </a:p>
+        </p:txBody>
+      </p:sp>
+      <p:sp>
+        <p:nvSpPr>
+          <p:cNvPr id="4" name="Zeitstrahl"/>
+          <p:cNvSpPr/>
+          <p:nvPr/>
+        </p:nvSpPr>
+        <p:spPr>
+          <a:xfrm>
+            <a:off x="685800" y="3886200"/>
+            <a:ext cx="10789920" cy="0"/>
+          </a:xfrm>
+          <a:prstGeom prst="line">
+            <a:avLst/>
+          </a:prstGeom>
+          <a:noFill/>
+          <a:ln w="25400">
+            <a:solidFill>
+              <a:schemeClr val="accent1"/>
+            </a:solidFill>
+            <a:prstDash val="solid"/>
+          </a:ln>
+        </p:spPr>
+      </p:sp>
+      <p:sp>
+        <p:nvSpPr>
+          <p:cNvPr id="5" name="Punkt 1950"/>
+          <p:cNvSpPr/>
+          <p:nvPr/>
+        </p:nvSpPr>
+        <p:spPr>
+          <a:xfrm>
+            <a:off x="557784" y="3758184"/>
+            <a:ext cx="256032" cy="256032"/>
+          </a:xfrm>
+          <a:prstGeom prst="ellipse">
+            <a:avLst/>
+          </a:prstGeom>
+          <a:solidFill>
+            <a:schemeClr val="bg1"/>
+          </a:solidFill>
+          <a:ln w="25400">
+            <a:solidFill>
+              <a:schemeClr val="accent1"/>
+            </a:solidFill>
+            <a:prstDash val="solid"/>
+          </a:ln>
+        </p:spPr>
+      </p:sp>
+      <p:sp>
+        <p:nvSpPr>
+          <p:cNvPr id="6" name="Text 4"/>
+          <p:cNvSpPr txBox="1"/>
+          <p:nvPr/>
+        </p:nvSpPr>
+        <p:spPr>
+          <a:xfrm>
+            <a:off x="484632" y="2240280"/>
+            <a:ext cx="1645920" cy="457200"/>
+          </a:xfrm>
+          <a:prstGeom prst="rect">
+            <a:avLst/>
+          </a:prstGeom>
+          <a:noFill/>
+          <a:ln/>
+        </p:spPr>
+        <p:txBody>
+          <a:bodyPr wrap="square" lIns="0" tIns="0" rIns="0" bIns="0" rtlCol="0" anchor="ctr"/>
+          <a:lstStyle/>
+          <a:p>
+            <a:pPr algn="l" indent="0" marL="0">
+              <a:buNone/>
+            </a:pPr>
+            <a:r>
+              <a:rPr lang="en-US" sz="2400" b="1" dirty="0">
+                <a:solidFill>
+                  <a:schemeClr val="tx1"/>
+                </a:solidFill>
+              </a:rPr>
+              <a:t>1950</a:t>
+            </a:r>
+            <a:endParaRPr lang="en-US" sz="2400" dirty="0"/>
+          </a:p>
+        </p:txBody>
+      </p:sp>
+      <p:sp>
+        <p:nvSpPr>
+          <p:cNvPr id="7" name="Text 5"/>
+          <p:cNvSpPr txBox="1"/>
+          <p:nvPr/>
+        </p:nvSpPr>
+        <p:spPr>
+          <a:xfrm>
+            <a:off x="484632" y="2697480"/>
+            <a:ext cx="1645920" cy="914400"/>
+          </a:xfrm>
+          <a:prstGeom prst="rect">
+            <a:avLst/>
+          </a:prstGeom>
+          <a:noFill/>
+          <a:ln/>
+        </p:spPr>
+        <p:txBody>
+          <a:bodyPr wrap="square" lIns="0" tIns="0" rIns="0" bIns="0" rtlCol="0" anchor="t"/>
+          <a:lstStyle/>
+          <a:p>
+            <a:pPr algn="l" indent="0" marL="0">
+              <a:buNone/>
+            </a:pPr>
+            <a:r>
+              <a:rPr lang="en-US" sz="1200" dirty="0">
+                <a:solidFill>
+                  <a:schemeClr val="tx2"/>
+                </a:solidFill>
+              </a:rPr>
+              <a:t>Alan Turing fragt: „Können Maschinen denken?“</a:t>
+            </a:r>
+            <a:endParaRPr lang="en-US" sz="1200" dirty="0"/>
+          </a:p>
+        </p:txBody>
+      </p:sp>
+      <p:sp>
+        <p:nvSpPr>
+          <p:cNvPr id="8" name="Punkt 1956"/>
+          <p:cNvSpPr/>
+          <p:nvPr/>
+        </p:nvSpPr>
+        <p:spPr>
+          <a:xfrm>
+            <a:off x="2356104" y="3758184"/>
+            <a:ext cx="256032" cy="256032"/>
+          </a:xfrm>
+          <a:prstGeom prst="ellipse">
+            <a:avLst/>
+          </a:prstGeom>
+          <a:solidFill>
+            <a:schemeClr val="bg1"/>
+          </a:solidFill>
+          <a:ln w="25400">
+            <a:solidFill>
+              <a:schemeClr val="accent1"/>
+            </a:solidFill>
+            <a:prstDash val="solid"/>
+          </a:ln>
+        </p:spPr>
+      </p:sp>
+      <p:sp>
+        <p:nvSpPr>
+          <p:cNvPr id="9" name="Text 7"/>
+          <p:cNvSpPr txBox="1"/>
+          <p:nvPr/>
+        </p:nvSpPr>
+        <p:spPr>
+          <a:xfrm>
+            <a:off x="1661160" y="4206240"/>
+            <a:ext cx="1645920" cy="457200"/>
+          </a:xfrm>
+          <a:prstGeom prst="rect">
+            <a:avLst/>
+          </a:prstGeom>
+          <a:noFill/>
+          <a:ln/>
+        </p:spPr>
+        <p:txBody>
+          <a:bodyPr wrap="square" lIns="0" tIns="0" rIns="0" bIns="0" rtlCol="0" anchor="ctr"/>
+          <a:lstStyle/>
+          <a:p>
+            <a:pPr algn="ctr" indent="0" marL="0">
+              <a:buNone/>
+            </a:pPr>
+            <a:r>
+              <a:rPr lang="en-US" sz="2400" b="1" dirty="0">
+                <a:solidFill>
+                  <a:schemeClr val="tx1"/>
+                </a:solidFill>
+              </a:rPr>
+              <a:t>1956</a:t>
+            </a:r>
+            <a:endParaRPr lang="en-US" sz="2400" dirty="0"/>
+          </a:p>
+        </p:txBody>
+      </p:sp>
+      <p:sp>
+        <p:nvSpPr>
+          <p:cNvPr id="10" name="Text 8"/>
+          <p:cNvSpPr txBox="1"/>
+          <p:nvPr/>
+        </p:nvSpPr>
+        <p:spPr>
+          <a:xfrm>
+            <a:off x="1661160" y="4663440"/>
+            <a:ext cx="1645920" cy="914400"/>
+          </a:xfrm>
+          <a:prstGeom prst="rect">
+            <a:avLst/>
+          </a:prstGeom>
+          <a:noFill/>
+          <a:ln/>
+        </p:spPr>
+        <p:txBody>
+          <a:bodyPr wrap="square" lIns="0" tIns="0" rIns="0" bIns="0" rtlCol="0" anchor="t"/>
+          <a:lstStyle/>
+          <a:p>
+            <a:pPr algn="ctr" indent="0" marL="0">
+              <a:buNone/>
+            </a:pPr>
+            <a:r>
+              <a:rPr lang="en-US" sz="1200" dirty="0">
+                <a:solidFill>
+                  <a:schemeClr val="tx2"/>
+                </a:solidFill>
+              </a:rPr>
+              <a:t>Der Begriff „Künstliche Intelligenz“ entsteht</a:t>
+            </a:r>
+            <a:endParaRPr lang="en-US" sz="1200" dirty="0"/>
+          </a:p>
+        </p:txBody>
+      </p:sp>
+      <p:sp>
+        <p:nvSpPr>
+          <p:cNvPr id="11" name="Punkt 1997"/>
+          <p:cNvSpPr/>
+          <p:nvPr/>
+        </p:nvSpPr>
+        <p:spPr>
+          <a:xfrm>
+            <a:off x="4154424" y="3758184"/>
+            <a:ext cx="256032" cy="256032"/>
+          </a:xfrm>
+          <a:prstGeom prst="ellipse">
+            <a:avLst/>
+          </a:prstGeom>
+          <a:solidFill>
+            <a:schemeClr val="bg1"/>
+          </a:solidFill>
+          <a:ln w="25400">
+            <a:solidFill>
+              <a:schemeClr val="accent1"/>
+            </a:solidFill>
+            <a:prstDash val="solid"/>
+          </a:ln>
+        </p:spPr>
+      </p:sp>
+      <p:sp>
+        <p:nvSpPr>
+          <p:cNvPr id="12" name="Text 10"/>
+          <p:cNvSpPr txBox="1"/>
+          <p:nvPr/>
+        </p:nvSpPr>
+        <p:spPr>
+          <a:xfrm>
+            <a:off x="3459480" y="2240280"/>
+            <a:ext cx="1645920" cy="457200"/>
+          </a:xfrm>
+          <a:prstGeom prst="rect">
+            <a:avLst/>
+          </a:prstGeom>
+          <a:noFill/>
+          <a:ln/>
+        </p:spPr>
+        <p:txBody>
+          <a:bodyPr wrap="square" lIns="0" tIns="0" rIns="0" bIns="0" rtlCol="0" anchor="ctr"/>
+          <a:lstStyle/>
+          <a:p>
+            <a:pPr algn="ctr" indent="0" marL="0">
+              <a:buNone/>
+            </a:pPr>
+            <a:r>
+              <a:rPr lang="en-US" sz="2400" b="1" dirty="0">
+                <a:solidFill>
+                  <a:schemeClr val="tx1"/>
+                </a:solidFill>
+              </a:rPr>
+              <a:t>1997</a:t>
+            </a:r>
+            <a:endParaRPr lang="en-US" sz="2400" dirty="0"/>
+          </a:p>
+        </p:txBody>
+      </p:sp>
+      <p:sp>
+        <p:nvSpPr>
+          <p:cNvPr id="13" name="Text 11"/>
+          <p:cNvSpPr txBox="1"/>
+          <p:nvPr/>
+        </p:nvSpPr>
+        <p:spPr>
+          <a:xfrm>
+            <a:off x="3459480" y="2697480"/>
+            <a:ext cx="1645920" cy="914400"/>
+          </a:xfrm>
+          <a:prstGeom prst="rect">
+            <a:avLst/>
+          </a:prstGeom>
+          <a:noFill/>
+          <a:ln/>
+        </p:spPr>
+        <p:txBody>
+          <a:bodyPr wrap="square" lIns="0" tIns="0" rIns="0" bIns="0" rtlCol="0" anchor="t"/>
+          <a:lstStyle/>
+          <a:p>
+            <a:pPr algn="ctr" indent="0" marL="0">
+              <a:buNone/>
+            </a:pPr>
+            <a:r>
+              <a:rPr lang="en-US" sz="1200" dirty="0">
+                <a:solidFill>
+                  <a:schemeClr val="tx2"/>
+                </a:solidFill>
+              </a:rPr>
+              <a:t>Computer Deep Blue schlägt Schach-Weltmeister Kasparow</a:t>
+            </a:r>
+            <a:endParaRPr lang="en-US" sz="1200" dirty="0"/>
+          </a:p>
+        </p:txBody>
+      </p:sp>
+      <p:sp>
+        <p:nvSpPr>
+          <p:cNvPr id="14" name="Punkt 2011"/>
+          <p:cNvSpPr/>
+          <p:nvPr/>
+        </p:nvSpPr>
+        <p:spPr>
+          <a:xfrm>
+            <a:off x="5952744" y="3758184"/>
+            <a:ext cx="256032" cy="256032"/>
+          </a:xfrm>
+          <a:prstGeom prst="ellipse">
+            <a:avLst/>
+          </a:prstGeom>
+          <a:solidFill>
+            <a:schemeClr val="bg1"/>
+          </a:solidFill>
+          <a:ln w="25400">
+            <a:solidFill>
+              <a:schemeClr val="accent1"/>
+            </a:solidFill>
+            <a:prstDash val="solid"/>
+          </a:ln>
+        </p:spPr>
+      </p:sp>
+      <p:sp>
+        <p:nvSpPr>
+          <p:cNvPr id="15" name="Text 13"/>
+          <p:cNvSpPr txBox="1"/>
+          <p:nvPr/>
+        </p:nvSpPr>
+        <p:spPr>
+          <a:xfrm>
+            <a:off x="5257800" y="4206240"/>
+            <a:ext cx="1645920" cy="457200"/>
+          </a:xfrm>
+          <a:prstGeom prst="rect">
+            <a:avLst/>
+          </a:prstGeom>
+          <a:noFill/>
+          <a:ln/>
+        </p:spPr>
+        <p:txBody>
+          <a:bodyPr wrap="square" lIns="0" tIns="0" rIns="0" bIns="0" rtlCol="0" anchor="ctr"/>
+          <a:lstStyle/>
+          <a:p>
+            <a:pPr algn="ctr" indent="0" marL="0">
+              <a:buNone/>
+            </a:pPr>
+            <a:r>
+              <a:rPr lang="en-US" sz="2400" b="1" dirty="0">
+                <a:solidFill>
+                  <a:schemeClr val="tx1"/>
+                </a:solidFill>
+              </a:rPr>
+              <a:t>2011</a:t>
+            </a:r>
+            <a:endParaRPr lang="en-US" sz="2400" dirty="0"/>
+          </a:p>
+        </p:txBody>
+      </p:sp>
+      <p:sp>
+        <p:nvSpPr>
+          <p:cNvPr id="16" name="Text 14"/>
+          <p:cNvSpPr txBox="1"/>
+          <p:nvPr/>
+        </p:nvSpPr>
+        <p:spPr>
+          <a:xfrm>
+            <a:off x="5257800" y="4663440"/>
+            <a:ext cx="1645920" cy="914400"/>
+          </a:xfrm>
+          <a:prstGeom prst="rect">
+            <a:avLst/>
+          </a:prstGeom>
+          <a:noFill/>
+          <a:ln/>
+        </p:spPr>
+        <p:txBody>
+          <a:bodyPr wrap="square" lIns="0" tIns="0" rIns="0" bIns="0" rtlCol="0" anchor="t"/>
+          <a:lstStyle/>
+          <a:p>
+            <a:pPr algn="ctr" indent="0" marL="0">
+              <a:buNone/>
+            </a:pPr>
+            <a:r>
+              <a:rPr lang="en-US" sz="1200" dirty="0">
+                <a:solidFill>
+                  <a:schemeClr val="tx2"/>
+                </a:solidFill>
+              </a:rPr>
+              <a:t>Siri zieht aufs iPhone – KI in der Hosentasche</a:t>
+            </a:r>
+            <a:endParaRPr lang="en-US" sz="1200" dirty="0"/>
+          </a:p>
+        </p:txBody>
+      </p:sp>
+      <p:sp>
+        <p:nvSpPr>
+          <p:cNvPr id="17" name="Punkt 2016"/>
+          <p:cNvSpPr/>
+          <p:nvPr/>
+        </p:nvSpPr>
+        <p:spPr>
+          <a:xfrm>
+            <a:off x="7751064" y="3758184"/>
+            <a:ext cx="256032" cy="256032"/>
+          </a:xfrm>
+          <a:prstGeom prst="ellipse">
+            <a:avLst/>
+          </a:prstGeom>
+          <a:solidFill>
+            <a:schemeClr val="bg1"/>
+          </a:solidFill>
+          <a:ln w="25400">
+            <a:solidFill>
+              <a:schemeClr val="accent1"/>
+            </a:solidFill>
+            <a:prstDash val="solid"/>
+          </a:ln>
+        </p:spPr>
+      </p:sp>
+      <p:sp>
+        <p:nvSpPr>
+          <p:cNvPr id="18" name="Text 16"/>
+          <p:cNvSpPr txBox="1"/>
+          <p:nvPr/>
+        </p:nvSpPr>
+        <p:spPr>
+          <a:xfrm>
+            <a:off x="7056120" y="2240280"/>
+            <a:ext cx="1645920" cy="457200"/>
+          </a:xfrm>
+          <a:prstGeom prst="rect">
+            <a:avLst/>
+          </a:prstGeom>
+          <a:noFill/>
+          <a:ln/>
+        </p:spPr>
+        <p:txBody>
+          <a:bodyPr wrap="square" lIns="0" tIns="0" rIns="0" bIns="0" rtlCol="0" anchor="ctr"/>
+          <a:lstStyle/>
+          <a:p>
+            <a:pPr algn="ctr" indent="0" marL="0">
+              <a:buNone/>
+            </a:pPr>
+            <a:r>
+              <a:rPr lang="en-US" sz="2400" b="1" dirty="0">
+                <a:solidFill>
+                  <a:schemeClr val="tx1"/>
+                </a:solidFill>
+              </a:rPr>
+              <a:t>2016</a:t>
+            </a:r>
+            <a:endParaRPr lang="en-US" sz="2400" dirty="0"/>
+          </a:p>
+        </p:txBody>
+      </p:sp>
+      <p:sp>
+        <p:nvSpPr>
+          <p:cNvPr id="19" name="Text 17"/>
+          <p:cNvSpPr txBox="1"/>
+          <p:nvPr/>
+        </p:nvSpPr>
+        <p:spPr>
+          <a:xfrm>
+            <a:off x="7056120" y="2697480"/>
+            <a:ext cx="1645920" cy="914400"/>
+          </a:xfrm>
+          <a:prstGeom prst="rect">
+            <a:avLst/>
+          </a:prstGeom>
+          <a:noFill/>
+          <a:ln/>
+        </p:spPr>
+        <p:txBody>
+          <a:bodyPr wrap="square" lIns="0" tIns="0" rIns="0" bIns="0" rtlCol="0" anchor="t"/>
+          <a:lstStyle/>
+          <a:p>
+            <a:pPr algn="ctr" indent="0" marL="0">
+              <a:buNone/>
+            </a:pPr>
+            <a:r>
+              <a:rPr lang="en-US" sz="1200" dirty="0">
+                <a:solidFill>
+                  <a:schemeClr val="tx2"/>
+                </a:solidFill>
+              </a:rPr>
+              <a:t>AlphaGo schlägt den Go-Profi Lee Sedol</a:t>
+            </a:r>
+            <a:endParaRPr lang="en-US" sz="1200" dirty="0"/>
+          </a:p>
+        </p:txBody>
+      </p:sp>
+      <p:sp>
+        <p:nvSpPr>
+          <p:cNvPr id="20" name="Punkt 2022"/>
+          <p:cNvSpPr/>
+          <p:nvPr/>
+        </p:nvSpPr>
+        <p:spPr>
+          <a:xfrm>
+            <a:off x="9549384" y="3758184"/>
+            <a:ext cx="256032" cy="256032"/>
+          </a:xfrm>
+          <a:prstGeom prst="ellipse">
+            <a:avLst/>
+          </a:prstGeom>
+          <a:solidFill>
+            <a:schemeClr val="bg1"/>
+          </a:solidFill>
+          <a:ln w="25400">
+            <a:solidFill>
+              <a:schemeClr val="accent1"/>
+            </a:solidFill>
+            <a:prstDash val="solid"/>
+          </a:ln>
+        </p:spPr>
+      </p:sp>
+      <p:sp>
+        <p:nvSpPr>
+          <p:cNvPr id="21" name="Text 19"/>
+          <p:cNvSpPr txBox="1"/>
+          <p:nvPr/>
+        </p:nvSpPr>
+        <p:spPr>
+          <a:xfrm>
+            <a:off x="8854440" y="4206240"/>
+            <a:ext cx="1645920" cy="457200"/>
+          </a:xfrm>
+          <a:prstGeom prst="rect">
+            <a:avLst/>
+          </a:prstGeom>
+          <a:noFill/>
+          <a:ln/>
+        </p:spPr>
+        <p:txBody>
+          <a:bodyPr wrap="square" lIns="0" tIns="0" rIns="0" bIns="0" rtlCol="0" anchor="ctr"/>
+          <a:lstStyle/>
+          <a:p>
+            <a:pPr algn="ctr" indent="0" marL="0">
+              <a:buNone/>
+            </a:pPr>
+            <a:r>
+              <a:rPr lang="en-US" sz="2400" b="1" dirty="0">
+                <a:solidFill>
+                  <a:schemeClr val="tx1"/>
+                </a:solidFill>
+              </a:rPr>
+              <a:t>2022</a:t>
+            </a:r>
+            <a:endParaRPr lang="en-US" sz="2400" dirty="0"/>
+          </a:p>
+        </p:txBody>
+      </p:sp>
+      <p:sp>
+        <p:nvSpPr>
+          <p:cNvPr id="22" name="Text 20"/>
+          <p:cNvSpPr txBox="1"/>
+          <p:nvPr/>
+        </p:nvSpPr>
+        <p:spPr>
+          <a:xfrm>
+            <a:off x="8854440" y="4663440"/>
+            <a:ext cx="1645920" cy="914400"/>
+          </a:xfrm>
+          <a:prstGeom prst="rect">
+            <a:avLst/>
+          </a:prstGeom>
+          <a:noFill/>
+          <a:ln/>
+        </p:spPr>
+        <p:txBody>
+          <a:bodyPr wrap="square" lIns="0" tIns="0" rIns="0" bIns="0" rtlCol="0" anchor="t"/>
+          <a:lstStyle/>
+          <a:p>
+            <a:pPr algn="ctr" indent="0" marL="0">
+              <a:buNone/>
+            </a:pPr>
+            <a:r>
+              <a:rPr lang="en-US" sz="1200" dirty="0">
+                <a:solidFill>
+                  <a:schemeClr val="tx2"/>
+                </a:solidFill>
+              </a:rPr>
+              <a:t>ChatGPT startet – 1 Million Nutzer in 5 Tagen</a:t>
+            </a:r>
+            <a:endParaRPr lang="en-US" sz="1200" dirty="0"/>
+          </a:p>
+        </p:txBody>
+      </p:sp>
+      <p:sp>
+        <p:nvSpPr>
+          <p:cNvPr id="23" name="Punkt 2026"/>
+          <p:cNvSpPr/>
+          <p:nvPr/>
+        </p:nvSpPr>
+        <p:spPr>
+          <a:xfrm>
+            <a:off x="11347704" y="3758184"/>
+            <a:ext cx="256032" cy="256032"/>
+          </a:xfrm>
+          <a:prstGeom prst="ellipse">
+            <a:avLst/>
+          </a:prstGeom>
+          <a:solidFill>
+            <a:schemeClr val="accent1"/>
+          </a:solidFill>
+          <a:ln w="25400">
+            <a:solidFill>
+              <a:schemeClr val="accent1"/>
+            </a:solidFill>
+            <a:prstDash val="solid"/>
+          </a:ln>
+        </p:spPr>
+      </p:sp>
+      <p:sp>
+        <p:nvSpPr>
+          <p:cNvPr id="24" name="Text 22"/>
+          <p:cNvSpPr txBox="1"/>
+          <p:nvPr/>
+        </p:nvSpPr>
+        <p:spPr>
+          <a:xfrm>
+            <a:off x="10058400" y="2240280"/>
+            <a:ext cx="1645920" cy="457200"/>
+          </a:xfrm>
+          <a:prstGeom prst="rect">
+            <a:avLst/>
+          </a:prstGeom>
+          <a:noFill/>
+          <a:ln/>
+        </p:spPr>
+        <p:txBody>
+          <a:bodyPr wrap="square" lIns="0" tIns="0" rIns="0" bIns="0" rtlCol="0" anchor="ctr"/>
+          <a:lstStyle/>
+          <a:p>
+            <a:pPr algn="r" indent="0" marL="0">
+              <a:buNone/>
+            </a:pPr>
+            <a:r>
+              <a:rPr lang="en-US" sz="2400" b="1" dirty="0">
+                <a:solidFill>
+                  <a:schemeClr val="accent1"/>
+                </a:solidFill>
+              </a:rPr>
+              <a:t>2026</a:t>
+            </a:r>
+            <a:endParaRPr lang="en-US" sz="2400" dirty="0"/>
+          </a:p>
+        </p:txBody>
+      </p:sp>
+      <p:sp>
+        <p:nvSpPr>
+          <p:cNvPr id="25" name="Text 23"/>
+          <p:cNvSpPr txBox="1"/>
+          <p:nvPr/>
+        </p:nvSpPr>
+        <p:spPr>
+          <a:xfrm>
+            <a:off x="10058400" y="2697480"/>
+            <a:ext cx="1645920" cy="914400"/>
+          </a:xfrm>
+          <a:prstGeom prst="rect">
+            <a:avLst/>
+          </a:prstGeom>
+          <a:noFill/>
+          <a:ln/>
+        </p:spPr>
+        <p:txBody>
+          <a:bodyPr wrap="square" lIns="0" tIns="0" rIns="0" bIns="0" rtlCol="0" anchor="t"/>
+          <a:lstStyle/>
+          <a:p>
+            <a:pPr algn="r" indent="0" marL="0">
+              <a:buNone/>
+            </a:pPr>
+            <a:r>
+              <a:rPr lang="en-US" sz="1200" dirty="0">
+                <a:solidFill>
+                  <a:schemeClr val="tx2"/>
+                </a:solidFill>
+              </a:rPr>
+              <a:t>KI-Tag am Gymnasium Süd: Jetzt seid ihr dran</a:t>
+            </a:r>
+            <a:endParaRPr lang="en-US" sz="1200" dirty="0"/>
+          </a:p>
+        </p:txBody>
+      </p:sp>
+      <p:sp>
+        <p:nvSpPr>
+          <p:cNvPr id="26" name="Hinweis optional"/>
+          <p:cNvSpPr/>
+          <p:nvPr/>
+        </p:nvSpPr>
+        <p:spPr>
+          <a:xfrm>
+            <a:off x="8366760" y="6437376"/>
+            <a:ext cx="2560320" cy="256032"/>
+          </a:xfrm>
+          <a:prstGeom prst="roundRect">
+            <a:avLst>
+              <a:gd name="adj" fmla="val 50000"/>
+            </a:avLst>
+          </a:prstGeom>
+          <a:solidFill>
+            <a:schemeClr val="bg2"/>
+          </a:solidFill>
+          <a:ln/>
+        </p:spPr>
+      </p:sp>
+      <p:sp>
+        <p:nvSpPr>
+          <p:cNvPr id="27" name="Text 25"/>
+          <p:cNvSpPr txBox="1"/>
+          <p:nvPr/>
+        </p:nvSpPr>
+        <p:spPr>
+          <a:xfrm>
+            <a:off x="8366760" y="6437376"/>
+            <a:ext cx="2560320" cy="256032"/>
+          </a:xfrm>
+          <a:prstGeom prst="rect">
+            <a:avLst/>
+          </a:prstGeom>
+          <a:noFill/>
+          <a:ln/>
+        </p:spPr>
+        <p:txBody>
+          <a:bodyPr wrap="square" lIns="0" tIns="0" rIns="0" bIns="0" rtlCol="0" anchor="ctr"/>
+          <a:lstStyle/>
+          <a:p>
+            <a:pPr algn="ctr" indent="0" marL="0">
+              <a:buNone/>
+            </a:pPr>
+            <a:r>
+              <a:rPr lang="en-US" sz="900" b="1" spc="100" kern="0" dirty="0">
+                <a:solidFill>
+                  <a:schemeClr val="accent3"/>
+                </a:solidFill>
+              </a:rPr>
+              <a:t>OPTIONAL · KAPITEL 01</a:t>
+            </a:r>
+            <a:endParaRPr lang="en-US" sz="900" dirty="0"/>
+          </a:p>
+        </p:txBody>
+      </p:sp>
+      <p:sp>
+        <p:nvSpPr>
+          <p:cNvPr id="25" name="Slide Number Placeholder 0"/>
+          <p:cNvSpPr>
+            <a:spLocks noGrp="1"/>
+          </p:cNvSpPr>
+          <p:nvPr>
+            <p:ph type="sldNum" sz="quarter" idx="4294967295"/>
+          </p:nvPr>
+        </p:nvSpPr>
+        <p:spPr>
+          <a:xfrm>
+            <a:off x="11155680" y="6455664"/>
+            <a:ext cx="548640" cy="274320"/>
+          </a:xfrm>
+          <a:prstGeom prst="rect">
+            <a:avLst/>
+          </a:prstGeom>
+          <a:extLst>
+            <a:ext uri="{C572A759-6A51-4108-AA02-DFA0A04FC94B}">
+              <ma14:wrappingTextBoxFlag xmlns:ma14="http://schemas.microsoft.com/office/mac/drawingml/2011/main" val="0"/>
+            </a:ext>
+          </a:extLst>
+        </p:spPr>
+        <p:txBody>
+          <a:bodyPr/>
+          <a:lstStyle>
+            <a:lvl1pPr>
+              <a:defRPr sz="1100">
+                <a:solidFill>
+                  <a:schemeClr val="accent3"/>
+                </a:solidFill>
+              </a:defRPr>
+            </a:lvl1pPr>
+          </a:lstStyle>
+          <a:p>
+            <a:pPr algn="r"/>
+            <a:fld id="{F7021451-1387-4CA6-816F-3879F97B5CBC}" type="slidenum">
+              <a:rPr b="0" lang="en-US"/>
+              <a:t>28</a:t>
+            </a:fld>
+            <a:endParaRPr lang="en-US"/>
+          </a:p>
+        </p:txBody>
+      </p:sp>
+    </p:spTree>
+  </p:cSld>
+  <p:clrMapOvr>
+    <a:masterClrMapping/>
+  </p:clrMapOvr>
+</p:sld>
+</file>
+
+<file path=ppt/slides/slide29.xml><?xml version="1.0" encoding="utf-8"?>
+<p:sld xmlns:a="http://schemas.openxmlformats.org/drawingml/2006/main" xmlns:r="http://schemas.openxmlformats.org/officeDocument/2006/relationships" xmlns:p="http://schemas.openxmlformats.org/presentationml/2006/main">
+  <p:cSld name="Slide 29">
+    <p:spTree>
+      <p:nvGrpSpPr>
+        <p:cNvPr id="1" name=""/>
+        <p:cNvGrpSpPr/>
+        <p:nvPr/>
+      </p:nvGrpSpPr>
+      <p:grpSpPr>
+        <a:xfrm>
+          <a:off x="0" y="0"/>
+          <a:ext cx="0" cy="0"/>
+          <a:chOff x="0" y="0"/>
+          <a:chExt cx="0" cy="0"/>
+        </a:xfrm>
+      </p:grpSpPr>
+      <p:sp>
+        <p:nvSpPr>
+          <p:cNvPr id="2" name="Text 1"/>
+          <p:cNvSpPr/>
+          <p:nvPr>
+            <p:ph idx="103" type="title" hasCustomPrompt="1"/>
+          </p:nvPr>
+        </p:nvSpPr>
+        <p:spPr>
+          <a:xfrm>
+            <a:off x="484632" y="548640"/>
+            <a:ext cx="8778240" cy="640080"/>
+          </a:xfrm>
+          <a:prstGeom prst="rect">
+            <a:avLst/>
+          </a:prstGeom>
+          <a:noFill/>
+          <a:ln/>
+        </p:spPr>
+        <p:txBody>
+          <a:bodyPr wrap="square" lIns="0" tIns="0" rIns="0" bIns="0" rtlCol="0" anchor="b"/>
+          <a:lstStyle/>
+          <a:p>
+            <a:pPr algn="l" indent="0" marL="0">
+              <a:buNone/>
+            </a:pPr>
+            <a:r>
+              <a:rPr lang="en-US" sz="3000" b="1" dirty="0">
+                <a:solidFill>
+                  <a:schemeClr val="tx1"/>
+                </a:solidFill>
+              </a:rPr>
+              <a:t>KI-Wörterbuch in 60 Sekunden</a:t>
+            </a:r>
+            <a:endParaRPr lang="en-US" sz="3000" dirty="0"/>
+          </a:p>
+        </p:txBody>
+      </p:sp>
+      <p:sp>
+        <p:nvSpPr>
+          <p:cNvPr id="3" name="Text 1"/>
+          <p:cNvSpPr/>
+          <p:nvPr>
+            <p:ph idx="104" type="body" hasCustomPrompt="1"/>
+          </p:nvPr>
+        </p:nvSpPr>
+        <p:spPr>
+          <a:xfrm>
+            <a:off x="484632" y="1417320"/>
+            <a:ext cx="9601200" cy="365760"/>
+          </a:xfrm>
+          <a:prstGeom prst="rect">
+            <a:avLst/>
+          </a:prstGeom>
+          <a:noFill/>
+          <a:ln/>
+        </p:spPr>
+        <p:txBody>
+          <a:bodyPr wrap="square" lIns="0" tIns="0" rIns="0" bIns="0" rtlCol="0" anchor="ctr"/>
+          <a:lstStyle/>
+          <a:p>
+            <a:pPr indent="0" marL="0">
+              <a:buNone/>
+            </a:pPr>
+            <a:r>
+              <a:rPr lang="en-US" sz="1500" dirty="0">
+                <a:solidFill>
+                  <a:schemeClr val="tx2"/>
+                </a:solidFill>
+              </a:rPr>
+              <a:t>Die wichtigsten Begriffe – kurz erklärt</a:t>
+            </a:r>
+            <a:endParaRPr lang="en-US" sz="1500" dirty="0"/>
+          </a:p>
+        </p:txBody>
+      </p:sp>
+      <p:sp>
+        <p:nvSpPr>
+          <p:cNvPr id="4" name="Begriff Künstliche Intelligenz"/>
+          <p:cNvSpPr/>
+          <p:nvPr/>
+        </p:nvSpPr>
+        <p:spPr>
+          <a:xfrm>
+            <a:off x="484632" y="2103120"/>
+            <a:ext cx="2651760" cy="1783080"/>
+          </a:xfrm>
+          <a:prstGeom prst="roundRect">
+            <a:avLst>
+              <a:gd name="adj" fmla="val 6154"/>
+            </a:avLst>
+          </a:prstGeom>
+          <a:solidFill>
+            <a:schemeClr val="bg1"/>
+          </a:solidFill>
+          <a:ln/>
+          <a:effectLst>
+            <a:outerShdw sx="100000" sy="100000" kx="0" ky="0" algn="bl" rotWithShape="0" blurRad="127000" dist="38100" dir="5400000">
+              <a:srgbClr val="1F2A55">
+                <a:alpha val="16000"/>
+              </a:srgbClr>
+            </a:outerShdw>
+          </a:effectLst>
+        </p:spPr>
+      </p:sp>
+      <p:sp>
+        <p:nvSpPr>
+          <p:cNvPr id="5" name="Text 3"/>
+          <p:cNvSpPr txBox="1"/>
+          <p:nvPr/>
+        </p:nvSpPr>
+        <p:spPr>
+          <a:xfrm>
+            <a:off x="713232" y="2304288"/>
+            <a:ext cx="2240280" cy="548640"/>
+          </a:xfrm>
+          <a:prstGeom prst="rect">
+            <a:avLst/>
+          </a:prstGeom>
+          <a:noFill/>
+          <a:ln/>
+        </p:spPr>
+        <p:txBody>
+          <a:bodyPr wrap="square" lIns="0" tIns="0" rIns="0" bIns="0" rtlCol="0" anchor="t"/>
+          <a:lstStyle/>
+          <a:p>
+            <a:pPr indent="0" marL="0">
+              <a:buNone/>
+            </a:pPr>
+            <a:r>
+              <a:rPr lang="en-US" sz="1500" b="1" dirty="0">
+                <a:solidFill>
+                  <a:schemeClr val="accent1"/>
+                </a:solidFill>
+              </a:rPr>
+              <a:t>Künstliche Intelligenz</a:t>
+            </a:r>
+            <a:endParaRPr lang="en-US" sz="1500" dirty="0"/>
+          </a:p>
+        </p:txBody>
+      </p:sp>
+      <p:sp>
+        <p:nvSpPr>
+          <p:cNvPr id="6" name="Text 4"/>
+          <p:cNvSpPr txBox="1"/>
+          <p:nvPr/>
+        </p:nvSpPr>
+        <p:spPr>
+          <a:xfrm>
+            <a:off x="713232" y="2880360"/>
+            <a:ext cx="2240280" cy="914400"/>
+          </a:xfrm>
+          <a:prstGeom prst="rect">
+            <a:avLst/>
+          </a:prstGeom>
+          <a:noFill/>
+          <a:ln/>
+        </p:spPr>
+        <p:txBody>
+          <a:bodyPr wrap="square" lIns="0" tIns="0" rIns="0" bIns="0" rtlCol="0" anchor="t"/>
+          <a:lstStyle/>
+          <a:p>
+            <a:pPr indent="0" marL="0">
+              <a:buNone/>
+            </a:pPr>
+            <a:r>
+              <a:rPr lang="en-US" sz="1250" dirty="0">
+                <a:solidFill>
+                  <a:schemeClr val="tx1"/>
+                </a:solidFill>
+              </a:rPr>
+              <a:t>Computer lösen Aufgaben, für die man sonst menschliches Denken braucht.</a:t>
+            </a:r>
+            <a:endParaRPr lang="en-US" sz="1250" dirty="0"/>
+          </a:p>
+        </p:txBody>
+      </p:sp>
+      <p:sp>
+        <p:nvSpPr>
+          <p:cNvPr id="7" name="Begriff Maschinelles Lernen"/>
+          <p:cNvSpPr/>
+          <p:nvPr/>
+        </p:nvSpPr>
+        <p:spPr>
+          <a:xfrm>
+            <a:off x="3319272" y="2103120"/>
+            <a:ext cx="2651760" cy="1783080"/>
+          </a:xfrm>
+          <a:prstGeom prst="roundRect">
+            <a:avLst>
+              <a:gd name="adj" fmla="val 6154"/>
+            </a:avLst>
+          </a:prstGeom>
+          <a:solidFill>
+            <a:schemeClr val="bg1"/>
+          </a:solidFill>
+          <a:ln/>
+          <a:effectLst>
+            <a:outerShdw sx="100000" sy="100000" kx="0" ky="0" algn="bl" rotWithShape="0" blurRad="127000" dist="38100" dir="5400000">
+              <a:srgbClr val="1F2A55">
+                <a:alpha val="16000"/>
+              </a:srgbClr>
+            </a:outerShdw>
+          </a:effectLst>
+        </p:spPr>
+      </p:sp>
+      <p:sp>
+        <p:nvSpPr>
+          <p:cNvPr id="8" name="Text 6"/>
+          <p:cNvSpPr txBox="1"/>
+          <p:nvPr/>
+        </p:nvSpPr>
+        <p:spPr>
+          <a:xfrm>
+            <a:off x="3547872" y="2304288"/>
+            <a:ext cx="2240280" cy="548640"/>
+          </a:xfrm>
+          <a:prstGeom prst="rect">
+            <a:avLst/>
+          </a:prstGeom>
+          <a:noFill/>
+          <a:ln/>
+        </p:spPr>
+        <p:txBody>
+          <a:bodyPr wrap="square" lIns="0" tIns="0" rIns="0" bIns="0" rtlCol="0" anchor="t"/>
+          <a:lstStyle/>
+          <a:p>
+            <a:pPr indent="0" marL="0">
+              <a:buNone/>
+            </a:pPr>
+            <a:r>
+              <a:rPr lang="en-US" sz="1500" b="1" dirty="0">
+                <a:solidFill>
+                  <a:schemeClr val="accent1"/>
+                </a:solidFill>
+              </a:rPr>
+              <a:t>Maschinelles Lernen</a:t>
+            </a:r>
+            <a:endParaRPr lang="en-US" sz="1500" dirty="0"/>
+          </a:p>
+        </p:txBody>
+      </p:sp>
+      <p:sp>
+        <p:nvSpPr>
+          <p:cNvPr id="9" name="Text 7"/>
+          <p:cNvSpPr txBox="1"/>
+          <p:nvPr/>
+        </p:nvSpPr>
+        <p:spPr>
+          <a:xfrm>
+            <a:off x="3547872" y="2880360"/>
+            <a:ext cx="2240280" cy="914400"/>
+          </a:xfrm>
+          <a:prstGeom prst="rect">
+            <a:avLst/>
+          </a:prstGeom>
+          <a:noFill/>
+          <a:ln/>
+        </p:spPr>
+        <p:txBody>
+          <a:bodyPr wrap="square" lIns="0" tIns="0" rIns="0" bIns="0" rtlCol="0" anchor="t"/>
+          <a:lstStyle/>
+          <a:p>
+            <a:pPr indent="0" marL="0">
+              <a:buNone/>
+            </a:pPr>
+            <a:r>
+              <a:rPr lang="en-US" sz="1250" dirty="0">
+                <a:solidFill>
+                  <a:schemeClr val="tx1"/>
+                </a:solidFill>
+              </a:rPr>
+              <a:t>KI lernt aus vielen Beispielen statt aus festen Regeln.</a:t>
+            </a:r>
+            <a:endParaRPr lang="en-US" sz="1250" dirty="0"/>
+          </a:p>
+        </p:txBody>
+      </p:sp>
+      <p:sp>
+        <p:nvSpPr>
+          <p:cNvPr id="10" name="Begriff Sprachmodell"/>
+          <p:cNvSpPr/>
+          <p:nvPr/>
+        </p:nvSpPr>
+        <p:spPr>
+          <a:xfrm>
+            <a:off x="6153912" y="2103120"/>
+            <a:ext cx="2651760" cy="1783080"/>
+          </a:xfrm>
+          <a:prstGeom prst="roundRect">
+            <a:avLst>
+              <a:gd name="adj" fmla="val 6154"/>
+            </a:avLst>
+          </a:prstGeom>
+          <a:solidFill>
+            <a:schemeClr val="bg1"/>
+          </a:solidFill>
+          <a:ln/>
+          <a:effectLst>
+            <a:outerShdw sx="100000" sy="100000" kx="0" ky="0" algn="bl" rotWithShape="0" blurRad="127000" dist="38100" dir="5400000">
+              <a:srgbClr val="1F2A55">
+                <a:alpha val="16000"/>
+              </a:srgbClr>
+            </a:outerShdw>
+          </a:effectLst>
+        </p:spPr>
+      </p:sp>
+      <p:sp>
+        <p:nvSpPr>
+          <p:cNvPr id="11" name="Text 9"/>
+          <p:cNvSpPr txBox="1"/>
+          <p:nvPr/>
+        </p:nvSpPr>
+        <p:spPr>
+          <a:xfrm>
+            <a:off x="6382512" y="2304288"/>
+            <a:ext cx="2240280" cy="548640"/>
+          </a:xfrm>
+          <a:prstGeom prst="rect">
+            <a:avLst/>
+          </a:prstGeom>
+          <a:noFill/>
+          <a:ln/>
+        </p:spPr>
+        <p:txBody>
+          <a:bodyPr wrap="square" lIns="0" tIns="0" rIns="0" bIns="0" rtlCol="0" anchor="t"/>
+          <a:lstStyle/>
+          <a:p>
+            <a:pPr indent="0" marL="0">
+              <a:buNone/>
+            </a:pPr>
+            <a:r>
+              <a:rPr lang="en-US" sz="1500" b="1" dirty="0">
+                <a:solidFill>
+                  <a:schemeClr val="accent1"/>
+                </a:solidFill>
+              </a:rPr>
+              <a:t>Sprachmodell</a:t>
+            </a:r>
+            <a:endParaRPr lang="en-US" sz="1500" dirty="0"/>
+          </a:p>
+        </p:txBody>
+      </p:sp>
+      <p:sp>
+        <p:nvSpPr>
+          <p:cNvPr id="12" name="Text 10"/>
+          <p:cNvSpPr txBox="1"/>
+          <p:nvPr/>
+        </p:nvSpPr>
+        <p:spPr>
+          <a:xfrm>
+            <a:off x="6382512" y="2880360"/>
+            <a:ext cx="2240280" cy="914400"/>
+          </a:xfrm>
+          <a:prstGeom prst="rect">
+            <a:avLst/>
+          </a:prstGeom>
+          <a:noFill/>
+          <a:ln/>
+        </p:spPr>
+        <p:txBody>
+          <a:bodyPr wrap="square" lIns="0" tIns="0" rIns="0" bIns="0" rtlCol="0" anchor="t"/>
+          <a:lstStyle/>
+          <a:p>
+            <a:pPr indent="0" marL="0">
+              <a:buNone/>
+            </a:pPr>
+            <a:r>
+              <a:rPr lang="en-US" sz="1250" dirty="0">
+                <a:solidFill>
+                  <a:schemeClr val="tx1"/>
+                </a:solidFill>
+              </a:rPr>
+              <a:t>KI, die mit riesigen Textmengen trainiert wurde und Text erzeugt – z. B. ChatGPT.</a:t>
+            </a:r>
+            <a:endParaRPr lang="en-US" sz="1250" dirty="0"/>
+          </a:p>
+        </p:txBody>
+      </p:sp>
+      <p:sp>
+        <p:nvSpPr>
+          <p:cNvPr id="13" name="Begriff Generative KI"/>
+          <p:cNvSpPr/>
+          <p:nvPr/>
+        </p:nvSpPr>
+        <p:spPr>
+          <a:xfrm>
+            <a:off x="8988552" y="2103120"/>
+            <a:ext cx="2651760" cy="1783080"/>
+          </a:xfrm>
+          <a:prstGeom prst="roundRect">
+            <a:avLst>
+              <a:gd name="adj" fmla="val 6154"/>
+            </a:avLst>
+          </a:prstGeom>
+          <a:solidFill>
+            <a:schemeClr val="bg1"/>
+          </a:solidFill>
+          <a:ln/>
+          <a:effectLst>
+            <a:outerShdw sx="100000" sy="100000" kx="0" ky="0" algn="bl" rotWithShape="0" blurRad="127000" dist="38100" dir="5400000">
+              <a:srgbClr val="1F2A55">
+                <a:alpha val="16000"/>
+              </a:srgbClr>
+            </a:outerShdw>
+          </a:effectLst>
+        </p:spPr>
+      </p:sp>
+      <p:sp>
+        <p:nvSpPr>
+          <p:cNvPr id="14" name="Text 12"/>
+          <p:cNvSpPr txBox="1"/>
+          <p:nvPr/>
+        </p:nvSpPr>
+        <p:spPr>
+          <a:xfrm>
+            <a:off x="9217152" y="2304288"/>
+            <a:ext cx="2240280" cy="548640"/>
+          </a:xfrm>
+          <a:prstGeom prst="rect">
+            <a:avLst/>
+          </a:prstGeom>
+          <a:noFill/>
+          <a:ln/>
+        </p:spPr>
+        <p:txBody>
+          <a:bodyPr wrap="square" lIns="0" tIns="0" rIns="0" bIns="0" rtlCol="0" anchor="t"/>
+          <a:lstStyle/>
+          <a:p>
+            <a:pPr indent="0" marL="0">
+              <a:buNone/>
+            </a:pPr>
+            <a:r>
+              <a:rPr lang="en-US" sz="1500" b="1" dirty="0">
+                <a:solidFill>
+                  <a:schemeClr val="accent1"/>
+                </a:solidFill>
+              </a:rPr>
+              <a:t>Generative KI</a:t>
+            </a:r>
+            <a:endParaRPr lang="en-US" sz="1500" dirty="0"/>
+          </a:p>
+        </p:txBody>
+      </p:sp>
+      <p:sp>
+        <p:nvSpPr>
+          <p:cNvPr id="15" name="Text 13"/>
+          <p:cNvSpPr txBox="1"/>
+          <p:nvPr/>
+        </p:nvSpPr>
+        <p:spPr>
+          <a:xfrm>
+            <a:off x="9217152" y="2880360"/>
+            <a:ext cx="2240280" cy="914400"/>
+          </a:xfrm>
+          <a:prstGeom prst="rect">
+            <a:avLst/>
+          </a:prstGeom>
+          <a:noFill/>
+          <a:ln/>
+        </p:spPr>
+        <p:txBody>
+          <a:bodyPr wrap="square" lIns="0" tIns="0" rIns="0" bIns="0" rtlCol="0" anchor="t"/>
+          <a:lstStyle/>
+          <a:p>
+            <a:pPr indent="0" marL="0">
+              <a:buNone/>
+            </a:pPr>
+            <a:r>
+              <a:rPr lang="en-US" sz="1250" dirty="0">
+                <a:solidFill>
+                  <a:schemeClr val="tx1"/>
+                </a:solidFill>
+              </a:rPr>
+              <a:t>KI, die Neues erzeugt: Texte, Bilder, Musik oder Videos.</a:t>
+            </a:r>
+            <a:endParaRPr lang="en-US" sz="1250" dirty="0"/>
+          </a:p>
+        </p:txBody>
+      </p:sp>
+      <p:sp>
+        <p:nvSpPr>
+          <p:cNvPr id="16" name="Begriff Prompt"/>
+          <p:cNvSpPr/>
+          <p:nvPr/>
+        </p:nvSpPr>
+        <p:spPr>
+          <a:xfrm>
+            <a:off x="484632" y="4069080"/>
+            <a:ext cx="2651760" cy="1783080"/>
+          </a:xfrm>
+          <a:prstGeom prst="roundRect">
+            <a:avLst>
+              <a:gd name="adj" fmla="val 6154"/>
+            </a:avLst>
+          </a:prstGeom>
+          <a:solidFill>
+            <a:schemeClr val="bg1"/>
+          </a:solidFill>
+          <a:ln/>
+          <a:effectLst>
+            <a:outerShdw sx="100000" sy="100000" kx="0" ky="0" algn="bl" rotWithShape="0" blurRad="127000" dist="38100" dir="5400000">
+              <a:srgbClr val="1F2A55">
+                <a:alpha val="16000"/>
+              </a:srgbClr>
+            </a:outerShdw>
+          </a:effectLst>
+        </p:spPr>
+      </p:sp>
+      <p:sp>
+        <p:nvSpPr>
+          <p:cNvPr id="17" name="Text 15"/>
+          <p:cNvSpPr txBox="1"/>
+          <p:nvPr/>
+        </p:nvSpPr>
+        <p:spPr>
+          <a:xfrm>
+            <a:off x="713232" y="4270248"/>
+            <a:ext cx="2240280" cy="548640"/>
+          </a:xfrm>
+          <a:prstGeom prst="rect">
+            <a:avLst/>
+          </a:prstGeom>
+          <a:noFill/>
+          <a:ln/>
+        </p:spPr>
+        <p:txBody>
+          <a:bodyPr wrap="square" lIns="0" tIns="0" rIns="0" bIns="0" rtlCol="0" anchor="t"/>
+          <a:lstStyle/>
+          <a:p>
+            <a:pPr indent="0" marL="0">
+              <a:buNone/>
+            </a:pPr>
+            <a:r>
+              <a:rPr lang="en-US" sz="1500" b="1" dirty="0">
+                <a:solidFill>
+                  <a:schemeClr val="accent1"/>
+                </a:solidFill>
+              </a:rPr>
+              <a:t>Prompt</a:t>
+            </a:r>
+            <a:endParaRPr lang="en-US" sz="1500" dirty="0"/>
+          </a:p>
+        </p:txBody>
+      </p:sp>
+      <p:sp>
+        <p:nvSpPr>
+          <p:cNvPr id="18" name="Text 16"/>
+          <p:cNvSpPr txBox="1"/>
+          <p:nvPr/>
+        </p:nvSpPr>
+        <p:spPr>
+          <a:xfrm>
+            <a:off x="713232" y="4846320"/>
+            <a:ext cx="2240280" cy="914400"/>
+          </a:xfrm>
+          <a:prstGeom prst="rect">
+            <a:avLst/>
+          </a:prstGeom>
+          <a:noFill/>
+          <a:ln/>
+        </p:spPr>
+        <p:txBody>
+          <a:bodyPr wrap="square" lIns="0" tIns="0" rIns="0" bIns="0" rtlCol="0" anchor="t"/>
+          <a:lstStyle/>
+          <a:p>
+            <a:pPr indent="0" marL="0">
+              <a:buNone/>
+            </a:pPr>
+            <a:r>
+              <a:rPr lang="en-US" sz="1250" dirty="0">
+                <a:solidFill>
+                  <a:schemeClr val="tx1"/>
+                </a:solidFill>
+              </a:rPr>
+              <a:t>Deine Anweisung an die KI – je klarer, desto besser das Ergebnis.</a:t>
+            </a:r>
+            <a:endParaRPr lang="en-US" sz="1250" dirty="0"/>
+          </a:p>
+        </p:txBody>
+      </p:sp>
+      <p:sp>
+        <p:nvSpPr>
+          <p:cNvPr id="19" name="Begriff Halluzination"/>
+          <p:cNvSpPr/>
+          <p:nvPr/>
+        </p:nvSpPr>
+        <p:spPr>
+          <a:xfrm>
+            <a:off x="3319272" y="4069080"/>
+            <a:ext cx="2651760" cy="1783080"/>
+          </a:xfrm>
+          <a:prstGeom prst="roundRect">
+            <a:avLst>
+              <a:gd name="adj" fmla="val 6154"/>
+            </a:avLst>
+          </a:prstGeom>
+          <a:solidFill>
+            <a:schemeClr val="bg1"/>
+          </a:solidFill>
+          <a:ln/>
+          <a:effectLst>
+            <a:outerShdw sx="100000" sy="100000" kx="0" ky="0" algn="bl" rotWithShape="0" blurRad="127000" dist="38100" dir="5400000">
+              <a:srgbClr val="1F2A55">
+                <a:alpha val="16000"/>
+              </a:srgbClr>
+            </a:outerShdw>
+          </a:effectLst>
+        </p:spPr>
+      </p:sp>
+      <p:sp>
+        <p:nvSpPr>
+          <p:cNvPr id="20" name="Text 18"/>
+          <p:cNvSpPr txBox="1"/>
+          <p:nvPr/>
+        </p:nvSpPr>
+        <p:spPr>
+          <a:xfrm>
+            <a:off x="3547872" y="4270248"/>
+            <a:ext cx="2240280" cy="548640"/>
+          </a:xfrm>
+          <a:prstGeom prst="rect">
+            <a:avLst/>
+          </a:prstGeom>
+          <a:noFill/>
+          <a:ln/>
+        </p:spPr>
+        <p:txBody>
+          <a:bodyPr wrap="square" lIns="0" tIns="0" rIns="0" bIns="0" rtlCol="0" anchor="t"/>
+          <a:lstStyle/>
+          <a:p>
+            <a:pPr indent="0" marL="0">
+              <a:buNone/>
+            </a:pPr>
+            <a:r>
+              <a:rPr lang="en-US" sz="1500" b="1" dirty="0">
+                <a:solidFill>
+                  <a:schemeClr val="accent1"/>
+                </a:solidFill>
+              </a:rPr>
+              <a:t>Halluzination</a:t>
+            </a:r>
+            <a:endParaRPr lang="en-US" sz="1500" dirty="0"/>
+          </a:p>
+        </p:txBody>
+      </p:sp>
+      <p:sp>
+        <p:nvSpPr>
+          <p:cNvPr id="21" name="Text 19"/>
+          <p:cNvSpPr txBox="1"/>
+          <p:nvPr/>
+        </p:nvSpPr>
+        <p:spPr>
+          <a:xfrm>
+            <a:off x="3547872" y="4846320"/>
+            <a:ext cx="2240280" cy="914400"/>
+          </a:xfrm>
+          <a:prstGeom prst="rect">
+            <a:avLst/>
+          </a:prstGeom>
+          <a:noFill/>
+          <a:ln/>
+        </p:spPr>
+        <p:txBody>
+          <a:bodyPr wrap="square" lIns="0" tIns="0" rIns="0" bIns="0" rtlCol="0" anchor="t"/>
+          <a:lstStyle/>
+          <a:p>
+            <a:pPr indent="0" marL="0">
+              <a:buNone/>
+            </a:pPr>
+            <a:r>
+              <a:rPr lang="en-US" sz="1250" dirty="0">
+                <a:solidFill>
+                  <a:schemeClr val="tx1"/>
+                </a:solidFill>
+              </a:rPr>
+              <a:t>Die KI erfindet etwas Falsches – und klingt dabei überzeugt.</a:t>
+            </a:r>
+            <a:endParaRPr lang="en-US" sz="1250" dirty="0"/>
+          </a:p>
+        </p:txBody>
+      </p:sp>
+      <p:sp>
+        <p:nvSpPr>
+          <p:cNvPr id="22" name="Begriff Deepfake"/>
+          <p:cNvSpPr/>
+          <p:nvPr/>
+        </p:nvSpPr>
+        <p:spPr>
+          <a:xfrm>
+            <a:off x="6153912" y="4069080"/>
+            <a:ext cx="2651760" cy="1783080"/>
+          </a:xfrm>
+          <a:prstGeom prst="roundRect">
+            <a:avLst>
+              <a:gd name="adj" fmla="val 6154"/>
+            </a:avLst>
+          </a:prstGeom>
+          <a:solidFill>
+            <a:schemeClr val="bg1"/>
+          </a:solidFill>
+          <a:ln/>
+          <a:effectLst>
+            <a:outerShdw sx="100000" sy="100000" kx="0" ky="0" algn="bl" rotWithShape="0" blurRad="127000" dist="38100" dir="5400000">
+              <a:srgbClr val="1F2A55">
+                <a:alpha val="16000"/>
+              </a:srgbClr>
+            </a:outerShdw>
+          </a:effectLst>
+        </p:spPr>
+      </p:sp>
+      <p:sp>
+        <p:nvSpPr>
+          <p:cNvPr id="23" name="Text 21"/>
+          <p:cNvSpPr txBox="1"/>
+          <p:nvPr/>
+        </p:nvSpPr>
+        <p:spPr>
+          <a:xfrm>
+            <a:off x="6382512" y="4270248"/>
+            <a:ext cx="2240280" cy="548640"/>
+          </a:xfrm>
+          <a:prstGeom prst="rect">
+            <a:avLst/>
+          </a:prstGeom>
+          <a:noFill/>
+          <a:ln/>
+        </p:spPr>
+        <p:txBody>
+          <a:bodyPr wrap="square" lIns="0" tIns="0" rIns="0" bIns="0" rtlCol="0" anchor="t"/>
+          <a:lstStyle/>
+          <a:p>
+            <a:pPr indent="0" marL="0">
+              <a:buNone/>
+            </a:pPr>
+            <a:r>
+              <a:rPr lang="en-US" sz="1500" b="1" dirty="0">
+                <a:solidFill>
+                  <a:schemeClr val="accent1"/>
+                </a:solidFill>
+              </a:rPr>
+              <a:t>Deepfake</a:t>
+            </a:r>
+            <a:endParaRPr lang="en-US" sz="1500" dirty="0"/>
+          </a:p>
+        </p:txBody>
+      </p:sp>
+      <p:sp>
+        <p:nvSpPr>
+          <p:cNvPr id="24" name="Text 22"/>
+          <p:cNvSpPr txBox="1"/>
+          <p:nvPr/>
+        </p:nvSpPr>
+        <p:spPr>
+          <a:xfrm>
+            <a:off x="6382512" y="4846320"/>
+            <a:ext cx="2240280" cy="914400"/>
+          </a:xfrm>
+          <a:prstGeom prst="rect">
+            <a:avLst/>
+          </a:prstGeom>
+          <a:noFill/>
+          <a:ln/>
+        </p:spPr>
+        <p:txBody>
+          <a:bodyPr wrap="square" lIns="0" tIns="0" rIns="0" bIns="0" rtlCol="0" anchor="t"/>
+          <a:lstStyle/>
+          <a:p>
+            <a:pPr indent="0" marL="0">
+              <a:buNone/>
+            </a:pPr>
+            <a:r>
+              <a:rPr lang="en-US" sz="1250" dirty="0">
+                <a:solidFill>
+                  <a:schemeClr val="tx1"/>
+                </a:solidFill>
+              </a:rPr>
+              <a:t>Täuschend echtes, mit KI gefälschtes Bild, Video oder Audio.</a:t>
+            </a:r>
+            <a:endParaRPr lang="en-US" sz="1250" dirty="0"/>
+          </a:p>
+        </p:txBody>
+      </p:sp>
+      <p:sp>
+        <p:nvSpPr>
+          <p:cNvPr id="25" name="Begriff Bias"/>
+          <p:cNvSpPr/>
+          <p:nvPr/>
+        </p:nvSpPr>
+        <p:spPr>
+          <a:xfrm>
+            <a:off x="8988552" y="4069080"/>
+            <a:ext cx="2651760" cy="1783080"/>
+          </a:xfrm>
+          <a:prstGeom prst="roundRect">
+            <a:avLst>
+              <a:gd name="adj" fmla="val 6154"/>
+            </a:avLst>
+          </a:prstGeom>
+          <a:solidFill>
+            <a:schemeClr val="bg1"/>
+          </a:solidFill>
+          <a:ln/>
+          <a:effectLst>
+            <a:outerShdw sx="100000" sy="100000" kx="0" ky="0" algn="bl" rotWithShape="0" blurRad="127000" dist="38100" dir="5400000">
+              <a:srgbClr val="1F2A55">
+                <a:alpha val="16000"/>
+              </a:srgbClr>
+            </a:outerShdw>
+          </a:effectLst>
+        </p:spPr>
+      </p:sp>
+      <p:sp>
+        <p:nvSpPr>
+          <p:cNvPr id="26" name="Text 24"/>
+          <p:cNvSpPr txBox="1"/>
+          <p:nvPr/>
+        </p:nvSpPr>
+        <p:spPr>
+          <a:xfrm>
+            <a:off x="9217152" y="4270248"/>
+            <a:ext cx="2240280" cy="548640"/>
+          </a:xfrm>
+          <a:prstGeom prst="rect">
+            <a:avLst/>
+          </a:prstGeom>
+          <a:noFill/>
+          <a:ln/>
+        </p:spPr>
+        <p:txBody>
+          <a:bodyPr wrap="square" lIns="0" tIns="0" rIns="0" bIns="0" rtlCol="0" anchor="t"/>
+          <a:lstStyle/>
+          <a:p>
+            <a:pPr indent="0" marL="0">
+              <a:buNone/>
+            </a:pPr>
+            <a:r>
+              <a:rPr lang="en-US" sz="1500" b="1" dirty="0">
+                <a:solidFill>
+                  <a:schemeClr val="accent1"/>
+                </a:solidFill>
+              </a:rPr>
+              <a:t>Bias</a:t>
+            </a:r>
+            <a:endParaRPr lang="en-US" sz="1500" dirty="0"/>
+          </a:p>
+        </p:txBody>
+      </p:sp>
+      <p:sp>
+        <p:nvSpPr>
+          <p:cNvPr id="27" name="Text 25"/>
+          <p:cNvSpPr txBox="1"/>
+          <p:nvPr/>
+        </p:nvSpPr>
+        <p:spPr>
+          <a:xfrm>
+            <a:off x="9217152" y="4846320"/>
+            <a:ext cx="2240280" cy="914400"/>
+          </a:xfrm>
+          <a:prstGeom prst="rect">
+            <a:avLst/>
+          </a:prstGeom>
+          <a:noFill/>
+          <a:ln/>
+        </p:spPr>
+        <p:txBody>
+          <a:bodyPr wrap="square" lIns="0" tIns="0" rIns="0" bIns="0" rtlCol="0" anchor="t"/>
+          <a:lstStyle/>
+          <a:p>
+            <a:pPr indent="0" marL="0">
+              <a:buNone/>
+            </a:pPr>
+            <a:r>
+              <a:rPr lang="en-US" sz="1250" dirty="0">
+                <a:solidFill>
+                  <a:schemeClr val="tx1"/>
+                </a:solidFill>
+              </a:rPr>
+              <a:t>Ein Vorurteil, das die KI aus ihren Trainingsdaten übernommen hat.</a:t>
+            </a:r>
+            <a:endParaRPr lang="en-US" sz="1250" dirty="0"/>
+          </a:p>
+        </p:txBody>
+      </p:sp>
+      <p:sp>
+        <p:nvSpPr>
+          <p:cNvPr id="28" name="Hinweis optional"/>
+          <p:cNvSpPr/>
+          <p:nvPr/>
+        </p:nvSpPr>
+        <p:spPr>
+          <a:xfrm>
+            <a:off x="8366760" y="6437376"/>
+            <a:ext cx="2560320" cy="256032"/>
+          </a:xfrm>
+          <a:prstGeom prst="roundRect">
+            <a:avLst>
+              <a:gd name="adj" fmla="val 50000"/>
+            </a:avLst>
+          </a:prstGeom>
+          <a:solidFill>
+            <a:schemeClr val="bg2"/>
+          </a:solidFill>
+          <a:ln/>
+        </p:spPr>
+      </p:sp>
+      <p:sp>
+        <p:nvSpPr>
+          <p:cNvPr id="29" name="Text 27"/>
+          <p:cNvSpPr txBox="1"/>
+          <p:nvPr/>
+        </p:nvSpPr>
+        <p:spPr>
+          <a:xfrm>
+            <a:off x="8366760" y="6437376"/>
+            <a:ext cx="2560320" cy="256032"/>
+          </a:xfrm>
+          <a:prstGeom prst="rect">
+            <a:avLst/>
+          </a:prstGeom>
+          <a:noFill/>
+          <a:ln/>
+        </p:spPr>
+        <p:txBody>
+          <a:bodyPr wrap="square" lIns="0" tIns="0" rIns="0" bIns="0" rtlCol="0" anchor="ctr"/>
+          <a:lstStyle/>
+          <a:p>
+            <a:pPr algn="ctr" indent="0" marL="0">
+              <a:buNone/>
+            </a:pPr>
+            <a:r>
+              <a:rPr lang="en-US" sz="900" b="1" spc="100" kern="0" dirty="0">
+                <a:solidFill>
+                  <a:schemeClr val="accent3"/>
+                </a:solidFill>
+              </a:rPr>
+              <a:t>OPTIONAL · KAPITEL 02</a:t>
+            </a:r>
+            <a:endParaRPr lang="en-US" sz="900" dirty="0"/>
+          </a:p>
+        </p:txBody>
+      </p:sp>
+      <p:sp>
+        <p:nvSpPr>
+          <p:cNvPr id="25" name="Slide Number Placeholder 0"/>
+          <p:cNvSpPr>
+            <a:spLocks noGrp="1"/>
+          </p:cNvSpPr>
+          <p:nvPr>
+            <p:ph type="sldNum" sz="quarter" idx="4294967295"/>
+          </p:nvPr>
+        </p:nvSpPr>
+        <p:spPr>
+          <a:xfrm>
+            <a:off x="11155680" y="6455664"/>
+            <a:ext cx="548640" cy="274320"/>
+          </a:xfrm>
+          <a:prstGeom prst="rect">
+            <a:avLst/>
+          </a:prstGeom>
+          <a:extLst>
+            <a:ext uri="{C572A759-6A51-4108-AA02-DFA0A04FC94B}">
+              <ma14:wrappingTextBoxFlag xmlns:ma14="http://schemas.microsoft.com/office/mac/drawingml/2011/main" val="0"/>
+            </a:ext>
+          </a:extLst>
+        </p:spPr>
+        <p:txBody>
+          <a:bodyPr/>
+          <a:lstStyle>
+            <a:lvl1pPr>
+              <a:defRPr sz="1100">
+                <a:solidFill>
+                  <a:schemeClr val="accent3"/>
+                </a:solidFill>
+              </a:defRPr>
+            </a:lvl1pPr>
+          </a:lstStyle>
+          <a:p>
+            <a:pPr algn="r"/>
+            <a:fld id="{F7021451-1387-4CA6-816F-3879F97B5CBC}" type="slidenum">
+              <a:rPr b="0" lang="en-US"/>
+              <a:t>29</a:t>
+            </a:fld>
+            <a:endParaRPr lang="en-US"/>
+          </a:p>
+        </p:txBody>
+      </p:sp>
+    </p:spTree>
+  </p:cSld>
+  <p:clrMapOvr>
+    <a:masterClrMapping/>
+  </p:clrMapOvr>
+</p:sld>
+</file>
+
 <file path=ppt/slides/slide3.xml><?xml version="1.0" encoding="utf-8"?>
 <p:sld xmlns:a="http://schemas.openxmlformats.org/drawingml/2006/main" xmlns:r="http://schemas.openxmlformats.org/officeDocument/2006/relationships" xmlns:p="http://schemas.openxmlformats.org/presentationml/2006/main">
   <p:cSld name="Slide 3">
@@ -15666,7 +18627,7 @@
                   <a:schemeClr val="tx1"/>
                 </a:solidFill>
               </a:rPr>
-              <a:t>Sie kann jeden Stil nachahmen: lässig, förmlich – oder genau wie du.</a:t>
+              <a:t>Sie kann jeden Stil nachahmen: locker, förmlich – oder genau wie du.</a:t>
             </a:r>
             <a:endParaRPr lang="en-US" sz="2000" dirty="0"/>
           </a:p>
@@ -15683,6 +18644,6577 @@
               <a:t>Genau deshalb lohnt es sich, KI zu verstehen.</a:t>
             </a:r>
             <a:endParaRPr lang="en-US" sz="2000" dirty="0"/>
+          </a:p>
+        </p:txBody>
+      </p:sp>
+    </p:spTree>
+  </p:cSld>
+  <p:clrMapOvr>
+    <a:masterClrMapping/>
+  </p:clrMapOvr>
+</p:sld>
+</file>
+
+<file path=ppt/slides/slide30.xml><?xml version="1.0" encoding="utf-8"?>
+<p:sld xmlns:a="http://schemas.openxmlformats.org/drawingml/2006/main" xmlns:r="http://schemas.openxmlformats.org/officeDocument/2006/relationships" xmlns:p="http://schemas.openxmlformats.org/presentationml/2006/main">
+  <p:cSld name="Slide 30">
+    <p:spTree>
+      <p:nvGrpSpPr>
+        <p:cNvPr id="1" name=""/>
+        <p:cNvGrpSpPr/>
+        <p:nvPr/>
+      </p:nvGrpSpPr>
+      <p:grpSpPr>
+        <a:xfrm>
+          <a:off x="0" y="0"/>
+          <a:ext cx="0" cy="0"/>
+          <a:chOff x="0" y="0"/>
+          <a:chExt cx="0" cy="0"/>
+        </a:xfrm>
+      </p:grpSpPr>
+      <p:sp>
+        <p:nvSpPr>
+          <p:cNvPr id="2" name="Text 1"/>
+          <p:cNvSpPr/>
+          <p:nvPr>
+            <p:ph idx="103" type="title" hasCustomPrompt="1"/>
+          </p:nvPr>
+        </p:nvSpPr>
+        <p:spPr>
+          <a:xfrm>
+            <a:off x="484632" y="548640"/>
+            <a:ext cx="8778240" cy="640080"/>
+          </a:xfrm>
+          <a:prstGeom prst="rect">
+            <a:avLst/>
+          </a:prstGeom>
+          <a:noFill/>
+          <a:ln/>
+        </p:spPr>
+        <p:txBody>
+          <a:bodyPr wrap="square" lIns="0" tIns="0" rIns="0" bIns="0" rtlCol="0" anchor="b"/>
+          <a:lstStyle/>
+          <a:p>
+            <a:pPr algn="l" indent="0" marL="0">
+              <a:buNone/>
+            </a:pPr>
+            <a:r>
+              <a:rPr lang="en-US" sz="3000" b="1" dirty="0">
+                <a:solidFill>
+                  <a:schemeClr val="tx1"/>
+                </a:solidFill>
+              </a:rPr>
+              <a:t>Was KI richtig gut kann – und was nicht</a:t>
+            </a:r>
+            <a:endParaRPr lang="en-US" sz="3000" dirty="0"/>
+          </a:p>
+        </p:txBody>
+      </p:sp>
+      <p:sp>
+        <p:nvSpPr>
+          <p:cNvPr id="3" name="Text 1"/>
+          <p:cNvSpPr/>
+          <p:nvPr>
+            <p:ph idx="104" type="body" hasCustomPrompt="1"/>
+          </p:nvPr>
+        </p:nvSpPr>
+        <p:spPr>
+          <a:xfrm>
+            <a:off x="484632" y="1417320"/>
+            <a:ext cx="9601200" cy="365760"/>
+          </a:xfrm>
+          <a:prstGeom prst="rect">
+            <a:avLst/>
+          </a:prstGeom>
+          <a:noFill/>
+          <a:ln/>
+        </p:spPr>
+        <p:txBody>
+          <a:bodyPr wrap="square" lIns="0" tIns="0" rIns="0" bIns="0" rtlCol="0" anchor="ctr"/>
+          <a:lstStyle/>
+          <a:p>
+            <a:pPr indent="0" marL="0">
+              <a:buNone/>
+            </a:pPr>
+            <a:r>
+              <a:rPr lang="en-US" sz="1500" dirty="0">
+                <a:solidFill>
+                  <a:schemeClr val="tx2"/>
+                </a:solidFill>
+              </a:rPr>
+              <a:t>KI ist ein starkes Werkzeug – aber kein Mensch</a:t>
+            </a:r>
+            <a:endParaRPr lang="en-US" sz="1500" dirty="0"/>
+          </a:p>
+        </p:txBody>
+      </p:sp>
+      <p:sp>
+        <p:nvSpPr>
+          <p:cNvPr id="4" name="Kann KI richtig gut"/>
+          <p:cNvSpPr/>
+          <p:nvPr/>
+        </p:nvSpPr>
+        <p:spPr>
+          <a:xfrm>
+            <a:off x="484632" y="2103120"/>
+            <a:ext cx="5486400" cy="3931920"/>
+          </a:xfrm>
+          <a:prstGeom prst="roundRect">
+            <a:avLst>
+              <a:gd name="adj" fmla="val 2791"/>
+            </a:avLst>
+          </a:prstGeom>
+          <a:solidFill>
+            <a:schemeClr val="bg1"/>
+          </a:solidFill>
+          <a:ln/>
+          <a:effectLst>
+            <a:outerShdw sx="100000" sy="100000" kx="0" ky="0" algn="bl" rotWithShape="0" blurRad="127000" dist="38100" dir="5400000">
+              <a:srgbClr val="1F2A55">
+                <a:alpha val="16000"/>
+              </a:srgbClr>
+            </a:outerShdw>
+          </a:effectLst>
+        </p:spPr>
+      </p:sp>
+      <p:sp>
+        <p:nvSpPr>
+          <p:cNvPr id="5" name="Icon-Kreis LuCircleCheck"/>
+          <p:cNvSpPr/>
+          <p:nvPr/>
+        </p:nvSpPr>
+        <p:spPr>
+          <a:xfrm>
+            <a:off x="804672" y="2377440"/>
+            <a:ext cx="594360" cy="594360"/>
+          </a:xfrm>
+          <a:prstGeom prst="ellipse">
+            <a:avLst/>
+          </a:prstGeom>
+          <a:solidFill>
+            <a:schemeClr val="accent1"/>
+          </a:solidFill>
+          <a:ln/>
+        </p:spPr>
+      </p:sp>
+      <p:pic>
+        <p:nvPicPr>
+          <p:cNvPr id="6" name="Icon LuCircleCheck" descr="preencoded.png">    </p:cNvPr>
+          <p:cNvPicPr>
+            <a:picLocks noChangeAspect="1"/>
+          </p:cNvPicPr>
+          <p:nvPr/>
+        </p:nvPicPr>
+        <p:blipFill>
+          <a:blip r:embed="rId1"/>
+          <a:stretch>
+            <a:fillRect/>
+          </a:stretch>
+        </p:blipFill>
+        <p:spPr>
+          <a:xfrm>
+            <a:off x="959206" y="2531974"/>
+            <a:ext cx="285293" cy="285293"/>
+          </a:xfrm>
+          <a:prstGeom prst="rect">
+            <a:avLst/>
+          </a:prstGeom>
+        </p:spPr>
+      </p:pic>
+      <p:sp>
+        <p:nvSpPr>
+          <p:cNvPr id="7" name="Text 4"/>
+          <p:cNvSpPr txBox="1"/>
+          <p:nvPr/>
+        </p:nvSpPr>
+        <p:spPr>
+          <a:xfrm>
+            <a:off x="1581912" y="2377440"/>
+            <a:ext cx="4206240" cy="594360"/>
+          </a:xfrm>
+          <a:prstGeom prst="rect">
+            <a:avLst/>
+          </a:prstGeom>
+          <a:noFill/>
+          <a:ln/>
+        </p:spPr>
+        <p:txBody>
+          <a:bodyPr wrap="square" lIns="0" tIns="0" rIns="0" bIns="0" rtlCol="0" anchor="ctr"/>
+          <a:lstStyle/>
+          <a:p>
+            <a:pPr indent="0" marL="0">
+              <a:buNone/>
+            </a:pPr>
+            <a:r>
+              <a:rPr lang="en-US" sz="2000" b="1" dirty="0">
+                <a:solidFill>
+                  <a:schemeClr val="accent1"/>
+                </a:solidFill>
+              </a:rPr>
+              <a:t>Kann KI richtig gut</a:t>
+            </a:r>
+            <a:endParaRPr lang="en-US" sz="2000" dirty="0"/>
+          </a:p>
+        </p:txBody>
+      </p:sp>
+      <p:sp>
+        <p:nvSpPr>
+          <p:cNvPr id="8" name="Text 5"/>
+          <p:cNvSpPr txBox="1"/>
+          <p:nvPr/>
+        </p:nvSpPr>
+        <p:spPr>
+          <a:xfrm>
+            <a:off x="850392" y="3200400"/>
+            <a:ext cx="4846320" cy="2651760"/>
+          </a:xfrm>
+          <a:prstGeom prst="rect">
+            <a:avLst/>
+          </a:prstGeom>
+          <a:noFill/>
+          <a:ln/>
+        </p:spPr>
+        <p:txBody>
+          <a:bodyPr wrap="square" lIns="0" tIns="0" rIns="0" bIns="0" rtlCol="0" anchor="t"/>
+          <a:lstStyle/>
+          <a:p>
+            <a:pPr marL="228600" indent="-228600">
+              <a:spcAft>
+                <a:spcPts val="900"/>
+              </a:spcAft>
+              <a:buSzPct val="100000"/>
+              <a:buChar char="•"/>
+            </a:pPr>
+            <a:r>
+              <a:rPr lang="en-US" sz="1600" dirty="0">
+                <a:solidFill>
+                  <a:schemeClr val="tx1"/>
+                </a:solidFill>
+              </a:rPr>
+              <a:t>Texte schreiben, umformulieren und zusammenfassen</a:t>
+            </a:r>
+            <a:endParaRPr lang="en-US" sz="1600" dirty="0"/>
+          </a:p>
+          <a:p>
+            <a:pPr marL="228600" indent="-228600">
+              <a:spcAft>
+                <a:spcPts val="900"/>
+              </a:spcAft>
+              <a:buSzPct val="100000"/>
+              <a:buChar char="•"/>
+            </a:pPr>
+            <a:r>
+              <a:rPr lang="en-US" sz="1600" dirty="0">
+                <a:solidFill>
+                  <a:schemeClr val="tx1"/>
+                </a:solidFill>
+              </a:rPr>
+              <a:t>In Sekunden übersetzen</a:t>
+            </a:r>
+            <a:endParaRPr lang="en-US" sz="1600" dirty="0"/>
+          </a:p>
+          <a:p>
+            <a:pPr marL="228600" indent="-228600">
+              <a:spcAft>
+                <a:spcPts val="900"/>
+              </a:spcAft>
+              <a:buSzPct val="100000"/>
+              <a:buChar char="•"/>
+            </a:pPr>
+            <a:r>
+              <a:rPr lang="en-US" sz="1600" dirty="0">
+                <a:solidFill>
+                  <a:schemeClr val="tx1"/>
+                </a:solidFill>
+              </a:rPr>
+              <a:t>Ideen sammeln und Entwürfe liefern</a:t>
+            </a:r>
+            <a:endParaRPr lang="en-US" sz="1600" dirty="0"/>
+          </a:p>
+          <a:p>
+            <a:pPr marL="228600" indent="-228600">
+              <a:spcAft>
+                <a:spcPts val="900"/>
+              </a:spcAft>
+              <a:buSzPct val="100000"/>
+              <a:buChar char="•"/>
+            </a:pPr>
+            <a:r>
+              <a:rPr lang="en-US" sz="1600" dirty="0">
+                <a:solidFill>
+                  <a:schemeClr val="tx1"/>
+                </a:solidFill>
+              </a:rPr>
+              <a:t>Muster in riesigen Datenmengen finden</a:t>
+            </a:r>
+            <a:endParaRPr lang="en-US" sz="1600" dirty="0"/>
+          </a:p>
+          <a:p>
+            <a:pPr marL="228600" indent="-228600">
+              <a:spcAft>
+                <a:spcPts val="900"/>
+              </a:spcAft>
+              <a:buSzPct val="100000"/>
+              <a:buChar char="•"/>
+            </a:pPr>
+            <a:r>
+              <a:rPr lang="en-US" sz="1600" dirty="0">
+                <a:solidFill>
+                  <a:schemeClr val="tx1"/>
+                </a:solidFill>
+              </a:rPr>
+              <a:t>Beim Programmieren helfen</a:t>
+            </a:r>
+            <a:endParaRPr lang="en-US" sz="1600" dirty="0"/>
+          </a:p>
+        </p:txBody>
+      </p:sp>
+      <p:sp>
+        <p:nvSpPr>
+          <p:cNvPr id="9" name="Kann KI (noch) nicht"/>
+          <p:cNvSpPr/>
+          <p:nvPr/>
+        </p:nvSpPr>
+        <p:spPr>
+          <a:xfrm>
+            <a:off x="6217920" y="2103120"/>
+            <a:ext cx="5486400" cy="3931920"/>
+          </a:xfrm>
+          <a:prstGeom prst="roundRect">
+            <a:avLst>
+              <a:gd name="adj" fmla="val 2791"/>
+            </a:avLst>
+          </a:prstGeom>
+          <a:solidFill>
+            <a:schemeClr val="bg1"/>
+          </a:solidFill>
+          <a:ln/>
+          <a:effectLst>
+            <a:outerShdw sx="100000" sy="100000" kx="0" ky="0" algn="bl" rotWithShape="0" blurRad="127000" dist="38100" dir="5400000">
+              <a:srgbClr val="1F2A55">
+                <a:alpha val="16000"/>
+              </a:srgbClr>
+            </a:outerShdw>
+          </a:effectLst>
+        </p:spPr>
+      </p:sp>
+      <p:sp>
+        <p:nvSpPr>
+          <p:cNvPr id="10" name="Icon-Kreis LuCircleX"/>
+          <p:cNvSpPr/>
+          <p:nvPr/>
+        </p:nvSpPr>
+        <p:spPr>
+          <a:xfrm>
+            <a:off x="6537960" y="2377440"/>
+            <a:ext cx="594360" cy="594360"/>
+          </a:xfrm>
+          <a:prstGeom prst="ellipse">
+            <a:avLst/>
+          </a:prstGeom>
+          <a:solidFill>
+            <a:schemeClr val="accent6"/>
+          </a:solidFill>
+          <a:ln/>
+        </p:spPr>
+      </p:sp>
+      <p:pic>
+        <p:nvPicPr>
+          <p:cNvPr id="11" name="Icon LuCircleX" descr="preencoded.png">    </p:cNvPr>
+          <p:cNvPicPr>
+            <a:picLocks noChangeAspect="1"/>
+          </p:cNvPicPr>
+          <p:nvPr/>
+        </p:nvPicPr>
+        <p:blipFill>
+          <a:blip r:embed="rId2"/>
+          <a:stretch>
+            <a:fillRect/>
+          </a:stretch>
+        </p:blipFill>
+        <p:spPr>
+          <a:xfrm>
+            <a:off x="6692494" y="2531974"/>
+            <a:ext cx="285293" cy="285293"/>
+          </a:xfrm>
+          <a:prstGeom prst="rect">
+            <a:avLst/>
+          </a:prstGeom>
+        </p:spPr>
+      </p:pic>
+      <p:sp>
+        <p:nvSpPr>
+          <p:cNvPr id="12" name="Text 8"/>
+          <p:cNvSpPr txBox="1"/>
+          <p:nvPr/>
+        </p:nvSpPr>
+        <p:spPr>
+          <a:xfrm>
+            <a:off x="7315200" y="2377440"/>
+            <a:ext cx="4206240" cy="594360"/>
+          </a:xfrm>
+          <a:prstGeom prst="rect">
+            <a:avLst/>
+          </a:prstGeom>
+          <a:noFill/>
+          <a:ln/>
+        </p:spPr>
+        <p:txBody>
+          <a:bodyPr wrap="square" lIns="0" tIns="0" rIns="0" bIns="0" rtlCol="0" anchor="ctr"/>
+          <a:lstStyle/>
+          <a:p>
+            <a:pPr indent="0" marL="0">
+              <a:buNone/>
+            </a:pPr>
+            <a:r>
+              <a:rPr lang="en-US" sz="2000" b="1" dirty="0">
+                <a:solidFill>
+                  <a:schemeClr val="accent6"/>
+                </a:solidFill>
+              </a:rPr>
+              <a:t>Kann KI (noch) nicht</a:t>
+            </a:r>
+            <a:endParaRPr lang="en-US" sz="2000" dirty="0"/>
+          </a:p>
+        </p:txBody>
+      </p:sp>
+      <p:sp>
+        <p:nvSpPr>
+          <p:cNvPr id="13" name="Text 9"/>
+          <p:cNvSpPr txBox="1"/>
+          <p:nvPr/>
+        </p:nvSpPr>
+        <p:spPr>
+          <a:xfrm>
+            <a:off x="6583680" y="3200400"/>
+            <a:ext cx="4846320" cy="2651760"/>
+          </a:xfrm>
+          <a:prstGeom prst="rect">
+            <a:avLst/>
+          </a:prstGeom>
+          <a:noFill/>
+          <a:ln/>
+        </p:spPr>
+        <p:txBody>
+          <a:bodyPr wrap="square" lIns="0" tIns="0" rIns="0" bIns="0" rtlCol="0" anchor="t"/>
+          <a:lstStyle/>
+          <a:p>
+            <a:pPr marL="228600" indent="-228600">
+              <a:spcAft>
+                <a:spcPts val="900"/>
+              </a:spcAft>
+              <a:buSzPct val="100000"/>
+              <a:buChar char="•"/>
+            </a:pPr>
+            <a:r>
+              <a:rPr lang="en-US" sz="1600" dirty="0">
+                <a:solidFill>
+                  <a:schemeClr val="tx1"/>
+                </a:solidFill>
+              </a:rPr>
+              <a:t>Wirklich verstehen, was sie sagt</a:t>
+            </a:r>
+            <a:endParaRPr lang="en-US" sz="1600" dirty="0"/>
+          </a:p>
+          <a:p>
+            <a:pPr marL="228600" indent="-228600">
+              <a:spcAft>
+                <a:spcPts val="900"/>
+              </a:spcAft>
+              <a:buSzPct val="100000"/>
+              <a:buChar char="•"/>
+            </a:pPr>
+            <a:r>
+              <a:rPr lang="en-US" sz="1600" dirty="0">
+                <a:solidFill>
+                  <a:schemeClr val="tx1"/>
+                </a:solidFill>
+              </a:rPr>
+              <a:t>Verantwortung für Entscheidungen übernehmen</a:t>
+            </a:r>
+            <a:endParaRPr lang="en-US" sz="1600" dirty="0"/>
+          </a:p>
+          <a:p>
+            <a:pPr marL="228600" indent="-228600">
+              <a:spcAft>
+                <a:spcPts val="900"/>
+              </a:spcAft>
+              <a:buSzPct val="100000"/>
+              <a:buChar char="•"/>
+            </a:pPr>
+            <a:r>
+              <a:rPr lang="en-US" sz="1600" dirty="0">
+                <a:solidFill>
+                  <a:schemeClr val="tx1"/>
+                </a:solidFill>
+              </a:rPr>
+              <a:t>Gefühle haben – sie kann sie nur nachahmen</a:t>
+            </a:r>
+            <a:endParaRPr lang="en-US" sz="1600" dirty="0"/>
+          </a:p>
+          <a:p>
+            <a:pPr marL="228600" indent="-228600">
+              <a:spcAft>
+                <a:spcPts val="900"/>
+              </a:spcAft>
+              <a:buSzPct val="100000"/>
+              <a:buChar char="•"/>
+            </a:pPr>
+            <a:r>
+              <a:rPr lang="en-US" sz="1600" dirty="0">
+                <a:solidFill>
+                  <a:schemeClr val="tx1"/>
+                </a:solidFill>
+              </a:rPr>
+              <a:t>Immer richtig liegen</a:t>
+            </a:r>
+            <a:endParaRPr lang="en-US" sz="1600" dirty="0"/>
+          </a:p>
+          <a:p>
+            <a:pPr marL="228600" indent="-228600">
+              <a:spcAft>
+                <a:spcPts val="900"/>
+              </a:spcAft>
+              <a:buSzPct val="100000"/>
+              <a:buChar char="•"/>
+            </a:pPr>
+            <a:r>
+              <a:rPr lang="en-US" sz="1600" dirty="0">
+                <a:solidFill>
+                  <a:schemeClr val="tx1"/>
+                </a:solidFill>
+              </a:rPr>
+              <a:t>Dich kennen – außer du erzählst es ihr</a:t>
+            </a:r>
+            <a:endParaRPr lang="en-US" sz="1600" dirty="0"/>
+          </a:p>
+        </p:txBody>
+      </p:sp>
+      <p:sp>
+        <p:nvSpPr>
+          <p:cNvPr id="14" name="Hinweis optional"/>
+          <p:cNvSpPr/>
+          <p:nvPr/>
+        </p:nvSpPr>
+        <p:spPr>
+          <a:xfrm>
+            <a:off x="8366760" y="6437376"/>
+            <a:ext cx="2560320" cy="256032"/>
+          </a:xfrm>
+          <a:prstGeom prst="roundRect">
+            <a:avLst>
+              <a:gd name="adj" fmla="val 50000"/>
+            </a:avLst>
+          </a:prstGeom>
+          <a:solidFill>
+            <a:schemeClr val="bg2"/>
+          </a:solidFill>
+          <a:ln/>
+        </p:spPr>
+      </p:sp>
+      <p:sp>
+        <p:nvSpPr>
+          <p:cNvPr id="15" name="Text 11"/>
+          <p:cNvSpPr txBox="1"/>
+          <p:nvPr/>
+        </p:nvSpPr>
+        <p:spPr>
+          <a:xfrm>
+            <a:off x="8366760" y="6437376"/>
+            <a:ext cx="2560320" cy="256032"/>
+          </a:xfrm>
+          <a:prstGeom prst="rect">
+            <a:avLst/>
+          </a:prstGeom>
+          <a:noFill/>
+          <a:ln/>
+        </p:spPr>
+        <p:txBody>
+          <a:bodyPr wrap="square" lIns="0" tIns="0" rIns="0" bIns="0" rtlCol="0" anchor="ctr"/>
+          <a:lstStyle/>
+          <a:p>
+            <a:pPr algn="ctr" indent="0" marL="0">
+              <a:buNone/>
+            </a:pPr>
+            <a:r>
+              <a:rPr lang="en-US" sz="900" b="1" spc="100" kern="0" dirty="0">
+                <a:solidFill>
+                  <a:schemeClr val="accent3"/>
+                </a:solidFill>
+              </a:rPr>
+              <a:t>OPTIONAL · KAPITEL 02</a:t>
+            </a:r>
+            <a:endParaRPr lang="en-US" sz="900" dirty="0"/>
+          </a:p>
+        </p:txBody>
+      </p:sp>
+      <p:sp>
+        <p:nvSpPr>
+          <p:cNvPr id="25" name="Slide Number Placeholder 0"/>
+          <p:cNvSpPr>
+            <a:spLocks noGrp="1"/>
+          </p:cNvSpPr>
+          <p:nvPr>
+            <p:ph type="sldNum" sz="quarter" idx="4294967295"/>
+          </p:nvPr>
+        </p:nvSpPr>
+        <p:spPr>
+          <a:xfrm>
+            <a:off x="11155680" y="6455664"/>
+            <a:ext cx="548640" cy="274320"/>
+          </a:xfrm>
+          <a:prstGeom prst="rect">
+            <a:avLst/>
+          </a:prstGeom>
+          <a:extLst>
+            <a:ext uri="{C572A759-6A51-4108-AA02-DFA0A04FC94B}">
+              <ma14:wrappingTextBoxFlag xmlns:ma14="http://schemas.microsoft.com/office/mac/drawingml/2011/main" val="0"/>
+            </a:ext>
+          </a:extLst>
+        </p:spPr>
+        <p:txBody>
+          <a:bodyPr/>
+          <a:lstStyle>
+            <a:lvl1pPr>
+              <a:defRPr sz="1100">
+                <a:solidFill>
+                  <a:schemeClr val="accent3"/>
+                </a:solidFill>
+              </a:defRPr>
+            </a:lvl1pPr>
+          </a:lstStyle>
+          <a:p>
+            <a:pPr algn="r"/>
+            <a:fld id="{F7021451-1387-4CA6-816F-3879F97B5CBC}" type="slidenum">
+              <a:rPr b="0" lang="en-US"/>
+              <a:t>30</a:t>
+            </a:fld>
+            <a:endParaRPr lang="en-US"/>
+          </a:p>
+        </p:txBody>
+      </p:sp>
+    </p:spTree>
+  </p:cSld>
+  <p:clrMapOvr>
+    <a:masterClrMapping/>
+  </p:clrMapOvr>
+</p:sld>
+</file>
+
+<file path=ppt/slides/slide31.xml><?xml version="1.0" encoding="utf-8"?>
+<p:sld xmlns:a="http://schemas.openxmlformats.org/drawingml/2006/main" xmlns:r="http://schemas.openxmlformats.org/officeDocument/2006/relationships" xmlns:p="http://schemas.openxmlformats.org/presentationml/2006/main">
+  <p:cSld name="Slide 31">
+    <p:spTree>
+      <p:nvGrpSpPr>
+        <p:cNvPr id="1" name=""/>
+        <p:cNvGrpSpPr/>
+        <p:nvPr/>
+      </p:nvGrpSpPr>
+      <p:grpSpPr>
+        <a:xfrm>
+          <a:off x="0" y="0"/>
+          <a:ext cx="0" cy="0"/>
+          <a:chOff x="0" y="0"/>
+          <a:chExt cx="0" cy="0"/>
+        </a:xfrm>
+      </p:grpSpPr>
+      <p:sp>
+        <p:nvSpPr>
+          <p:cNvPr id="2" name="Text 1"/>
+          <p:cNvSpPr/>
+          <p:nvPr>
+            <p:ph idx="103" type="title" hasCustomPrompt="1"/>
+          </p:nvPr>
+        </p:nvSpPr>
+        <p:spPr>
+          <a:xfrm>
+            <a:off x="484632" y="548640"/>
+            <a:ext cx="8778240" cy="640080"/>
+          </a:xfrm>
+          <a:prstGeom prst="rect">
+            <a:avLst/>
+          </a:prstGeom>
+          <a:noFill/>
+          <a:ln/>
+        </p:spPr>
+        <p:txBody>
+          <a:bodyPr wrap="square" lIns="0" tIns="0" rIns="0" bIns="0" rtlCol="0" anchor="b"/>
+          <a:lstStyle/>
+          <a:p>
+            <a:pPr algn="l" indent="0" marL="0">
+              <a:buNone/>
+            </a:pPr>
+            <a:r>
+              <a:rPr lang="en-US" sz="3000" b="1" dirty="0">
+                <a:solidFill>
+                  <a:schemeClr val="tx1"/>
+                </a:solidFill>
+              </a:rPr>
+              <a:t>Die Prompt-Formel</a:t>
+            </a:r>
+            <a:endParaRPr lang="en-US" sz="3000" dirty="0"/>
+          </a:p>
+        </p:txBody>
+      </p:sp>
+      <p:sp>
+        <p:nvSpPr>
+          <p:cNvPr id="3" name="Text 1"/>
+          <p:cNvSpPr/>
+          <p:nvPr>
+            <p:ph idx="104" type="body" hasCustomPrompt="1"/>
+          </p:nvPr>
+        </p:nvSpPr>
+        <p:spPr>
+          <a:xfrm>
+            <a:off x="484632" y="1417320"/>
+            <a:ext cx="9601200" cy="365760"/>
+          </a:xfrm>
+          <a:prstGeom prst="rect">
+            <a:avLst/>
+          </a:prstGeom>
+          <a:noFill/>
+          <a:ln/>
+        </p:spPr>
+        <p:txBody>
+          <a:bodyPr wrap="square" lIns="0" tIns="0" rIns="0" bIns="0" rtlCol="0" anchor="ctr"/>
+          <a:lstStyle/>
+          <a:p>
+            <a:pPr indent="0" marL="0">
+              <a:buNone/>
+            </a:pPr>
+            <a:r>
+              <a:rPr lang="en-US" sz="1500" dirty="0">
+                <a:solidFill>
+                  <a:schemeClr val="tx2"/>
+                </a:solidFill>
+              </a:rPr>
+              <a:t>Fünf Bausteine für bessere Ergebnisse – Vorgeschmack auf Station 1</a:t>
+            </a:r>
+            <a:endParaRPr lang="en-US" sz="1500" dirty="0"/>
+          </a:p>
+        </p:txBody>
+      </p:sp>
+      <p:sp>
+        <p:nvSpPr>
+          <p:cNvPr id="4" name="Baustein Rolle"/>
+          <p:cNvSpPr/>
+          <p:nvPr/>
+        </p:nvSpPr>
+        <p:spPr>
+          <a:xfrm>
+            <a:off x="484632" y="2103120"/>
+            <a:ext cx="2103120" cy="1417320"/>
+          </a:xfrm>
+          <a:prstGeom prst="roundRect">
+            <a:avLst>
+              <a:gd name="adj" fmla="val 7742"/>
+            </a:avLst>
+          </a:prstGeom>
+          <a:solidFill>
+            <a:schemeClr val="tx1"/>
+          </a:solidFill>
+          <a:ln/>
+        </p:spPr>
+      </p:sp>
+      <p:sp>
+        <p:nvSpPr>
+          <p:cNvPr id="5" name="Text 3"/>
+          <p:cNvSpPr txBox="1"/>
+          <p:nvPr/>
+        </p:nvSpPr>
+        <p:spPr>
+          <a:xfrm>
+            <a:off x="713232" y="2240280"/>
+            <a:ext cx="1737360" cy="502920"/>
+          </a:xfrm>
+          <a:prstGeom prst="rect">
+            <a:avLst/>
+          </a:prstGeom>
+          <a:noFill/>
+          <a:ln/>
+        </p:spPr>
+        <p:txBody>
+          <a:bodyPr wrap="square" lIns="0" tIns="0" rIns="0" bIns="0" rtlCol="0" anchor="ctr"/>
+          <a:lstStyle/>
+          <a:p>
+            <a:pPr indent="0" marL="0">
+              <a:buNone/>
+            </a:pPr>
+            <a:r>
+              <a:rPr lang="en-US" sz="2000" b="1" dirty="0">
+                <a:solidFill>
+                  <a:schemeClr val="bg1"/>
+                </a:solidFill>
+              </a:rPr>
+              <a:t>Rolle</a:t>
+            </a:r>
+            <a:endParaRPr lang="en-US" sz="2000" dirty="0"/>
+          </a:p>
+        </p:txBody>
+      </p:sp>
+      <p:sp>
+        <p:nvSpPr>
+          <p:cNvPr id="6" name="Text 4"/>
+          <p:cNvSpPr txBox="1"/>
+          <p:nvPr/>
+        </p:nvSpPr>
+        <p:spPr>
+          <a:xfrm>
+            <a:off x="713232" y="2743200"/>
+            <a:ext cx="1737360" cy="640080"/>
+          </a:xfrm>
+          <a:prstGeom prst="rect">
+            <a:avLst/>
+          </a:prstGeom>
+          <a:noFill/>
+          <a:ln/>
+        </p:spPr>
+        <p:txBody>
+          <a:bodyPr wrap="square" lIns="0" tIns="0" rIns="0" bIns="0" rtlCol="0" anchor="t"/>
+          <a:lstStyle/>
+          <a:p>
+            <a:pPr indent="0" marL="0">
+              <a:buNone/>
+            </a:pPr>
+            <a:r>
+              <a:rPr lang="en-US" sz="1200" dirty="0">
+                <a:solidFill>
+                  <a:schemeClr val="bg1"/>
+                </a:solidFill>
+              </a:rPr>
+              <a:t>Wer soll die KI sein?</a:t>
+            </a:r>
+            <a:endParaRPr lang="en-US" sz="1200" dirty="0"/>
+          </a:p>
+        </p:txBody>
+      </p:sp>
+      <p:sp>
+        <p:nvSpPr>
+          <p:cNvPr id="7" name="Baustein Aufgabe"/>
+          <p:cNvSpPr/>
+          <p:nvPr/>
+        </p:nvSpPr>
+        <p:spPr>
+          <a:xfrm>
+            <a:off x="2752344" y="2103120"/>
+            <a:ext cx="2103120" cy="1417320"/>
+          </a:xfrm>
+          <a:prstGeom prst="roundRect">
+            <a:avLst>
+              <a:gd name="adj" fmla="val 7742"/>
+            </a:avLst>
+          </a:prstGeom>
+          <a:solidFill>
+            <a:schemeClr val="accent4"/>
+          </a:solidFill>
+          <a:ln/>
+        </p:spPr>
+      </p:sp>
+      <p:sp>
+        <p:nvSpPr>
+          <p:cNvPr id="8" name="Text 6"/>
+          <p:cNvSpPr txBox="1"/>
+          <p:nvPr/>
+        </p:nvSpPr>
+        <p:spPr>
+          <a:xfrm>
+            <a:off x="2980944" y="2240280"/>
+            <a:ext cx="1737360" cy="502920"/>
+          </a:xfrm>
+          <a:prstGeom prst="rect">
+            <a:avLst/>
+          </a:prstGeom>
+          <a:noFill/>
+          <a:ln/>
+        </p:spPr>
+        <p:txBody>
+          <a:bodyPr wrap="square" lIns="0" tIns="0" rIns="0" bIns="0" rtlCol="0" anchor="ctr"/>
+          <a:lstStyle/>
+          <a:p>
+            <a:pPr indent="0" marL="0">
+              <a:buNone/>
+            </a:pPr>
+            <a:r>
+              <a:rPr lang="en-US" sz="2000" b="1" dirty="0">
+                <a:solidFill>
+                  <a:schemeClr val="bg1"/>
+                </a:solidFill>
+              </a:rPr>
+              <a:t>Aufgabe</a:t>
+            </a:r>
+            <a:endParaRPr lang="en-US" sz="2000" dirty="0"/>
+          </a:p>
+        </p:txBody>
+      </p:sp>
+      <p:sp>
+        <p:nvSpPr>
+          <p:cNvPr id="9" name="Text 7"/>
+          <p:cNvSpPr txBox="1"/>
+          <p:nvPr/>
+        </p:nvSpPr>
+        <p:spPr>
+          <a:xfrm>
+            <a:off x="2980944" y="2743200"/>
+            <a:ext cx="1737360" cy="640080"/>
+          </a:xfrm>
+          <a:prstGeom prst="rect">
+            <a:avLst/>
+          </a:prstGeom>
+          <a:noFill/>
+          <a:ln/>
+        </p:spPr>
+        <p:txBody>
+          <a:bodyPr wrap="square" lIns="0" tIns="0" rIns="0" bIns="0" rtlCol="0" anchor="t"/>
+          <a:lstStyle/>
+          <a:p>
+            <a:pPr indent="0" marL="0">
+              <a:buNone/>
+            </a:pPr>
+            <a:r>
+              <a:rPr lang="en-US" sz="1200" dirty="0">
+                <a:solidFill>
+                  <a:schemeClr val="bg1"/>
+                </a:solidFill>
+              </a:rPr>
+              <a:t>Was genau soll sie tun?</a:t>
+            </a:r>
+            <a:endParaRPr lang="en-US" sz="1200" dirty="0"/>
+          </a:p>
+        </p:txBody>
+      </p:sp>
+      <p:sp>
+        <p:nvSpPr>
+          <p:cNvPr id="10" name="Baustein Kontext"/>
+          <p:cNvSpPr/>
+          <p:nvPr/>
+        </p:nvSpPr>
+        <p:spPr>
+          <a:xfrm>
+            <a:off x="5020056" y="2103120"/>
+            <a:ext cx="2103120" cy="1417320"/>
+          </a:xfrm>
+          <a:prstGeom prst="roundRect">
+            <a:avLst>
+              <a:gd name="adj" fmla="val 7742"/>
+            </a:avLst>
+          </a:prstGeom>
+          <a:solidFill>
+            <a:schemeClr val="accent1"/>
+          </a:solidFill>
+          <a:ln/>
+        </p:spPr>
+      </p:sp>
+      <p:sp>
+        <p:nvSpPr>
+          <p:cNvPr id="11" name="Text 9"/>
+          <p:cNvSpPr txBox="1"/>
+          <p:nvPr/>
+        </p:nvSpPr>
+        <p:spPr>
+          <a:xfrm>
+            <a:off x="5248656" y="2240280"/>
+            <a:ext cx="1737360" cy="502920"/>
+          </a:xfrm>
+          <a:prstGeom prst="rect">
+            <a:avLst/>
+          </a:prstGeom>
+          <a:noFill/>
+          <a:ln/>
+        </p:spPr>
+        <p:txBody>
+          <a:bodyPr wrap="square" lIns="0" tIns="0" rIns="0" bIns="0" rtlCol="0" anchor="ctr"/>
+          <a:lstStyle/>
+          <a:p>
+            <a:pPr indent="0" marL="0">
+              <a:buNone/>
+            </a:pPr>
+            <a:r>
+              <a:rPr lang="en-US" sz="2000" b="1" dirty="0">
+                <a:solidFill>
+                  <a:schemeClr val="bg1"/>
+                </a:solidFill>
+              </a:rPr>
+              <a:t>Kontext</a:t>
+            </a:r>
+            <a:endParaRPr lang="en-US" sz="2000" dirty="0"/>
+          </a:p>
+        </p:txBody>
+      </p:sp>
+      <p:sp>
+        <p:nvSpPr>
+          <p:cNvPr id="12" name="Text 10"/>
+          <p:cNvSpPr txBox="1"/>
+          <p:nvPr/>
+        </p:nvSpPr>
+        <p:spPr>
+          <a:xfrm>
+            <a:off x="5248656" y="2743200"/>
+            <a:ext cx="1737360" cy="640080"/>
+          </a:xfrm>
+          <a:prstGeom prst="rect">
+            <a:avLst/>
+          </a:prstGeom>
+          <a:noFill/>
+          <a:ln/>
+        </p:spPr>
+        <p:txBody>
+          <a:bodyPr wrap="square" lIns="0" tIns="0" rIns="0" bIns="0" rtlCol="0" anchor="t"/>
+          <a:lstStyle/>
+          <a:p>
+            <a:pPr indent="0" marL="0">
+              <a:buNone/>
+            </a:pPr>
+            <a:r>
+              <a:rPr lang="en-US" sz="1200" dirty="0">
+                <a:solidFill>
+                  <a:schemeClr val="bg1"/>
+                </a:solidFill>
+              </a:rPr>
+              <a:t>Für wen? Worum geht's?</a:t>
+            </a:r>
+            <a:endParaRPr lang="en-US" sz="1200" dirty="0"/>
+          </a:p>
+        </p:txBody>
+      </p:sp>
+      <p:sp>
+        <p:nvSpPr>
+          <p:cNvPr id="13" name="Baustein Format"/>
+          <p:cNvSpPr/>
+          <p:nvPr/>
+        </p:nvSpPr>
+        <p:spPr>
+          <a:xfrm>
+            <a:off x="7287768" y="2103120"/>
+            <a:ext cx="2103120" cy="1417320"/>
+          </a:xfrm>
+          <a:prstGeom prst="roundRect">
+            <a:avLst>
+              <a:gd name="adj" fmla="val 7742"/>
+            </a:avLst>
+          </a:prstGeom>
+          <a:solidFill>
+            <a:schemeClr val="accent2"/>
+          </a:solidFill>
+          <a:ln/>
+        </p:spPr>
+      </p:sp>
+      <p:sp>
+        <p:nvSpPr>
+          <p:cNvPr id="14" name="Text 12"/>
+          <p:cNvSpPr txBox="1"/>
+          <p:nvPr/>
+        </p:nvSpPr>
+        <p:spPr>
+          <a:xfrm>
+            <a:off x="7516368" y="2240280"/>
+            <a:ext cx="1737360" cy="502920"/>
+          </a:xfrm>
+          <a:prstGeom prst="rect">
+            <a:avLst/>
+          </a:prstGeom>
+          <a:noFill/>
+          <a:ln/>
+        </p:spPr>
+        <p:txBody>
+          <a:bodyPr wrap="square" lIns="0" tIns="0" rIns="0" bIns="0" rtlCol="0" anchor="ctr"/>
+          <a:lstStyle/>
+          <a:p>
+            <a:pPr indent="0" marL="0">
+              <a:buNone/>
+            </a:pPr>
+            <a:r>
+              <a:rPr lang="en-US" sz="2000" b="1" dirty="0">
+                <a:solidFill>
+                  <a:schemeClr val="bg1"/>
+                </a:solidFill>
+              </a:rPr>
+              <a:t>Format</a:t>
+            </a:r>
+            <a:endParaRPr lang="en-US" sz="2000" dirty="0"/>
+          </a:p>
+        </p:txBody>
+      </p:sp>
+      <p:sp>
+        <p:nvSpPr>
+          <p:cNvPr id="15" name="Text 13"/>
+          <p:cNvSpPr txBox="1"/>
+          <p:nvPr/>
+        </p:nvSpPr>
+        <p:spPr>
+          <a:xfrm>
+            <a:off x="7516368" y="2743200"/>
+            <a:ext cx="1737360" cy="640080"/>
+          </a:xfrm>
+          <a:prstGeom prst="rect">
+            <a:avLst/>
+          </a:prstGeom>
+          <a:noFill/>
+          <a:ln/>
+        </p:spPr>
+        <p:txBody>
+          <a:bodyPr wrap="square" lIns="0" tIns="0" rIns="0" bIns="0" rtlCol="0" anchor="t"/>
+          <a:lstStyle/>
+          <a:p>
+            <a:pPr indent="0" marL="0">
+              <a:buNone/>
+            </a:pPr>
+            <a:r>
+              <a:rPr lang="en-US" sz="1200" dirty="0">
+                <a:solidFill>
+                  <a:schemeClr val="bg1"/>
+                </a:solidFill>
+              </a:rPr>
+              <a:t>Wie lang? Welche Form?</a:t>
+            </a:r>
+            <a:endParaRPr lang="en-US" sz="1200" dirty="0"/>
+          </a:p>
+        </p:txBody>
+      </p:sp>
+      <p:sp>
+        <p:nvSpPr>
+          <p:cNvPr id="16" name="Baustein Stil"/>
+          <p:cNvSpPr/>
+          <p:nvPr/>
+        </p:nvSpPr>
+        <p:spPr>
+          <a:xfrm>
+            <a:off x="9555480" y="2103120"/>
+            <a:ext cx="2103120" cy="1417320"/>
+          </a:xfrm>
+          <a:prstGeom prst="roundRect">
+            <a:avLst>
+              <a:gd name="adj" fmla="val 7742"/>
+            </a:avLst>
+          </a:prstGeom>
+          <a:solidFill>
+            <a:schemeClr val="accent3"/>
+          </a:solidFill>
+          <a:ln/>
+        </p:spPr>
+      </p:sp>
+      <p:sp>
+        <p:nvSpPr>
+          <p:cNvPr id="17" name="Text 15"/>
+          <p:cNvSpPr txBox="1"/>
+          <p:nvPr/>
+        </p:nvSpPr>
+        <p:spPr>
+          <a:xfrm>
+            <a:off x="9784080" y="2240280"/>
+            <a:ext cx="1737360" cy="502920"/>
+          </a:xfrm>
+          <a:prstGeom prst="rect">
+            <a:avLst/>
+          </a:prstGeom>
+          <a:noFill/>
+          <a:ln/>
+        </p:spPr>
+        <p:txBody>
+          <a:bodyPr wrap="square" lIns="0" tIns="0" rIns="0" bIns="0" rtlCol="0" anchor="ctr"/>
+          <a:lstStyle/>
+          <a:p>
+            <a:pPr indent="0" marL="0">
+              <a:buNone/>
+            </a:pPr>
+            <a:r>
+              <a:rPr lang="en-US" sz="2000" b="1" dirty="0">
+                <a:solidFill>
+                  <a:schemeClr val="bg1"/>
+                </a:solidFill>
+              </a:rPr>
+              <a:t>Stil</a:t>
+            </a:r>
+            <a:endParaRPr lang="en-US" sz="2000" dirty="0"/>
+          </a:p>
+        </p:txBody>
+      </p:sp>
+      <p:sp>
+        <p:nvSpPr>
+          <p:cNvPr id="18" name="Text 16"/>
+          <p:cNvSpPr txBox="1"/>
+          <p:nvPr/>
+        </p:nvSpPr>
+        <p:spPr>
+          <a:xfrm>
+            <a:off x="9784080" y="2743200"/>
+            <a:ext cx="1737360" cy="640080"/>
+          </a:xfrm>
+          <a:prstGeom prst="rect">
+            <a:avLst/>
+          </a:prstGeom>
+          <a:noFill/>
+          <a:ln/>
+        </p:spPr>
+        <p:txBody>
+          <a:bodyPr wrap="square" lIns="0" tIns="0" rIns="0" bIns="0" rtlCol="0" anchor="t"/>
+          <a:lstStyle/>
+          <a:p>
+            <a:pPr indent="0" marL="0">
+              <a:buNone/>
+            </a:pPr>
+            <a:r>
+              <a:rPr lang="en-US" sz="1200" dirty="0">
+                <a:solidFill>
+                  <a:schemeClr val="bg1"/>
+                </a:solidFill>
+              </a:rPr>
+              <a:t>Welcher Ton?</a:t>
+            </a:r>
+            <a:endParaRPr lang="en-US" sz="1200" dirty="0"/>
+          </a:p>
+        </p:txBody>
+      </p:sp>
+      <p:sp>
+        <p:nvSpPr>
+          <p:cNvPr id="19" name="Fertiger Prompt"/>
+          <p:cNvSpPr/>
+          <p:nvPr/>
+        </p:nvSpPr>
+        <p:spPr>
+          <a:xfrm>
+            <a:off x="484632" y="3840480"/>
+            <a:ext cx="11219688" cy="1508760"/>
+          </a:xfrm>
+          <a:prstGeom prst="roundRect">
+            <a:avLst>
+              <a:gd name="adj" fmla="val 7273"/>
+            </a:avLst>
+          </a:prstGeom>
+          <a:solidFill>
+            <a:schemeClr val="bg1"/>
+          </a:solidFill>
+          <a:ln/>
+          <a:effectLst>
+            <a:outerShdw sx="100000" sy="100000" kx="0" ky="0" algn="bl" rotWithShape="0" blurRad="127000" dist="38100" dir="5400000">
+              <a:srgbClr val="1F2A55">
+                <a:alpha val="16000"/>
+              </a:srgbClr>
+            </a:outerShdw>
+          </a:effectLst>
+        </p:spPr>
+      </p:sp>
+      <p:sp>
+        <p:nvSpPr>
+          <p:cNvPr id="20" name="Text 18"/>
+          <p:cNvSpPr txBox="1"/>
+          <p:nvPr/>
+        </p:nvSpPr>
+        <p:spPr>
+          <a:xfrm>
+            <a:off x="777240" y="3977640"/>
+            <a:ext cx="4572000" cy="274320"/>
+          </a:xfrm>
+          <a:prstGeom prst="rect">
+            <a:avLst/>
+          </a:prstGeom>
+          <a:noFill/>
+          <a:ln/>
+        </p:spPr>
+        <p:txBody>
+          <a:bodyPr wrap="square" lIns="0" tIns="0" rIns="0" bIns="0" rtlCol="0" anchor="ctr"/>
+          <a:lstStyle/>
+          <a:p>
+            <a:pPr indent="0" marL="0">
+              <a:buNone/>
+            </a:pPr>
+            <a:r>
+              <a:rPr lang="en-US" sz="1100" b="1" spc="200" kern="0" dirty="0">
+                <a:solidFill>
+                  <a:schemeClr val="accent3"/>
+                </a:solidFill>
+              </a:rPr>
+              <a:t>ZUSAMMENGESETZT</a:t>
+            </a:r>
+            <a:endParaRPr lang="en-US" sz="1100" dirty="0"/>
+          </a:p>
+        </p:txBody>
+      </p:sp>
+      <p:sp>
+        <p:nvSpPr>
+          <p:cNvPr id="21" name="Text 19"/>
+          <p:cNvSpPr txBox="1"/>
+          <p:nvPr/>
+        </p:nvSpPr>
+        <p:spPr>
+          <a:xfrm>
+            <a:off x="777240" y="4297680"/>
+            <a:ext cx="10607040" cy="914400"/>
+          </a:xfrm>
+          <a:prstGeom prst="rect">
+            <a:avLst/>
+          </a:prstGeom>
+          <a:noFill/>
+          <a:ln/>
+        </p:spPr>
+        <p:txBody>
+          <a:bodyPr wrap="square" lIns="0" tIns="0" rIns="0" bIns="0" rtlCol="0" anchor="t"/>
+          <a:lstStyle/>
+          <a:p>
+            <a:pPr indent="0" marL="0">
+              <a:buNone/>
+            </a:pPr>
+            <a:r>
+              <a:rPr lang="en-US" sz="1800" b="1" dirty="0">
+                <a:solidFill>
+                  <a:schemeClr val="tx1"/>
+                </a:solidFill>
+              </a:rPr>
+              <a:t>Du bist Redakteur der Schülerzeitung. </a:t>
+            </a:r>
+            <a:pPr indent="0" marL="0">
+              <a:buNone/>
+            </a:pPr>
+            <a:r>
+              <a:rPr lang="en-US" sz="1800" b="1" dirty="0">
+                <a:solidFill>
+                  <a:schemeClr val="accent4"/>
+                </a:solidFill>
+              </a:rPr>
+              <a:t>Schreib einen Instagram-Post </a:t>
+            </a:r>
+            <a:pPr indent="0" marL="0">
+              <a:buNone/>
+            </a:pPr>
+            <a:r>
+              <a:rPr lang="en-US" sz="1800" b="1" dirty="0">
+                <a:solidFill>
+                  <a:schemeClr val="accent1"/>
+                </a:solidFill>
+              </a:rPr>
+              <a:t>für unser Schulfest am Freitag, Klassen 5–10. </a:t>
+            </a:r>
+            <a:pPr indent="0" marL="0">
+              <a:buNone/>
+            </a:pPr>
+            <a:r>
+              <a:rPr lang="en-US" sz="1800" b="1" dirty="0">
+                <a:solidFill>
+                  <a:schemeClr val="accent2"/>
+                </a:solidFill>
+              </a:rPr>
+              <a:t>Max. 80 Wörter, 3 Hashtags. </a:t>
+            </a:r>
+            <a:pPr indent="0" marL="0">
+              <a:buNone/>
+            </a:pPr>
+            <a:r>
+              <a:rPr lang="en-US" sz="1800" b="1" dirty="0">
+                <a:solidFill>
+                  <a:schemeClr val="accent3"/>
+                </a:solidFill>
+              </a:rPr>
+              <a:t>Locker und einladend.</a:t>
+            </a:r>
+            <a:endParaRPr lang="en-US" sz="1800" dirty="0"/>
+          </a:p>
+        </p:txBody>
+      </p:sp>
+      <p:sp>
+        <p:nvSpPr>
+          <p:cNvPr id="22" name="Vergleich"/>
+          <p:cNvSpPr/>
+          <p:nvPr/>
+        </p:nvSpPr>
+        <p:spPr>
+          <a:xfrm>
+            <a:off x="484632" y="5532120"/>
+            <a:ext cx="11219688" cy="502920"/>
+          </a:xfrm>
+          <a:prstGeom prst="roundRect">
+            <a:avLst>
+              <a:gd name="adj" fmla="val 21818"/>
+            </a:avLst>
+          </a:prstGeom>
+          <a:solidFill>
+            <a:schemeClr val="accent5"/>
+          </a:solidFill>
+          <a:ln/>
+        </p:spPr>
+      </p:sp>
+      <p:sp>
+        <p:nvSpPr>
+          <p:cNvPr id="23" name="Text 21"/>
+          <p:cNvSpPr txBox="1"/>
+          <p:nvPr/>
+        </p:nvSpPr>
+        <p:spPr>
+          <a:xfrm>
+            <a:off x="777240" y="5532120"/>
+            <a:ext cx="10607040" cy="502920"/>
+          </a:xfrm>
+          <a:prstGeom prst="rect">
+            <a:avLst/>
+          </a:prstGeom>
+          <a:noFill/>
+          <a:ln/>
+        </p:spPr>
+        <p:txBody>
+          <a:bodyPr wrap="square" lIns="0" tIns="0" rIns="0" bIns="0" rtlCol="0" anchor="ctr"/>
+          <a:lstStyle/>
+          <a:p>
+            <a:pPr indent="0" marL="0">
+              <a:buNone/>
+            </a:pPr>
+            <a:r>
+              <a:rPr lang="en-US" sz="1400" b="1" dirty="0">
+                <a:solidFill>
+                  <a:schemeClr val="accent1"/>
+                </a:solidFill>
+              </a:rPr>
+              <a:t>Zum Vergleich: </a:t>
+            </a:r>
+            <a:pPr indent="0" marL="0">
+              <a:buNone/>
+            </a:pPr>
+            <a:r>
+              <a:rPr lang="en-US" sz="1400" dirty="0">
+                <a:solidFill>
+                  <a:schemeClr val="tx1"/>
+                </a:solidFill>
+              </a:rPr>
+              <a:t>„Schreib was übers Schulfest.“ – probiert beides aus und vergleicht!</a:t>
+            </a:r>
+            <a:endParaRPr lang="en-US" sz="1400" dirty="0"/>
+          </a:p>
+        </p:txBody>
+      </p:sp>
+      <p:sp>
+        <p:nvSpPr>
+          <p:cNvPr id="24" name="Hinweis optional"/>
+          <p:cNvSpPr/>
+          <p:nvPr/>
+        </p:nvSpPr>
+        <p:spPr>
+          <a:xfrm>
+            <a:off x="8366760" y="6437376"/>
+            <a:ext cx="2560320" cy="256032"/>
+          </a:xfrm>
+          <a:prstGeom prst="roundRect">
+            <a:avLst>
+              <a:gd name="adj" fmla="val 50000"/>
+            </a:avLst>
+          </a:prstGeom>
+          <a:solidFill>
+            <a:schemeClr val="bg2"/>
+          </a:solidFill>
+          <a:ln/>
+        </p:spPr>
+      </p:sp>
+      <p:sp>
+        <p:nvSpPr>
+          <p:cNvPr id="25" name="Text 23"/>
+          <p:cNvSpPr txBox="1"/>
+          <p:nvPr/>
+        </p:nvSpPr>
+        <p:spPr>
+          <a:xfrm>
+            <a:off x="8366760" y="6437376"/>
+            <a:ext cx="2560320" cy="256032"/>
+          </a:xfrm>
+          <a:prstGeom prst="rect">
+            <a:avLst/>
+          </a:prstGeom>
+          <a:noFill/>
+          <a:ln/>
+        </p:spPr>
+        <p:txBody>
+          <a:bodyPr wrap="square" lIns="0" tIns="0" rIns="0" bIns="0" rtlCol="0" anchor="ctr"/>
+          <a:lstStyle/>
+          <a:p>
+            <a:pPr algn="ctr" indent="0" marL="0">
+              <a:buNone/>
+            </a:pPr>
+            <a:r>
+              <a:rPr lang="en-US" sz="900" b="1" spc="100" kern="0" dirty="0">
+                <a:solidFill>
+                  <a:schemeClr val="accent3"/>
+                </a:solidFill>
+              </a:rPr>
+              <a:t>OPTIONAL · KAPITEL 03</a:t>
+            </a:r>
+            <a:endParaRPr lang="en-US" sz="900" dirty="0"/>
+          </a:p>
+        </p:txBody>
+      </p:sp>
+      <p:sp>
+        <p:nvSpPr>
+          <p:cNvPr id="25" name="Slide Number Placeholder 0"/>
+          <p:cNvSpPr>
+            <a:spLocks noGrp="1"/>
+          </p:cNvSpPr>
+          <p:nvPr>
+            <p:ph type="sldNum" sz="quarter" idx="4294967295"/>
+          </p:nvPr>
+        </p:nvSpPr>
+        <p:spPr>
+          <a:xfrm>
+            <a:off x="11155680" y="6455664"/>
+            <a:ext cx="548640" cy="274320"/>
+          </a:xfrm>
+          <a:prstGeom prst="rect">
+            <a:avLst/>
+          </a:prstGeom>
+          <a:extLst>
+            <a:ext uri="{C572A759-6A51-4108-AA02-DFA0A04FC94B}">
+              <ma14:wrappingTextBoxFlag xmlns:ma14="http://schemas.microsoft.com/office/mac/drawingml/2011/main" val="0"/>
+            </a:ext>
+          </a:extLst>
+        </p:spPr>
+        <p:txBody>
+          <a:bodyPr/>
+          <a:lstStyle>
+            <a:lvl1pPr>
+              <a:defRPr sz="1100">
+                <a:solidFill>
+                  <a:schemeClr val="accent3"/>
+                </a:solidFill>
+              </a:defRPr>
+            </a:lvl1pPr>
+          </a:lstStyle>
+          <a:p>
+            <a:pPr algn="r"/>
+            <a:fld id="{F7021451-1387-4CA6-816F-3879F97B5CBC}" type="slidenum">
+              <a:rPr b="0" lang="en-US"/>
+              <a:t>31</a:t>
+            </a:fld>
+            <a:endParaRPr lang="en-US"/>
+          </a:p>
+        </p:txBody>
+      </p:sp>
+    </p:spTree>
+  </p:cSld>
+  <p:clrMapOvr>
+    <a:masterClrMapping/>
+  </p:clrMapOvr>
+</p:sld>
+</file>
+
+<file path=ppt/slides/slide32.xml><?xml version="1.0" encoding="utf-8"?>
+<p:sld xmlns:a="http://schemas.openxmlformats.org/drawingml/2006/main" xmlns:r="http://schemas.openxmlformats.org/officeDocument/2006/relationships" xmlns:p="http://schemas.openxmlformats.org/presentationml/2006/main">
+  <p:cSld name="Slide 32">
+    <p:spTree>
+      <p:nvGrpSpPr>
+        <p:cNvPr id="1" name=""/>
+        <p:cNvGrpSpPr/>
+        <p:nvPr/>
+      </p:nvGrpSpPr>
+      <p:grpSpPr>
+        <a:xfrm>
+          <a:off x="0" y="0"/>
+          <a:ext cx="0" cy="0"/>
+          <a:chOff x="0" y="0"/>
+          <a:chExt cx="0" cy="0"/>
+        </a:xfrm>
+      </p:grpSpPr>
+      <p:sp>
+        <p:nvSpPr>
+          <p:cNvPr id="2" name="Text 1"/>
+          <p:cNvSpPr/>
+          <p:nvPr>
+            <p:ph idx="103" type="title" hasCustomPrompt="1"/>
+          </p:nvPr>
+        </p:nvSpPr>
+        <p:spPr>
+          <a:xfrm>
+            <a:off x="484632" y="548640"/>
+            <a:ext cx="8778240" cy="640080"/>
+          </a:xfrm>
+          <a:prstGeom prst="rect">
+            <a:avLst/>
+          </a:prstGeom>
+          <a:noFill/>
+          <a:ln/>
+        </p:spPr>
+        <p:txBody>
+          <a:bodyPr wrap="square" lIns="0" tIns="0" rIns="0" bIns="0" rtlCol="0" anchor="b"/>
+          <a:lstStyle/>
+          <a:p>
+            <a:pPr algn="l" indent="0" marL="0">
+              <a:buNone/>
+            </a:pPr>
+            <a:r>
+              <a:rPr lang="en-US" sz="3000" b="1" dirty="0">
+                <a:solidFill>
+                  <a:schemeClr val="tx1"/>
+                </a:solidFill>
+              </a:rPr>
+              <a:t>KI in den Berufen von morgen</a:t>
+            </a:r>
+            <a:endParaRPr lang="en-US" sz="3000" dirty="0"/>
+          </a:p>
+        </p:txBody>
+      </p:sp>
+      <p:sp>
+        <p:nvSpPr>
+          <p:cNvPr id="3" name="Mitmachen MITMACHEN"/>
+          <p:cNvSpPr/>
+          <p:nvPr/>
+        </p:nvSpPr>
+        <p:spPr>
+          <a:xfrm>
+            <a:off x="484632" y="1417320"/>
+            <a:ext cx="1847088" cy="365760"/>
+          </a:xfrm>
+          <a:prstGeom prst="roundRect">
+            <a:avLst>
+              <a:gd name="adj" fmla="val 50000"/>
+            </a:avLst>
+          </a:prstGeom>
+          <a:solidFill>
+            <a:schemeClr val="accent1"/>
+          </a:solidFill>
+          <a:ln/>
+        </p:spPr>
+      </p:sp>
+      <p:pic>
+        <p:nvPicPr>
+          <p:cNvPr id="4" name="Mitmachen-Icon" descr="preencoded.png">    </p:cNvPr>
+          <p:cNvPicPr>
+            <a:picLocks noChangeAspect="1"/>
+          </p:cNvPicPr>
+          <p:nvPr/>
+        </p:nvPicPr>
+        <p:blipFill>
+          <a:blip r:embed="rId1"/>
+          <a:stretch>
+            <a:fillRect/>
+          </a:stretch>
+        </p:blipFill>
+        <p:spPr>
+          <a:xfrm>
+            <a:off x="603504" y="1481328"/>
+            <a:ext cx="237744" cy="237744"/>
+          </a:xfrm>
+          <a:prstGeom prst="rect">
+            <a:avLst/>
+          </a:prstGeom>
+        </p:spPr>
+      </p:pic>
+      <p:sp>
+        <p:nvSpPr>
+          <p:cNvPr id="5" name="Text 2"/>
+          <p:cNvSpPr txBox="1"/>
+          <p:nvPr/>
+        </p:nvSpPr>
+        <p:spPr>
+          <a:xfrm>
+            <a:off x="914400" y="1417320"/>
+            <a:ext cx="1389888" cy="365760"/>
+          </a:xfrm>
+          <a:prstGeom prst="rect">
+            <a:avLst/>
+          </a:prstGeom>
+          <a:noFill/>
+          <a:ln/>
+        </p:spPr>
+        <p:txBody>
+          <a:bodyPr wrap="square" lIns="0" tIns="0" rIns="0" bIns="0" rtlCol="0" anchor="ctr"/>
+          <a:lstStyle/>
+          <a:p>
+            <a:pPr indent="0" marL="0">
+              <a:buNone/>
+            </a:pPr>
+            <a:r>
+              <a:rPr lang="en-US" sz="1100" b="1" spc="300" kern="0" dirty="0">
+                <a:solidFill>
+                  <a:schemeClr val="bg1"/>
+                </a:solidFill>
+              </a:rPr>
+              <a:t>MITMACHEN</a:t>
+            </a:r>
+            <a:endParaRPr lang="en-US" sz="1100" dirty="0"/>
+          </a:p>
+        </p:txBody>
+      </p:sp>
+      <p:sp>
+        <p:nvSpPr>
+          <p:cNvPr id="6" name="Text 3"/>
+          <p:cNvSpPr txBox="1"/>
+          <p:nvPr/>
+        </p:nvSpPr>
+        <p:spPr>
+          <a:xfrm>
+            <a:off x="2514600" y="1417320"/>
+            <a:ext cx="8229600" cy="365760"/>
+          </a:xfrm>
+          <a:prstGeom prst="rect">
+            <a:avLst/>
+          </a:prstGeom>
+          <a:noFill/>
+          <a:ln/>
+        </p:spPr>
+        <p:txBody>
+          <a:bodyPr wrap="square" lIns="0" tIns="0" rIns="0" bIns="0" rtlCol="0" anchor="ctr"/>
+          <a:lstStyle/>
+          <a:p>
+            <a:pPr indent="0" marL="0">
+              <a:buNone/>
+            </a:pPr>
+            <a:r>
+              <a:rPr lang="en-US" sz="1500" dirty="0">
+                <a:solidFill>
+                  <a:schemeClr val="tx2"/>
+                </a:solidFill>
+              </a:rPr>
+              <a:t>Welcher Beruf interessiert dich – und wo hilft dort KI?</a:t>
+            </a:r>
+            <a:endParaRPr lang="en-US" sz="1500" dirty="0"/>
+          </a:p>
+        </p:txBody>
+      </p:sp>
+      <p:sp>
+        <p:nvSpPr>
+          <p:cNvPr id="7" name="Beruf Medizin"/>
+          <p:cNvSpPr/>
+          <p:nvPr/>
+        </p:nvSpPr>
+        <p:spPr>
+          <a:xfrm>
+            <a:off x="484632" y="2148840"/>
+            <a:ext cx="3611880" cy="1691640"/>
+          </a:xfrm>
+          <a:prstGeom prst="roundRect">
+            <a:avLst>
+              <a:gd name="adj" fmla="val 6486"/>
+            </a:avLst>
+          </a:prstGeom>
+          <a:solidFill>
+            <a:schemeClr val="bg1"/>
+          </a:solidFill>
+          <a:ln/>
+          <a:effectLst>
+            <a:outerShdw sx="100000" sy="100000" kx="0" ky="0" algn="bl" rotWithShape="0" blurRad="127000" dist="38100" dir="5400000">
+              <a:srgbClr val="1F2A55">
+                <a:alpha val="16000"/>
+              </a:srgbClr>
+            </a:outerShdw>
+          </a:effectLst>
+        </p:spPr>
+      </p:sp>
+      <p:sp>
+        <p:nvSpPr>
+          <p:cNvPr id="8" name="Icon-Kreis LuStethoscope"/>
+          <p:cNvSpPr/>
+          <p:nvPr/>
+        </p:nvSpPr>
+        <p:spPr>
+          <a:xfrm>
+            <a:off x="758952" y="2423160"/>
+            <a:ext cx="640080" cy="640080"/>
+          </a:xfrm>
+          <a:prstGeom prst="ellipse">
+            <a:avLst/>
+          </a:prstGeom>
+          <a:solidFill>
+            <a:schemeClr val="accent1"/>
+          </a:solidFill>
+          <a:ln/>
+        </p:spPr>
+      </p:sp>
+      <p:pic>
+        <p:nvPicPr>
+          <p:cNvPr id="9" name="Icon LuStethoscope" descr="preencoded.png">    </p:cNvPr>
+          <p:cNvPicPr>
+            <a:picLocks noChangeAspect="1"/>
+          </p:cNvPicPr>
+          <p:nvPr/>
+        </p:nvPicPr>
+        <p:blipFill>
+          <a:blip r:embed="rId2"/>
+          <a:stretch>
+            <a:fillRect/>
+          </a:stretch>
+        </p:blipFill>
+        <p:spPr>
+          <a:xfrm>
+            <a:off x="925373" y="2589581"/>
+            <a:ext cx="307238" cy="307238"/>
+          </a:xfrm>
+          <a:prstGeom prst="rect">
+            <a:avLst/>
+          </a:prstGeom>
+        </p:spPr>
+      </p:pic>
+      <p:sp>
+        <p:nvSpPr>
+          <p:cNvPr id="10" name="Text 6"/>
+          <p:cNvSpPr txBox="1"/>
+          <p:nvPr/>
+        </p:nvSpPr>
+        <p:spPr>
+          <a:xfrm>
+            <a:off x="1581912" y="2423160"/>
+            <a:ext cx="2377440" cy="640080"/>
+          </a:xfrm>
+          <a:prstGeom prst="rect">
+            <a:avLst/>
+          </a:prstGeom>
+          <a:noFill/>
+          <a:ln/>
+        </p:spPr>
+        <p:txBody>
+          <a:bodyPr wrap="square" lIns="0" tIns="0" rIns="0" bIns="0" rtlCol="0" anchor="ctr"/>
+          <a:lstStyle/>
+          <a:p>
+            <a:pPr indent="0" marL="0">
+              <a:buNone/>
+            </a:pPr>
+            <a:r>
+              <a:rPr lang="en-US" sz="1800" b="1" dirty="0">
+                <a:solidFill>
+                  <a:schemeClr val="tx1"/>
+                </a:solidFill>
+              </a:rPr>
+              <a:t>Medizin</a:t>
+            </a:r>
+            <a:endParaRPr lang="en-US" sz="1800" dirty="0"/>
+          </a:p>
+        </p:txBody>
+      </p:sp>
+      <p:sp>
+        <p:nvSpPr>
+          <p:cNvPr id="11" name="Text 7"/>
+          <p:cNvSpPr txBox="1"/>
+          <p:nvPr/>
+        </p:nvSpPr>
+        <p:spPr>
+          <a:xfrm>
+            <a:off x="758952" y="3154680"/>
+            <a:ext cx="3108960" cy="594360"/>
+          </a:xfrm>
+          <a:prstGeom prst="rect">
+            <a:avLst/>
+          </a:prstGeom>
+          <a:noFill/>
+          <a:ln/>
+        </p:spPr>
+        <p:txBody>
+          <a:bodyPr wrap="square" lIns="0" tIns="0" rIns="0" bIns="0" rtlCol="0" anchor="t"/>
+          <a:lstStyle/>
+          <a:p>
+            <a:pPr indent="0" marL="0">
+              <a:buNone/>
+            </a:pPr>
+            <a:r>
+              <a:rPr lang="en-US" sz="1300" dirty="0">
+                <a:solidFill>
+                  <a:schemeClr val="tx2"/>
+                </a:solidFill>
+              </a:rPr>
+              <a:t>KI hilft, Röntgen- und MRT-Bilder auszuwerten. Die Diagnose stellt die Ärztin.</a:t>
+            </a:r>
+            <a:endParaRPr lang="en-US" sz="1300" dirty="0"/>
+          </a:p>
+        </p:txBody>
+      </p:sp>
+      <p:sp>
+        <p:nvSpPr>
+          <p:cNvPr id="12" name="Beruf Handwerk"/>
+          <p:cNvSpPr/>
+          <p:nvPr/>
+        </p:nvSpPr>
+        <p:spPr>
+          <a:xfrm>
+            <a:off x="4279392" y="2148840"/>
+            <a:ext cx="3611880" cy="1691640"/>
+          </a:xfrm>
+          <a:prstGeom prst="roundRect">
+            <a:avLst>
+              <a:gd name="adj" fmla="val 6486"/>
+            </a:avLst>
+          </a:prstGeom>
+          <a:solidFill>
+            <a:schemeClr val="bg1"/>
+          </a:solidFill>
+          <a:ln/>
+          <a:effectLst>
+            <a:outerShdw sx="100000" sy="100000" kx="0" ky="0" algn="bl" rotWithShape="0" blurRad="127000" dist="38100" dir="5400000">
+              <a:srgbClr val="1F2A55">
+                <a:alpha val="16000"/>
+              </a:srgbClr>
+            </a:outerShdw>
+          </a:effectLst>
+        </p:spPr>
+      </p:sp>
+      <p:sp>
+        <p:nvSpPr>
+          <p:cNvPr id="13" name="Icon-Kreis LuHammer"/>
+          <p:cNvSpPr/>
+          <p:nvPr/>
+        </p:nvSpPr>
+        <p:spPr>
+          <a:xfrm>
+            <a:off x="4553712" y="2423160"/>
+            <a:ext cx="640080" cy="640080"/>
+          </a:xfrm>
+          <a:prstGeom prst="ellipse">
+            <a:avLst/>
+          </a:prstGeom>
+          <a:solidFill>
+            <a:schemeClr val="tx1"/>
+          </a:solidFill>
+          <a:ln/>
+        </p:spPr>
+      </p:sp>
+      <p:pic>
+        <p:nvPicPr>
+          <p:cNvPr id="14" name="Icon LuHammer" descr="preencoded.png">    </p:cNvPr>
+          <p:cNvPicPr>
+            <a:picLocks noChangeAspect="1"/>
+          </p:cNvPicPr>
+          <p:nvPr/>
+        </p:nvPicPr>
+        <p:blipFill>
+          <a:blip r:embed="rId3"/>
+          <a:stretch>
+            <a:fillRect/>
+          </a:stretch>
+        </p:blipFill>
+        <p:spPr>
+          <a:xfrm>
+            <a:off x="4720133" y="2589581"/>
+            <a:ext cx="307238" cy="307238"/>
+          </a:xfrm>
+          <a:prstGeom prst="rect">
+            <a:avLst/>
+          </a:prstGeom>
+        </p:spPr>
+      </p:pic>
+      <p:sp>
+        <p:nvSpPr>
+          <p:cNvPr id="15" name="Text 10"/>
+          <p:cNvSpPr txBox="1"/>
+          <p:nvPr/>
+        </p:nvSpPr>
+        <p:spPr>
+          <a:xfrm>
+            <a:off x="5376672" y="2423160"/>
+            <a:ext cx="2377440" cy="640080"/>
+          </a:xfrm>
+          <a:prstGeom prst="rect">
+            <a:avLst/>
+          </a:prstGeom>
+          <a:noFill/>
+          <a:ln/>
+        </p:spPr>
+        <p:txBody>
+          <a:bodyPr wrap="square" lIns="0" tIns="0" rIns="0" bIns="0" rtlCol="0" anchor="ctr"/>
+          <a:lstStyle/>
+          <a:p>
+            <a:pPr indent="0" marL="0">
+              <a:buNone/>
+            </a:pPr>
+            <a:r>
+              <a:rPr lang="en-US" sz="1800" b="1" dirty="0">
+                <a:solidFill>
+                  <a:schemeClr val="tx1"/>
+                </a:solidFill>
+              </a:rPr>
+              <a:t>Handwerk</a:t>
+            </a:r>
+            <a:endParaRPr lang="en-US" sz="1800" dirty="0"/>
+          </a:p>
+        </p:txBody>
+      </p:sp>
+      <p:sp>
+        <p:nvSpPr>
+          <p:cNvPr id="16" name="Text 11"/>
+          <p:cNvSpPr txBox="1"/>
+          <p:nvPr/>
+        </p:nvSpPr>
+        <p:spPr>
+          <a:xfrm>
+            <a:off x="4553712" y="3154680"/>
+            <a:ext cx="3108960" cy="594360"/>
+          </a:xfrm>
+          <a:prstGeom prst="rect">
+            <a:avLst/>
+          </a:prstGeom>
+          <a:noFill/>
+          <a:ln/>
+        </p:spPr>
+        <p:txBody>
+          <a:bodyPr wrap="square" lIns="0" tIns="0" rIns="0" bIns="0" rtlCol="0" anchor="t"/>
+          <a:lstStyle/>
+          <a:p>
+            <a:pPr indent="0" marL="0">
+              <a:buNone/>
+            </a:pPr>
+            <a:r>
+              <a:rPr lang="en-US" sz="1300" dirty="0">
+                <a:solidFill>
+                  <a:schemeClr val="tx2"/>
+                </a:solidFill>
+              </a:rPr>
+              <a:t>KI schreibt Angebote und plant Material. Gebaut wird von Menschen.</a:t>
+            </a:r>
+            <a:endParaRPr lang="en-US" sz="1300" dirty="0"/>
+          </a:p>
+        </p:txBody>
+      </p:sp>
+      <p:sp>
+        <p:nvSpPr>
+          <p:cNvPr id="17" name="Beruf Landwirtschaft"/>
+          <p:cNvSpPr/>
+          <p:nvPr/>
+        </p:nvSpPr>
+        <p:spPr>
+          <a:xfrm>
+            <a:off x="8074152" y="2148840"/>
+            <a:ext cx="3611880" cy="1691640"/>
+          </a:xfrm>
+          <a:prstGeom prst="roundRect">
+            <a:avLst>
+              <a:gd name="adj" fmla="val 6486"/>
+            </a:avLst>
+          </a:prstGeom>
+          <a:solidFill>
+            <a:schemeClr val="bg1"/>
+          </a:solidFill>
+          <a:ln/>
+          <a:effectLst>
+            <a:outerShdw sx="100000" sy="100000" kx="0" ky="0" algn="bl" rotWithShape="0" blurRad="127000" dist="38100" dir="5400000">
+              <a:srgbClr val="1F2A55">
+                <a:alpha val="16000"/>
+              </a:srgbClr>
+            </a:outerShdw>
+          </a:effectLst>
+        </p:spPr>
+      </p:sp>
+      <p:sp>
+        <p:nvSpPr>
+          <p:cNvPr id="18" name="Icon-Kreis LuSprout"/>
+          <p:cNvSpPr/>
+          <p:nvPr/>
+        </p:nvSpPr>
+        <p:spPr>
+          <a:xfrm>
+            <a:off x="8348472" y="2423160"/>
+            <a:ext cx="640080" cy="640080"/>
+          </a:xfrm>
+          <a:prstGeom prst="ellipse">
+            <a:avLst/>
+          </a:prstGeom>
+          <a:solidFill>
+            <a:schemeClr val="accent1"/>
+          </a:solidFill>
+          <a:ln/>
+        </p:spPr>
+      </p:sp>
+      <p:pic>
+        <p:nvPicPr>
+          <p:cNvPr id="19" name="Icon LuSprout" descr="preencoded.png">    </p:cNvPr>
+          <p:cNvPicPr>
+            <a:picLocks noChangeAspect="1"/>
+          </p:cNvPicPr>
+          <p:nvPr/>
+        </p:nvPicPr>
+        <p:blipFill>
+          <a:blip r:embed="rId4"/>
+          <a:stretch>
+            <a:fillRect/>
+          </a:stretch>
+        </p:blipFill>
+        <p:spPr>
+          <a:xfrm>
+            <a:off x="8514893" y="2589581"/>
+            <a:ext cx="307238" cy="307238"/>
+          </a:xfrm>
+          <a:prstGeom prst="rect">
+            <a:avLst/>
+          </a:prstGeom>
+        </p:spPr>
+      </p:pic>
+      <p:sp>
+        <p:nvSpPr>
+          <p:cNvPr id="20" name="Text 14"/>
+          <p:cNvSpPr txBox="1"/>
+          <p:nvPr/>
+        </p:nvSpPr>
+        <p:spPr>
+          <a:xfrm>
+            <a:off x="9171432" y="2423160"/>
+            <a:ext cx="2377440" cy="640080"/>
+          </a:xfrm>
+          <a:prstGeom prst="rect">
+            <a:avLst/>
+          </a:prstGeom>
+          <a:noFill/>
+          <a:ln/>
+        </p:spPr>
+        <p:txBody>
+          <a:bodyPr wrap="square" lIns="0" tIns="0" rIns="0" bIns="0" rtlCol="0" anchor="ctr"/>
+          <a:lstStyle/>
+          <a:p>
+            <a:pPr indent="0" marL="0">
+              <a:buNone/>
+            </a:pPr>
+            <a:r>
+              <a:rPr lang="en-US" sz="1800" b="1" dirty="0">
+                <a:solidFill>
+                  <a:schemeClr val="tx1"/>
+                </a:solidFill>
+              </a:rPr>
+              <a:t>Landwirtschaft</a:t>
+            </a:r>
+            <a:endParaRPr lang="en-US" sz="1800" dirty="0"/>
+          </a:p>
+        </p:txBody>
+      </p:sp>
+      <p:sp>
+        <p:nvSpPr>
+          <p:cNvPr id="21" name="Text 15"/>
+          <p:cNvSpPr txBox="1"/>
+          <p:nvPr/>
+        </p:nvSpPr>
+        <p:spPr>
+          <a:xfrm>
+            <a:off x="8348472" y="3154680"/>
+            <a:ext cx="3108960" cy="594360"/>
+          </a:xfrm>
+          <a:prstGeom prst="rect">
+            <a:avLst/>
+          </a:prstGeom>
+          <a:noFill/>
+          <a:ln/>
+        </p:spPr>
+        <p:txBody>
+          <a:bodyPr wrap="square" lIns="0" tIns="0" rIns="0" bIns="0" rtlCol="0" anchor="t"/>
+          <a:lstStyle/>
+          <a:p>
+            <a:pPr indent="0" marL="0">
+              <a:buNone/>
+            </a:pPr>
+            <a:r>
+              <a:rPr lang="en-US" sz="1300" dirty="0">
+                <a:solidFill>
+                  <a:schemeClr val="tx2"/>
+                </a:solidFill>
+              </a:rPr>
+              <a:t>Drohnen und Sensoren zeigen, wo Pflanzen Wasser oder Dünger brauchen.</a:t>
+            </a:r>
+            <a:endParaRPr lang="en-US" sz="1300" dirty="0"/>
+          </a:p>
+        </p:txBody>
+      </p:sp>
+      <p:sp>
+        <p:nvSpPr>
+          <p:cNvPr id="22" name="Beruf Journalismus"/>
+          <p:cNvSpPr/>
+          <p:nvPr/>
+        </p:nvSpPr>
+        <p:spPr>
+          <a:xfrm>
+            <a:off x="484632" y="4069080"/>
+            <a:ext cx="3611880" cy="1691640"/>
+          </a:xfrm>
+          <a:prstGeom prst="roundRect">
+            <a:avLst>
+              <a:gd name="adj" fmla="val 6486"/>
+            </a:avLst>
+          </a:prstGeom>
+          <a:solidFill>
+            <a:schemeClr val="bg1"/>
+          </a:solidFill>
+          <a:ln/>
+          <a:effectLst>
+            <a:outerShdw sx="100000" sy="100000" kx="0" ky="0" algn="bl" rotWithShape="0" blurRad="127000" dist="38100" dir="5400000">
+              <a:srgbClr val="1F2A55">
+                <a:alpha val="16000"/>
+              </a:srgbClr>
+            </a:outerShdw>
+          </a:effectLst>
+        </p:spPr>
+      </p:sp>
+      <p:sp>
+        <p:nvSpPr>
+          <p:cNvPr id="23" name="Icon-Kreis LuNewspaper"/>
+          <p:cNvSpPr/>
+          <p:nvPr/>
+        </p:nvSpPr>
+        <p:spPr>
+          <a:xfrm>
+            <a:off x="758952" y="4343400"/>
+            <a:ext cx="640080" cy="640080"/>
+          </a:xfrm>
+          <a:prstGeom prst="ellipse">
+            <a:avLst/>
+          </a:prstGeom>
+          <a:solidFill>
+            <a:schemeClr val="tx1"/>
+          </a:solidFill>
+          <a:ln/>
+        </p:spPr>
+      </p:sp>
+      <p:pic>
+        <p:nvPicPr>
+          <p:cNvPr id="24" name="Icon LuNewspaper" descr="preencoded.png">    </p:cNvPr>
+          <p:cNvPicPr>
+            <a:picLocks noChangeAspect="1"/>
+          </p:cNvPicPr>
+          <p:nvPr/>
+        </p:nvPicPr>
+        <p:blipFill>
+          <a:blip r:embed="rId5"/>
+          <a:stretch>
+            <a:fillRect/>
+          </a:stretch>
+        </p:blipFill>
+        <p:spPr>
+          <a:xfrm>
+            <a:off x="925373" y="4509821"/>
+            <a:ext cx="307238" cy="307238"/>
+          </a:xfrm>
+          <a:prstGeom prst="rect">
+            <a:avLst/>
+          </a:prstGeom>
+        </p:spPr>
+      </p:pic>
+      <p:sp>
+        <p:nvSpPr>
+          <p:cNvPr id="25" name="Text 18"/>
+          <p:cNvSpPr txBox="1"/>
+          <p:nvPr/>
+        </p:nvSpPr>
+        <p:spPr>
+          <a:xfrm>
+            <a:off x="1581912" y="4343400"/>
+            <a:ext cx="2377440" cy="640080"/>
+          </a:xfrm>
+          <a:prstGeom prst="rect">
+            <a:avLst/>
+          </a:prstGeom>
+          <a:noFill/>
+          <a:ln/>
+        </p:spPr>
+        <p:txBody>
+          <a:bodyPr wrap="square" lIns="0" tIns="0" rIns="0" bIns="0" rtlCol="0" anchor="ctr"/>
+          <a:lstStyle/>
+          <a:p>
+            <a:pPr indent="0" marL="0">
+              <a:buNone/>
+            </a:pPr>
+            <a:r>
+              <a:rPr lang="en-US" sz="1800" b="1" dirty="0">
+                <a:solidFill>
+                  <a:schemeClr val="tx1"/>
+                </a:solidFill>
+              </a:rPr>
+              <a:t>Journalismus</a:t>
+            </a:r>
+            <a:endParaRPr lang="en-US" sz="1800" dirty="0"/>
+          </a:p>
+        </p:txBody>
+      </p:sp>
+      <p:sp>
+        <p:nvSpPr>
+          <p:cNvPr id="26" name="Text 19"/>
+          <p:cNvSpPr txBox="1"/>
+          <p:nvPr/>
+        </p:nvSpPr>
+        <p:spPr>
+          <a:xfrm>
+            <a:off x="758952" y="5074920"/>
+            <a:ext cx="3108960" cy="594360"/>
+          </a:xfrm>
+          <a:prstGeom prst="rect">
+            <a:avLst/>
+          </a:prstGeom>
+          <a:noFill/>
+          <a:ln/>
+        </p:spPr>
+        <p:txBody>
+          <a:bodyPr wrap="square" lIns="0" tIns="0" rIns="0" bIns="0" rtlCol="0" anchor="t"/>
+          <a:lstStyle/>
+          <a:p>
+            <a:pPr indent="0" marL="0">
+              <a:buNone/>
+            </a:pPr>
+            <a:r>
+              <a:rPr lang="en-US" sz="1300" dirty="0">
+                <a:solidFill>
+                  <a:schemeClr val="tx2"/>
+                </a:solidFill>
+              </a:rPr>
+              <a:t>KI hilft beim Recherchieren und Übersetzen. Prüfen müssen Menschen.</a:t>
+            </a:r>
+            <a:endParaRPr lang="en-US" sz="1300" dirty="0"/>
+          </a:p>
+        </p:txBody>
+      </p:sp>
+      <p:sp>
+        <p:nvSpPr>
+          <p:cNvPr id="27" name="Beruf Design &amp; Medien"/>
+          <p:cNvSpPr/>
+          <p:nvPr/>
+        </p:nvSpPr>
+        <p:spPr>
+          <a:xfrm>
+            <a:off x="4279392" y="4069080"/>
+            <a:ext cx="3611880" cy="1691640"/>
+          </a:xfrm>
+          <a:prstGeom prst="roundRect">
+            <a:avLst>
+              <a:gd name="adj" fmla="val 6486"/>
+            </a:avLst>
+          </a:prstGeom>
+          <a:solidFill>
+            <a:schemeClr val="bg1"/>
+          </a:solidFill>
+          <a:ln/>
+          <a:effectLst>
+            <a:outerShdw sx="100000" sy="100000" kx="0" ky="0" algn="bl" rotWithShape="0" blurRad="127000" dist="38100" dir="5400000">
+              <a:srgbClr val="1F2A55">
+                <a:alpha val="16000"/>
+              </a:srgbClr>
+            </a:outerShdw>
+          </a:effectLst>
+        </p:spPr>
+      </p:sp>
+      <p:sp>
+        <p:nvSpPr>
+          <p:cNvPr id="28" name="Icon-Kreis LuPalette"/>
+          <p:cNvSpPr/>
+          <p:nvPr/>
+        </p:nvSpPr>
+        <p:spPr>
+          <a:xfrm>
+            <a:off x="4553712" y="4343400"/>
+            <a:ext cx="640080" cy="640080"/>
+          </a:xfrm>
+          <a:prstGeom prst="ellipse">
+            <a:avLst/>
+          </a:prstGeom>
+          <a:solidFill>
+            <a:schemeClr val="accent1"/>
+          </a:solidFill>
+          <a:ln/>
+        </p:spPr>
+      </p:sp>
+      <p:pic>
+        <p:nvPicPr>
+          <p:cNvPr id="29" name="Icon LuPalette" descr="preencoded.png">    </p:cNvPr>
+          <p:cNvPicPr>
+            <a:picLocks noChangeAspect="1"/>
+          </p:cNvPicPr>
+          <p:nvPr/>
+        </p:nvPicPr>
+        <p:blipFill>
+          <a:blip r:embed="rId6"/>
+          <a:stretch>
+            <a:fillRect/>
+          </a:stretch>
+        </p:blipFill>
+        <p:spPr>
+          <a:xfrm>
+            <a:off x="4720133" y="4509821"/>
+            <a:ext cx="307238" cy="307238"/>
+          </a:xfrm>
+          <a:prstGeom prst="rect">
+            <a:avLst/>
+          </a:prstGeom>
+        </p:spPr>
+      </p:pic>
+      <p:sp>
+        <p:nvSpPr>
+          <p:cNvPr id="30" name="Text 22"/>
+          <p:cNvSpPr txBox="1"/>
+          <p:nvPr/>
+        </p:nvSpPr>
+        <p:spPr>
+          <a:xfrm>
+            <a:off x="5376672" y="4343400"/>
+            <a:ext cx="2377440" cy="640080"/>
+          </a:xfrm>
+          <a:prstGeom prst="rect">
+            <a:avLst/>
+          </a:prstGeom>
+          <a:noFill/>
+          <a:ln/>
+        </p:spPr>
+        <p:txBody>
+          <a:bodyPr wrap="square" lIns="0" tIns="0" rIns="0" bIns="0" rtlCol="0" anchor="ctr"/>
+          <a:lstStyle/>
+          <a:p>
+            <a:pPr indent="0" marL="0">
+              <a:buNone/>
+            </a:pPr>
+            <a:r>
+              <a:rPr lang="en-US" sz="1800" b="1" dirty="0">
+                <a:solidFill>
+                  <a:schemeClr val="tx1"/>
+                </a:solidFill>
+              </a:rPr>
+              <a:t>Design &amp; Medien</a:t>
+            </a:r>
+            <a:endParaRPr lang="en-US" sz="1800" dirty="0"/>
+          </a:p>
+        </p:txBody>
+      </p:sp>
+      <p:sp>
+        <p:nvSpPr>
+          <p:cNvPr id="31" name="Text 23"/>
+          <p:cNvSpPr txBox="1"/>
+          <p:nvPr/>
+        </p:nvSpPr>
+        <p:spPr>
+          <a:xfrm>
+            <a:off x="4553712" y="5074920"/>
+            <a:ext cx="3108960" cy="594360"/>
+          </a:xfrm>
+          <a:prstGeom prst="rect">
+            <a:avLst/>
+          </a:prstGeom>
+          <a:noFill/>
+          <a:ln/>
+        </p:spPr>
+        <p:txBody>
+          <a:bodyPr wrap="square" lIns="0" tIns="0" rIns="0" bIns="0" rtlCol="0" anchor="t"/>
+          <a:lstStyle/>
+          <a:p>
+            <a:pPr indent="0" marL="0">
+              <a:buNone/>
+            </a:pPr>
+            <a:r>
+              <a:rPr lang="en-US" sz="1300" dirty="0">
+                <a:solidFill>
+                  <a:schemeClr val="tx2"/>
+                </a:solidFill>
+              </a:rPr>
+              <a:t>KI liefert schnell Entwürfe. Idee und Geschmack bleiben menschlich.</a:t>
+            </a:r>
+            <a:endParaRPr lang="en-US" sz="1300" dirty="0"/>
+          </a:p>
+        </p:txBody>
+      </p:sp>
+      <p:sp>
+        <p:nvSpPr>
+          <p:cNvPr id="32" name="Beruf IT-Sicherheit"/>
+          <p:cNvSpPr/>
+          <p:nvPr/>
+        </p:nvSpPr>
+        <p:spPr>
+          <a:xfrm>
+            <a:off x="8074152" y="4069080"/>
+            <a:ext cx="3611880" cy="1691640"/>
+          </a:xfrm>
+          <a:prstGeom prst="roundRect">
+            <a:avLst>
+              <a:gd name="adj" fmla="val 6486"/>
+            </a:avLst>
+          </a:prstGeom>
+          <a:solidFill>
+            <a:schemeClr val="bg1"/>
+          </a:solidFill>
+          <a:ln/>
+          <a:effectLst>
+            <a:outerShdw sx="100000" sy="100000" kx="0" ky="0" algn="bl" rotWithShape="0" blurRad="127000" dist="38100" dir="5400000">
+              <a:srgbClr val="1F2A55">
+                <a:alpha val="16000"/>
+              </a:srgbClr>
+            </a:outerShdw>
+          </a:effectLst>
+        </p:spPr>
+      </p:sp>
+      <p:sp>
+        <p:nvSpPr>
+          <p:cNvPr id="33" name="Icon-Kreis LuShield"/>
+          <p:cNvSpPr/>
+          <p:nvPr/>
+        </p:nvSpPr>
+        <p:spPr>
+          <a:xfrm>
+            <a:off x="8348472" y="4343400"/>
+            <a:ext cx="640080" cy="640080"/>
+          </a:xfrm>
+          <a:prstGeom prst="ellipse">
+            <a:avLst/>
+          </a:prstGeom>
+          <a:solidFill>
+            <a:schemeClr val="tx1"/>
+          </a:solidFill>
+          <a:ln/>
+        </p:spPr>
+      </p:sp>
+      <p:pic>
+        <p:nvPicPr>
+          <p:cNvPr id="34" name="Icon LuShield" descr="preencoded.png">    </p:cNvPr>
+          <p:cNvPicPr>
+            <a:picLocks noChangeAspect="1"/>
+          </p:cNvPicPr>
+          <p:nvPr/>
+        </p:nvPicPr>
+        <p:blipFill>
+          <a:blip r:embed="rId7"/>
+          <a:stretch>
+            <a:fillRect/>
+          </a:stretch>
+        </p:blipFill>
+        <p:spPr>
+          <a:xfrm>
+            <a:off x="8514893" y="4509821"/>
+            <a:ext cx="307238" cy="307238"/>
+          </a:xfrm>
+          <a:prstGeom prst="rect">
+            <a:avLst/>
+          </a:prstGeom>
+        </p:spPr>
+      </p:pic>
+      <p:sp>
+        <p:nvSpPr>
+          <p:cNvPr id="35" name="Text 26"/>
+          <p:cNvSpPr txBox="1"/>
+          <p:nvPr/>
+        </p:nvSpPr>
+        <p:spPr>
+          <a:xfrm>
+            <a:off x="9171432" y="4343400"/>
+            <a:ext cx="2377440" cy="640080"/>
+          </a:xfrm>
+          <a:prstGeom prst="rect">
+            <a:avLst/>
+          </a:prstGeom>
+          <a:noFill/>
+          <a:ln/>
+        </p:spPr>
+        <p:txBody>
+          <a:bodyPr wrap="square" lIns="0" tIns="0" rIns="0" bIns="0" rtlCol="0" anchor="ctr"/>
+          <a:lstStyle/>
+          <a:p>
+            <a:pPr indent="0" marL="0">
+              <a:buNone/>
+            </a:pPr>
+            <a:r>
+              <a:rPr lang="en-US" sz="1800" b="1" dirty="0">
+                <a:solidFill>
+                  <a:schemeClr val="tx1"/>
+                </a:solidFill>
+              </a:rPr>
+              <a:t>IT-Sicherheit</a:t>
+            </a:r>
+            <a:endParaRPr lang="en-US" sz="1800" dirty="0"/>
+          </a:p>
+        </p:txBody>
+      </p:sp>
+      <p:sp>
+        <p:nvSpPr>
+          <p:cNvPr id="36" name="Text 27"/>
+          <p:cNvSpPr txBox="1"/>
+          <p:nvPr/>
+        </p:nvSpPr>
+        <p:spPr>
+          <a:xfrm>
+            <a:off x="8348472" y="5074920"/>
+            <a:ext cx="3108960" cy="594360"/>
+          </a:xfrm>
+          <a:prstGeom prst="rect">
+            <a:avLst/>
+          </a:prstGeom>
+          <a:noFill/>
+          <a:ln/>
+        </p:spPr>
+        <p:txBody>
+          <a:bodyPr wrap="square" lIns="0" tIns="0" rIns="0" bIns="0" rtlCol="0" anchor="t"/>
+          <a:lstStyle/>
+          <a:p>
+            <a:pPr indent="0" marL="0">
+              <a:buNone/>
+            </a:pPr>
+            <a:r>
+              <a:rPr lang="en-US" sz="1300" dirty="0">
+                <a:solidFill>
+                  <a:schemeClr val="tx2"/>
+                </a:solidFill>
+              </a:rPr>
+              <a:t>KI erkennt verdächtige Angriffe. Menschen entscheiden, was passiert.</a:t>
+            </a:r>
+            <a:endParaRPr lang="en-US" sz="1300" dirty="0"/>
+          </a:p>
+        </p:txBody>
+      </p:sp>
+      <p:sp>
+        <p:nvSpPr>
+          <p:cNvPr id="37" name="Hinweis optional"/>
+          <p:cNvSpPr/>
+          <p:nvPr/>
+        </p:nvSpPr>
+        <p:spPr>
+          <a:xfrm>
+            <a:off x="8366760" y="6437376"/>
+            <a:ext cx="2560320" cy="256032"/>
+          </a:xfrm>
+          <a:prstGeom prst="roundRect">
+            <a:avLst>
+              <a:gd name="adj" fmla="val 50000"/>
+            </a:avLst>
+          </a:prstGeom>
+          <a:solidFill>
+            <a:schemeClr val="bg2"/>
+          </a:solidFill>
+          <a:ln/>
+        </p:spPr>
+      </p:sp>
+      <p:sp>
+        <p:nvSpPr>
+          <p:cNvPr id="38" name="Text 29"/>
+          <p:cNvSpPr txBox="1"/>
+          <p:nvPr/>
+        </p:nvSpPr>
+        <p:spPr>
+          <a:xfrm>
+            <a:off x="8366760" y="6437376"/>
+            <a:ext cx="2560320" cy="256032"/>
+          </a:xfrm>
+          <a:prstGeom prst="rect">
+            <a:avLst/>
+          </a:prstGeom>
+          <a:noFill/>
+          <a:ln/>
+        </p:spPr>
+        <p:txBody>
+          <a:bodyPr wrap="square" lIns="0" tIns="0" rIns="0" bIns="0" rtlCol="0" anchor="ctr"/>
+          <a:lstStyle/>
+          <a:p>
+            <a:pPr algn="ctr" indent="0" marL="0">
+              <a:buNone/>
+            </a:pPr>
+            <a:r>
+              <a:rPr lang="en-US" sz="900" b="1" spc="100" kern="0" dirty="0">
+                <a:solidFill>
+                  <a:schemeClr val="accent3"/>
+                </a:solidFill>
+              </a:rPr>
+              <a:t>OPTIONAL · KAPITEL 03</a:t>
+            </a:r>
+            <a:endParaRPr lang="en-US" sz="900" dirty="0"/>
+          </a:p>
+        </p:txBody>
+      </p:sp>
+      <p:sp>
+        <p:nvSpPr>
+          <p:cNvPr id="40" name="Text 1"/>
+          <p:cNvSpPr/>
+          <p:nvPr>
+            <p:ph idx="104" type="body" hasCustomPrompt="1"/>
+          </p:nvPr>
+        </p:nvSpPr>
+        <p:spPr>
+          <a:xfrm>
+            <a:off x="484632" y="1417320"/>
+            <a:ext cx="9601200" cy="365760"/>
+          </a:xfrm>
+          <a:prstGeom prst="rect">
+            <a:avLst/>
+          </a:prstGeom>
+          <a:noFill/>
+          <a:ln/>
+        </p:spPr>
+        <p:txBody>
+          <a:bodyPr wrap="square" lIns="0" tIns="0" rIns="0" bIns="0" rtlCol="0" anchor="ctr"/>
+          <a:lstStyle/>
+          <a:p>
+            <a:pPr indent="0" marL="0">
+              <a:buNone/>
+            </a:pPr>
+            <a:endParaRPr lang="en-US" sz="1500" dirty="0"/>
+          </a:p>
+        </p:txBody>
+      </p:sp>
+      <p:sp>
+        <p:nvSpPr>
+          <p:cNvPr id="25" name="Slide Number Placeholder 0"/>
+          <p:cNvSpPr>
+            <a:spLocks noGrp="1"/>
+          </p:cNvSpPr>
+          <p:nvPr>
+            <p:ph type="sldNum" sz="quarter" idx="4294967295"/>
+          </p:nvPr>
+        </p:nvSpPr>
+        <p:spPr>
+          <a:xfrm>
+            <a:off x="11155680" y="6455664"/>
+            <a:ext cx="548640" cy="274320"/>
+          </a:xfrm>
+          <a:prstGeom prst="rect">
+            <a:avLst/>
+          </a:prstGeom>
+          <a:extLst>
+            <a:ext uri="{C572A759-6A51-4108-AA02-DFA0A04FC94B}">
+              <ma14:wrappingTextBoxFlag xmlns:ma14="http://schemas.microsoft.com/office/mac/drawingml/2011/main" val="0"/>
+            </a:ext>
+          </a:extLst>
+        </p:spPr>
+        <p:txBody>
+          <a:bodyPr/>
+          <a:lstStyle>
+            <a:lvl1pPr>
+              <a:defRPr sz="1100">
+                <a:solidFill>
+                  <a:schemeClr val="accent3"/>
+                </a:solidFill>
+              </a:defRPr>
+            </a:lvl1pPr>
+          </a:lstStyle>
+          <a:p>
+            <a:pPr algn="r"/>
+            <a:fld id="{F7021451-1387-4CA6-816F-3879F97B5CBC}" type="slidenum">
+              <a:rPr b="0" lang="en-US"/>
+              <a:t>32</a:t>
+            </a:fld>
+            <a:endParaRPr lang="en-US"/>
+          </a:p>
+        </p:txBody>
+      </p:sp>
+    </p:spTree>
+  </p:cSld>
+  <p:clrMapOvr>
+    <a:masterClrMapping/>
+  </p:clrMapOvr>
+</p:sld>
+</file>
+
+<file path=ppt/slides/slide33.xml><?xml version="1.0" encoding="utf-8"?>
+<p:sld xmlns:a="http://schemas.openxmlformats.org/drawingml/2006/main" xmlns:r="http://schemas.openxmlformats.org/officeDocument/2006/relationships" xmlns:p="http://schemas.openxmlformats.org/presentationml/2006/main">
+  <p:cSld name="Slide 33">
+    <p:spTree>
+      <p:nvGrpSpPr>
+        <p:cNvPr id="1" name=""/>
+        <p:cNvGrpSpPr/>
+        <p:nvPr/>
+      </p:nvGrpSpPr>
+      <p:grpSpPr>
+        <a:xfrm>
+          <a:off x="0" y="0"/>
+          <a:ext cx="0" cy="0"/>
+          <a:chOff x="0" y="0"/>
+          <a:chExt cx="0" cy="0"/>
+        </a:xfrm>
+      </p:grpSpPr>
+      <p:sp>
+        <p:nvSpPr>
+          <p:cNvPr id="2" name="Text 1"/>
+          <p:cNvSpPr/>
+          <p:nvPr>
+            <p:ph idx="103" type="title" hasCustomPrompt="1"/>
+          </p:nvPr>
+        </p:nvSpPr>
+        <p:spPr>
+          <a:xfrm>
+            <a:off x="484632" y="548640"/>
+            <a:ext cx="8778240" cy="640080"/>
+          </a:xfrm>
+          <a:prstGeom prst="rect">
+            <a:avLst/>
+          </a:prstGeom>
+          <a:noFill/>
+          <a:ln/>
+        </p:spPr>
+        <p:txBody>
+          <a:bodyPr wrap="square" lIns="0" tIns="0" rIns="0" bIns="0" rtlCol="0" anchor="b"/>
+          <a:lstStyle/>
+          <a:p>
+            <a:pPr algn="l" indent="0" marL="0">
+              <a:buNone/>
+            </a:pPr>
+            <a:r>
+              <a:rPr lang="en-US" sz="3000" b="1" dirty="0">
+                <a:solidFill>
+                  <a:schemeClr val="tx1"/>
+                </a:solidFill>
+              </a:rPr>
+              <a:t>Wahr oder falsch?</a:t>
+            </a:r>
+            <a:endParaRPr lang="en-US" sz="3000" dirty="0"/>
+          </a:p>
+        </p:txBody>
+      </p:sp>
+      <p:sp>
+        <p:nvSpPr>
+          <p:cNvPr id="3" name="Mitmachen QUIZ"/>
+          <p:cNvSpPr/>
+          <p:nvPr/>
+        </p:nvSpPr>
+        <p:spPr>
+          <a:xfrm>
+            <a:off x="484632" y="1417320"/>
+            <a:ext cx="1252728" cy="365760"/>
+          </a:xfrm>
+          <a:prstGeom prst="roundRect">
+            <a:avLst>
+              <a:gd name="adj" fmla="val 50000"/>
+            </a:avLst>
+          </a:prstGeom>
+          <a:solidFill>
+            <a:schemeClr val="accent1"/>
+          </a:solidFill>
+          <a:ln/>
+        </p:spPr>
+      </p:sp>
+      <p:pic>
+        <p:nvPicPr>
+          <p:cNvPr id="4" name="Mitmachen-Icon" descr="preencoded.png">    </p:cNvPr>
+          <p:cNvPicPr>
+            <a:picLocks noChangeAspect="1"/>
+          </p:cNvPicPr>
+          <p:nvPr/>
+        </p:nvPicPr>
+        <p:blipFill>
+          <a:blip r:embed="rId1"/>
+          <a:stretch>
+            <a:fillRect/>
+          </a:stretch>
+        </p:blipFill>
+        <p:spPr>
+          <a:xfrm>
+            <a:off x="603504" y="1481328"/>
+            <a:ext cx="237744" cy="237744"/>
+          </a:xfrm>
+          <a:prstGeom prst="rect">
+            <a:avLst/>
+          </a:prstGeom>
+        </p:spPr>
+      </p:pic>
+      <p:sp>
+        <p:nvSpPr>
+          <p:cNvPr id="5" name="Text 2"/>
+          <p:cNvSpPr txBox="1"/>
+          <p:nvPr/>
+        </p:nvSpPr>
+        <p:spPr>
+          <a:xfrm>
+            <a:off x="914400" y="1417320"/>
+            <a:ext cx="795528" cy="365760"/>
+          </a:xfrm>
+          <a:prstGeom prst="rect">
+            <a:avLst/>
+          </a:prstGeom>
+          <a:noFill/>
+          <a:ln/>
+        </p:spPr>
+        <p:txBody>
+          <a:bodyPr wrap="square" lIns="0" tIns="0" rIns="0" bIns="0" rtlCol="0" anchor="ctr"/>
+          <a:lstStyle/>
+          <a:p>
+            <a:pPr indent="0" marL="0">
+              <a:buNone/>
+            </a:pPr>
+            <a:r>
+              <a:rPr lang="en-US" sz="1100" b="1" spc="300" kern="0" dirty="0">
+                <a:solidFill>
+                  <a:schemeClr val="bg1"/>
+                </a:solidFill>
+              </a:rPr>
+              <a:t>QUIZ</a:t>
+            </a:r>
+            <a:endParaRPr lang="en-US" sz="1100" dirty="0"/>
+          </a:p>
+        </p:txBody>
+      </p:sp>
+      <p:sp>
+        <p:nvSpPr>
+          <p:cNvPr id="6" name="Text 3"/>
+          <p:cNvSpPr txBox="1"/>
+          <p:nvPr/>
+        </p:nvSpPr>
+        <p:spPr>
+          <a:xfrm>
+            <a:off x="1920240" y="1417320"/>
+            <a:ext cx="8229600" cy="365760"/>
+          </a:xfrm>
+          <a:prstGeom prst="rect">
+            <a:avLst/>
+          </a:prstGeom>
+          <a:noFill/>
+          <a:ln/>
+        </p:spPr>
+        <p:txBody>
+          <a:bodyPr wrap="square" lIns="0" tIns="0" rIns="0" bIns="0" rtlCol="0" anchor="ctr"/>
+          <a:lstStyle/>
+          <a:p>
+            <a:pPr indent="0" marL="0">
+              <a:buNone/>
+            </a:pPr>
+            <a:r>
+              <a:rPr lang="en-US" sz="1500" dirty="0">
+                <a:solidFill>
+                  <a:schemeClr val="tx2"/>
+                </a:solidFill>
+              </a:rPr>
+              <a:t>Daumen hoch für wahr, Daumen runter für falsch</a:t>
+            </a:r>
+            <a:endParaRPr lang="en-US" sz="1500" dirty="0"/>
+          </a:p>
+        </p:txBody>
+      </p:sp>
+      <p:sp>
+        <p:nvSpPr>
+          <p:cNvPr id="7" name="Aussage 1"/>
+          <p:cNvSpPr/>
+          <p:nvPr/>
+        </p:nvSpPr>
+        <p:spPr>
+          <a:xfrm>
+            <a:off x="484632" y="2103120"/>
+            <a:ext cx="5486400" cy="1143000"/>
+          </a:xfrm>
+          <a:prstGeom prst="roundRect">
+            <a:avLst>
+              <a:gd name="adj" fmla="val 9600"/>
+            </a:avLst>
+          </a:prstGeom>
+          <a:solidFill>
+            <a:schemeClr val="bg1"/>
+          </a:solidFill>
+          <a:ln/>
+          <a:effectLst>
+            <a:outerShdw sx="100000" sy="100000" kx="0" ky="0" algn="bl" rotWithShape="0" blurRad="127000" dist="38100" dir="5400000">
+              <a:srgbClr val="1F2A55">
+                <a:alpha val="16000"/>
+              </a:srgbClr>
+            </a:outerShdw>
+          </a:effectLst>
+        </p:spPr>
+      </p:sp>
+      <p:sp>
+        <p:nvSpPr>
+          <p:cNvPr id="8" name="Nummer 1"/>
+          <p:cNvSpPr/>
+          <p:nvPr/>
+        </p:nvSpPr>
+        <p:spPr>
+          <a:xfrm>
+            <a:off x="713232" y="2377440"/>
+            <a:ext cx="594360" cy="594360"/>
+          </a:xfrm>
+          <a:prstGeom prst="ellipse">
+            <a:avLst/>
+          </a:prstGeom>
+          <a:solidFill>
+            <a:schemeClr val="tx1"/>
+          </a:solidFill>
+          <a:ln/>
+        </p:spPr>
+      </p:sp>
+      <p:sp>
+        <p:nvSpPr>
+          <p:cNvPr id="9" name="Text 6"/>
+          <p:cNvSpPr txBox="1"/>
+          <p:nvPr/>
+        </p:nvSpPr>
+        <p:spPr>
+          <a:xfrm>
+            <a:off x="713232" y="2377440"/>
+            <a:ext cx="594360" cy="594360"/>
+          </a:xfrm>
+          <a:prstGeom prst="rect">
+            <a:avLst/>
+          </a:prstGeom>
+          <a:noFill/>
+          <a:ln/>
+        </p:spPr>
+        <p:txBody>
+          <a:bodyPr wrap="square" lIns="0" tIns="0" rIns="0" bIns="0" rtlCol="0" anchor="ctr"/>
+          <a:lstStyle/>
+          <a:p>
+            <a:pPr algn="ctr" indent="0" marL="0">
+              <a:buNone/>
+            </a:pPr>
+            <a:r>
+              <a:rPr lang="en-US" sz="1800" b="1" dirty="0">
+                <a:solidFill>
+                  <a:schemeClr val="bg1"/>
+                </a:solidFill>
+              </a:rPr>
+              <a:t>1</a:t>
+            </a:r>
+            <a:endParaRPr lang="en-US" sz="1800" dirty="0"/>
+          </a:p>
+        </p:txBody>
+      </p:sp>
+      <p:sp>
+        <p:nvSpPr>
+          <p:cNvPr id="10" name="Text 7"/>
+          <p:cNvSpPr txBox="1"/>
+          <p:nvPr/>
+        </p:nvSpPr>
+        <p:spPr>
+          <a:xfrm>
+            <a:off x="1490472" y="2103120"/>
+            <a:ext cx="4297680" cy="1143000"/>
+          </a:xfrm>
+          <a:prstGeom prst="rect">
+            <a:avLst/>
+          </a:prstGeom>
+          <a:noFill/>
+          <a:ln/>
+        </p:spPr>
+        <p:txBody>
+          <a:bodyPr wrap="square" lIns="0" tIns="0" rIns="0" bIns="0" rtlCol="0" anchor="ctr"/>
+          <a:lstStyle/>
+          <a:p>
+            <a:pPr indent="0" marL="0">
+              <a:buNone/>
+            </a:pPr>
+            <a:r>
+              <a:rPr lang="en-US" sz="1700" b="1" dirty="0">
+                <a:solidFill>
+                  <a:schemeClr val="tx1"/>
+                </a:solidFill>
+              </a:rPr>
+              <a:t>KI denkt wie ein Mensch.</a:t>
+            </a:r>
+            <a:endParaRPr lang="en-US" sz="1700" dirty="0"/>
+          </a:p>
+        </p:txBody>
+      </p:sp>
+      <p:sp>
+        <p:nvSpPr>
+          <p:cNvPr id="11" name="Aussage 2"/>
+          <p:cNvSpPr/>
+          <p:nvPr/>
+        </p:nvSpPr>
+        <p:spPr>
+          <a:xfrm>
+            <a:off x="6217920" y="2103120"/>
+            <a:ext cx="5486400" cy="1143000"/>
+          </a:xfrm>
+          <a:prstGeom prst="roundRect">
+            <a:avLst>
+              <a:gd name="adj" fmla="val 9600"/>
+            </a:avLst>
+          </a:prstGeom>
+          <a:solidFill>
+            <a:schemeClr val="bg1"/>
+          </a:solidFill>
+          <a:ln/>
+          <a:effectLst>
+            <a:outerShdw sx="100000" sy="100000" kx="0" ky="0" algn="bl" rotWithShape="0" blurRad="127000" dist="38100" dir="5400000">
+              <a:srgbClr val="1F2A55">
+                <a:alpha val="16000"/>
+              </a:srgbClr>
+            </a:outerShdw>
+          </a:effectLst>
+        </p:spPr>
+      </p:sp>
+      <p:sp>
+        <p:nvSpPr>
+          <p:cNvPr id="12" name="Nummer 2"/>
+          <p:cNvSpPr/>
+          <p:nvPr/>
+        </p:nvSpPr>
+        <p:spPr>
+          <a:xfrm>
+            <a:off x="6446520" y="2377440"/>
+            <a:ext cx="594360" cy="594360"/>
+          </a:xfrm>
+          <a:prstGeom prst="ellipse">
+            <a:avLst/>
+          </a:prstGeom>
+          <a:solidFill>
+            <a:schemeClr val="tx1"/>
+          </a:solidFill>
+          <a:ln/>
+        </p:spPr>
+      </p:sp>
+      <p:sp>
+        <p:nvSpPr>
+          <p:cNvPr id="13" name="Text 10"/>
+          <p:cNvSpPr txBox="1"/>
+          <p:nvPr/>
+        </p:nvSpPr>
+        <p:spPr>
+          <a:xfrm>
+            <a:off x="6446520" y="2377440"/>
+            <a:ext cx="594360" cy="594360"/>
+          </a:xfrm>
+          <a:prstGeom prst="rect">
+            <a:avLst/>
+          </a:prstGeom>
+          <a:noFill/>
+          <a:ln/>
+        </p:spPr>
+        <p:txBody>
+          <a:bodyPr wrap="square" lIns="0" tIns="0" rIns="0" bIns="0" rtlCol="0" anchor="ctr"/>
+          <a:lstStyle/>
+          <a:p>
+            <a:pPr algn="ctr" indent="0" marL="0">
+              <a:buNone/>
+            </a:pPr>
+            <a:r>
+              <a:rPr lang="en-US" sz="1800" b="1" dirty="0">
+                <a:solidFill>
+                  <a:schemeClr val="bg1"/>
+                </a:solidFill>
+              </a:rPr>
+              <a:t>2</a:t>
+            </a:r>
+            <a:endParaRPr lang="en-US" sz="1800" dirty="0"/>
+          </a:p>
+        </p:txBody>
+      </p:sp>
+      <p:sp>
+        <p:nvSpPr>
+          <p:cNvPr id="14" name="Text 11"/>
+          <p:cNvSpPr txBox="1"/>
+          <p:nvPr/>
+        </p:nvSpPr>
+        <p:spPr>
+          <a:xfrm>
+            <a:off x="7223760" y="2103120"/>
+            <a:ext cx="4297680" cy="1143000"/>
+          </a:xfrm>
+          <a:prstGeom prst="rect">
+            <a:avLst/>
+          </a:prstGeom>
+          <a:noFill/>
+          <a:ln/>
+        </p:spPr>
+        <p:txBody>
+          <a:bodyPr wrap="square" lIns="0" tIns="0" rIns="0" bIns="0" rtlCol="0" anchor="ctr"/>
+          <a:lstStyle/>
+          <a:p>
+            <a:pPr indent="0" marL="0">
+              <a:buNone/>
+            </a:pPr>
+            <a:r>
+              <a:rPr lang="en-US" sz="1700" b="1" dirty="0">
+                <a:solidFill>
+                  <a:schemeClr val="tx1"/>
+                </a:solidFill>
+              </a:rPr>
+              <a:t>KI-Bilder können täuschend echt aussehen.</a:t>
+            </a:r>
+            <a:endParaRPr lang="en-US" sz="1700" dirty="0"/>
+          </a:p>
+        </p:txBody>
+      </p:sp>
+      <p:sp>
+        <p:nvSpPr>
+          <p:cNvPr id="15" name="Aussage 3"/>
+          <p:cNvSpPr/>
+          <p:nvPr/>
+        </p:nvSpPr>
+        <p:spPr>
+          <a:xfrm>
+            <a:off x="484632" y="3429000"/>
+            <a:ext cx="5486400" cy="1143000"/>
+          </a:xfrm>
+          <a:prstGeom prst="roundRect">
+            <a:avLst>
+              <a:gd name="adj" fmla="val 9600"/>
+            </a:avLst>
+          </a:prstGeom>
+          <a:solidFill>
+            <a:schemeClr val="bg1"/>
+          </a:solidFill>
+          <a:ln/>
+          <a:effectLst>
+            <a:outerShdw sx="100000" sy="100000" kx="0" ky="0" algn="bl" rotWithShape="0" blurRad="127000" dist="38100" dir="5400000">
+              <a:srgbClr val="1F2A55">
+                <a:alpha val="16000"/>
+              </a:srgbClr>
+            </a:outerShdw>
+          </a:effectLst>
+        </p:spPr>
+      </p:sp>
+      <p:sp>
+        <p:nvSpPr>
+          <p:cNvPr id="16" name="Nummer 3"/>
+          <p:cNvSpPr/>
+          <p:nvPr/>
+        </p:nvSpPr>
+        <p:spPr>
+          <a:xfrm>
+            <a:off x="713232" y="3703320"/>
+            <a:ext cx="594360" cy="594360"/>
+          </a:xfrm>
+          <a:prstGeom prst="ellipse">
+            <a:avLst/>
+          </a:prstGeom>
+          <a:solidFill>
+            <a:schemeClr val="tx1"/>
+          </a:solidFill>
+          <a:ln/>
+        </p:spPr>
+      </p:sp>
+      <p:sp>
+        <p:nvSpPr>
+          <p:cNvPr id="17" name="Text 14"/>
+          <p:cNvSpPr txBox="1"/>
+          <p:nvPr/>
+        </p:nvSpPr>
+        <p:spPr>
+          <a:xfrm>
+            <a:off x="713232" y="3703320"/>
+            <a:ext cx="594360" cy="594360"/>
+          </a:xfrm>
+          <a:prstGeom prst="rect">
+            <a:avLst/>
+          </a:prstGeom>
+          <a:noFill/>
+          <a:ln/>
+        </p:spPr>
+        <p:txBody>
+          <a:bodyPr wrap="square" lIns="0" tIns="0" rIns="0" bIns="0" rtlCol="0" anchor="ctr"/>
+          <a:lstStyle/>
+          <a:p>
+            <a:pPr algn="ctr" indent="0" marL="0">
+              <a:buNone/>
+            </a:pPr>
+            <a:r>
+              <a:rPr lang="en-US" sz="1800" b="1" dirty="0">
+                <a:solidFill>
+                  <a:schemeClr val="bg1"/>
+                </a:solidFill>
+              </a:rPr>
+              <a:t>3</a:t>
+            </a:r>
+            <a:endParaRPr lang="en-US" sz="1800" dirty="0"/>
+          </a:p>
+        </p:txBody>
+      </p:sp>
+      <p:sp>
+        <p:nvSpPr>
+          <p:cNvPr id="18" name="Text 15"/>
+          <p:cNvSpPr txBox="1"/>
+          <p:nvPr/>
+        </p:nvSpPr>
+        <p:spPr>
+          <a:xfrm>
+            <a:off x="1490472" y="3429000"/>
+            <a:ext cx="4297680" cy="1143000"/>
+          </a:xfrm>
+          <a:prstGeom prst="rect">
+            <a:avLst/>
+          </a:prstGeom>
+          <a:noFill/>
+          <a:ln/>
+        </p:spPr>
+        <p:txBody>
+          <a:bodyPr wrap="square" lIns="0" tIns="0" rIns="0" bIns="0" rtlCol="0" anchor="ctr"/>
+          <a:lstStyle/>
+          <a:p>
+            <a:pPr indent="0" marL="0">
+              <a:buNone/>
+            </a:pPr>
+            <a:r>
+              <a:rPr lang="en-US" sz="1700" b="1" dirty="0">
+                <a:solidFill>
+                  <a:schemeClr val="tx1"/>
+                </a:solidFill>
+              </a:rPr>
+              <a:t>Was ich einem Chatbot schreibe, bleibt privat.</a:t>
+            </a:r>
+            <a:endParaRPr lang="en-US" sz="1700" dirty="0"/>
+          </a:p>
+        </p:txBody>
+      </p:sp>
+      <p:sp>
+        <p:nvSpPr>
+          <p:cNvPr id="19" name="Aussage 4"/>
+          <p:cNvSpPr/>
+          <p:nvPr/>
+        </p:nvSpPr>
+        <p:spPr>
+          <a:xfrm>
+            <a:off x="6217920" y="3429000"/>
+            <a:ext cx="5486400" cy="1143000"/>
+          </a:xfrm>
+          <a:prstGeom prst="roundRect">
+            <a:avLst>
+              <a:gd name="adj" fmla="val 9600"/>
+            </a:avLst>
+          </a:prstGeom>
+          <a:solidFill>
+            <a:schemeClr val="bg1"/>
+          </a:solidFill>
+          <a:ln/>
+          <a:effectLst>
+            <a:outerShdw sx="100000" sy="100000" kx="0" ky="0" algn="bl" rotWithShape="0" blurRad="127000" dist="38100" dir="5400000">
+              <a:srgbClr val="1F2A55">
+                <a:alpha val="16000"/>
+              </a:srgbClr>
+            </a:outerShdw>
+          </a:effectLst>
+        </p:spPr>
+      </p:sp>
+      <p:sp>
+        <p:nvSpPr>
+          <p:cNvPr id="20" name="Nummer 4"/>
+          <p:cNvSpPr/>
+          <p:nvPr/>
+        </p:nvSpPr>
+        <p:spPr>
+          <a:xfrm>
+            <a:off x="6446520" y="3703320"/>
+            <a:ext cx="594360" cy="594360"/>
+          </a:xfrm>
+          <a:prstGeom prst="ellipse">
+            <a:avLst/>
+          </a:prstGeom>
+          <a:solidFill>
+            <a:schemeClr val="tx1"/>
+          </a:solidFill>
+          <a:ln/>
+        </p:spPr>
+      </p:sp>
+      <p:sp>
+        <p:nvSpPr>
+          <p:cNvPr id="21" name="Text 18"/>
+          <p:cNvSpPr txBox="1"/>
+          <p:nvPr/>
+        </p:nvSpPr>
+        <p:spPr>
+          <a:xfrm>
+            <a:off x="6446520" y="3703320"/>
+            <a:ext cx="594360" cy="594360"/>
+          </a:xfrm>
+          <a:prstGeom prst="rect">
+            <a:avLst/>
+          </a:prstGeom>
+          <a:noFill/>
+          <a:ln/>
+        </p:spPr>
+        <p:txBody>
+          <a:bodyPr wrap="square" lIns="0" tIns="0" rIns="0" bIns="0" rtlCol="0" anchor="ctr"/>
+          <a:lstStyle/>
+          <a:p>
+            <a:pPr algn="ctr" indent="0" marL="0">
+              <a:buNone/>
+            </a:pPr>
+            <a:r>
+              <a:rPr lang="en-US" sz="1800" b="1" dirty="0">
+                <a:solidFill>
+                  <a:schemeClr val="bg1"/>
+                </a:solidFill>
+              </a:rPr>
+              <a:t>4</a:t>
+            </a:r>
+            <a:endParaRPr lang="en-US" sz="1800" dirty="0"/>
+          </a:p>
+        </p:txBody>
+      </p:sp>
+      <p:sp>
+        <p:nvSpPr>
+          <p:cNvPr id="22" name="Text 19"/>
+          <p:cNvSpPr txBox="1"/>
+          <p:nvPr/>
+        </p:nvSpPr>
+        <p:spPr>
+          <a:xfrm>
+            <a:off x="7223760" y="3429000"/>
+            <a:ext cx="4297680" cy="1143000"/>
+          </a:xfrm>
+          <a:prstGeom prst="rect">
+            <a:avLst/>
+          </a:prstGeom>
+          <a:noFill/>
+          <a:ln/>
+        </p:spPr>
+        <p:txBody>
+          <a:bodyPr wrap="square" lIns="0" tIns="0" rIns="0" bIns="0" rtlCol="0" anchor="ctr"/>
+          <a:lstStyle/>
+          <a:p>
+            <a:pPr indent="0" marL="0">
+              <a:buNone/>
+            </a:pPr>
+            <a:r>
+              <a:rPr lang="en-US" sz="1700" b="1" dirty="0">
+                <a:solidFill>
+                  <a:schemeClr val="tx1"/>
+                </a:solidFill>
+              </a:rPr>
+              <a:t>Eine KI kann Vorurteile haben.</a:t>
+            </a:r>
+            <a:endParaRPr lang="en-US" sz="1700" dirty="0"/>
+          </a:p>
+        </p:txBody>
+      </p:sp>
+      <p:sp>
+        <p:nvSpPr>
+          <p:cNvPr id="23" name="Aussage 5"/>
+          <p:cNvSpPr/>
+          <p:nvPr/>
+        </p:nvSpPr>
+        <p:spPr>
+          <a:xfrm>
+            <a:off x="484632" y="4754880"/>
+            <a:ext cx="5486400" cy="1143000"/>
+          </a:xfrm>
+          <a:prstGeom prst="roundRect">
+            <a:avLst>
+              <a:gd name="adj" fmla="val 9600"/>
+            </a:avLst>
+          </a:prstGeom>
+          <a:solidFill>
+            <a:schemeClr val="bg1"/>
+          </a:solidFill>
+          <a:ln/>
+          <a:effectLst>
+            <a:outerShdw sx="100000" sy="100000" kx="0" ky="0" algn="bl" rotWithShape="0" blurRad="127000" dist="38100" dir="5400000">
+              <a:srgbClr val="1F2A55">
+                <a:alpha val="16000"/>
+              </a:srgbClr>
+            </a:outerShdw>
+          </a:effectLst>
+        </p:spPr>
+      </p:sp>
+      <p:sp>
+        <p:nvSpPr>
+          <p:cNvPr id="24" name="Nummer 5"/>
+          <p:cNvSpPr/>
+          <p:nvPr/>
+        </p:nvSpPr>
+        <p:spPr>
+          <a:xfrm>
+            <a:off x="713232" y="5029200"/>
+            <a:ext cx="594360" cy="594360"/>
+          </a:xfrm>
+          <a:prstGeom prst="ellipse">
+            <a:avLst/>
+          </a:prstGeom>
+          <a:solidFill>
+            <a:schemeClr val="tx1"/>
+          </a:solidFill>
+          <a:ln/>
+        </p:spPr>
+      </p:sp>
+      <p:sp>
+        <p:nvSpPr>
+          <p:cNvPr id="25" name="Text 22"/>
+          <p:cNvSpPr txBox="1"/>
+          <p:nvPr/>
+        </p:nvSpPr>
+        <p:spPr>
+          <a:xfrm>
+            <a:off x="713232" y="5029200"/>
+            <a:ext cx="594360" cy="594360"/>
+          </a:xfrm>
+          <a:prstGeom prst="rect">
+            <a:avLst/>
+          </a:prstGeom>
+          <a:noFill/>
+          <a:ln/>
+        </p:spPr>
+        <p:txBody>
+          <a:bodyPr wrap="square" lIns="0" tIns="0" rIns="0" bIns="0" rtlCol="0" anchor="ctr"/>
+          <a:lstStyle/>
+          <a:p>
+            <a:pPr algn="ctr" indent="0" marL="0">
+              <a:buNone/>
+            </a:pPr>
+            <a:r>
+              <a:rPr lang="en-US" sz="1800" b="1" dirty="0">
+                <a:solidFill>
+                  <a:schemeClr val="bg1"/>
+                </a:solidFill>
+              </a:rPr>
+              <a:t>5</a:t>
+            </a:r>
+            <a:endParaRPr lang="en-US" sz="1800" dirty="0"/>
+          </a:p>
+        </p:txBody>
+      </p:sp>
+      <p:sp>
+        <p:nvSpPr>
+          <p:cNvPr id="26" name="Text 23"/>
+          <p:cNvSpPr txBox="1"/>
+          <p:nvPr/>
+        </p:nvSpPr>
+        <p:spPr>
+          <a:xfrm>
+            <a:off x="1490472" y="4754880"/>
+            <a:ext cx="4297680" cy="1143000"/>
+          </a:xfrm>
+          <a:prstGeom prst="rect">
+            <a:avLst/>
+          </a:prstGeom>
+          <a:noFill/>
+          <a:ln/>
+        </p:spPr>
+        <p:txBody>
+          <a:bodyPr wrap="square" lIns="0" tIns="0" rIns="0" bIns="0" rtlCol="0" anchor="ctr"/>
+          <a:lstStyle/>
+          <a:p>
+            <a:pPr indent="0" marL="0">
+              <a:buNone/>
+            </a:pPr>
+            <a:r>
+              <a:rPr lang="en-US" sz="1700" b="1" dirty="0">
+                <a:solidFill>
+                  <a:schemeClr val="tx1"/>
+                </a:solidFill>
+              </a:rPr>
+              <a:t>Wenn eine KI eine Quelle nennt, gibt es sie auch.</a:t>
+            </a:r>
+            <a:endParaRPr lang="en-US" sz="1700" dirty="0"/>
+          </a:p>
+        </p:txBody>
+      </p:sp>
+      <p:sp>
+        <p:nvSpPr>
+          <p:cNvPr id="27" name="Aussage 6"/>
+          <p:cNvSpPr/>
+          <p:nvPr/>
+        </p:nvSpPr>
+        <p:spPr>
+          <a:xfrm>
+            <a:off x="6217920" y="4754880"/>
+            <a:ext cx="5486400" cy="1143000"/>
+          </a:xfrm>
+          <a:prstGeom prst="roundRect">
+            <a:avLst>
+              <a:gd name="adj" fmla="val 9600"/>
+            </a:avLst>
+          </a:prstGeom>
+          <a:solidFill>
+            <a:schemeClr val="bg1"/>
+          </a:solidFill>
+          <a:ln/>
+          <a:effectLst>
+            <a:outerShdw sx="100000" sy="100000" kx="0" ky="0" algn="bl" rotWithShape="0" blurRad="127000" dist="38100" dir="5400000">
+              <a:srgbClr val="1F2A55">
+                <a:alpha val="16000"/>
+              </a:srgbClr>
+            </a:outerShdw>
+          </a:effectLst>
+        </p:spPr>
+      </p:sp>
+      <p:sp>
+        <p:nvSpPr>
+          <p:cNvPr id="28" name="Nummer 6"/>
+          <p:cNvSpPr/>
+          <p:nvPr/>
+        </p:nvSpPr>
+        <p:spPr>
+          <a:xfrm>
+            <a:off x="6446520" y="5029200"/>
+            <a:ext cx="594360" cy="594360"/>
+          </a:xfrm>
+          <a:prstGeom prst="ellipse">
+            <a:avLst/>
+          </a:prstGeom>
+          <a:solidFill>
+            <a:schemeClr val="tx1"/>
+          </a:solidFill>
+          <a:ln/>
+        </p:spPr>
+      </p:sp>
+      <p:sp>
+        <p:nvSpPr>
+          <p:cNvPr id="29" name="Text 26"/>
+          <p:cNvSpPr txBox="1"/>
+          <p:nvPr/>
+        </p:nvSpPr>
+        <p:spPr>
+          <a:xfrm>
+            <a:off x="6446520" y="5029200"/>
+            <a:ext cx="594360" cy="594360"/>
+          </a:xfrm>
+          <a:prstGeom prst="rect">
+            <a:avLst/>
+          </a:prstGeom>
+          <a:noFill/>
+          <a:ln/>
+        </p:spPr>
+        <p:txBody>
+          <a:bodyPr wrap="square" lIns="0" tIns="0" rIns="0" bIns="0" rtlCol="0" anchor="ctr"/>
+          <a:lstStyle/>
+          <a:p>
+            <a:pPr algn="ctr" indent="0" marL="0">
+              <a:buNone/>
+            </a:pPr>
+            <a:r>
+              <a:rPr lang="en-US" sz="1800" b="1" dirty="0">
+                <a:solidFill>
+                  <a:schemeClr val="bg1"/>
+                </a:solidFill>
+              </a:rPr>
+              <a:t>6</a:t>
+            </a:r>
+            <a:endParaRPr lang="en-US" sz="1800" dirty="0"/>
+          </a:p>
+        </p:txBody>
+      </p:sp>
+      <p:sp>
+        <p:nvSpPr>
+          <p:cNvPr id="30" name="Text 27"/>
+          <p:cNvSpPr txBox="1"/>
+          <p:nvPr/>
+        </p:nvSpPr>
+        <p:spPr>
+          <a:xfrm>
+            <a:off x="7223760" y="4754880"/>
+            <a:ext cx="4297680" cy="1143000"/>
+          </a:xfrm>
+          <a:prstGeom prst="rect">
+            <a:avLst/>
+          </a:prstGeom>
+          <a:noFill/>
+          <a:ln/>
+        </p:spPr>
+        <p:txBody>
+          <a:bodyPr wrap="square" lIns="0" tIns="0" rIns="0" bIns="0" rtlCol="0" anchor="ctr"/>
+          <a:lstStyle/>
+          <a:p>
+            <a:pPr indent="0" marL="0">
+              <a:buNone/>
+            </a:pPr>
+            <a:r>
+              <a:rPr lang="en-US" sz="1700" b="1" dirty="0">
+                <a:solidFill>
+                  <a:schemeClr val="tx1"/>
+                </a:solidFill>
+              </a:rPr>
+              <a:t>KI braucht viel Energie.</a:t>
+            </a:r>
+            <a:endParaRPr lang="en-US" sz="1700" dirty="0"/>
+          </a:p>
+        </p:txBody>
+      </p:sp>
+      <p:sp>
+        <p:nvSpPr>
+          <p:cNvPr id="31" name="Hinweis optional"/>
+          <p:cNvSpPr/>
+          <p:nvPr/>
+        </p:nvSpPr>
+        <p:spPr>
+          <a:xfrm>
+            <a:off x="8366760" y="6437376"/>
+            <a:ext cx="2560320" cy="256032"/>
+          </a:xfrm>
+          <a:prstGeom prst="roundRect">
+            <a:avLst>
+              <a:gd name="adj" fmla="val 50000"/>
+            </a:avLst>
+          </a:prstGeom>
+          <a:solidFill>
+            <a:schemeClr val="bg2"/>
+          </a:solidFill>
+          <a:ln/>
+        </p:spPr>
+      </p:sp>
+      <p:sp>
+        <p:nvSpPr>
+          <p:cNvPr id="32" name="Text 29"/>
+          <p:cNvSpPr txBox="1"/>
+          <p:nvPr/>
+        </p:nvSpPr>
+        <p:spPr>
+          <a:xfrm>
+            <a:off x="8366760" y="6437376"/>
+            <a:ext cx="2560320" cy="256032"/>
+          </a:xfrm>
+          <a:prstGeom prst="rect">
+            <a:avLst/>
+          </a:prstGeom>
+          <a:noFill/>
+          <a:ln/>
+        </p:spPr>
+        <p:txBody>
+          <a:bodyPr wrap="square" lIns="0" tIns="0" rIns="0" bIns="0" rtlCol="0" anchor="ctr"/>
+          <a:lstStyle/>
+          <a:p>
+            <a:pPr algn="ctr" indent="0" marL="0">
+              <a:buNone/>
+            </a:pPr>
+            <a:r>
+              <a:rPr lang="en-US" sz="900" b="1" spc="100" kern="0" dirty="0">
+                <a:solidFill>
+                  <a:schemeClr val="accent3"/>
+                </a:solidFill>
+              </a:rPr>
+              <a:t>OPTIONAL · ÜBERALL</a:t>
+            </a:r>
+            <a:endParaRPr lang="en-US" sz="900" dirty="0"/>
+          </a:p>
+        </p:txBody>
+      </p:sp>
+      <p:sp>
+        <p:nvSpPr>
+          <p:cNvPr id="34" name="Text 1"/>
+          <p:cNvSpPr/>
+          <p:nvPr>
+            <p:ph idx="104" type="body" hasCustomPrompt="1"/>
+          </p:nvPr>
+        </p:nvSpPr>
+        <p:spPr>
+          <a:xfrm>
+            <a:off x="484632" y="1417320"/>
+            <a:ext cx="9601200" cy="365760"/>
+          </a:xfrm>
+          <a:prstGeom prst="rect">
+            <a:avLst/>
+          </a:prstGeom>
+          <a:noFill/>
+          <a:ln/>
+        </p:spPr>
+        <p:txBody>
+          <a:bodyPr wrap="square" lIns="0" tIns="0" rIns="0" bIns="0" rtlCol="0" anchor="ctr"/>
+          <a:lstStyle/>
+          <a:p>
+            <a:pPr indent="0" marL="0">
+              <a:buNone/>
+            </a:pPr>
+            <a:endParaRPr lang="en-US" sz="1500" dirty="0"/>
+          </a:p>
+        </p:txBody>
+      </p:sp>
+      <p:sp>
+        <p:nvSpPr>
+          <p:cNvPr id="25" name="Slide Number Placeholder 0"/>
+          <p:cNvSpPr>
+            <a:spLocks noGrp="1"/>
+          </p:cNvSpPr>
+          <p:nvPr>
+            <p:ph type="sldNum" sz="quarter" idx="4294967295"/>
+          </p:nvPr>
+        </p:nvSpPr>
+        <p:spPr>
+          <a:xfrm>
+            <a:off x="11155680" y="6455664"/>
+            <a:ext cx="548640" cy="274320"/>
+          </a:xfrm>
+          <a:prstGeom prst="rect">
+            <a:avLst/>
+          </a:prstGeom>
+          <a:extLst>
+            <a:ext uri="{C572A759-6A51-4108-AA02-DFA0A04FC94B}">
+              <ma14:wrappingTextBoxFlag xmlns:ma14="http://schemas.microsoft.com/office/mac/drawingml/2011/main" val="0"/>
+            </a:ext>
+          </a:extLst>
+        </p:spPr>
+        <p:txBody>
+          <a:bodyPr/>
+          <a:lstStyle>
+            <a:lvl1pPr>
+              <a:defRPr sz="1100">
+                <a:solidFill>
+                  <a:schemeClr val="accent3"/>
+                </a:solidFill>
+              </a:defRPr>
+            </a:lvl1pPr>
+          </a:lstStyle>
+          <a:p>
+            <a:pPr algn="r"/>
+            <a:fld id="{F7021451-1387-4CA6-816F-3879F97B5CBC}" type="slidenum">
+              <a:rPr b="0" lang="en-US"/>
+              <a:t>33</a:t>
+            </a:fld>
+            <a:endParaRPr lang="en-US"/>
+          </a:p>
+        </p:txBody>
+      </p:sp>
+    </p:spTree>
+  </p:cSld>
+  <p:clrMapOvr>
+    <a:masterClrMapping/>
+  </p:clrMapOvr>
+</p:sld>
+</file>
+
+<file path=ppt/slides/slide34.xml><?xml version="1.0" encoding="utf-8"?>
+<p:sld xmlns:a="http://schemas.openxmlformats.org/drawingml/2006/main" xmlns:r="http://schemas.openxmlformats.org/officeDocument/2006/relationships" xmlns:p="http://schemas.openxmlformats.org/presentationml/2006/main">
+  <p:cSld name="Slide 34">
+    <p:spTree>
+      <p:nvGrpSpPr>
+        <p:cNvPr id="1" name=""/>
+        <p:cNvGrpSpPr/>
+        <p:nvPr/>
+      </p:nvGrpSpPr>
+      <p:grpSpPr>
+        <a:xfrm>
+          <a:off x="0" y="0"/>
+          <a:ext cx="0" cy="0"/>
+          <a:chOff x="0" y="0"/>
+          <a:chExt cx="0" cy="0"/>
+        </a:xfrm>
+      </p:grpSpPr>
+      <p:sp>
+        <p:nvSpPr>
+          <p:cNvPr id="2" name="Text 1"/>
+          <p:cNvSpPr/>
+          <p:nvPr>
+            <p:ph idx="103" type="title" hasCustomPrompt="1"/>
+          </p:nvPr>
+        </p:nvSpPr>
+        <p:spPr>
+          <a:xfrm>
+            <a:off x="484632" y="548640"/>
+            <a:ext cx="8778240" cy="640080"/>
+          </a:xfrm>
+          <a:prstGeom prst="rect">
+            <a:avLst/>
+          </a:prstGeom>
+          <a:noFill/>
+          <a:ln/>
+        </p:spPr>
+        <p:txBody>
+          <a:bodyPr wrap="square" lIns="0" tIns="0" rIns="0" bIns="0" rtlCol="0" anchor="b"/>
+          <a:lstStyle/>
+          <a:p>
+            <a:pPr algn="l" indent="0" marL="0">
+              <a:buNone/>
+            </a:pPr>
+            <a:r>
+              <a:rPr lang="en-US" sz="3000" b="1" dirty="0">
+                <a:solidFill>
+                  <a:schemeClr val="tx1"/>
+                </a:solidFill>
+              </a:rPr>
+              <a:t>Wahr oder falsch? Die Auflösung</a:t>
+            </a:r>
+            <a:endParaRPr lang="en-US" sz="3000" dirty="0"/>
+          </a:p>
+        </p:txBody>
+      </p:sp>
+      <p:sp>
+        <p:nvSpPr>
+          <p:cNvPr id="3" name="Text 1"/>
+          <p:cNvSpPr/>
+          <p:nvPr>
+            <p:ph idx="104" type="body" hasCustomPrompt="1"/>
+          </p:nvPr>
+        </p:nvSpPr>
+        <p:spPr>
+          <a:xfrm>
+            <a:off x="484632" y="1417320"/>
+            <a:ext cx="9601200" cy="365760"/>
+          </a:xfrm>
+          <a:prstGeom prst="rect">
+            <a:avLst/>
+          </a:prstGeom>
+          <a:noFill/>
+          <a:ln/>
+        </p:spPr>
+        <p:txBody>
+          <a:bodyPr wrap="square" lIns="0" tIns="0" rIns="0" bIns="0" rtlCol="0" anchor="ctr"/>
+          <a:lstStyle/>
+          <a:p>
+            <a:pPr indent="0" marL="0">
+              <a:buNone/>
+            </a:pPr>
+            <a:r>
+              <a:rPr lang="en-US" sz="1500" dirty="0">
+                <a:solidFill>
+                  <a:schemeClr val="tx2"/>
+                </a:solidFill>
+              </a:rPr>
+              <a:t>Wie viele hattet ihr richtig?</a:t>
+            </a:r>
+            <a:endParaRPr lang="en-US" sz="1500" dirty="0"/>
+          </a:p>
+        </p:txBody>
+      </p:sp>
+      <p:sp>
+        <p:nvSpPr>
+          <p:cNvPr id="4" name="Aussage 1"/>
+          <p:cNvSpPr/>
+          <p:nvPr/>
+        </p:nvSpPr>
+        <p:spPr>
+          <a:xfrm>
+            <a:off x="484632" y="2103120"/>
+            <a:ext cx="5486400" cy="1143000"/>
+          </a:xfrm>
+          <a:prstGeom prst="roundRect">
+            <a:avLst>
+              <a:gd name="adj" fmla="val 9600"/>
+            </a:avLst>
+          </a:prstGeom>
+          <a:solidFill>
+            <a:schemeClr val="bg1"/>
+          </a:solidFill>
+          <a:ln/>
+          <a:effectLst>
+            <a:outerShdw sx="100000" sy="100000" kx="0" ky="0" algn="bl" rotWithShape="0" blurRad="127000" dist="38100" dir="5400000">
+              <a:srgbClr val="1F2A55">
+                <a:alpha val="16000"/>
+              </a:srgbClr>
+            </a:outerShdw>
+          </a:effectLst>
+        </p:spPr>
+      </p:sp>
+      <p:sp>
+        <p:nvSpPr>
+          <p:cNvPr id="5" name="Icon-Kreis LuCircleX"/>
+          <p:cNvSpPr/>
+          <p:nvPr/>
+        </p:nvSpPr>
+        <p:spPr>
+          <a:xfrm>
+            <a:off x="713232" y="2377440"/>
+            <a:ext cx="594360" cy="594360"/>
+          </a:xfrm>
+          <a:prstGeom prst="ellipse">
+            <a:avLst/>
+          </a:prstGeom>
+          <a:solidFill>
+            <a:schemeClr val="accent6"/>
+          </a:solidFill>
+          <a:ln/>
+        </p:spPr>
+      </p:sp>
+      <p:pic>
+        <p:nvPicPr>
+          <p:cNvPr id="6" name="Icon LuCircleX" descr="preencoded.png">    </p:cNvPr>
+          <p:cNvPicPr>
+            <a:picLocks noChangeAspect="1"/>
+          </p:cNvPicPr>
+          <p:nvPr/>
+        </p:nvPicPr>
+        <p:blipFill>
+          <a:blip r:embed="rId1"/>
+          <a:stretch>
+            <a:fillRect/>
+          </a:stretch>
+        </p:blipFill>
+        <p:spPr>
+          <a:xfrm>
+            <a:off x="867766" y="2531974"/>
+            <a:ext cx="285293" cy="285293"/>
+          </a:xfrm>
+          <a:prstGeom prst="rect">
+            <a:avLst/>
+          </a:prstGeom>
+        </p:spPr>
+      </p:pic>
+      <p:sp>
+        <p:nvSpPr>
+          <p:cNvPr id="7" name="Text 4"/>
+          <p:cNvSpPr txBox="1"/>
+          <p:nvPr/>
+        </p:nvSpPr>
+        <p:spPr>
+          <a:xfrm>
+            <a:off x="1490472" y="2194560"/>
+            <a:ext cx="4343400" cy="502920"/>
+          </a:xfrm>
+          <a:prstGeom prst="rect">
+            <a:avLst/>
+          </a:prstGeom>
+          <a:noFill/>
+          <a:ln/>
+        </p:spPr>
+        <p:txBody>
+          <a:bodyPr wrap="square" lIns="0" tIns="0" rIns="0" bIns="0" rtlCol="0" anchor="ctr"/>
+          <a:lstStyle/>
+          <a:p>
+            <a:pPr indent="0" marL="0">
+              <a:buNone/>
+            </a:pPr>
+            <a:r>
+              <a:rPr lang="en-US" sz="1350" b="1" dirty="0">
+                <a:solidFill>
+                  <a:schemeClr val="tx1"/>
+                </a:solidFill>
+              </a:rPr>
+              <a:t>KI denkt wie ein Mensch.</a:t>
+            </a:r>
+            <a:endParaRPr lang="en-US" sz="1350" dirty="0"/>
+          </a:p>
+        </p:txBody>
+      </p:sp>
+      <p:sp>
+        <p:nvSpPr>
+          <p:cNvPr id="8" name="Text 5"/>
+          <p:cNvSpPr txBox="1"/>
+          <p:nvPr/>
+        </p:nvSpPr>
+        <p:spPr>
+          <a:xfrm>
+            <a:off x="1490472" y="2743200"/>
+            <a:ext cx="4343400" cy="438912"/>
+          </a:xfrm>
+          <a:prstGeom prst="rect">
+            <a:avLst/>
+          </a:prstGeom>
+          <a:noFill/>
+          <a:ln/>
+        </p:spPr>
+        <p:txBody>
+          <a:bodyPr wrap="square" lIns="0" tIns="0" rIns="0" bIns="0" rtlCol="0" anchor="t"/>
+          <a:lstStyle/>
+          <a:p>
+            <a:pPr indent="0" marL="0">
+              <a:buNone/>
+            </a:pPr>
+            <a:r>
+              <a:rPr lang="en-US" sz="1200" b="1" dirty="0">
+                <a:solidFill>
+                  <a:schemeClr val="accent6"/>
+                </a:solidFill>
+              </a:rPr>
+              <a:t>Falsch. </a:t>
+            </a:r>
+            <a:pPr indent="0" marL="0">
+              <a:buNone/>
+            </a:pPr>
+            <a:r>
+              <a:rPr lang="en-US" sz="1200" dirty="0">
+                <a:solidFill>
+                  <a:schemeClr val="tx2"/>
+                </a:solidFill>
+              </a:rPr>
+              <a:t>Sie berechnet Wahrscheinlichkeiten – sie versteht nicht wie wir.</a:t>
+            </a:r>
+            <a:endParaRPr lang="en-US" sz="1200" dirty="0"/>
+          </a:p>
+        </p:txBody>
+      </p:sp>
+      <p:sp>
+        <p:nvSpPr>
+          <p:cNvPr id="9" name="Aussage 2"/>
+          <p:cNvSpPr/>
+          <p:nvPr/>
+        </p:nvSpPr>
+        <p:spPr>
+          <a:xfrm>
+            <a:off x="6217920" y="2103120"/>
+            <a:ext cx="5486400" cy="1143000"/>
+          </a:xfrm>
+          <a:prstGeom prst="roundRect">
+            <a:avLst>
+              <a:gd name="adj" fmla="val 9600"/>
+            </a:avLst>
+          </a:prstGeom>
+          <a:solidFill>
+            <a:schemeClr val="bg1"/>
+          </a:solidFill>
+          <a:ln/>
+          <a:effectLst>
+            <a:outerShdw sx="100000" sy="100000" kx="0" ky="0" algn="bl" rotWithShape="0" blurRad="127000" dist="38100" dir="5400000">
+              <a:srgbClr val="1F2A55">
+                <a:alpha val="16000"/>
+              </a:srgbClr>
+            </a:outerShdw>
+          </a:effectLst>
+        </p:spPr>
+      </p:sp>
+      <p:sp>
+        <p:nvSpPr>
+          <p:cNvPr id="10" name="Icon-Kreis LuCircleCheck"/>
+          <p:cNvSpPr/>
+          <p:nvPr/>
+        </p:nvSpPr>
+        <p:spPr>
+          <a:xfrm>
+            <a:off x="6446520" y="2377440"/>
+            <a:ext cx="594360" cy="594360"/>
+          </a:xfrm>
+          <a:prstGeom prst="ellipse">
+            <a:avLst/>
+          </a:prstGeom>
+          <a:solidFill>
+            <a:schemeClr val="accent1"/>
+          </a:solidFill>
+          <a:ln/>
+        </p:spPr>
+      </p:sp>
+      <p:pic>
+        <p:nvPicPr>
+          <p:cNvPr id="11" name="Icon LuCircleCheck" descr="preencoded.png">    </p:cNvPr>
+          <p:cNvPicPr>
+            <a:picLocks noChangeAspect="1"/>
+          </p:cNvPicPr>
+          <p:nvPr/>
+        </p:nvPicPr>
+        <p:blipFill>
+          <a:blip r:embed="rId2"/>
+          <a:stretch>
+            <a:fillRect/>
+          </a:stretch>
+        </p:blipFill>
+        <p:spPr>
+          <a:xfrm>
+            <a:off x="6601054" y="2531974"/>
+            <a:ext cx="285293" cy="285293"/>
+          </a:xfrm>
+          <a:prstGeom prst="rect">
+            <a:avLst/>
+          </a:prstGeom>
+        </p:spPr>
+      </p:pic>
+      <p:sp>
+        <p:nvSpPr>
+          <p:cNvPr id="12" name="Text 8"/>
+          <p:cNvSpPr txBox="1"/>
+          <p:nvPr/>
+        </p:nvSpPr>
+        <p:spPr>
+          <a:xfrm>
+            <a:off x="7223760" y="2194560"/>
+            <a:ext cx="4343400" cy="502920"/>
+          </a:xfrm>
+          <a:prstGeom prst="rect">
+            <a:avLst/>
+          </a:prstGeom>
+          <a:noFill/>
+          <a:ln/>
+        </p:spPr>
+        <p:txBody>
+          <a:bodyPr wrap="square" lIns="0" tIns="0" rIns="0" bIns="0" rtlCol="0" anchor="ctr"/>
+          <a:lstStyle/>
+          <a:p>
+            <a:pPr indent="0" marL="0">
+              <a:buNone/>
+            </a:pPr>
+            <a:r>
+              <a:rPr lang="en-US" sz="1350" b="1" dirty="0">
+                <a:solidFill>
+                  <a:schemeClr val="tx1"/>
+                </a:solidFill>
+              </a:rPr>
+              <a:t>KI-Bilder können täuschend echt aussehen.</a:t>
+            </a:r>
+            <a:endParaRPr lang="en-US" sz="1350" dirty="0"/>
+          </a:p>
+        </p:txBody>
+      </p:sp>
+      <p:sp>
+        <p:nvSpPr>
+          <p:cNvPr id="13" name="Text 9"/>
+          <p:cNvSpPr txBox="1"/>
+          <p:nvPr/>
+        </p:nvSpPr>
+        <p:spPr>
+          <a:xfrm>
+            <a:off x="7223760" y="2743200"/>
+            <a:ext cx="4343400" cy="438912"/>
+          </a:xfrm>
+          <a:prstGeom prst="rect">
+            <a:avLst/>
+          </a:prstGeom>
+          <a:noFill/>
+          <a:ln/>
+        </p:spPr>
+        <p:txBody>
+          <a:bodyPr wrap="square" lIns="0" tIns="0" rIns="0" bIns="0" rtlCol="0" anchor="t"/>
+          <a:lstStyle/>
+          <a:p>
+            <a:pPr indent="0" marL="0">
+              <a:buNone/>
+            </a:pPr>
+            <a:r>
+              <a:rPr lang="en-US" sz="1200" b="1" dirty="0">
+                <a:solidFill>
+                  <a:schemeClr val="accent1"/>
+                </a:solidFill>
+              </a:rPr>
+              <a:t>Wahr. </a:t>
+            </a:r>
+            <a:pPr indent="0" marL="0">
+              <a:buNone/>
+            </a:pPr>
+            <a:r>
+              <a:rPr lang="en-US" sz="1200" dirty="0">
+                <a:solidFill>
+                  <a:schemeClr val="tx2"/>
+                </a:solidFill>
+              </a:rPr>
+              <a:t>Selbst Profis lassen sich täuschen.</a:t>
+            </a:r>
+            <a:endParaRPr lang="en-US" sz="1200" dirty="0"/>
+          </a:p>
+        </p:txBody>
+      </p:sp>
+      <p:sp>
+        <p:nvSpPr>
+          <p:cNvPr id="14" name="Aussage 3"/>
+          <p:cNvSpPr/>
+          <p:nvPr/>
+        </p:nvSpPr>
+        <p:spPr>
+          <a:xfrm>
+            <a:off x="484632" y="3429000"/>
+            <a:ext cx="5486400" cy="1143000"/>
+          </a:xfrm>
+          <a:prstGeom prst="roundRect">
+            <a:avLst>
+              <a:gd name="adj" fmla="val 9600"/>
+            </a:avLst>
+          </a:prstGeom>
+          <a:solidFill>
+            <a:schemeClr val="bg1"/>
+          </a:solidFill>
+          <a:ln/>
+          <a:effectLst>
+            <a:outerShdw sx="100000" sy="100000" kx="0" ky="0" algn="bl" rotWithShape="0" blurRad="127000" dist="38100" dir="5400000">
+              <a:srgbClr val="1F2A55">
+                <a:alpha val="16000"/>
+              </a:srgbClr>
+            </a:outerShdw>
+          </a:effectLst>
+        </p:spPr>
+      </p:sp>
+      <p:sp>
+        <p:nvSpPr>
+          <p:cNvPr id="15" name="Icon-Kreis LuCircleX"/>
+          <p:cNvSpPr/>
+          <p:nvPr/>
+        </p:nvSpPr>
+        <p:spPr>
+          <a:xfrm>
+            <a:off x="713232" y="3703320"/>
+            <a:ext cx="594360" cy="594360"/>
+          </a:xfrm>
+          <a:prstGeom prst="ellipse">
+            <a:avLst/>
+          </a:prstGeom>
+          <a:solidFill>
+            <a:schemeClr val="accent6"/>
+          </a:solidFill>
+          <a:ln/>
+        </p:spPr>
+      </p:sp>
+      <p:pic>
+        <p:nvPicPr>
+          <p:cNvPr id="16" name="Icon LuCircleX" descr="preencoded.png">    </p:cNvPr>
+          <p:cNvPicPr>
+            <a:picLocks noChangeAspect="1"/>
+          </p:cNvPicPr>
+          <p:nvPr/>
+        </p:nvPicPr>
+        <p:blipFill>
+          <a:blip r:embed="rId3"/>
+          <a:stretch>
+            <a:fillRect/>
+          </a:stretch>
+        </p:blipFill>
+        <p:spPr>
+          <a:xfrm>
+            <a:off x="867766" y="3857854"/>
+            <a:ext cx="285293" cy="285293"/>
+          </a:xfrm>
+          <a:prstGeom prst="rect">
+            <a:avLst/>
+          </a:prstGeom>
+        </p:spPr>
+      </p:pic>
+      <p:sp>
+        <p:nvSpPr>
+          <p:cNvPr id="17" name="Text 12"/>
+          <p:cNvSpPr txBox="1"/>
+          <p:nvPr/>
+        </p:nvSpPr>
+        <p:spPr>
+          <a:xfrm>
+            <a:off x="1490472" y="3520440"/>
+            <a:ext cx="4343400" cy="502920"/>
+          </a:xfrm>
+          <a:prstGeom prst="rect">
+            <a:avLst/>
+          </a:prstGeom>
+          <a:noFill/>
+          <a:ln/>
+        </p:spPr>
+        <p:txBody>
+          <a:bodyPr wrap="square" lIns="0" tIns="0" rIns="0" bIns="0" rtlCol="0" anchor="ctr"/>
+          <a:lstStyle/>
+          <a:p>
+            <a:pPr indent="0" marL="0">
+              <a:buNone/>
+            </a:pPr>
+            <a:r>
+              <a:rPr lang="en-US" sz="1350" b="1" dirty="0">
+                <a:solidFill>
+                  <a:schemeClr val="tx1"/>
+                </a:solidFill>
+              </a:rPr>
+              <a:t>Was ich einem Chatbot schreibe, bleibt privat.</a:t>
+            </a:r>
+            <a:endParaRPr lang="en-US" sz="1350" dirty="0"/>
+          </a:p>
+        </p:txBody>
+      </p:sp>
+      <p:sp>
+        <p:nvSpPr>
+          <p:cNvPr id="18" name="Text 13"/>
+          <p:cNvSpPr txBox="1"/>
+          <p:nvPr/>
+        </p:nvSpPr>
+        <p:spPr>
+          <a:xfrm>
+            <a:off x="1490472" y="4069080"/>
+            <a:ext cx="4343400" cy="438912"/>
+          </a:xfrm>
+          <a:prstGeom prst="rect">
+            <a:avLst/>
+          </a:prstGeom>
+          <a:noFill/>
+          <a:ln/>
+        </p:spPr>
+        <p:txBody>
+          <a:bodyPr wrap="square" lIns="0" tIns="0" rIns="0" bIns="0" rtlCol="0" anchor="t"/>
+          <a:lstStyle/>
+          <a:p>
+            <a:pPr indent="0" marL="0">
+              <a:buNone/>
+            </a:pPr>
+            <a:r>
+              <a:rPr lang="en-US" sz="1200" b="1" dirty="0">
+                <a:solidFill>
+                  <a:schemeClr val="accent6"/>
+                </a:solidFill>
+              </a:rPr>
+              <a:t>Falsch. </a:t>
+            </a:r>
+            <a:pPr indent="0" marL="0">
+              <a:buNone/>
+            </a:pPr>
+            <a:r>
+              <a:rPr lang="en-US" sz="1200" dirty="0">
+                <a:solidFill>
+                  <a:schemeClr val="tx2"/>
+                </a:solidFill>
+              </a:rPr>
+              <a:t>Eingaben können gespeichert und ausgewertet werden.</a:t>
+            </a:r>
+            <a:endParaRPr lang="en-US" sz="1200" dirty="0"/>
+          </a:p>
+        </p:txBody>
+      </p:sp>
+      <p:sp>
+        <p:nvSpPr>
+          <p:cNvPr id="19" name="Aussage 4"/>
+          <p:cNvSpPr/>
+          <p:nvPr/>
+        </p:nvSpPr>
+        <p:spPr>
+          <a:xfrm>
+            <a:off x="6217920" y="3429000"/>
+            <a:ext cx="5486400" cy="1143000"/>
+          </a:xfrm>
+          <a:prstGeom prst="roundRect">
+            <a:avLst>
+              <a:gd name="adj" fmla="val 9600"/>
+            </a:avLst>
+          </a:prstGeom>
+          <a:solidFill>
+            <a:schemeClr val="bg1"/>
+          </a:solidFill>
+          <a:ln/>
+          <a:effectLst>
+            <a:outerShdw sx="100000" sy="100000" kx="0" ky="0" algn="bl" rotWithShape="0" blurRad="127000" dist="38100" dir="5400000">
+              <a:srgbClr val="1F2A55">
+                <a:alpha val="16000"/>
+              </a:srgbClr>
+            </a:outerShdw>
+          </a:effectLst>
+        </p:spPr>
+      </p:sp>
+      <p:sp>
+        <p:nvSpPr>
+          <p:cNvPr id="20" name="Icon-Kreis LuCircleCheck"/>
+          <p:cNvSpPr/>
+          <p:nvPr/>
+        </p:nvSpPr>
+        <p:spPr>
+          <a:xfrm>
+            <a:off x="6446520" y="3703320"/>
+            <a:ext cx="594360" cy="594360"/>
+          </a:xfrm>
+          <a:prstGeom prst="ellipse">
+            <a:avLst/>
+          </a:prstGeom>
+          <a:solidFill>
+            <a:schemeClr val="accent1"/>
+          </a:solidFill>
+          <a:ln/>
+        </p:spPr>
+      </p:sp>
+      <p:pic>
+        <p:nvPicPr>
+          <p:cNvPr id="21" name="Icon LuCircleCheck" descr="preencoded.png">    </p:cNvPr>
+          <p:cNvPicPr>
+            <a:picLocks noChangeAspect="1"/>
+          </p:cNvPicPr>
+          <p:nvPr/>
+        </p:nvPicPr>
+        <p:blipFill>
+          <a:blip r:embed="rId4"/>
+          <a:stretch>
+            <a:fillRect/>
+          </a:stretch>
+        </p:blipFill>
+        <p:spPr>
+          <a:xfrm>
+            <a:off x="6601054" y="3857854"/>
+            <a:ext cx="285293" cy="285293"/>
+          </a:xfrm>
+          <a:prstGeom prst="rect">
+            <a:avLst/>
+          </a:prstGeom>
+        </p:spPr>
+      </p:pic>
+      <p:sp>
+        <p:nvSpPr>
+          <p:cNvPr id="22" name="Text 16"/>
+          <p:cNvSpPr txBox="1"/>
+          <p:nvPr/>
+        </p:nvSpPr>
+        <p:spPr>
+          <a:xfrm>
+            <a:off x="7223760" y="3520440"/>
+            <a:ext cx="4343400" cy="502920"/>
+          </a:xfrm>
+          <a:prstGeom prst="rect">
+            <a:avLst/>
+          </a:prstGeom>
+          <a:noFill/>
+          <a:ln/>
+        </p:spPr>
+        <p:txBody>
+          <a:bodyPr wrap="square" lIns="0" tIns="0" rIns="0" bIns="0" rtlCol="0" anchor="ctr"/>
+          <a:lstStyle/>
+          <a:p>
+            <a:pPr indent="0" marL="0">
+              <a:buNone/>
+            </a:pPr>
+            <a:r>
+              <a:rPr lang="en-US" sz="1350" b="1" dirty="0">
+                <a:solidFill>
+                  <a:schemeClr val="tx1"/>
+                </a:solidFill>
+              </a:rPr>
+              <a:t>Eine KI kann Vorurteile haben.</a:t>
+            </a:r>
+            <a:endParaRPr lang="en-US" sz="1350" dirty="0"/>
+          </a:p>
+        </p:txBody>
+      </p:sp>
+      <p:sp>
+        <p:nvSpPr>
+          <p:cNvPr id="23" name="Text 17"/>
+          <p:cNvSpPr txBox="1"/>
+          <p:nvPr/>
+        </p:nvSpPr>
+        <p:spPr>
+          <a:xfrm>
+            <a:off x="7223760" y="4069080"/>
+            <a:ext cx="4343400" cy="438912"/>
+          </a:xfrm>
+          <a:prstGeom prst="rect">
+            <a:avLst/>
+          </a:prstGeom>
+          <a:noFill/>
+          <a:ln/>
+        </p:spPr>
+        <p:txBody>
+          <a:bodyPr wrap="square" lIns="0" tIns="0" rIns="0" bIns="0" rtlCol="0" anchor="t"/>
+          <a:lstStyle/>
+          <a:p>
+            <a:pPr indent="0" marL="0">
+              <a:buNone/>
+            </a:pPr>
+            <a:r>
+              <a:rPr lang="en-US" sz="1200" b="1" dirty="0">
+                <a:solidFill>
+                  <a:schemeClr val="accent1"/>
+                </a:solidFill>
+              </a:rPr>
+              <a:t>Wahr. </a:t>
+            </a:r>
+            <a:pPr indent="0" marL="0">
+              <a:buNone/>
+            </a:pPr>
+            <a:r>
+              <a:rPr lang="en-US" sz="1200" dirty="0">
+                <a:solidFill>
+                  <a:schemeClr val="tx2"/>
+                </a:solidFill>
+              </a:rPr>
+              <a:t>Sie übernimmt sie aus ihren Trainingsdaten.</a:t>
+            </a:r>
+            <a:endParaRPr lang="en-US" sz="1200" dirty="0"/>
+          </a:p>
+        </p:txBody>
+      </p:sp>
+      <p:sp>
+        <p:nvSpPr>
+          <p:cNvPr id="24" name="Aussage 5"/>
+          <p:cNvSpPr/>
+          <p:nvPr/>
+        </p:nvSpPr>
+        <p:spPr>
+          <a:xfrm>
+            <a:off x="484632" y="4754880"/>
+            <a:ext cx="5486400" cy="1143000"/>
+          </a:xfrm>
+          <a:prstGeom prst="roundRect">
+            <a:avLst>
+              <a:gd name="adj" fmla="val 9600"/>
+            </a:avLst>
+          </a:prstGeom>
+          <a:solidFill>
+            <a:schemeClr val="bg1"/>
+          </a:solidFill>
+          <a:ln/>
+          <a:effectLst>
+            <a:outerShdw sx="100000" sy="100000" kx="0" ky="0" algn="bl" rotWithShape="0" blurRad="127000" dist="38100" dir="5400000">
+              <a:srgbClr val="1F2A55">
+                <a:alpha val="16000"/>
+              </a:srgbClr>
+            </a:outerShdw>
+          </a:effectLst>
+        </p:spPr>
+      </p:sp>
+      <p:sp>
+        <p:nvSpPr>
+          <p:cNvPr id="25" name="Icon-Kreis LuCircleX"/>
+          <p:cNvSpPr/>
+          <p:nvPr/>
+        </p:nvSpPr>
+        <p:spPr>
+          <a:xfrm>
+            <a:off x="713232" y="5029200"/>
+            <a:ext cx="594360" cy="594360"/>
+          </a:xfrm>
+          <a:prstGeom prst="ellipse">
+            <a:avLst/>
+          </a:prstGeom>
+          <a:solidFill>
+            <a:schemeClr val="accent6"/>
+          </a:solidFill>
+          <a:ln/>
+        </p:spPr>
+      </p:sp>
+      <p:pic>
+        <p:nvPicPr>
+          <p:cNvPr id="26" name="Icon LuCircleX" descr="preencoded.png">    </p:cNvPr>
+          <p:cNvPicPr>
+            <a:picLocks noChangeAspect="1"/>
+          </p:cNvPicPr>
+          <p:nvPr/>
+        </p:nvPicPr>
+        <p:blipFill>
+          <a:blip r:embed="rId5"/>
+          <a:stretch>
+            <a:fillRect/>
+          </a:stretch>
+        </p:blipFill>
+        <p:spPr>
+          <a:xfrm>
+            <a:off x="867766" y="5183734"/>
+            <a:ext cx="285293" cy="285293"/>
+          </a:xfrm>
+          <a:prstGeom prst="rect">
+            <a:avLst/>
+          </a:prstGeom>
+        </p:spPr>
+      </p:pic>
+      <p:sp>
+        <p:nvSpPr>
+          <p:cNvPr id="27" name="Text 20"/>
+          <p:cNvSpPr txBox="1"/>
+          <p:nvPr/>
+        </p:nvSpPr>
+        <p:spPr>
+          <a:xfrm>
+            <a:off x="1490472" y="4846320"/>
+            <a:ext cx="4343400" cy="502920"/>
+          </a:xfrm>
+          <a:prstGeom prst="rect">
+            <a:avLst/>
+          </a:prstGeom>
+          <a:noFill/>
+          <a:ln/>
+        </p:spPr>
+        <p:txBody>
+          <a:bodyPr wrap="square" lIns="0" tIns="0" rIns="0" bIns="0" rtlCol="0" anchor="ctr"/>
+          <a:lstStyle/>
+          <a:p>
+            <a:pPr indent="0" marL="0">
+              <a:buNone/>
+            </a:pPr>
+            <a:r>
+              <a:rPr lang="en-US" sz="1350" b="1" dirty="0">
+                <a:solidFill>
+                  <a:schemeClr val="tx1"/>
+                </a:solidFill>
+              </a:rPr>
+              <a:t>Wenn eine KI eine Quelle nennt, gibt es sie auch.</a:t>
+            </a:r>
+            <a:endParaRPr lang="en-US" sz="1350" dirty="0"/>
+          </a:p>
+        </p:txBody>
+      </p:sp>
+      <p:sp>
+        <p:nvSpPr>
+          <p:cNvPr id="28" name="Text 21"/>
+          <p:cNvSpPr txBox="1"/>
+          <p:nvPr/>
+        </p:nvSpPr>
+        <p:spPr>
+          <a:xfrm>
+            <a:off x="1490472" y="5394960"/>
+            <a:ext cx="4343400" cy="438912"/>
+          </a:xfrm>
+          <a:prstGeom prst="rect">
+            <a:avLst/>
+          </a:prstGeom>
+          <a:noFill/>
+          <a:ln/>
+        </p:spPr>
+        <p:txBody>
+          <a:bodyPr wrap="square" lIns="0" tIns="0" rIns="0" bIns="0" rtlCol="0" anchor="t"/>
+          <a:lstStyle/>
+          <a:p>
+            <a:pPr indent="0" marL="0">
+              <a:buNone/>
+            </a:pPr>
+            <a:r>
+              <a:rPr lang="en-US" sz="1200" b="1" dirty="0">
+                <a:solidFill>
+                  <a:schemeClr val="accent6"/>
+                </a:solidFill>
+              </a:rPr>
+              <a:t>Falsch. </a:t>
+            </a:r>
+            <a:pPr indent="0" marL="0">
+              <a:buNone/>
+            </a:pPr>
+            <a:r>
+              <a:rPr lang="en-US" sz="1200" dirty="0">
+                <a:solidFill>
+                  <a:schemeClr val="tx2"/>
+                </a:solidFill>
+              </a:rPr>
+              <a:t>Quellen können frei erfunden sein.</a:t>
+            </a:r>
+            <a:endParaRPr lang="en-US" sz="1200" dirty="0"/>
+          </a:p>
+        </p:txBody>
+      </p:sp>
+      <p:sp>
+        <p:nvSpPr>
+          <p:cNvPr id="29" name="Aussage 6"/>
+          <p:cNvSpPr/>
+          <p:nvPr/>
+        </p:nvSpPr>
+        <p:spPr>
+          <a:xfrm>
+            <a:off x="6217920" y="4754880"/>
+            <a:ext cx="5486400" cy="1143000"/>
+          </a:xfrm>
+          <a:prstGeom prst="roundRect">
+            <a:avLst>
+              <a:gd name="adj" fmla="val 9600"/>
+            </a:avLst>
+          </a:prstGeom>
+          <a:solidFill>
+            <a:schemeClr val="bg1"/>
+          </a:solidFill>
+          <a:ln/>
+          <a:effectLst>
+            <a:outerShdw sx="100000" sy="100000" kx="0" ky="0" algn="bl" rotWithShape="0" blurRad="127000" dist="38100" dir="5400000">
+              <a:srgbClr val="1F2A55">
+                <a:alpha val="16000"/>
+              </a:srgbClr>
+            </a:outerShdw>
+          </a:effectLst>
+        </p:spPr>
+      </p:sp>
+      <p:sp>
+        <p:nvSpPr>
+          <p:cNvPr id="30" name="Icon-Kreis LuCircleCheck"/>
+          <p:cNvSpPr/>
+          <p:nvPr/>
+        </p:nvSpPr>
+        <p:spPr>
+          <a:xfrm>
+            <a:off x="6446520" y="5029200"/>
+            <a:ext cx="594360" cy="594360"/>
+          </a:xfrm>
+          <a:prstGeom prst="ellipse">
+            <a:avLst/>
+          </a:prstGeom>
+          <a:solidFill>
+            <a:schemeClr val="accent1"/>
+          </a:solidFill>
+          <a:ln/>
+        </p:spPr>
+      </p:sp>
+      <p:pic>
+        <p:nvPicPr>
+          <p:cNvPr id="31" name="Icon LuCircleCheck" descr="preencoded.png">    </p:cNvPr>
+          <p:cNvPicPr>
+            <a:picLocks noChangeAspect="1"/>
+          </p:cNvPicPr>
+          <p:nvPr/>
+        </p:nvPicPr>
+        <p:blipFill>
+          <a:blip r:embed="rId6"/>
+          <a:stretch>
+            <a:fillRect/>
+          </a:stretch>
+        </p:blipFill>
+        <p:spPr>
+          <a:xfrm>
+            <a:off x="6601054" y="5183734"/>
+            <a:ext cx="285293" cy="285293"/>
+          </a:xfrm>
+          <a:prstGeom prst="rect">
+            <a:avLst/>
+          </a:prstGeom>
+        </p:spPr>
+      </p:pic>
+      <p:sp>
+        <p:nvSpPr>
+          <p:cNvPr id="32" name="Text 24"/>
+          <p:cNvSpPr txBox="1"/>
+          <p:nvPr/>
+        </p:nvSpPr>
+        <p:spPr>
+          <a:xfrm>
+            <a:off x="7223760" y="4846320"/>
+            <a:ext cx="4343400" cy="502920"/>
+          </a:xfrm>
+          <a:prstGeom prst="rect">
+            <a:avLst/>
+          </a:prstGeom>
+          <a:noFill/>
+          <a:ln/>
+        </p:spPr>
+        <p:txBody>
+          <a:bodyPr wrap="square" lIns="0" tIns="0" rIns="0" bIns="0" rtlCol="0" anchor="ctr"/>
+          <a:lstStyle/>
+          <a:p>
+            <a:pPr indent="0" marL="0">
+              <a:buNone/>
+            </a:pPr>
+            <a:r>
+              <a:rPr lang="en-US" sz="1350" b="1" dirty="0">
+                <a:solidFill>
+                  <a:schemeClr val="tx1"/>
+                </a:solidFill>
+              </a:rPr>
+              <a:t>KI braucht viel Energie.</a:t>
+            </a:r>
+            <a:endParaRPr lang="en-US" sz="1350" dirty="0"/>
+          </a:p>
+        </p:txBody>
+      </p:sp>
+      <p:sp>
+        <p:nvSpPr>
+          <p:cNvPr id="33" name="Text 25"/>
+          <p:cNvSpPr txBox="1"/>
+          <p:nvPr/>
+        </p:nvSpPr>
+        <p:spPr>
+          <a:xfrm>
+            <a:off x="7223760" y="5394960"/>
+            <a:ext cx="4343400" cy="438912"/>
+          </a:xfrm>
+          <a:prstGeom prst="rect">
+            <a:avLst/>
+          </a:prstGeom>
+          <a:noFill/>
+          <a:ln/>
+        </p:spPr>
+        <p:txBody>
+          <a:bodyPr wrap="square" lIns="0" tIns="0" rIns="0" bIns="0" rtlCol="0" anchor="t"/>
+          <a:lstStyle/>
+          <a:p>
+            <a:pPr indent="0" marL="0">
+              <a:buNone/>
+            </a:pPr>
+            <a:r>
+              <a:rPr lang="en-US" sz="1200" b="1" dirty="0">
+                <a:solidFill>
+                  <a:schemeClr val="accent1"/>
+                </a:solidFill>
+              </a:rPr>
+              <a:t>Wahr. </a:t>
+            </a:r>
+            <a:pPr indent="0" marL="0">
+              <a:buNone/>
+            </a:pPr>
+            <a:r>
+              <a:rPr lang="en-US" sz="1200" dirty="0">
+                <a:solidFill>
+                  <a:schemeClr val="tx2"/>
+                </a:solidFill>
+              </a:rPr>
+              <a:t>Rechenzentren verbrauchen enorme Mengen Strom.</a:t>
+            </a:r>
+            <a:endParaRPr lang="en-US" sz="1200" dirty="0"/>
+          </a:p>
+        </p:txBody>
+      </p:sp>
+      <p:sp>
+        <p:nvSpPr>
+          <p:cNvPr id="34" name="Hinweis optional"/>
+          <p:cNvSpPr/>
+          <p:nvPr/>
+        </p:nvSpPr>
+        <p:spPr>
+          <a:xfrm>
+            <a:off x="8366760" y="6437376"/>
+            <a:ext cx="2560320" cy="256032"/>
+          </a:xfrm>
+          <a:prstGeom prst="roundRect">
+            <a:avLst>
+              <a:gd name="adj" fmla="val 50000"/>
+            </a:avLst>
+          </a:prstGeom>
+          <a:solidFill>
+            <a:schemeClr val="bg2"/>
+          </a:solidFill>
+          <a:ln/>
+        </p:spPr>
+      </p:sp>
+      <p:sp>
+        <p:nvSpPr>
+          <p:cNvPr id="35" name="Text 27"/>
+          <p:cNvSpPr txBox="1"/>
+          <p:nvPr/>
+        </p:nvSpPr>
+        <p:spPr>
+          <a:xfrm>
+            <a:off x="8366760" y="6437376"/>
+            <a:ext cx="2560320" cy="256032"/>
+          </a:xfrm>
+          <a:prstGeom prst="rect">
+            <a:avLst/>
+          </a:prstGeom>
+          <a:noFill/>
+          <a:ln/>
+        </p:spPr>
+        <p:txBody>
+          <a:bodyPr wrap="square" lIns="0" tIns="0" rIns="0" bIns="0" rtlCol="0" anchor="ctr"/>
+          <a:lstStyle/>
+          <a:p>
+            <a:pPr algn="ctr" indent="0" marL="0">
+              <a:buNone/>
+            </a:pPr>
+            <a:r>
+              <a:rPr lang="en-US" sz="900" b="1" spc="100" kern="0" dirty="0">
+                <a:solidFill>
+                  <a:schemeClr val="accent3"/>
+                </a:solidFill>
+              </a:rPr>
+              <a:t>OPTIONAL · ÜBERALL</a:t>
+            </a:r>
+            <a:endParaRPr lang="en-US" sz="900" dirty="0"/>
+          </a:p>
+        </p:txBody>
+      </p:sp>
+      <p:sp>
+        <p:nvSpPr>
+          <p:cNvPr id="25" name="Slide Number Placeholder 0"/>
+          <p:cNvSpPr>
+            <a:spLocks noGrp="1"/>
+          </p:cNvSpPr>
+          <p:nvPr>
+            <p:ph type="sldNum" sz="quarter" idx="4294967295"/>
+          </p:nvPr>
+        </p:nvSpPr>
+        <p:spPr>
+          <a:xfrm>
+            <a:off x="11155680" y="6455664"/>
+            <a:ext cx="548640" cy="274320"/>
+          </a:xfrm>
+          <a:prstGeom prst="rect">
+            <a:avLst/>
+          </a:prstGeom>
+          <a:extLst>
+            <a:ext uri="{C572A759-6A51-4108-AA02-DFA0A04FC94B}">
+              <ma14:wrappingTextBoxFlag xmlns:ma14="http://schemas.microsoft.com/office/mac/drawingml/2011/main" val="0"/>
+            </a:ext>
+          </a:extLst>
+        </p:spPr>
+        <p:txBody>
+          <a:bodyPr/>
+          <a:lstStyle>
+            <a:lvl1pPr>
+              <a:defRPr sz="1100">
+                <a:solidFill>
+                  <a:schemeClr val="accent3"/>
+                </a:solidFill>
+              </a:defRPr>
+            </a:lvl1pPr>
+          </a:lstStyle>
+          <a:p>
+            <a:pPr algn="r"/>
+            <a:fld id="{F7021451-1387-4CA6-816F-3879F97B5CBC}" type="slidenum">
+              <a:rPr b="0" lang="en-US"/>
+              <a:t>34</a:t>
+            </a:fld>
+            <a:endParaRPr lang="en-US"/>
+          </a:p>
+        </p:txBody>
+      </p:sp>
+    </p:spTree>
+  </p:cSld>
+  <p:clrMapOvr>
+    <a:masterClrMapping/>
+  </p:clrMapOvr>
+</p:sld>
+</file>
+
+<file path=ppt/slides/slide35.xml><?xml version="1.0" encoding="utf-8"?>
+<p:sld xmlns:a="http://schemas.openxmlformats.org/drawingml/2006/main" xmlns:r="http://schemas.openxmlformats.org/officeDocument/2006/relationships" xmlns:p="http://schemas.openxmlformats.org/presentationml/2006/main">
+  <p:cSld name="Slide 35">
+    <p:spTree>
+      <p:nvGrpSpPr>
+        <p:cNvPr id="1" name=""/>
+        <p:cNvGrpSpPr/>
+        <p:nvPr/>
+      </p:nvGrpSpPr>
+      <p:grpSpPr>
+        <a:xfrm>
+          <a:off x="0" y="0"/>
+          <a:ext cx="0" cy="0"/>
+          <a:chOff x="0" y="0"/>
+          <a:chExt cx="0" cy="0"/>
+        </a:xfrm>
+      </p:grpSpPr>
+      <p:sp>
+        <p:nvSpPr>
+          <p:cNvPr id="2" name="Text 1"/>
+          <p:cNvSpPr/>
+          <p:nvPr>
+            <p:ph idx="103" type="title" hasCustomPrompt="1"/>
+          </p:nvPr>
+        </p:nvSpPr>
+        <p:spPr>
+          <a:xfrm>
+            <a:off x="484632" y="548640"/>
+            <a:ext cx="8778240" cy="640080"/>
+          </a:xfrm>
+          <a:prstGeom prst="rect">
+            <a:avLst/>
+          </a:prstGeom>
+          <a:noFill/>
+          <a:ln/>
+        </p:spPr>
+        <p:txBody>
+          <a:bodyPr wrap="square" lIns="0" tIns="0" rIns="0" bIns="0" rtlCol="0" anchor="b"/>
+          <a:lstStyle/>
+          <a:p>
+            <a:pPr algn="l" indent="0" marL="0">
+              <a:buNone/>
+            </a:pPr>
+            <a:r>
+              <a:rPr lang="en-US" sz="3000" b="1" dirty="0">
+                <a:solidFill>
+                  <a:schemeClr val="tx1"/>
+                </a:solidFill>
+              </a:rPr>
+              <a:t>KI &amp; Recht: Was ist erlaubt?</a:t>
+            </a:r>
+            <a:endParaRPr lang="en-US" sz="3000" dirty="0"/>
+          </a:p>
+        </p:txBody>
+      </p:sp>
+      <p:sp>
+        <p:nvSpPr>
+          <p:cNvPr id="3" name="Text 1"/>
+          <p:cNvSpPr/>
+          <p:nvPr>
+            <p:ph idx="104" type="body" hasCustomPrompt="1"/>
+          </p:nvPr>
+        </p:nvSpPr>
+        <p:spPr>
+          <a:xfrm>
+            <a:off x="484632" y="1417320"/>
+            <a:ext cx="9601200" cy="365760"/>
+          </a:xfrm>
+          <a:prstGeom prst="rect">
+            <a:avLst/>
+          </a:prstGeom>
+          <a:noFill/>
+          <a:ln/>
+        </p:spPr>
+        <p:txBody>
+          <a:bodyPr wrap="square" lIns="0" tIns="0" rIns="0" bIns="0" rtlCol="0" anchor="ctr"/>
+          <a:lstStyle/>
+          <a:p>
+            <a:pPr indent="0" marL="0">
+              <a:buNone/>
+            </a:pPr>
+            <a:r>
+              <a:rPr lang="en-US" sz="1500" dirty="0">
+                <a:solidFill>
+                  <a:schemeClr val="tx2"/>
+                </a:solidFill>
+              </a:rPr>
+              <a:t>Vereinfacht erklärt – im Zweifel lieber nachfragen</a:t>
+            </a:r>
+            <a:endParaRPr lang="en-US" sz="1500" dirty="0"/>
+          </a:p>
+        </p:txBody>
+      </p:sp>
+      <p:sp>
+        <p:nvSpPr>
+          <p:cNvPr id="4" name="Regel Recht am eigenen Bild"/>
+          <p:cNvSpPr/>
+          <p:nvPr/>
+        </p:nvSpPr>
+        <p:spPr>
+          <a:xfrm>
+            <a:off x="484632" y="2103120"/>
+            <a:ext cx="5486400" cy="1783080"/>
+          </a:xfrm>
+          <a:prstGeom prst="roundRect">
+            <a:avLst>
+              <a:gd name="adj" fmla="val 6154"/>
+            </a:avLst>
+          </a:prstGeom>
+          <a:solidFill>
+            <a:schemeClr val="bg1"/>
+          </a:solidFill>
+          <a:ln/>
+          <a:effectLst>
+            <a:outerShdw sx="100000" sy="100000" kx="0" ky="0" algn="bl" rotWithShape="0" blurRad="127000" dist="38100" dir="5400000">
+              <a:srgbClr val="1F2A55">
+                <a:alpha val="16000"/>
+              </a:srgbClr>
+            </a:outerShdw>
+          </a:effectLst>
+        </p:spPr>
+      </p:sp>
+      <p:sp>
+        <p:nvSpPr>
+          <p:cNvPr id="5" name="Icon-Kreis LuCamera"/>
+          <p:cNvSpPr/>
+          <p:nvPr/>
+        </p:nvSpPr>
+        <p:spPr>
+          <a:xfrm>
+            <a:off x="758952" y="2377440"/>
+            <a:ext cx="640080" cy="640080"/>
+          </a:xfrm>
+          <a:prstGeom prst="ellipse">
+            <a:avLst/>
+          </a:prstGeom>
+          <a:solidFill>
+            <a:schemeClr val="tx1"/>
+          </a:solidFill>
+          <a:ln/>
+        </p:spPr>
+      </p:sp>
+      <p:pic>
+        <p:nvPicPr>
+          <p:cNvPr id="6" name="Icon LuCamera" descr="preencoded.png">    </p:cNvPr>
+          <p:cNvPicPr>
+            <a:picLocks noChangeAspect="1"/>
+          </p:cNvPicPr>
+          <p:nvPr/>
+        </p:nvPicPr>
+        <p:blipFill>
+          <a:blip r:embed="rId1"/>
+          <a:stretch>
+            <a:fillRect/>
+          </a:stretch>
+        </p:blipFill>
+        <p:spPr>
+          <a:xfrm>
+            <a:off x="925373" y="2543861"/>
+            <a:ext cx="307238" cy="307238"/>
+          </a:xfrm>
+          <a:prstGeom prst="rect">
+            <a:avLst/>
+          </a:prstGeom>
+        </p:spPr>
+      </p:pic>
+      <p:sp>
+        <p:nvSpPr>
+          <p:cNvPr id="7" name="Text 4"/>
+          <p:cNvSpPr txBox="1"/>
+          <p:nvPr/>
+        </p:nvSpPr>
+        <p:spPr>
+          <a:xfrm>
+            <a:off x="1581912" y="2377440"/>
+            <a:ext cx="4206240" cy="457200"/>
+          </a:xfrm>
+          <a:prstGeom prst="rect">
+            <a:avLst/>
+          </a:prstGeom>
+          <a:noFill/>
+          <a:ln/>
+        </p:spPr>
+        <p:txBody>
+          <a:bodyPr wrap="square" lIns="0" tIns="0" rIns="0" bIns="0" rtlCol="0" anchor="ctr"/>
+          <a:lstStyle/>
+          <a:p>
+            <a:pPr indent="0" marL="0">
+              <a:buNone/>
+            </a:pPr>
+            <a:r>
+              <a:rPr lang="en-US" sz="1800" b="1" dirty="0">
+                <a:solidFill>
+                  <a:schemeClr val="tx1"/>
+                </a:solidFill>
+              </a:rPr>
+              <a:t>Recht am eigenen Bild</a:t>
+            </a:r>
+            <a:endParaRPr lang="en-US" sz="1800" dirty="0"/>
+          </a:p>
+        </p:txBody>
+      </p:sp>
+      <p:sp>
+        <p:nvSpPr>
+          <p:cNvPr id="8" name="Text 5"/>
+          <p:cNvSpPr txBox="1"/>
+          <p:nvPr/>
+        </p:nvSpPr>
+        <p:spPr>
+          <a:xfrm>
+            <a:off x="1581912" y="2880360"/>
+            <a:ext cx="4206240" cy="914400"/>
+          </a:xfrm>
+          <a:prstGeom prst="rect">
+            <a:avLst/>
+          </a:prstGeom>
+          <a:noFill/>
+          <a:ln/>
+        </p:spPr>
+        <p:txBody>
+          <a:bodyPr wrap="square" lIns="0" tIns="0" rIns="0" bIns="0" rtlCol="0" anchor="t"/>
+          <a:lstStyle/>
+          <a:p>
+            <a:pPr indent="0" marL="0">
+              <a:buNone/>
+            </a:pPr>
+            <a:r>
+              <a:rPr lang="en-US" sz="1350" dirty="0">
+                <a:solidFill>
+                  <a:schemeClr val="tx2"/>
+                </a:solidFill>
+              </a:rPr>
+              <a:t>Fotos und Videos von anderen nur mit Einverständnis bearbeiten oder teilen. Deepfakes von Mitschülern können strafbar sein.</a:t>
+            </a:r>
+            <a:endParaRPr lang="en-US" sz="1350" dirty="0"/>
+          </a:p>
+        </p:txBody>
+      </p:sp>
+      <p:sp>
+        <p:nvSpPr>
+          <p:cNvPr id="9" name="Regel Urheberrecht &amp; Ehrlichkeit"/>
+          <p:cNvSpPr/>
+          <p:nvPr/>
+        </p:nvSpPr>
+        <p:spPr>
+          <a:xfrm>
+            <a:off x="6217920" y="2103120"/>
+            <a:ext cx="5486400" cy="1783080"/>
+          </a:xfrm>
+          <a:prstGeom prst="roundRect">
+            <a:avLst>
+              <a:gd name="adj" fmla="val 6154"/>
+            </a:avLst>
+          </a:prstGeom>
+          <a:solidFill>
+            <a:schemeClr val="bg1"/>
+          </a:solidFill>
+          <a:ln/>
+          <a:effectLst>
+            <a:outerShdw sx="100000" sy="100000" kx="0" ky="0" algn="bl" rotWithShape="0" blurRad="127000" dist="38100" dir="5400000">
+              <a:srgbClr val="1F2A55">
+                <a:alpha val="16000"/>
+              </a:srgbClr>
+            </a:outerShdw>
+          </a:effectLst>
+        </p:spPr>
+      </p:sp>
+      <p:sp>
+        <p:nvSpPr>
+          <p:cNvPr id="10" name="Icon-Kreis LuCopyright"/>
+          <p:cNvSpPr/>
+          <p:nvPr/>
+        </p:nvSpPr>
+        <p:spPr>
+          <a:xfrm>
+            <a:off x="6492240" y="2377440"/>
+            <a:ext cx="640080" cy="640080"/>
+          </a:xfrm>
+          <a:prstGeom prst="ellipse">
+            <a:avLst/>
+          </a:prstGeom>
+          <a:solidFill>
+            <a:schemeClr val="tx1"/>
+          </a:solidFill>
+          <a:ln/>
+        </p:spPr>
+      </p:sp>
+      <p:pic>
+        <p:nvPicPr>
+          <p:cNvPr id="11" name="Icon LuCopyright" descr="preencoded.png">    </p:cNvPr>
+          <p:cNvPicPr>
+            <a:picLocks noChangeAspect="1"/>
+          </p:cNvPicPr>
+          <p:nvPr/>
+        </p:nvPicPr>
+        <p:blipFill>
+          <a:blip r:embed="rId2"/>
+          <a:stretch>
+            <a:fillRect/>
+          </a:stretch>
+        </p:blipFill>
+        <p:spPr>
+          <a:xfrm>
+            <a:off x="6658661" y="2543861"/>
+            <a:ext cx="307238" cy="307238"/>
+          </a:xfrm>
+          <a:prstGeom prst="rect">
+            <a:avLst/>
+          </a:prstGeom>
+        </p:spPr>
+      </p:pic>
+      <p:sp>
+        <p:nvSpPr>
+          <p:cNvPr id="12" name="Text 8"/>
+          <p:cNvSpPr txBox="1"/>
+          <p:nvPr/>
+        </p:nvSpPr>
+        <p:spPr>
+          <a:xfrm>
+            <a:off x="7315200" y="2377440"/>
+            <a:ext cx="4206240" cy="457200"/>
+          </a:xfrm>
+          <a:prstGeom prst="rect">
+            <a:avLst/>
+          </a:prstGeom>
+          <a:noFill/>
+          <a:ln/>
+        </p:spPr>
+        <p:txBody>
+          <a:bodyPr wrap="square" lIns="0" tIns="0" rIns="0" bIns="0" rtlCol="0" anchor="ctr"/>
+          <a:lstStyle/>
+          <a:p>
+            <a:pPr indent="0" marL="0">
+              <a:buNone/>
+            </a:pPr>
+            <a:r>
+              <a:rPr lang="en-US" sz="1800" b="1" dirty="0">
+                <a:solidFill>
+                  <a:schemeClr val="tx1"/>
+                </a:solidFill>
+              </a:rPr>
+              <a:t>Urheberrecht &amp; Ehrlichkeit</a:t>
+            </a:r>
+            <a:endParaRPr lang="en-US" sz="1800" dirty="0"/>
+          </a:p>
+        </p:txBody>
+      </p:sp>
+      <p:sp>
+        <p:nvSpPr>
+          <p:cNvPr id="13" name="Text 9"/>
+          <p:cNvSpPr txBox="1"/>
+          <p:nvPr/>
+        </p:nvSpPr>
+        <p:spPr>
+          <a:xfrm>
+            <a:off x="7315200" y="2880360"/>
+            <a:ext cx="4206240" cy="914400"/>
+          </a:xfrm>
+          <a:prstGeom prst="rect">
+            <a:avLst/>
+          </a:prstGeom>
+          <a:noFill/>
+          <a:ln/>
+        </p:spPr>
+        <p:txBody>
+          <a:bodyPr wrap="square" lIns="0" tIns="0" rIns="0" bIns="0" rtlCol="0" anchor="t"/>
+          <a:lstStyle/>
+          <a:p>
+            <a:pPr indent="0" marL="0">
+              <a:buNone/>
+            </a:pPr>
+            <a:r>
+              <a:rPr lang="en-US" sz="1350" dirty="0">
+                <a:solidFill>
+                  <a:schemeClr val="tx2"/>
+                </a:solidFill>
+              </a:rPr>
+              <a:t>Fremde Texte oder Bilder nicht als eigene ausgeben. KI-Hilfe so angeben, wie es eure Schule verlangt.</a:t>
+            </a:r>
+            <a:endParaRPr lang="en-US" sz="1350" dirty="0"/>
+          </a:p>
+        </p:txBody>
+      </p:sp>
+      <p:sp>
+        <p:nvSpPr>
+          <p:cNvPr id="14" name="Regel Kennzeichnung"/>
+          <p:cNvSpPr/>
+          <p:nvPr/>
+        </p:nvSpPr>
+        <p:spPr>
+          <a:xfrm>
+            <a:off x="484632" y="4069080"/>
+            <a:ext cx="5486400" cy="1783080"/>
+          </a:xfrm>
+          <a:prstGeom prst="roundRect">
+            <a:avLst>
+              <a:gd name="adj" fmla="val 6154"/>
+            </a:avLst>
+          </a:prstGeom>
+          <a:solidFill>
+            <a:schemeClr val="bg1"/>
+          </a:solidFill>
+          <a:ln/>
+          <a:effectLst>
+            <a:outerShdw sx="100000" sy="100000" kx="0" ky="0" algn="bl" rotWithShape="0" blurRad="127000" dist="38100" dir="5400000">
+              <a:srgbClr val="1F2A55">
+                <a:alpha val="16000"/>
+              </a:srgbClr>
+            </a:outerShdw>
+          </a:effectLst>
+        </p:spPr>
+      </p:sp>
+      <p:sp>
+        <p:nvSpPr>
+          <p:cNvPr id="15" name="Icon-Kreis LuTag"/>
+          <p:cNvSpPr/>
+          <p:nvPr/>
+        </p:nvSpPr>
+        <p:spPr>
+          <a:xfrm>
+            <a:off x="758952" y="4343400"/>
+            <a:ext cx="640080" cy="640080"/>
+          </a:xfrm>
+          <a:prstGeom prst="ellipse">
+            <a:avLst/>
+          </a:prstGeom>
+          <a:solidFill>
+            <a:schemeClr val="tx1"/>
+          </a:solidFill>
+          <a:ln/>
+        </p:spPr>
+      </p:sp>
+      <p:pic>
+        <p:nvPicPr>
+          <p:cNvPr id="16" name="Icon LuTag" descr="preencoded.png">    </p:cNvPr>
+          <p:cNvPicPr>
+            <a:picLocks noChangeAspect="1"/>
+          </p:cNvPicPr>
+          <p:nvPr/>
+        </p:nvPicPr>
+        <p:blipFill>
+          <a:blip r:embed="rId3"/>
+          <a:stretch>
+            <a:fillRect/>
+          </a:stretch>
+        </p:blipFill>
+        <p:spPr>
+          <a:xfrm>
+            <a:off x="925373" y="4509821"/>
+            <a:ext cx="307238" cy="307238"/>
+          </a:xfrm>
+          <a:prstGeom prst="rect">
+            <a:avLst/>
+          </a:prstGeom>
+        </p:spPr>
+      </p:pic>
+      <p:sp>
+        <p:nvSpPr>
+          <p:cNvPr id="17" name="Text 12"/>
+          <p:cNvSpPr txBox="1"/>
+          <p:nvPr/>
+        </p:nvSpPr>
+        <p:spPr>
+          <a:xfrm>
+            <a:off x="1581912" y="4343400"/>
+            <a:ext cx="4206240" cy="457200"/>
+          </a:xfrm>
+          <a:prstGeom prst="rect">
+            <a:avLst/>
+          </a:prstGeom>
+          <a:noFill/>
+          <a:ln/>
+        </p:spPr>
+        <p:txBody>
+          <a:bodyPr wrap="square" lIns="0" tIns="0" rIns="0" bIns="0" rtlCol="0" anchor="ctr"/>
+          <a:lstStyle/>
+          <a:p>
+            <a:pPr indent="0" marL="0">
+              <a:buNone/>
+            </a:pPr>
+            <a:r>
+              <a:rPr lang="en-US" sz="1800" b="1" dirty="0">
+                <a:solidFill>
+                  <a:schemeClr val="tx1"/>
+                </a:solidFill>
+              </a:rPr>
+              <a:t>Kennzeichnung</a:t>
+            </a:r>
+            <a:endParaRPr lang="en-US" sz="1800" dirty="0"/>
+          </a:p>
+        </p:txBody>
+      </p:sp>
+      <p:sp>
+        <p:nvSpPr>
+          <p:cNvPr id="18" name="Text 13"/>
+          <p:cNvSpPr txBox="1"/>
+          <p:nvPr/>
+        </p:nvSpPr>
+        <p:spPr>
+          <a:xfrm>
+            <a:off x="1581912" y="4846320"/>
+            <a:ext cx="4206240" cy="914400"/>
+          </a:xfrm>
+          <a:prstGeom prst="rect">
+            <a:avLst/>
+          </a:prstGeom>
+          <a:noFill/>
+          <a:ln/>
+        </p:spPr>
+        <p:txBody>
+          <a:bodyPr wrap="square" lIns="0" tIns="0" rIns="0" bIns="0" rtlCol="0" anchor="t"/>
+          <a:lstStyle/>
+          <a:p>
+            <a:pPr indent="0" marL="0">
+              <a:buNone/>
+            </a:pPr>
+            <a:r>
+              <a:rPr lang="en-US" sz="1350" dirty="0">
+                <a:solidFill>
+                  <a:schemeClr val="tx2"/>
+                </a:solidFill>
+              </a:rPr>
+              <a:t>Der EU AI Act verlangt, dass KI-generierte Inhalte und Deepfakes als solche erkennbar sind.</a:t>
+            </a:r>
+            <a:endParaRPr lang="en-US" sz="1350" dirty="0"/>
+          </a:p>
+        </p:txBody>
+      </p:sp>
+      <p:sp>
+        <p:nvSpPr>
+          <p:cNvPr id="19" name="Regel Altersgrenzen"/>
+          <p:cNvSpPr/>
+          <p:nvPr/>
+        </p:nvSpPr>
+        <p:spPr>
+          <a:xfrm>
+            <a:off x="6217920" y="4069080"/>
+            <a:ext cx="5486400" cy="1783080"/>
+          </a:xfrm>
+          <a:prstGeom prst="roundRect">
+            <a:avLst>
+              <a:gd name="adj" fmla="val 6154"/>
+            </a:avLst>
+          </a:prstGeom>
+          <a:solidFill>
+            <a:schemeClr val="bg1"/>
+          </a:solidFill>
+          <a:ln/>
+          <a:effectLst>
+            <a:outerShdw sx="100000" sy="100000" kx="0" ky="0" algn="bl" rotWithShape="0" blurRad="127000" dist="38100" dir="5400000">
+              <a:srgbClr val="1F2A55">
+                <a:alpha val="16000"/>
+              </a:srgbClr>
+            </a:outerShdw>
+          </a:effectLst>
+        </p:spPr>
+      </p:sp>
+      <p:sp>
+        <p:nvSpPr>
+          <p:cNvPr id="20" name="Icon-Kreis LuUserCheck"/>
+          <p:cNvSpPr/>
+          <p:nvPr/>
+        </p:nvSpPr>
+        <p:spPr>
+          <a:xfrm>
+            <a:off x="6492240" y="4343400"/>
+            <a:ext cx="640080" cy="640080"/>
+          </a:xfrm>
+          <a:prstGeom prst="ellipse">
+            <a:avLst/>
+          </a:prstGeom>
+          <a:solidFill>
+            <a:schemeClr val="tx1"/>
+          </a:solidFill>
+          <a:ln/>
+        </p:spPr>
+      </p:sp>
+      <p:pic>
+        <p:nvPicPr>
+          <p:cNvPr id="21" name="Icon LuUserCheck" descr="preencoded.png">    </p:cNvPr>
+          <p:cNvPicPr>
+            <a:picLocks noChangeAspect="1"/>
+          </p:cNvPicPr>
+          <p:nvPr/>
+        </p:nvPicPr>
+        <p:blipFill>
+          <a:blip r:embed="rId4"/>
+          <a:stretch>
+            <a:fillRect/>
+          </a:stretch>
+        </p:blipFill>
+        <p:spPr>
+          <a:xfrm>
+            <a:off x="6658661" y="4509821"/>
+            <a:ext cx="307238" cy="307238"/>
+          </a:xfrm>
+          <a:prstGeom prst="rect">
+            <a:avLst/>
+          </a:prstGeom>
+        </p:spPr>
+      </p:pic>
+      <p:sp>
+        <p:nvSpPr>
+          <p:cNvPr id="22" name="Text 16"/>
+          <p:cNvSpPr txBox="1"/>
+          <p:nvPr/>
+        </p:nvSpPr>
+        <p:spPr>
+          <a:xfrm>
+            <a:off x="7315200" y="4343400"/>
+            <a:ext cx="4206240" cy="457200"/>
+          </a:xfrm>
+          <a:prstGeom prst="rect">
+            <a:avLst/>
+          </a:prstGeom>
+          <a:noFill/>
+          <a:ln/>
+        </p:spPr>
+        <p:txBody>
+          <a:bodyPr wrap="square" lIns="0" tIns="0" rIns="0" bIns="0" rtlCol="0" anchor="ctr"/>
+          <a:lstStyle/>
+          <a:p>
+            <a:pPr indent="0" marL="0">
+              <a:buNone/>
+            </a:pPr>
+            <a:r>
+              <a:rPr lang="en-US" sz="1800" b="1" dirty="0">
+                <a:solidFill>
+                  <a:schemeClr val="tx1"/>
+                </a:solidFill>
+              </a:rPr>
+              <a:t>Altersgrenzen</a:t>
+            </a:r>
+            <a:endParaRPr lang="en-US" sz="1800" dirty="0"/>
+          </a:p>
+        </p:txBody>
+      </p:sp>
+      <p:sp>
+        <p:nvSpPr>
+          <p:cNvPr id="23" name="Text 17"/>
+          <p:cNvSpPr txBox="1"/>
+          <p:nvPr/>
+        </p:nvSpPr>
+        <p:spPr>
+          <a:xfrm>
+            <a:off x="7315200" y="4846320"/>
+            <a:ext cx="4206240" cy="914400"/>
+          </a:xfrm>
+          <a:prstGeom prst="rect">
+            <a:avLst/>
+          </a:prstGeom>
+          <a:noFill/>
+          <a:ln/>
+        </p:spPr>
+        <p:txBody>
+          <a:bodyPr wrap="square" lIns="0" tIns="0" rIns="0" bIns="0" rtlCol="0" anchor="t"/>
+          <a:lstStyle/>
+          <a:p>
+            <a:pPr indent="0" marL="0">
+              <a:buNone/>
+            </a:pPr>
+            <a:r>
+              <a:rPr lang="en-US" sz="1350" dirty="0">
+                <a:solidFill>
+                  <a:schemeClr val="tx2"/>
+                </a:solidFill>
+              </a:rPr>
+              <a:t>Viele KI-Dienste sind erst ab 13 Jahren erlaubt – unter 18 oft nur mit Einverständnis der Eltern.</a:t>
+            </a:r>
+            <a:endParaRPr lang="en-US" sz="1350" dirty="0"/>
+          </a:p>
+        </p:txBody>
+      </p:sp>
+      <p:sp>
+        <p:nvSpPr>
+          <p:cNvPr id="24" name="Hinweis optional"/>
+          <p:cNvSpPr/>
+          <p:nvPr/>
+        </p:nvSpPr>
+        <p:spPr>
+          <a:xfrm>
+            <a:off x="8366760" y="6437376"/>
+            <a:ext cx="2560320" cy="256032"/>
+          </a:xfrm>
+          <a:prstGeom prst="roundRect">
+            <a:avLst>
+              <a:gd name="adj" fmla="val 50000"/>
+            </a:avLst>
+          </a:prstGeom>
+          <a:solidFill>
+            <a:schemeClr val="bg2"/>
+          </a:solidFill>
+          <a:ln/>
+        </p:spPr>
+      </p:sp>
+      <p:sp>
+        <p:nvSpPr>
+          <p:cNvPr id="25" name="Text 19"/>
+          <p:cNvSpPr txBox="1"/>
+          <p:nvPr/>
+        </p:nvSpPr>
+        <p:spPr>
+          <a:xfrm>
+            <a:off x="8366760" y="6437376"/>
+            <a:ext cx="2560320" cy="256032"/>
+          </a:xfrm>
+          <a:prstGeom prst="rect">
+            <a:avLst/>
+          </a:prstGeom>
+          <a:noFill/>
+          <a:ln/>
+        </p:spPr>
+        <p:txBody>
+          <a:bodyPr wrap="square" lIns="0" tIns="0" rIns="0" bIns="0" rtlCol="0" anchor="ctr"/>
+          <a:lstStyle/>
+          <a:p>
+            <a:pPr algn="ctr" indent="0" marL="0">
+              <a:buNone/>
+            </a:pPr>
+            <a:r>
+              <a:rPr lang="en-US" sz="900" b="1" spc="100" kern="0" dirty="0">
+                <a:solidFill>
+                  <a:schemeClr val="accent3"/>
+                </a:solidFill>
+              </a:rPr>
+              <a:t>OPTIONAL · KAPITEL 04</a:t>
+            </a:r>
+            <a:endParaRPr lang="en-US" sz="900" dirty="0"/>
+          </a:p>
+        </p:txBody>
+      </p:sp>
+      <p:sp>
+        <p:nvSpPr>
+          <p:cNvPr id="25" name="Slide Number Placeholder 0"/>
+          <p:cNvSpPr>
+            <a:spLocks noGrp="1"/>
+          </p:cNvSpPr>
+          <p:nvPr>
+            <p:ph type="sldNum" sz="quarter" idx="4294967295"/>
+          </p:nvPr>
+        </p:nvSpPr>
+        <p:spPr>
+          <a:xfrm>
+            <a:off x="11155680" y="6455664"/>
+            <a:ext cx="548640" cy="274320"/>
+          </a:xfrm>
+          <a:prstGeom prst="rect">
+            <a:avLst/>
+          </a:prstGeom>
+          <a:extLst>
+            <a:ext uri="{C572A759-6A51-4108-AA02-DFA0A04FC94B}">
+              <ma14:wrappingTextBoxFlag xmlns:ma14="http://schemas.microsoft.com/office/mac/drawingml/2011/main" val="0"/>
+            </a:ext>
+          </a:extLst>
+        </p:spPr>
+        <p:txBody>
+          <a:bodyPr/>
+          <a:lstStyle>
+            <a:lvl1pPr>
+              <a:defRPr sz="1100">
+                <a:solidFill>
+                  <a:schemeClr val="accent3"/>
+                </a:solidFill>
+              </a:defRPr>
+            </a:lvl1pPr>
+          </a:lstStyle>
+          <a:p>
+            <a:pPr algn="r"/>
+            <a:fld id="{F7021451-1387-4CA6-816F-3879F97B5CBC}" type="slidenum">
+              <a:rPr b="0" lang="en-US"/>
+              <a:t>35</a:t>
+            </a:fld>
+            <a:endParaRPr lang="en-US"/>
+          </a:p>
+        </p:txBody>
+      </p:sp>
+    </p:spTree>
+  </p:cSld>
+  <p:clrMapOvr>
+    <a:masterClrMapping/>
+  </p:clrMapOvr>
+</p:sld>
+</file>
+
+<file path=ppt/slides/slide36.xml><?xml version="1.0" encoding="utf-8"?>
+<p:sld xmlns:a="http://schemas.openxmlformats.org/drawingml/2006/main" xmlns:r="http://schemas.openxmlformats.org/officeDocument/2006/relationships" xmlns:p="http://schemas.openxmlformats.org/presentationml/2006/main">
+  <p:cSld name="Slide 36">
+    <p:spTree>
+      <p:nvGrpSpPr>
+        <p:cNvPr id="1" name=""/>
+        <p:cNvGrpSpPr/>
+        <p:nvPr/>
+      </p:nvGrpSpPr>
+      <p:grpSpPr>
+        <a:xfrm>
+          <a:off x="0" y="0"/>
+          <a:ext cx="0" cy="0"/>
+          <a:chOff x="0" y="0"/>
+          <a:chExt cx="0" cy="0"/>
+        </a:xfrm>
+      </p:grpSpPr>
+      <p:sp>
+        <p:nvSpPr>
+          <p:cNvPr id="2" name="Text 1"/>
+          <p:cNvSpPr/>
+          <p:nvPr>
+            <p:ph idx="103" type="title" hasCustomPrompt="1"/>
+          </p:nvPr>
+        </p:nvSpPr>
+        <p:spPr>
+          <a:xfrm>
+            <a:off x="484632" y="548640"/>
+            <a:ext cx="8778240" cy="640080"/>
+          </a:xfrm>
+          <a:prstGeom prst="rect">
+            <a:avLst/>
+          </a:prstGeom>
+          <a:noFill/>
+          <a:ln/>
+        </p:spPr>
+        <p:txBody>
+          <a:bodyPr wrap="square" lIns="0" tIns="0" rIns="0" bIns="0" rtlCol="0" anchor="b"/>
+          <a:lstStyle/>
+          <a:p>
+            <a:pPr algn="l" indent="0" marL="0">
+              <a:buNone/>
+            </a:pPr>
+            <a:r>
+              <a:rPr lang="en-US" sz="3000" b="1" dirty="0">
+                <a:solidFill>
+                  <a:schemeClr val="tx1"/>
+                </a:solidFill>
+              </a:rPr>
+              <a:t>Deine 5 KI-Regeln</a:t>
+            </a:r>
+            <a:endParaRPr lang="en-US" sz="3000" dirty="0"/>
+          </a:p>
+        </p:txBody>
+      </p:sp>
+      <p:sp>
+        <p:nvSpPr>
+          <p:cNvPr id="3" name="Text 1"/>
+          <p:cNvSpPr/>
+          <p:nvPr>
+            <p:ph idx="104" type="body" hasCustomPrompt="1"/>
+          </p:nvPr>
+        </p:nvSpPr>
+        <p:spPr>
+          <a:xfrm>
+            <a:off x="484632" y="1417320"/>
+            <a:ext cx="9601200" cy="365760"/>
+          </a:xfrm>
+          <a:prstGeom prst="rect">
+            <a:avLst/>
+          </a:prstGeom>
+          <a:noFill/>
+          <a:ln/>
+        </p:spPr>
+        <p:txBody>
+          <a:bodyPr wrap="square" lIns="0" tIns="0" rIns="0" bIns="0" rtlCol="0" anchor="ctr"/>
+          <a:lstStyle/>
+          <a:p>
+            <a:pPr indent="0" marL="0">
+              <a:buNone/>
+            </a:pPr>
+            <a:r>
+              <a:rPr lang="en-US" sz="1500" dirty="0">
+                <a:solidFill>
+                  <a:schemeClr val="tx2"/>
+                </a:solidFill>
+              </a:rPr>
+              <a:t>Zum Mitnehmen – für Schule und Alltag</a:t>
+            </a:r>
+            <a:endParaRPr lang="en-US" sz="1500" dirty="0"/>
+          </a:p>
+        </p:txBody>
+      </p:sp>
+      <p:sp>
+        <p:nvSpPr>
+          <p:cNvPr id="4" name="Regel 1"/>
+          <p:cNvSpPr/>
+          <p:nvPr/>
+        </p:nvSpPr>
+        <p:spPr>
+          <a:xfrm>
+            <a:off x="484632" y="2103120"/>
+            <a:ext cx="11219688" cy="658368"/>
+          </a:xfrm>
+          <a:prstGeom prst="roundRect">
+            <a:avLst>
+              <a:gd name="adj" fmla="val 16667"/>
+            </a:avLst>
+          </a:prstGeom>
+          <a:solidFill>
+            <a:schemeClr val="bg1"/>
+          </a:solidFill>
+          <a:ln/>
+          <a:effectLst>
+            <a:outerShdw sx="100000" sy="100000" kx="0" ky="0" algn="bl" rotWithShape="0" blurRad="127000" dist="38100" dir="5400000">
+              <a:srgbClr val="1F2A55">
+                <a:alpha val="16000"/>
+              </a:srgbClr>
+            </a:outerShdw>
+          </a:effectLst>
+        </p:spPr>
+      </p:sp>
+      <p:sp>
+        <p:nvSpPr>
+          <p:cNvPr id="5" name="Text 3"/>
+          <p:cNvSpPr txBox="1"/>
+          <p:nvPr/>
+        </p:nvSpPr>
+        <p:spPr>
+          <a:xfrm>
+            <a:off x="685800" y="2103120"/>
+            <a:ext cx="548640" cy="658368"/>
+          </a:xfrm>
+          <a:prstGeom prst="rect">
+            <a:avLst/>
+          </a:prstGeom>
+          <a:noFill/>
+          <a:ln/>
+        </p:spPr>
+        <p:txBody>
+          <a:bodyPr wrap="square" lIns="0" tIns="0" rIns="0" bIns="0" rtlCol="0" anchor="ctr"/>
+          <a:lstStyle/>
+          <a:p>
+            <a:pPr indent="0" marL="0">
+              <a:buNone/>
+            </a:pPr>
+            <a:r>
+              <a:rPr lang="en-US" sz="2600" b="1" dirty="0">
+                <a:solidFill>
+                  <a:schemeClr val="accent1"/>
+                </a:solidFill>
+              </a:rPr>
+              <a:t>1</a:t>
+            </a:r>
+            <a:endParaRPr lang="en-US" sz="2600" dirty="0"/>
+          </a:p>
+        </p:txBody>
+      </p:sp>
+      <p:sp>
+        <p:nvSpPr>
+          <p:cNvPr id="6" name="Text 4"/>
+          <p:cNvSpPr txBox="1"/>
+          <p:nvPr/>
+        </p:nvSpPr>
+        <p:spPr>
+          <a:xfrm>
+            <a:off x="1325880" y="2103120"/>
+            <a:ext cx="4754880" cy="658368"/>
+          </a:xfrm>
+          <a:prstGeom prst="rect">
+            <a:avLst/>
+          </a:prstGeom>
+          <a:noFill/>
+          <a:ln/>
+        </p:spPr>
+        <p:txBody>
+          <a:bodyPr wrap="square" lIns="0" tIns="0" rIns="0" bIns="0" rtlCol="0" anchor="ctr"/>
+          <a:lstStyle/>
+          <a:p>
+            <a:pPr indent="0" marL="0">
+              <a:buNone/>
+            </a:pPr>
+            <a:r>
+              <a:rPr lang="en-US" sz="1800" b="1" dirty="0">
+                <a:solidFill>
+                  <a:schemeClr val="tx1"/>
+                </a:solidFill>
+              </a:rPr>
+              <a:t>Erst selbst denken, dann fragen.</a:t>
+            </a:r>
+            <a:endParaRPr lang="en-US" sz="1800" dirty="0"/>
+          </a:p>
+        </p:txBody>
+      </p:sp>
+      <p:sp>
+        <p:nvSpPr>
+          <p:cNvPr id="7" name="Text 5"/>
+          <p:cNvSpPr txBox="1"/>
+          <p:nvPr/>
+        </p:nvSpPr>
+        <p:spPr>
+          <a:xfrm>
+            <a:off x="6126480" y="2103120"/>
+            <a:ext cx="5394960" cy="658368"/>
+          </a:xfrm>
+          <a:prstGeom prst="rect">
+            <a:avLst/>
+          </a:prstGeom>
+          <a:noFill/>
+          <a:ln/>
+        </p:spPr>
+        <p:txBody>
+          <a:bodyPr wrap="square" lIns="0" tIns="0" rIns="0" bIns="0" rtlCol="0" anchor="ctr"/>
+          <a:lstStyle/>
+          <a:p>
+            <a:pPr indent="0" marL="0">
+              <a:buNone/>
+            </a:pPr>
+            <a:r>
+              <a:rPr lang="en-US" sz="1500" dirty="0">
+                <a:solidFill>
+                  <a:schemeClr val="tx2"/>
+                </a:solidFill>
+              </a:rPr>
+              <a:t>Nutze KI als Coach, nicht als Abkürzung.</a:t>
+            </a:r>
+            <a:endParaRPr lang="en-US" sz="1500" dirty="0"/>
+          </a:p>
+        </p:txBody>
+      </p:sp>
+      <p:sp>
+        <p:nvSpPr>
+          <p:cNvPr id="8" name="Regel 2"/>
+          <p:cNvSpPr/>
+          <p:nvPr/>
+        </p:nvSpPr>
+        <p:spPr>
+          <a:xfrm>
+            <a:off x="484632" y="2889504"/>
+            <a:ext cx="11219688" cy="658368"/>
+          </a:xfrm>
+          <a:prstGeom prst="roundRect">
+            <a:avLst>
+              <a:gd name="adj" fmla="val 16667"/>
+            </a:avLst>
+          </a:prstGeom>
+          <a:solidFill>
+            <a:schemeClr val="bg1"/>
+          </a:solidFill>
+          <a:ln/>
+          <a:effectLst>
+            <a:outerShdw sx="100000" sy="100000" kx="0" ky="0" algn="bl" rotWithShape="0" blurRad="127000" dist="38100" dir="5400000">
+              <a:srgbClr val="1F2A55">
+                <a:alpha val="16000"/>
+              </a:srgbClr>
+            </a:outerShdw>
+          </a:effectLst>
+        </p:spPr>
+      </p:sp>
+      <p:sp>
+        <p:nvSpPr>
+          <p:cNvPr id="9" name="Text 7"/>
+          <p:cNvSpPr txBox="1"/>
+          <p:nvPr/>
+        </p:nvSpPr>
+        <p:spPr>
+          <a:xfrm>
+            <a:off x="685800" y="2889504"/>
+            <a:ext cx="548640" cy="658368"/>
+          </a:xfrm>
+          <a:prstGeom prst="rect">
+            <a:avLst/>
+          </a:prstGeom>
+          <a:noFill/>
+          <a:ln/>
+        </p:spPr>
+        <p:txBody>
+          <a:bodyPr wrap="square" lIns="0" tIns="0" rIns="0" bIns="0" rtlCol="0" anchor="ctr"/>
+          <a:lstStyle/>
+          <a:p>
+            <a:pPr indent="0" marL="0">
+              <a:buNone/>
+            </a:pPr>
+            <a:r>
+              <a:rPr lang="en-US" sz="2600" b="1" dirty="0">
+                <a:solidFill>
+                  <a:schemeClr val="accent1"/>
+                </a:solidFill>
+              </a:rPr>
+              <a:t>2</a:t>
+            </a:r>
+            <a:endParaRPr lang="en-US" sz="2600" dirty="0"/>
+          </a:p>
+        </p:txBody>
+      </p:sp>
+      <p:sp>
+        <p:nvSpPr>
+          <p:cNvPr id="10" name="Text 8"/>
+          <p:cNvSpPr txBox="1"/>
+          <p:nvPr/>
+        </p:nvSpPr>
+        <p:spPr>
+          <a:xfrm>
+            <a:off x="1325880" y="2889504"/>
+            <a:ext cx="4754880" cy="658368"/>
+          </a:xfrm>
+          <a:prstGeom prst="rect">
+            <a:avLst/>
+          </a:prstGeom>
+          <a:noFill/>
+          <a:ln/>
+        </p:spPr>
+        <p:txBody>
+          <a:bodyPr wrap="square" lIns="0" tIns="0" rIns="0" bIns="0" rtlCol="0" anchor="ctr"/>
+          <a:lstStyle/>
+          <a:p>
+            <a:pPr indent="0" marL="0">
+              <a:buNone/>
+            </a:pPr>
+            <a:r>
+              <a:rPr lang="en-US" sz="1800" b="1" dirty="0">
+                <a:solidFill>
+                  <a:schemeClr val="tx1"/>
+                </a:solidFill>
+              </a:rPr>
+              <a:t>Wichtiges immer prüfen.</a:t>
+            </a:r>
+            <a:endParaRPr lang="en-US" sz="1800" dirty="0"/>
+          </a:p>
+        </p:txBody>
+      </p:sp>
+      <p:sp>
+        <p:nvSpPr>
+          <p:cNvPr id="11" name="Text 9"/>
+          <p:cNvSpPr txBox="1"/>
+          <p:nvPr/>
+        </p:nvSpPr>
+        <p:spPr>
+          <a:xfrm>
+            <a:off x="6126480" y="2889504"/>
+            <a:ext cx="5394960" cy="658368"/>
+          </a:xfrm>
+          <a:prstGeom prst="rect">
+            <a:avLst/>
+          </a:prstGeom>
+          <a:noFill/>
+          <a:ln/>
+        </p:spPr>
+        <p:txBody>
+          <a:bodyPr wrap="square" lIns="0" tIns="0" rIns="0" bIns="0" rtlCol="0" anchor="ctr"/>
+          <a:lstStyle/>
+          <a:p>
+            <a:pPr indent="0" marL="0">
+              <a:buNone/>
+            </a:pPr>
+            <a:r>
+              <a:rPr lang="en-US" sz="1500" dirty="0">
+                <a:solidFill>
+                  <a:schemeClr val="tx2"/>
+                </a:solidFill>
+              </a:rPr>
+              <a:t>Eine zweite, verlässliche Quelle gehört dazu.</a:t>
+            </a:r>
+            <a:endParaRPr lang="en-US" sz="1500" dirty="0"/>
+          </a:p>
+        </p:txBody>
+      </p:sp>
+      <p:sp>
+        <p:nvSpPr>
+          <p:cNvPr id="12" name="Regel 3"/>
+          <p:cNvSpPr/>
+          <p:nvPr/>
+        </p:nvSpPr>
+        <p:spPr>
+          <a:xfrm>
+            <a:off x="484632" y="3675888"/>
+            <a:ext cx="11219688" cy="658368"/>
+          </a:xfrm>
+          <a:prstGeom prst="roundRect">
+            <a:avLst>
+              <a:gd name="adj" fmla="val 16667"/>
+            </a:avLst>
+          </a:prstGeom>
+          <a:solidFill>
+            <a:schemeClr val="bg1"/>
+          </a:solidFill>
+          <a:ln/>
+          <a:effectLst>
+            <a:outerShdw sx="100000" sy="100000" kx="0" ky="0" algn="bl" rotWithShape="0" blurRad="127000" dist="38100" dir="5400000">
+              <a:srgbClr val="1F2A55">
+                <a:alpha val="16000"/>
+              </a:srgbClr>
+            </a:outerShdw>
+          </a:effectLst>
+        </p:spPr>
+      </p:sp>
+      <p:sp>
+        <p:nvSpPr>
+          <p:cNvPr id="13" name="Text 11"/>
+          <p:cNvSpPr txBox="1"/>
+          <p:nvPr/>
+        </p:nvSpPr>
+        <p:spPr>
+          <a:xfrm>
+            <a:off x="685800" y="3675888"/>
+            <a:ext cx="548640" cy="658368"/>
+          </a:xfrm>
+          <a:prstGeom prst="rect">
+            <a:avLst/>
+          </a:prstGeom>
+          <a:noFill/>
+          <a:ln/>
+        </p:spPr>
+        <p:txBody>
+          <a:bodyPr wrap="square" lIns="0" tIns="0" rIns="0" bIns="0" rtlCol="0" anchor="ctr"/>
+          <a:lstStyle/>
+          <a:p>
+            <a:pPr indent="0" marL="0">
+              <a:buNone/>
+            </a:pPr>
+            <a:r>
+              <a:rPr lang="en-US" sz="2600" b="1" dirty="0">
+                <a:solidFill>
+                  <a:schemeClr val="accent1"/>
+                </a:solidFill>
+              </a:rPr>
+              <a:t>3</a:t>
+            </a:r>
+            <a:endParaRPr lang="en-US" sz="2600" dirty="0"/>
+          </a:p>
+        </p:txBody>
+      </p:sp>
+      <p:sp>
+        <p:nvSpPr>
+          <p:cNvPr id="14" name="Text 12"/>
+          <p:cNvSpPr txBox="1"/>
+          <p:nvPr/>
+        </p:nvSpPr>
+        <p:spPr>
+          <a:xfrm>
+            <a:off x="1325880" y="3675888"/>
+            <a:ext cx="4754880" cy="658368"/>
+          </a:xfrm>
+          <a:prstGeom prst="rect">
+            <a:avLst/>
+          </a:prstGeom>
+          <a:noFill/>
+          <a:ln/>
+        </p:spPr>
+        <p:txBody>
+          <a:bodyPr wrap="square" lIns="0" tIns="0" rIns="0" bIns="0" rtlCol="0" anchor="ctr"/>
+          <a:lstStyle/>
+          <a:p>
+            <a:pPr indent="0" marL="0">
+              <a:buNone/>
+            </a:pPr>
+            <a:r>
+              <a:rPr lang="en-US" sz="1800" b="1" dirty="0">
+                <a:solidFill>
+                  <a:schemeClr val="tx1"/>
+                </a:solidFill>
+              </a:rPr>
+              <a:t>Keine privaten Daten eingeben.</a:t>
+            </a:r>
+            <a:endParaRPr lang="en-US" sz="1800" dirty="0"/>
+          </a:p>
+        </p:txBody>
+      </p:sp>
+      <p:sp>
+        <p:nvSpPr>
+          <p:cNvPr id="15" name="Text 13"/>
+          <p:cNvSpPr txBox="1"/>
+          <p:nvPr/>
+        </p:nvSpPr>
+        <p:spPr>
+          <a:xfrm>
+            <a:off x="6126480" y="3675888"/>
+            <a:ext cx="5394960" cy="658368"/>
+          </a:xfrm>
+          <a:prstGeom prst="rect">
+            <a:avLst/>
+          </a:prstGeom>
+          <a:noFill/>
+          <a:ln/>
+        </p:spPr>
+        <p:txBody>
+          <a:bodyPr wrap="square" lIns="0" tIns="0" rIns="0" bIns="0" rtlCol="0" anchor="ctr"/>
+          <a:lstStyle/>
+          <a:p>
+            <a:pPr indent="0" marL="0">
+              <a:buNone/>
+            </a:pPr>
+            <a:r>
+              <a:rPr lang="en-US" sz="1500" dirty="0">
+                <a:solidFill>
+                  <a:schemeClr val="tx2"/>
+                </a:solidFill>
+              </a:rPr>
+              <a:t>Keine Namen, Adressen, Fotos oder Passwörter.</a:t>
+            </a:r>
+            <a:endParaRPr lang="en-US" sz="1500" dirty="0"/>
+          </a:p>
+        </p:txBody>
+      </p:sp>
+      <p:sp>
+        <p:nvSpPr>
+          <p:cNvPr id="16" name="Regel 4"/>
+          <p:cNvSpPr/>
+          <p:nvPr/>
+        </p:nvSpPr>
+        <p:spPr>
+          <a:xfrm>
+            <a:off x="484632" y="4462272"/>
+            <a:ext cx="11219688" cy="658368"/>
+          </a:xfrm>
+          <a:prstGeom prst="roundRect">
+            <a:avLst>
+              <a:gd name="adj" fmla="val 16667"/>
+            </a:avLst>
+          </a:prstGeom>
+          <a:solidFill>
+            <a:schemeClr val="bg1"/>
+          </a:solidFill>
+          <a:ln/>
+          <a:effectLst>
+            <a:outerShdw sx="100000" sy="100000" kx="0" ky="0" algn="bl" rotWithShape="0" blurRad="127000" dist="38100" dir="5400000">
+              <a:srgbClr val="1F2A55">
+                <a:alpha val="16000"/>
+              </a:srgbClr>
+            </a:outerShdw>
+          </a:effectLst>
+        </p:spPr>
+      </p:sp>
+      <p:sp>
+        <p:nvSpPr>
+          <p:cNvPr id="17" name="Text 15"/>
+          <p:cNvSpPr txBox="1"/>
+          <p:nvPr/>
+        </p:nvSpPr>
+        <p:spPr>
+          <a:xfrm>
+            <a:off x="685800" y="4462272"/>
+            <a:ext cx="548640" cy="658368"/>
+          </a:xfrm>
+          <a:prstGeom prst="rect">
+            <a:avLst/>
+          </a:prstGeom>
+          <a:noFill/>
+          <a:ln/>
+        </p:spPr>
+        <p:txBody>
+          <a:bodyPr wrap="square" lIns="0" tIns="0" rIns="0" bIns="0" rtlCol="0" anchor="ctr"/>
+          <a:lstStyle/>
+          <a:p>
+            <a:pPr indent="0" marL="0">
+              <a:buNone/>
+            </a:pPr>
+            <a:r>
+              <a:rPr lang="en-US" sz="2600" b="1" dirty="0">
+                <a:solidFill>
+                  <a:schemeClr val="accent1"/>
+                </a:solidFill>
+              </a:rPr>
+              <a:t>4</a:t>
+            </a:r>
+            <a:endParaRPr lang="en-US" sz="2600" dirty="0"/>
+          </a:p>
+        </p:txBody>
+      </p:sp>
+      <p:sp>
+        <p:nvSpPr>
+          <p:cNvPr id="18" name="Text 16"/>
+          <p:cNvSpPr txBox="1"/>
+          <p:nvPr/>
+        </p:nvSpPr>
+        <p:spPr>
+          <a:xfrm>
+            <a:off x="1325880" y="4462272"/>
+            <a:ext cx="4754880" cy="658368"/>
+          </a:xfrm>
+          <a:prstGeom prst="rect">
+            <a:avLst/>
+          </a:prstGeom>
+          <a:noFill/>
+          <a:ln/>
+        </p:spPr>
+        <p:txBody>
+          <a:bodyPr wrap="square" lIns="0" tIns="0" rIns="0" bIns="0" rtlCol="0" anchor="ctr"/>
+          <a:lstStyle/>
+          <a:p>
+            <a:pPr indent="0" marL="0">
+              <a:buNone/>
+            </a:pPr>
+            <a:r>
+              <a:rPr lang="en-US" sz="1800" b="1" dirty="0">
+                <a:solidFill>
+                  <a:schemeClr val="tx1"/>
+                </a:solidFill>
+              </a:rPr>
+              <a:t>KI-Hilfe offen angeben.</a:t>
+            </a:r>
+            <a:endParaRPr lang="en-US" sz="1800" dirty="0"/>
+          </a:p>
+        </p:txBody>
+      </p:sp>
+      <p:sp>
+        <p:nvSpPr>
+          <p:cNvPr id="19" name="Text 17"/>
+          <p:cNvSpPr txBox="1"/>
+          <p:nvPr/>
+        </p:nvSpPr>
+        <p:spPr>
+          <a:xfrm>
+            <a:off x="6126480" y="4462272"/>
+            <a:ext cx="5394960" cy="658368"/>
+          </a:xfrm>
+          <a:prstGeom prst="rect">
+            <a:avLst/>
+          </a:prstGeom>
+          <a:noFill/>
+          <a:ln/>
+        </p:spPr>
+        <p:txBody>
+          <a:bodyPr wrap="square" lIns="0" tIns="0" rIns="0" bIns="0" rtlCol="0" anchor="ctr"/>
+          <a:lstStyle/>
+          <a:p>
+            <a:pPr indent="0" marL="0">
+              <a:buNone/>
+            </a:pPr>
+            <a:r>
+              <a:rPr lang="en-US" sz="1500" dirty="0">
+                <a:solidFill>
+                  <a:schemeClr val="tx2"/>
+                </a:solidFill>
+              </a:rPr>
+              <a:t>So, wie es deine Schule oder Lehrkraft verlangt.</a:t>
+            </a:r>
+            <a:endParaRPr lang="en-US" sz="1500" dirty="0"/>
+          </a:p>
+        </p:txBody>
+      </p:sp>
+      <p:sp>
+        <p:nvSpPr>
+          <p:cNvPr id="20" name="Regel 5"/>
+          <p:cNvSpPr/>
+          <p:nvPr/>
+        </p:nvSpPr>
+        <p:spPr>
+          <a:xfrm>
+            <a:off x="484632" y="5248656"/>
+            <a:ext cx="11219688" cy="658368"/>
+          </a:xfrm>
+          <a:prstGeom prst="roundRect">
+            <a:avLst>
+              <a:gd name="adj" fmla="val 16667"/>
+            </a:avLst>
+          </a:prstGeom>
+          <a:solidFill>
+            <a:schemeClr val="bg1"/>
+          </a:solidFill>
+          <a:ln/>
+          <a:effectLst>
+            <a:outerShdw sx="100000" sy="100000" kx="0" ky="0" algn="bl" rotWithShape="0" blurRad="127000" dist="38100" dir="5400000">
+              <a:srgbClr val="1F2A55">
+                <a:alpha val="16000"/>
+              </a:srgbClr>
+            </a:outerShdw>
+          </a:effectLst>
+        </p:spPr>
+      </p:sp>
+      <p:sp>
+        <p:nvSpPr>
+          <p:cNvPr id="21" name="Text 19"/>
+          <p:cNvSpPr txBox="1"/>
+          <p:nvPr/>
+        </p:nvSpPr>
+        <p:spPr>
+          <a:xfrm>
+            <a:off x="685800" y="5248656"/>
+            <a:ext cx="548640" cy="658368"/>
+          </a:xfrm>
+          <a:prstGeom prst="rect">
+            <a:avLst/>
+          </a:prstGeom>
+          <a:noFill/>
+          <a:ln/>
+        </p:spPr>
+        <p:txBody>
+          <a:bodyPr wrap="square" lIns="0" tIns="0" rIns="0" bIns="0" rtlCol="0" anchor="ctr"/>
+          <a:lstStyle/>
+          <a:p>
+            <a:pPr indent="0" marL="0">
+              <a:buNone/>
+            </a:pPr>
+            <a:r>
+              <a:rPr lang="en-US" sz="2600" b="1" dirty="0">
+                <a:solidFill>
+                  <a:schemeClr val="accent1"/>
+                </a:solidFill>
+              </a:rPr>
+              <a:t>5</a:t>
+            </a:r>
+            <a:endParaRPr lang="en-US" sz="2600" dirty="0"/>
+          </a:p>
+        </p:txBody>
+      </p:sp>
+      <p:sp>
+        <p:nvSpPr>
+          <p:cNvPr id="22" name="Text 20"/>
+          <p:cNvSpPr txBox="1"/>
+          <p:nvPr/>
+        </p:nvSpPr>
+        <p:spPr>
+          <a:xfrm>
+            <a:off x="1325880" y="5248656"/>
+            <a:ext cx="4754880" cy="658368"/>
+          </a:xfrm>
+          <a:prstGeom prst="rect">
+            <a:avLst/>
+          </a:prstGeom>
+          <a:noFill/>
+          <a:ln/>
+        </p:spPr>
+        <p:txBody>
+          <a:bodyPr wrap="square" lIns="0" tIns="0" rIns="0" bIns="0" rtlCol="0" anchor="ctr"/>
+          <a:lstStyle/>
+          <a:p>
+            <a:pPr indent="0" marL="0">
+              <a:buNone/>
+            </a:pPr>
+            <a:r>
+              <a:rPr lang="en-US" sz="1800" b="1" dirty="0">
+                <a:solidFill>
+                  <a:schemeClr val="tx1"/>
+                </a:solidFill>
+              </a:rPr>
+              <a:t>Fair bleiben.</a:t>
+            </a:r>
+            <a:endParaRPr lang="en-US" sz="1800" dirty="0"/>
+          </a:p>
+        </p:txBody>
+      </p:sp>
+      <p:sp>
+        <p:nvSpPr>
+          <p:cNvPr id="23" name="Text 21"/>
+          <p:cNvSpPr txBox="1"/>
+          <p:nvPr/>
+        </p:nvSpPr>
+        <p:spPr>
+          <a:xfrm>
+            <a:off x="6126480" y="5248656"/>
+            <a:ext cx="5394960" cy="658368"/>
+          </a:xfrm>
+          <a:prstGeom prst="rect">
+            <a:avLst/>
+          </a:prstGeom>
+          <a:noFill/>
+          <a:ln/>
+        </p:spPr>
+        <p:txBody>
+          <a:bodyPr wrap="square" lIns="0" tIns="0" rIns="0" bIns="0" rtlCol="0" anchor="ctr"/>
+          <a:lstStyle/>
+          <a:p>
+            <a:pPr indent="0" marL="0">
+              <a:buNone/>
+            </a:pPr>
+            <a:r>
+              <a:rPr lang="en-US" sz="1500" dirty="0">
+                <a:solidFill>
+                  <a:schemeClr val="tx2"/>
+                </a:solidFill>
+              </a:rPr>
+              <a:t>Keine Deepfakes oder Fakes über andere – niemals.</a:t>
+            </a:r>
+            <a:endParaRPr lang="en-US" sz="1500" dirty="0"/>
+          </a:p>
+        </p:txBody>
+      </p:sp>
+      <p:sp>
+        <p:nvSpPr>
+          <p:cNvPr id="24" name="Hinweis optional"/>
+          <p:cNvSpPr/>
+          <p:nvPr/>
+        </p:nvSpPr>
+        <p:spPr>
+          <a:xfrm>
+            <a:off x="8366760" y="6437376"/>
+            <a:ext cx="2560320" cy="256032"/>
+          </a:xfrm>
+          <a:prstGeom prst="roundRect">
+            <a:avLst>
+              <a:gd name="adj" fmla="val 50000"/>
+            </a:avLst>
+          </a:prstGeom>
+          <a:solidFill>
+            <a:schemeClr val="bg2"/>
+          </a:solidFill>
+          <a:ln/>
+        </p:spPr>
+      </p:sp>
+      <p:sp>
+        <p:nvSpPr>
+          <p:cNvPr id="25" name="Text 23"/>
+          <p:cNvSpPr txBox="1"/>
+          <p:nvPr/>
+        </p:nvSpPr>
+        <p:spPr>
+          <a:xfrm>
+            <a:off x="8366760" y="6437376"/>
+            <a:ext cx="2560320" cy="256032"/>
+          </a:xfrm>
+          <a:prstGeom prst="rect">
+            <a:avLst/>
+          </a:prstGeom>
+          <a:noFill/>
+          <a:ln/>
+        </p:spPr>
+        <p:txBody>
+          <a:bodyPr wrap="square" lIns="0" tIns="0" rIns="0" bIns="0" rtlCol="0" anchor="ctr"/>
+          <a:lstStyle/>
+          <a:p>
+            <a:pPr algn="ctr" indent="0" marL="0">
+              <a:buNone/>
+            </a:pPr>
+            <a:r>
+              <a:rPr lang="en-US" sz="900" b="1" spc="100" kern="0" dirty="0">
+                <a:solidFill>
+                  <a:schemeClr val="accent3"/>
+                </a:solidFill>
+              </a:rPr>
+              <a:t>OPTIONAL · ABSCHLUSS</a:t>
+            </a:r>
+            <a:endParaRPr lang="en-US" sz="900" dirty="0"/>
+          </a:p>
+        </p:txBody>
+      </p:sp>
+      <p:sp>
+        <p:nvSpPr>
+          <p:cNvPr id="25" name="Slide Number Placeholder 0"/>
+          <p:cNvSpPr>
+            <a:spLocks noGrp="1"/>
+          </p:cNvSpPr>
+          <p:nvPr>
+            <p:ph type="sldNum" sz="quarter" idx="4294967295"/>
+          </p:nvPr>
+        </p:nvSpPr>
+        <p:spPr>
+          <a:xfrm>
+            <a:off x="11155680" y="6455664"/>
+            <a:ext cx="548640" cy="274320"/>
+          </a:xfrm>
+          <a:prstGeom prst="rect">
+            <a:avLst/>
+          </a:prstGeom>
+          <a:extLst>
+            <a:ext uri="{C572A759-6A51-4108-AA02-DFA0A04FC94B}">
+              <ma14:wrappingTextBoxFlag xmlns:ma14="http://schemas.microsoft.com/office/mac/drawingml/2011/main" val="0"/>
+            </a:ext>
+          </a:extLst>
+        </p:spPr>
+        <p:txBody>
+          <a:bodyPr/>
+          <a:lstStyle>
+            <a:lvl1pPr>
+              <a:defRPr sz="1100">
+                <a:solidFill>
+                  <a:schemeClr val="accent3"/>
+                </a:solidFill>
+              </a:defRPr>
+            </a:lvl1pPr>
+          </a:lstStyle>
+          <a:p>
+            <a:pPr algn="r"/>
+            <a:fld id="{F7021451-1387-4CA6-816F-3879F97B5CBC}" type="slidenum">
+              <a:rPr b="0" lang="en-US"/>
+              <a:t>36</a:t>
+            </a:fld>
+            <a:endParaRPr lang="en-US"/>
           </a:p>
         </p:txBody>
       </p:sp>
@@ -20170,10 +29702,10 @@
         <a:srgbClr val="F4F6FB"/>
       </a:lt2>
       <a:accent1>
-        <a:srgbClr val="D24C84"/>
+        <a:srgbClr val="2F62B3"/>
       </a:accent1>
       <a:accent2>
-        <a:srgbClr val="3E6DB5"/>
+        <a:srgbClr val="5A8FD8"/>
       </a:accent2>
       <a:accent3>
         <a:srgbClr val="6A7FA8"/>
@@ -20182,7 +29714,7 @@
         <a:srgbClr val="283070"/>
       </a:accent4>
       <a:accent5>
-        <a:srgbClr val="FCE8F0"/>
+        <a:srgbClr val="E8F0FB"/>
       </a:accent5>
       <a:accent6>
         <a:srgbClr val="E05A2B"/>
